--- a/ekona_slides_template_new.pptx
+++ b/ekona_slides_template_new.pptx
@@ -126,7 +126,7 @@
   <pc:docChgLst>
     <pc:chgData name="Sam Khalil" userId="82cd1ec2-6208-465b-9d4d-40ce8f0cbf96" providerId="ADAL" clId="{651B6F30-EC96-2340-AD4B-07A6B9855D0C}"/>
     <pc:docChg chg="undo custSel addSld delSld modSld modMainMaster">
-      <pc:chgData name="Sam Khalil" userId="82cd1ec2-6208-465b-9d4d-40ce8f0cbf96" providerId="ADAL" clId="{651B6F30-EC96-2340-AD4B-07A6B9855D0C}" dt="2025-07-17T16:43:33.189" v="1205" actId="962"/>
+      <pc:chgData name="Sam Khalil" userId="82cd1ec2-6208-465b-9d4d-40ce8f0cbf96" providerId="ADAL" clId="{651B6F30-EC96-2340-AD4B-07A6B9855D0C}" dt="2025-07-17T16:52:43.058" v="1222" actId="20577"/>
       <pc:docMkLst>
         <pc:docMk/>
       </pc:docMkLst>
@@ -159,7 +159,7 @@
         </pc:sldMkLst>
       </pc:sldChg>
       <pc:sldMasterChg chg="addSldLayout delSldLayout modSldLayout sldLayoutOrd">
-        <pc:chgData name="Sam Khalil" userId="82cd1ec2-6208-465b-9d4d-40ce8f0cbf96" providerId="ADAL" clId="{651B6F30-EC96-2340-AD4B-07A6B9855D0C}" dt="2025-07-17T16:43:33.189" v="1205" actId="962"/>
+        <pc:chgData name="Sam Khalil" userId="82cd1ec2-6208-465b-9d4d-40ce8f0cbf96" providerId="ADAL" clId="{651B6F30-EC96-2340-AD4B-07A6B9855D0C}" dt="2025-07-17T16:52:43.058" v="1222" actId="20577"/>
         <pc:sldMasterMkLst>
           <pc:docMk/>
           <pc:sldMasterMk cId="2940896467" sldId="2147483648"/>
@@ -454,7 +454,7 @@
           </pc:spChg>
         </pc:sldLayoutChg>
         <pc:sldLayoutChg chg="addSp delSp modSp mod ord">
-          <pc:chgData name="Sam Khalil" userId="82cd1ec2-6208-465b-9d4d-40ce8f0cbf96" providerId="ADAL" clId="{651B6F30-EC96-2340-AD4B-07A6B9855D0C}" dt="2025-07-17T16:43:33.189" v="1205" actId="962"/>
+          <pc:chgData name="Sam Khalil" userId="82cd1ec2-6208-465b-9d4d-40ce8f0cbf96" providerId="ADAL" clId="{651B6F30-EC96-2340-AD4B-07A6B9855D0C}" dt="2025-07-17T16:52:43.058" v="1222" actId="20577"/>
           <pc:sldLayoutMkLst>
             <pc:docMk/>
             <pc:sldMasterMk cId="2940896467" sldId="2147483648"/>
@@ -488,7 +488,7 @@
             </ac:spMkLst>
           </pc:spChg>
           <pc:spChg chg="add mod">
-            <ac:chgData name="Sam Khalil" userId="82cd1ec2-6208-465b-9d4d-40ce8f0cbf96" providerId="ADAL" clId="{651B6F30-EC96-2340-AD4B-07A6B9855D0C}" dt="2025-07-17T16:43:14.254" v="1198" actId="962"/>
+            <ac:chgData name="Sam Khalil" userId="82cd1ec2-6208-465b-9d4d-40ce8f0cbf96" providerId="ADAL" clId="{651B6F30-EC96-2340-AD4B-07A6B9855D0C}" dt="2025-07-17T16:52:41.643" v="1221" actId="20577"/>
             <ac:spMkLst>
               <pc:docMk/>
               <pc:sldMasterMk cId="2940896467" sldId="2147483648"/>
@@ -524,7 +524,7 @@
             </ac:spMkLst>
           </pc:spChg>
           <pc:spChg chg="add del mod">
-            <ac:chgData name="Sam Khalil" userId="82cd1ec2-6208-465b-9d4d-40ce8f0cbf96" providerId="ADAL" clId="{651B6F30-EC96-2340-AD4B-07A6B9855D0C}" dt="2025-07-17T16:43:26.258" v="1203" actId="962"/>
+            <ac:chgData name="Sam Khalil" userId="82cd1ec2-6208-465b-9d4d-40ce8f0cbf96" providerId="ADAL" clId="{651B6F30-EC96-2340-AD4B-07A6B9855D0C}" dt="2025-07-17T16:52:34.116" v="1217" actId="20577"/>
             <ac:spMkLst>
               <pc:docMk/>
               <pc:sldMasterMk cId="2940896467" sldId="2147483648"/>
@@ -569,7 +569,7 @@
             </ac:spMkLst>
           </pc:spChg>
           <pc:spChg chg="add mod">
-            <ac:chgData name="Sam Khalil" userId="82cd1ec2-6208-465b-9d4d-40ce8f0cbf96" providerId="ADAL" clId="{651B6F30-EC96-2340-AD4B-07A6B9855D0C}" dt="2025-07-17T13:45:08.199" v="1144" actId="1076"/>
+            <ac:chgData name="Sam Khalil" userId="82cd1ec2-6208-465b-9d4d-40ce8f0cbf96" providerId="ADAL" clId="{651B6F30-EC96-2340-AD4B-07A6B9855D0C}" dt="2025-07-17T16:52:25.016" v="1206" actId="20577"/>
             <ac:spMkLst>
               <pc:docMk/>
               <pc:sldMasterMk cId="2940896467" sldId="2147483648"/>
@@ -587,7 +587,7 @@
             </ac:spMkLst>
           </pc:spChg>
           <pc:spChg chg="add mod">
-            <ac:chgData name="Sam Khalil" userId="82cd1ec2-6208-465b-9d4d-40ce8f0cbf96" providerId="ADAL" clId="{651B6F30-EC96-2340-AD4B-07A6B9855D0C}" dt="2025-07-17T13:45:08.199" v="1144" actId="1076"/>
+            <ac:chgData name="Sam Khalil" userId="82cd1ec2-6208-465b-9d4d-40ce8f0cbf96" providerId="ADAL" clId="{651B6F30-EC96-2340-AD4B-07A6B9855D0C}" dt="2025-07-17T16:52:43.058" v="1222" actId="20577"/>
             <ac:spMkLst>
               <pc:docMk/>
               <pc:sldMasterMk cId="2940896467" sldId="2147483648"/>
@@ -605,7 +605,7 @@
             </ac:spMkLst>
           </pc:spChg>
           <pc:spChg chg="add mod">
-            <ac:chgData name="Sam Khalil" userId="82cd1ec2-6208-465b-9d4d-40ce8f0cbf96" providerId="ADAL" clId="{651B6F30-EC96-2340-AD4B-07A6B9855D0C}" dt="2025-07-17T13:45:08.199" v="1144" actId="1076"/>
+            <ac:chgData name="Sam Khalil" userId="82cd1ec2-6208-465b-9d4d-40ce8f0cbf96" providerId="ADAL" clId="{651B6F30-EC96-2340-AD4B-07A6B9855D0C}" dt="2025-07-17T16:52:27.742" v="1210" actId="20577"/>
             <ac:spMkLst>
               <pc:docMk/>
               <pc:sldMasterMk cId="2940896467" sldId="2147483648"/>
@@ -614,7 +614,7 @@
             </ac:spMkLst>
           </pc:spChg>
           <pc:spChg chg="add mod">
-            <ac:chgData name="Sam Khalil" userId="82cd1ec2-6208-465b-9d4d-40ce8f0cbf96" providerId="ADAL" clId="{651B6F30-EC96-2340-AD4B-07A6B9855D0C}" dt="2025-07-17T16:43:33.189" v="1205" actId="962"/>
+            <ac:chgData name="Sam Khalil" userId="82cd1ec2-6208-465b-9d4d-40ce8f0cbf96" providerId="ADAL" clId="{651B6F30-EC96-2340-AD4B-07A6B9855D0C}" dt="2025-07-17T16:52:38.759" v="1220" actId="20577"/>
             <ac:spMkLst>
               <pc:docMk/>
               <pc:sldMasterMk cId="2940896467" sldId="2147483648"/>
@@ -5220,7 +5220,7 @@
             <a:pPr lvl="0"/>
             <a:r>
               <a:rPr lang="en-US" dirty="0"/>
-              <a:t>Text beside icon 1 maximum 10 words</a:t>
+              <a:t>Text beside icon 1 maximum 8 words</a:t>
             </a:r>
           </a:p>
         </p:txBody>
@@ -5310,7 +5310,7 @@
             <a:pPr lvl="0"/>
             <a:r>
               <a:rPr lang="en-US" dirty="0"/>
-              <a:t>Text beside icon 2 maximum 10 words</a:t>
+              <a:t>Text beside icon 2 maximum 8 words</a:t>
             </a:r>
           </a:p>
         </p:txBody>
@@ -5413,7 +5413,7 @@
             <a:pPr lvl="0"/>
             <a:r>
               <a:rPr lang="en-US" dirty="0"/>
-              <a:t>Text beside icon 3 maximum 10 words</a:t>
+              <a:t>Text beside icon 3 maximum 8 words</a:t>
             </a:r>
           </a:p>
         </p:txBody>
@@ -5516,7 +5516,7 @@
             <a:pPr lvl="0"/>
             <a:r>
               <a:rPr lang="en-US" dirty="0"/>
-              <a:t>Text beside icon 4 maximum 10 words</a:t>
+              <a:t>Text beside icon 4 maximum 8 words</a:t>
             </a:r>
           </a:p>
         </p:txBody>
@@ -5619,7 +5619,7 @@
             <a:pPr lvl="0"/>
             <a:r>
               <a:rPr lang="en-US" dirty="0"/>
-              <a:t>Text beside icon 3 maximum 10 words</a:t>
+              <a:t>Text beside icon 5 maximum 8 words</a:t>
             </a:r>
           </a:p>
         </p:txBody>
@@ -5722,7 +5722,7 @@
             <a:pPr lvl="0"/>
             <a:r>
               <a:rPr lang="en-US" dirty="0"/>
-              <a:t>Text beside icon 4 maximum 10 words</a:t>
+              <a:t>Text beside icon 6 maximum 8 words</a:t>
             </a:r>
           </a:p>
         </p:txBody>

--- a/ekona_slides_template_new.pptx
+++ b/ekona_slides_template_new.pptx
@@ -115,8 +115,7 @@
 <file path=ppt/revisionInfo.xml><?xml version="1.0" encoding="utf-8"?>
 <p1510:revInfo xmlns:a="http://schemas.openxmlformats.org/drawingml/2006/main" xmlns:r="http://schemas.openxmlformats.org/officeDocument/2006/relationships" xmlns:p1510="http://schemas.microsoft.com/office/powerpoint/2015/10/main">
   <p1510:revLst>
-    <p1510:client id="{651B6F30-EC96-2340-AD4B-07A6B9855D0C}" v="122" dt="2025-07-17T16:43:33.189"/>
-    <p1510:client id="{86AB5ADE-44BA-4B42-A7C8-B1D92A4F8300}" v="63" dt="2025-07-16T19:52:37.470"/>
+    <p1510:client id="{651B6F30-EC96-2340-AD4B-07A6B9855D0C}" v="124" dt="2025-07-17T20:39:56.478"/>
   </p1510:revLst>
 </p1510:revInfo>
 </file>
@@ -126,7 +125,7 @@
   <pc:docChgLst>
     <pc:chgData name="Sam Khalil" userId="82cd1ec2-6208-465b-9d4d-40ce8f0cbf96" providerId="ADAL" clId="{651B6F30-EC96-2340-AD4B-07A6B9855D0C}"/>
     <pc:docChg chg="undo custSel addSld delSld modSld modMainMaster">
-      <pc:chgData name="Sam Khalil" userId="82cd1ec2-6208-465b-9d4d-40ce8f0cbf96" providerId="ADAL" clId="{651B6F30-EC96-2340-AD4B-07A6B9855D0C}" dt="2025-07-17T16:52:43.058" v="1222" actId="20577"/>
+      <pc:chgData name="Sam Khalil" userId="82cd1ec2-6208-465b-9d4d-40ce8f0cbf96" providerId="ADAL" clId="{651B6F30-EC96-2340-AD4B-07A6B9855D0C}" dt="2025-07-17T21:10:32.513" v="1239" actId="20578"/>
       <pc:docMkLst>
         <pc:docMk/>
       </pc:docMkLst>
@@ -138,11 +137,41 @@
         </pc:sldMkLst>
       </pc:sldChg>
       <pc:sldChg chg="new del">
+        <pc:chgData name="Sam Khalil" userId="82cd1ec2-6208-465b-9d4d-40ce8f0cbf96" providerId="ADAL" clId="{651B6F30-EC96-2340-AD4B-07A6B9855D0C}" dt="2025-07-17T20:51:12.571" v="1232" actId="2696"/>
+        <pc:sldMkLst>
+          <pc:docMk/>
+          <pc:sldMk cId="3084245232" sldId="256"/>
+        </pc:sldMkLst>
+      </pc:sldChg>
+      <pc:sldChg chg="new del">
         <pc:chgData name="Sam Khalil" userId="82cd1ec2-6208-465b-9d4d-40ce8f0cbf96" providerId="ADAL" clId="{651B6F30-EC96-2340-AD4B-07A6B9855D0C}" dt="2025-07-17T09:39:26.054" v="162" actId="2696"/>
         <pc:sldMkLst>
           <pc:docMk/>
           <pc:sldMk cId="3478321964" sldId="256"/>
         </pc:sldMkLst>
+      </pc:sldChg>
+      <pc:sldChg chg="addSp delSp modSp new del mod">
+        <pc:chgData name="Sam Khalil" userId="82cd1ec2-6208-465b-9d4d-40ce8f0cbf96" providerId="ADAL" clId="{651B6F30-EC96-2340-AD4B-07A6B9855D0C}" dt="2025-07-17T20:40:56.913" v="1231" actId="2696"/>
+        <pc:sldMkLst>
+          <pc:docMk/>
+          <pc:sldMk cId="1866868894" sldId="257"/>
+        </pc:sldMkLst>
+        <pc:spChg chg="del">
+          <ac:chgData name="Sam Khalil" userId="82cd1ec2-6208-465b-9d4d-40ce8f0cbf96" providerId="ADAL" clId="{651B6F30-EC96-2340-AD4B-07A6B9855D0C}" dt="2025-07-17T20:40:36.576" v="1230"/>
+          <ac:spMkLst>
+            <pc:docMk/>
+            <pc:sldMk cId="1866868894" sldId="257"/>
+            <ac:spMk id="3" creationId="{C6B887A7-ADAA-F876-68AC-B7FF7EA3EE0E}"/>
+          </ac:spMkLst>
+        </pc:spChg>
+        <pc:graphicFrameChg chg="add">
+          <ac:chgData name="Sam Khalil" userId="82cd1ec2-6208-465b-9d4d-40ce8f0cbf96" providerId="ADAL" clId="{651B6F30-EC96-2340-AD4B-07A6B9855D0C}" dt="2025-07-17T20:40:36.576" v="1230"/>
+          <ac:graphicFrameMkLst>
+            <pc:docMk/>
+            <pc:sldMk cId="1866868894" sldId="257"/>
+            <ac:graphicFrameMk id="4" creationId="{5B477F69-9AB2-1667-89A8-A0118C958FCE}"/>
+          </ac:graphicFrameMkLst>
+        </pc:graphicFrameChg>
       </pc:sldChg>
       <pc:sldChg chg="del">
         <pc:chgData name="Sam Khalil" userId="82cd1ec2-6208-465b-9d4d-40ce8f0cbf96" providerId="ADAL" clId="{651B6F30-EC96-2340-AD4B-07A6B9855D0C}" dt="2025-07-16T20:03:04.043" v="1" actId="2696"/>
@@ -159,7 +188,7 @@
         </pc:sldMkLst>
       </pc:sldChg>
       <pc:sldMasterChg chg="addSldLayout delSldLayout modSldLayout sldLayoutOrd">
-        <pc:chgData name="Sam Khalil" userId="82cd1ec2-6208-465b-9d4d-40ce8f0cbf96" providerId="ADAL" clId="{651B6F30-EC96-2340-AD4B-07A6B9855D0C}" dt="2025-07-17T16:52:43.058" v="1222" actId="20577"/>
+        <pc:chgData name="Sam Khalil" userId="82cd1ec2-6208-465b-9d4d-40ce8f0cbf96" providerId="ADAL" clId="{651B6F30-EC96-2340-AD4B-07A6B9855D0C}" dt="2025-07-17T21:10:32.513" v="1239" actId="20578"/>
         <pc:sldMasterMkLst>
           <pc:docMk/>
           <pc:sldMasterMk cId="2940896467" sldId="2147483648"/>
@@ -427,6 +456,22 @@
             </ac:spMkLst>
           </pc:spChg>
         </pc:sldLayoutChg>
+        <pc:sldLayoutChg chg="ord">
+          <pc:chgData name="Sam Khalil" userId="82cd1ec2-6208-465b-9d4d-40ce8f0cbf96" providerId="ADAL" clId="{651B6F30-EC96-2340-AD4B-07A6B9855D0C}" dt="2025-07-17T21:10:19.682" v="1234" actId="20578"/>
+          <pc:sldLayoutMkLst>
+            <pc:docMk/>
+            <pc:sldMasterMk cId="2940896467" sldId="2147483648"/>
+            <pc:sldLayoutMk cId="3393990456" sldId="2147483672"/>
+          </pc:sldLayoutMkLst>
+        </pc:sldLayoutChg>
+        <pc:sldLayoutChg chg="ord">
+          <pc:chgData name="Sam Khalil" userId="82cd1ec2-6208-465b-9d4d-40ce8f0cbf96" providerId="ADAL" clId="{651B6F30-EC96-2340-AD4B-07A6B9855D0C}" dt="2025-07-17T21:10:32.513" v="1239" actId="20578"/>
+          <pc:sldLayoutMkLst>
+            <pc:docMk/>
+            <pc:sldMasterMk cId="2940896467" sldId="2147483648"/>
+            <pc:sldLayoutMk cId="2955669845" sldId="2147483673"/>
+          </pc:sldLayoutMkLst>
+        </pc:sldLayoutChg>
         <pc:sldLayoutChg chg="modSp add mod ord modTransition">
           <pc:chgData name="Sam Khalil" userId="82cd1ec2-6208-465b-9d4d-40ce8f0cbf96" providerId="ADAL" clId="{651B6F30-EC96-2340-AD4B-07A6B9855D0C}" dt="2025-07-17T09:55:36.490" v="947" actId="20577"/>
           <pc:sldLayoutMkLst>
@@ -641,6 +686,50 @@
             </ac:picMkLst>
           </pc:picChg>
         </pc:sldLayoutChg>
+        <pc:sldLayoutChg chg="addSp delSp modSp add mod ord modTransition">
+          <pc:chgData name="Sam Khalil" userId="82cd1ec2-6208-465b-9d4d-40ce8f0cbf96" providerId="ADAL" clId="{651B6F30-EC96-2340-AD4B-07A6B9855D0C}" dt="2025-07-17T21:10:25.014" v="1236" actId="20578"/>
+          <pc:sldLayoutMkLst>
+            <pc:docMk/>
+            <pc:sldMasterMk cId="2940896467" sldId="2147483648"/>
+            <pc:sldLayoutMk cId="88811751" sldId="2147483676"/>
+          </pc:sldLayoutMkLst>
+          <pc:spChg chg="add del">
+            <ac:chgData name="Sam Khalil" userId="82cd1ec2-6208-465b-9d4d-40ce8f0cbf96" providerId="ADAL" clId="{651B6F30-EC96-2340-AD4B-07A6B9855D0C}" dt="2025-07-17T20:39:46.295" v="1224" actId="11529"/>
+            <ac:spMkLst>
+              <pc:docMk/>
+              <pc:sldMasterMk cId="2940896467" sldId="2147483648"/>
+              <pc:sldLayoutMk cId="88811751" sldId="2147483676"/>
+              <ac:spMk id="4" creationId="{D61816B6-E94D-6D9C-D518-C718E848339B}"/>
+            </ac:spMkLst>
+          </pc:spChg>
+          <pc:spChg chg="add del mod">
+            <ac:chgData name="Sam Khalil" userId="82cd1ec2-6208-465b-9d4d-40ce8f0cbf96" providerId="ADAL" clId="{651B6F30-EC96-2340-AD4B-07A6B9855D0C}" dt="2025-07-17T20:39:50.387" v="1225" actId="478"/>
+            <ac:spMkLst>
+              <pc:docMk/>
+              <pc:sldMasterMk cId="2940896467" sldId="2147483648"/>
+              <pc:sldLayoutMk cId="88811751" sldId="2147483676"/>
+              <ac:spMk id="5" creationId="{119B0F57-6873-79DD-D2A5-E4210B5DE9E3}"/>
+            </ac:spMkLst>
+          </pc:spChg>
+          <pc:spChg chg="add del">
+            <ac:chgData name="Sam Khalil" userId="82cd1ec2-6208-465b-9d4d-40ce8f0cbf96" providerId="ADAL" clId="{651B6F30-EC96-2340-AD4B-07A6B9855D0C}" dt="2025-07-17T20:39:56.478" v="1226" actId="11529"/>
+            <ac:spMkLst>
+              <pc:docMk/>
+              <pc:sldMasterMk cId="2940896467" sldId="2147483648"/>
+              <pc:sldLayoutMk cId="88811751" sldId="2147483676"/>
+              <ac:spMk id="6" creationId="{4B52941E-4775-6143-2E36-388B9E09B9E9}"/>
+            </ac:spMkLst>
+          </pc:spChg>
+          <pc:spChg chg="add del mod">
+            <ac:chgData name="Sam Khalil" userId="82cd1ec2-6208-465b-9d4d-40ce8f0cbf96" providerId="ADAL" clId="{651B6F30-EC96-2340-AD4B-07A6B9855D0C}" dt="2025-07-17T20:40:02.195" v="1227" actId="478"/>
+            <ac:spMkLst>
+              <pc:docMk/>
+              <pc:sldMasterMk cId="2940896467" sldId="2147483648"/>
+              <pc:sldLayoutMk cId="88811751" sldId="2147483676"/>
+              <ac:spMk id="7" creationId="{249C9B60-EA2D-6F1F-2E58-4BFDDC84A498}"/>
+            </ac:spMkLst>
+          </pc:spChg>
+        </pc:sldLayoutChg>
       </pc:sldMasterChg>
     </pc:docChg>
   </pc:docChgLst>
@@ -1131,7 +1220,769 @@
 
 <file path=ppt/slideLayouts/slideLayout10.xml><?xml version="1.0" encoding="utf-8"?>
 <p:sldLayout xmlns:a="http://schemas.openxmlformats.org/drawingml/2006/main" xmlns:r="http://schemas.openxmlformats.org/officeDocument/2006/relationships" xmlns:p="http://schemas.openxmlformats.org/presentationml/2006/main" preserve="1" userDrawn="1">
-  <p:cSld name="Conclusion Slide">
+  <p:cSld name="Branding Slide should always be added at the end of the deck">
+    <p:spTree>
+      <p:nvGrpSpPr>
+        <p:cNvPr id="1" name=""/>
+        <p:cNvGrpSpPr/>
+        <p:nvPr/>
+      </p:nvGrpSpPr>
+      <p:grpSpPr>
+        <a:xfrm>
+          <a:off x="0" y="0"/>
+          <a:ext cx="0" cy="0"/>
+          <a:chOff x="0" y="0"/>
+          <a:chExt cx="0" cy="0"/>
+        </a:xfrm>
+      </p:grpSpPr>
+      <p:pic>
+        <p:nvPicPr>
+          <p:cNvPr id="4" name="Picture 3" descr="A snowy mountain tops with clouds in the background&#10;&#10;AI-generated content may be incorrect.">
+            <a:extLst>
+              <a:ext uri="{FF2B5EF4-FFF2-40B4-BE49-F238E27FC236}">
+                <a16:creationId xmlns:a16="http://schemas.microsoft.com/office/drawing/2014/main" id="{E92912F8-6299-B5F5-C99C-1BF14D2F0334}"/>
+              </a:ext>
+            </a:extLst>
+          </p:cNvPr>
+          <p:cNvPicPr>
+            <a:picLocks noGrp="1" noRot="1" noChangeAspect="1" noMove="1" noResize="1" noEditPoints="1" noAdjustHandles="1" noChangeArrowheads="1" noChangeShapeType="1" noCrop="1"/>
+          </p:cNvPicPr>
+          <p:nvPr userDrawn="1"/>
+        </p:nvPicPr>
+        <p:blipFill>
+          <a:blip r:embed="rId2">
+            <a:duotone>
+              <a:schemeClr val="bg2">
+                <a:shade val="45000"/>
+                <a:satMod val="135000"/>
+              </a:schemeClr>
+              <a:prstClr val="white"/>
+            </a:duotone>
+            <a:alphaModFix amt="35000"/>
+            <a:extLst>
+              <a:ext uri="{BEBA8EAE-BF5A-486C-A8C5-ECC9F3942E4B}">
+                <a14:imgProps xmlns:a14="http://schemas.microsoft.com/office/drawing/2010/main">
+                  <a14:imgLayer r:embed="rId3">
+                    <a14:imgEffect>
+                      <a14:saturation sat="0"/>
+                    </a14:imgEffect>
+                  </a14:imgLayer>
+                </a14:imgProps>
+              </a:ext>
+              <a:ext uri="{28A0092B-C50C-407E-A947-70E740481C1C}">
+                <a14:useLocalDpi xmlns:a14="http://schemas.microsoft.com/office/drawing/2010/main" val="0"/>
+              </a:ext>
+            </a:extLst>
+          </a:blip>
+          <a:srcRect b="9610"/>
+          <a:stretch/>
+        </p:blipFill>
+        <p:spPr>
+          <a:xfrm>
+            <a:off x="0" y="0"/>
+            <a:ext cx="12192000" cy="6246421"/>
+          </a:xfrm>
+          <a:prstGeom prst="rect">
+            <a:avLst/>
+          </a:prstGeom>
+        </p:spPr>
+      </p:pic>
+      <p:sp>
+        <p:nvSpPr>
+          <p:cNvPr id="2" name="Rounded Rectangle 1">
+            <a:extLst>
+              <a:ext uri="{FF2B5EF4-FFF2-40B4-BE49-F238E27FC236}">
+                <a16:creationId xmlns:a16="http://schemas.microsoft.com/office/drawing/2014/main" id="{6372FCEB-FEC1-18CC-54A6-09739A289B26}"/>
+              </a:ext>
+            </a:extLst>
+          </p:cNvPr>
+          <p:cNvSpPr/>
+          <p:nvPr userDrawn="1"/>
+        </p:nvSpPr>
+        <p:spPr>
+          <a:xfrm>
+            <a:off x="7855153" y="2401368"/>
+            <a:ext cx="3878223" cy="2385232"/>
+          </a:xfrm>
+          <a:prstGeom prst="roundRect">
+            <a:avLst>
+              <a:gd name="adj" fmla="val 4127"/>
+            </a:avLst>
+          </a:prstGeom>
+          <a:solidFill>
+            <a:schemeClr val="bg1">
+              <a:lumMod val="85000"/>
+              <a:alpha val="13425"/>
+            </a:schemeClr>
+          </a:solidFill>
+          <a:ln>
+            <a:noFill/>
+          </a:ln>
+          <a:effectLst>
+            <a:innerShdw blurRad="63500" dist="50800" dir="13500000">
+              <a:prstClr val="black">
+                <a:alpha val="50000"/>
+              </a:prstClr>
+            </a:innerShdw>
+          </a:effectLst>
+        </p:spPr>
+        <p:style>
+          <a:lnRef idx="2">
+            <a:schemeClr val="accent1">
+              <a:shade val="15000"/>
+            </a:schemeClr>
+          </a:lnRef>
+          <a:fillRef idx="1">
+            <a:schemeClr val="accent1"/>
+          </a:fillRef>
+          <a:effectRef idx="0">
+            <a:schemeClr val="accent1"/>
+          </a:effectRef>
+          <a:fontRef idx="minor">
+            <a:schemeClr val="lt1"/>
+          </a:fontRef>
+        </p:style>
+        <p:txBody>
+          <a:bodyPr rtlCol="0" anchor="ctr"/>
+          <a:lstStyle/>
+          <a:p>
+            <a:pPr algn="ctr"/>
+            <a:endParaRPr lang="en-US"/>
+          </a:p>
+        </p:txBody>
+      </p:sp>
+      <p:pic>
+        <p:nvPicPr>
+          <p:cNvPr id="3" name="Picture 2" descr="A black and white logo&#10;&#10;AI-generated content may be incorrect.">
+            <a:extLst>
+              <a:ext uri="{FF2B5EF4-FFF2-40B4-BE49-F238E27FC236}">
+                <a16:creationId xmlns:a16="http://schemas.microsoft.com/office/drawing/2014/main" id="{2CB979AF-52B6-8198-E16B-E489C26655CC}"/>
+              </a:ext>
+            </a:extLst>
+          </p:cNvPr>
+          <p:cNvPicPr>
+            <a:picLocks noChangeAspect="1"/>
+          </p:cNvPicPr>
+          <p:nvPr userDrawn="1"/>
+        </p:nvPicPr>
+        <p:blipFill>
+          <a:blip r:embed="rId4">
+            <a:extLst>
+              <a:ext uri="{28A0092B-C50C-407E-A947-70E740481C1C}">
+                <a14:useLocalDpi xmlns:a14="http://schemas.microsoft.com/office/drawing/2010/main" val="0"/>
+              </a:ext>
+            </a:extLst>
+          </a:blip>
+          <a:stretch>
+            <a:fillRect/>
+          </a:stretch>
+        </p:blipFill>
+        <p:spPr>
+          <a:xfrm>
+            <a:off x="614681" y="420826"/>
+            <a:ext cx="2062951" cy="873084"/>
+          </a:xfrm>
+          <a:prstGeom prst="rect">
+            <a:avLst/>
+          </a:prstGeom>
+        </p:spPr>
+      </p:pic>
+      <p:sp>
+        <p:nvSpPr>
+          <p:cNvPr id="5" name="TextBox 4">
+            <a:extLst>
+              <a:ext uri="{FF2B5EF4-FFF2-40B4-BE49-F238E27FC236}">
+                <a16:creationId xmlns:a16="http://schemas.microsoft.com/office/drawing/2014/main" id="{24B54DAF-BA2D-A789-444C-FA860250E4C4}"/>
+              </a:ext>
+            </a:extLst>
+          </p:cNvPr>
+          <p:cNvSpPr txBox="1"/>
+          <p:nvPr userDrawn="1"/>
+        </p:nvSpPr>
+        <p:spPr>
+          <a:xfrm>
+            <a:off x="537678" y="1243124"/>
+            <a:ext cx="7865177" cy="1077218"/>
+          </a:xfrm>
+          <a:prstGeom prst="rect">
+            <a:avLst/>
+          </a:prstGeom>
+          <a:noFill/>
+        </p:spPr>
+        <p:txBody>
+          <a:bodyPr wrap="square">
+            <a:spAutoFit/>
+          </a:bodyPr>
+          <a:lstStyle/>
+          <a:p>
+            <a:r>
+              <a:rPr lang="en-US" sz="4000" b="1">
+                <a:solidFill>
+                  <a:schemeClr val="tx1">
+                    <a:lumMod val="75000"/>
+                    <a:lumOff val="25000"/>
+                  </a:schemeClr>
+                </a:solidFill>
+                <a:latin typeface="Calibri" panose="020F0502020204030204" pitchFamily="34" charset="0"/>
+                <a:cs typeface="Calibri" panose="020F0502020204030204" pitchFamily="34" charset="0"/>
+              </a:rPr>
+              <a:t>WE BUILD YOUR AI</a:t>
+            </a:r>
+          </a:p>
+          <a:p>
+            <a:r>
+              <a:rPr lang="en-US" sz="2400">
+                <a:solidFill>
+                  <a:srgbClr val="101826"/>
+                </a:solidFill>
+                <a:cs typeface="Arial" panose="020B0604020202020204" pitchFamily="34" charset="0"/>
+              </a:rPr>
+              <a:t>They deliver results you can trust.</a:t>
+            </a:r>
+            <a:endParaRPr lang="en-US" sz="2400">
+              <a:solidFill>
+                <a:srgbClr val="101826"/>
+              </a:solidFill>
+            </a:endParaRPr>
+          </a:p>
+        </p:txBody>
+      </p:sp>
+      <p:sp>
+        <p:nvSpPr>
+          <p:cNvPr id="6" name="Rectangle 5">
+            <a:extLst>
+              <a:ext uri="{FF2B5EF4-FFF2-40B4-BE49-F238E27FC236}">
+                <a16:creationId xmlns:a16="http://schemas.microsoft.com/office/drawing/2014/main" id="{F8EBCBDC-7DC7-57A3-68F3-C1F199D1F242}"/>
+              </a:ext>
+            </a:extLst>
+          </p:cNvPr>
+          <p:cNvSpPr/>
+          <p:nvPr userDrawn="1"/>
+        </p:nvSpPr>
+        <p:spPr>
+          <a:xfrm>
+            <a:off x="1244178" y="2854019"/>
+            <a:ext cx="5892445" cy="721963"/>
+          </a:xfrm>
+          <a:prstGeom prst="rect">
+            <a:avLst/>
+          </a:prstGeom>
+          <a:noFill/>
+          <a:ln>
+            <a:noFill/>
+          </a:ln>
+        </p:spPr>
+        <p:style>
+          <a:lnRef idx="2">
+            <a:schemeClr val="accent1">
+              <a:shade val="15000"/>
+            </a:schemeClr>
+          </a:lnRef>
+          <a:fillRef idx="1">
+            <a:schemeClr val="accent1"/>
+          </a:fillRef>
+          <a:effectRef idx="0">
+            <a:schemeClr val="accent1"/>
+          </a:effectRef>
+          <a:fontRef idx="minor">
+            <a:schemeClr val="lt1"/>
+          </a:fontRef>
+        </p:style>
+        <p:txBody>
+          <a:bodyPr rtlCol="0" anchor="ctr"/>
+          <a:lstStyle/>
+          <a:p>
+            <a:r>
+              <a:rPr lang="en-US" sz="1400">
+                <a:solidFill>
+                  <a:schemeClr val="tx1">
+                    <a:lumMod val="85000"/>
+                    <a:lumOff val="15000"/>
+                  </a:schemeClr>
+                </a:solidFill>
+              </a:rPr>
+              <a:t>We architect and implement AI systems where specialized agents collaborate to tackle complex, real‑world workflows end‑to‑end.</a:t>
+            </a:r>
+          </a:p>
+        </p:txBody>
+      </p:sp>
+      <p:sp>
+        <p:nvSpPr>
+          <p:cNvPr id="7" name="TextBox 6">
+            <a:extLst>
+              <a:ext uri="{FF2B5EF4-FFF2-40B4-BE49-F238E27FC236}">
+                <a16:creationId xmlns:a16="http://schemas.microsoft.com/office/drawing/2014/main" id="{A0172EA7-EE16-8BF8-D83B-8289FF215701}"/>
+              </a:ext>
+            </a:extLst>
+          </p:cNvPr>
+          <p:cNvSpPr txBox="1"/>
+          <p:nvPr userDrawn="1"/>
+        </p:nvSpPr>
+        <p:spPr>
+          <a:xfrm>
+            <a:off x="1244178" y="2562020"/>
+            <a:ext cx="3220129" cy="400110"/>
+          </a:xfrm>
+          <a:prstGeom prst="rect">
+            <a:avLst/>
+          </a:prstGeom>
+          <a:noFill/>
+        </p:spPr>
+        <p:txBody>
+          <a:bodyPr wrap="square">
+            <a:spAutoFit/>
+          </a:bodyPr>
+          <a:lstStyle/>
+          <a:p>
+            <a:r>
+              <a:rPr lang="en-US" sz="2000" b="1">
+                <a:solidFill>
+                  <a:srgbClr val="DD2525"/>
+                </a:solidFill>
+                <a:cs typeface="Arial" panose="020B0604020202020204" pitchFamily="34" charset="0"/>
+              </a:rPr>
+              <a:t>AI MULTI-AGENTS</a:t>
+            </a:r>
+            <a:endParaRPr lang="en-US" sz="2000" b="1">
+              <a:solidFill>
+                <a:srgbClr val="DD2525"/>
+              </a:solidFill>
+            </a:endParaRPr>
+          </a:p>
+        </p:txBody>
+      </p:sp>
+      <p:sp>
+        <p:nvSpPr>
+          <p:cNvPr id="8" name="Rectangle 7">
+            <a:extLst>
+              <a:ext uri="{FF2B5EF4-FFF2-40B4-BE49-F238E27FC236}">
+                <a16:creationId xmlns:a16="http://schemas.microsoft.com/office/drawing/2014/main" id="{E4E97082-EE78-4A4A-9BA5-90CC786B29DF}"/>
+              </a:ext>
+            </a:extLst>
+          </p:cNvPr>
+          <p:cNvSpPr/>
+          <p:nvPr userDrawn="1"/>
+        </p:nvSpPr>
+        <p:spPr>
+          <a:xfrm>
+            <a:off x="1244178" y="4064637"/>
+            <a:ext cx="5892445" cy="721963"/>
+          </a:xfrm>
+          <a:prstGeom prst="rect">
+            <a:avLst/>
+          </a:prstGeom>
+          <a:noFill/>
+          <a:ln>
+            <a:noFill/>
+          </a:ln>
+        </p:spPr>
+        <p:style>
+          <a:lnRef idx="2">
+            <a:schemeClr val="accent1">
+              <a:shade val="15000"/>
+            </a:schemeClr>
+          </a:lnRef>
+          <a:fillRef idx="1">
+            <a:schemeClr val="accent1"/>
+          </a:fillRef>
+          <a:effectRef idx="0">
+            <a:schemeClr val="accent1"/>
+          </a:effectRef>
+          <a:fontRef idx="minor">
+            <a:schemeClr val="lt1"/>
+          </a:fontRef>
+        </p:style>
+        <p:txBody>
+          <a:bodyPr rtlCol="0" anchor="ctr"/>
+          <a:lstStyle/>
+          <a:p>
+            <a:r>
+              <a:rPr lang="en-US" sz="1400">
+                <a:solidFill>
+                  <a:schemeClr val="tx1">
+                    <a:lumMod val="85000"/>
+                    <a:lumOff val="15000"/>
+                  </a:schemeClr>
+                </a:solidFill>
+              </a:rPr>
+              <a:t>We automate your systems from reproducible experimentation to continuous testing, ensuring your models &amp; Agents stay performant, monitored and compliant in production.</a:t>
+            </a:r>
+          </a:p>
+        </p:txBody>
+      </p:sp>
+      <p:sp>
+        <p:nvSpPr>
+          <p:cNvPr id="9" name="TextBox 8">
+            <a:extLst>
+              <a:ext uri="{FF2B5EF4-FFF2-40B4-BE49-F238E27FC236}">
+                <a16:creationId xmlns:a16="http://schemas.microsoft.com/office/drawing/2014/main" id="{2FAD454B-708B-C32D-9945-96B09BE516CA}"/>
+              </a:ext>
+            </a:extLst>
+          </p:cNvPr>
+          <p:cNvSpPr txBox="1"/>
+          <p:nvPr userDrawn="1"/>
+        </p:nvSpPr>
+        <p:spPr>
+          <a:xfrm>
+            <a:off x="1244178" y="3664527"/>
+            <a:ext cx="3220129" cy="400110"/>
+          </a:xfrm>
+          <a:prstGeom prst="rect">
+            <a:avLst/>
+          </a:prstGeom>
+          <a:noFill/>
+        </p:spPr>
+        <p:txBody>
+          <a:bodyPr wrap="square">
+            <a:spAutoFit/>
+          </a:bodyPr>
+          <a:lstStyle/>
+          <a:p>
+            <a:r>
+              <a:rPr lang="en-US" sz="2000" b="1">
+                <a:solidFill>
+                  <a:srgbClr val="DD2525"/>
+                </a:solidFill>
+                <a:cs typeface="Arial" panose="020B0604020202020204" pitchFamily="34" charset="0"/>
+              </a:rPr>
+              <a:t>AI &amp; ML Infrastructure</a:t>
+            </a:r>
+            <a:endParaRPr lang="en-US" sz="2000" b="1">
+              <a:solidFill>
+                <a:srgbClr val="DD2525"/>
+              </a:solidFill>
+            </a:endParaRPr>
+          </a:p>
+        </p:txBody>
+      </p:sp>
+      <p:sp>
+        <p:nvSpPr>
+          <p:cNvPr id="10" name="Rectangle 9">
+            <a:extLst>
+              <a:ext uri="{FF2B5EF4-FFF2-40B4-BE49-F238E27FC236}">
+                <a16:creationId xmlns:a16="http://schemas.microsoft.com/office/drawing/2014/main" id="{2D2DA866-5869-7DF3-B720-22AF42CEED04}"/>
+              </a:ext>
+            </a:extLst>
+          </p:cNvPr>
+          <p:cNvSpPr/>
+          <p:nvPr userDrawn="1"/>
+        </p:nvSpPr>
+        <p:spPr>
+          <a:xfrm>
+            <a:off x="1244178" y="5274423"/>
+            <a:ext cx="5892445" cy="721963"/>
+          </a:xfrm>
+          <a:prstGeom prst="rect">
+            <a:avLst/>
+          </a:prstGeom>
+          <a:noFill/>
+          <a:ln>
+            <a:noFill/>
+          </a:ln>
+        </p:spPr>
+        <p:style>
+          <a:lnRef idx="2">
+            <a:schemeClr val="accent1">
+              <a:shade val="15000"/>
+            </a:schemeClr>
+          </a:lnRef>
+          <a:fillRef idx="1">
+            <a:schemeClr val="accent1"/>
+          </a:fillRef>
+          <a:effectRef idx="0">
+            <a:schemeClr val="accent1"/>
+          </a:effectRef>
+          <a:fontRef idx="minor">
+            <a:schemeClr val="lt1"/>
+          </a:fontRef>
+        </p:style>
+        <p:txBody>
+          <a:bodyPr rtlCol="0" anchor="ctr"/>
+          <a:lstStyle/>
+          <a:p>
+            <a:r>
+              <a:rPr lang="en-US" sz="1400">
+                <a:solidFill>
+                  <a:schemeClr val="tx1">
+                    <a:lumMod val="85000"/>
+                    <a:lumOff val="15000"/>
+                  </a:schemeClr>
+                </a:solidFill>
+              </a:rPr>
+              <a:t>We translate technical capability into business value, build roadmaps, ROI evaluation, and risk‑aware governance frameworks that align multi‑agent solutions with your organization’s goals.</a:t>
+            </a:r>
+          </a:p>
+        </p:txBody>
+      </p:sp>
+      <p:sp>
+        <p:nvSpPr>
+          <p:cNvPr id="11" name="TextBox 10">
+            <a:extLst>
+              <a:ext uri="{FF2B5EF4-FFF2-40B4-BE49-F238E27FC236}">
+                <a16:creationId xmlns:a16="http://schemas.microsoft.com/office/drawing/2014/main" id="{FDDBB755-0FD4-D1C9-DC17-4BA387134BBB}"/>
+              </a:ext>
+            </a:extLst>
+          </p:cNvPr>
+          <p:cNvSpPr txBox="1"/>
+          <p:nvPr userDrawn="1"/>
+        </p:nvSpPr>
+        <p:spPr>
+          <a:xfrm>
+            <a:off x="1244178" y="4874313"/>
+            <a:ext cx="3220129" cy="400110"/>
+          </a:xfrm>
+          <a:prstGeom prst="rect">
+            <a:avLst/>
+          </a:prstGeom>
+          <a:noFill/>
+        </p:spPr>
+        <p:txBody>
+          <a:bodyPr wrap="square">
+            <a:spAutoFit/>
+          </a:bodyPr>
+          <a:lstStyle/>
+          <a:p>
+            <a:r>
+              <a:rPr lang="en-US" sz="2000" b="1">
+                <a:solidFill>
+                  <a:srgbClr val="DD2525"/>
+                </a:solidFill>
+                <a:cs typeface="Arial" panose="020B0604020202020204" pitchFamily="34" charset="0"/>
+              </a:rPr>
+              <a:t>AI STRATEGY</a:t>
+            </a:r>
+            <a:endParaRPr lang="en-US" sz="2000" b="1">
+              <a:solidFill>
+                <a:srgbClr val="DD2525"/>
+              </a:solidFill>
+            </a:endParaRPr>
+          </a:p>
+        </p:txBody>
+      </p:sp>
+      <p:sp>
+        <p:nvSpPr>
+          <p:cNvPr id="12" name="TextBox 11">
+            <a:extLst>
+              <a:ext uri="{FF2B5EF4-FFF2-40B4-BE49-F238E27FC236}">
+                <a16:creationId xmlns:a16="http://schemas.microsoft.com/office/drawing/2014/main" id="{EFC724FB-B7D0-20F8-923C-E4CD8D9194CA}"/>
+              </a:ext>
+            </a:extLst>
+          </p:cNvPr>
+          <p:cNvSpPr txBox="1"/>
+          <p:nvPr userDrawn="1"/>
+        </p:nvSpPr>
+        <p:spPr>
+          <a:xfrm>
+            <a:off x="7944857" y="2525381"/>
+            <a:ext cx="3788519" cy="1569660"/>
+          </a:xfrm>
+          <a:prstGeom prst="rect">
+            <a:avLst/>
+          </a:prstGeom>
+          <a:noFill/>
+        </p:spPr>
+        <p:txBody>
+          <a:bodyPr wrap="square">
+            <a:spAutoFit/>
+          </a:bodyPr>
+          <a:lstStyle/>
+          <a:p>
+            <a:pPr algn="ctr"/>
+            <a:r>
+              <a:rPr lang="en-US" sz="2400" b="1" i="0">
+                <a:solidFill>
+                  <a:schemeClr val="tx1">
+                    <a:lumMod val="75000"/>
+                    <a:lumOff val="25000"/>
+                  </a:schemeClr>
+                </a:solidFill>
+                <a:effectLst/>
+                <a:cs typeface="Arial" panose="020B0604020202020204" pitchFamily="34" charset="0"/>
+              </a:rPr>
+              <a:t>WE PARTNER WITH CLIENTS FROM LARGE ORGANIZATIONS TO STARTUPS</a:t>
+            </a:r>
+          </a:p>
+        </p:txBody>
+      </p:sp>
+      <p:pic>
+        <p:nvPicPr>
+          <p:cNvPr id="14" name="Graphic 13" descr="Anger Symbol with solid fill">
+            <a:extLst>
+              <a:ext uri="{FF2B5EF4-FFF2-40B4-BE49-F238E27FC236}">
+                <a16:creationId xmlns:a16="http://schemas.microsoft.com/office/drawing/2014/main" id="{981C10B9-9817-EB54-2841-E3C1D957E143}"/>
+              </a:ext>
+            </a:extLst>
+          </p:cNvPr>
+          <p:cNvPicPr>
+            <a:picLocks noChangeAspect="1"/>
+          </p:cNvPicPr>
+          <p:nvPr userDrawn="1"/>
+        </p:nvPicPr>
+        <p:blipFill>
+          <a:blip r:embed="rId5">
+            <a:extLst>
+              <a:ext uri="{96DAC541-7B7A-43D3-8B79-37D633B846F1}">
+                <asvg:svgBlip xmlns:asvg="http://schemas.microsoft.com/office/drawing/2016/SVG/main" r:embed="rId6"/>
+              </a:ext>
+            </a:extLst>
+          </a:blip>
+          <a:stretch>
+            <a:fillRect/>
+          </a:stretch>
+        </p:blipFill>
+        <p:spPr>
+          <a:xfrm>
+            <a:off x="9454583" y="3953226"/>
+            <a:ext cx="914400" cy="914400"/>
+          </a:xfrm>
+          <a:prstGeom prst="rect">
+            <a:avLst/>
+          </a:prstGeom>
+          <a:effectLst>
+            <a:reflection blurRad="6350" stA="52000" endA="300" endPos="35000" dir="5400000" sy="-100000" algn="bl" rotWithShape="0"/>
+          </a:effectLst>
+        </p:spPr>
+      </p:pic>
+      <p:pic>
+        <p:nvPicPr>
+          <p:cNvPr id="15" name="Graphic 14">
+            <a:extLst>
+              <a:ext uri="{FF2B5EF4-FFF2-40B4-BE49-F238E27FC236}">
+                <a16:creationId xmlns:a16="http://schemas.microsoft.com/office/drawing/2014/main" id="{A4B69331-9158-072D-86DF-19E93D7C2AE4}"/>
+              </a:ext>
+            </a:extLst>
+          </p:cNvPr>
+          <p:cNvPicPr>
+            <a:picLocks noChangeAspect="1"/>
+          </p:cNvPicPr>
+          <p:nvPr userDrawn="1"/>
+        </p:nvPicPr>
+        <p:blipFill>
+          <a:blip r:embed="rId7">
+            <a:extLst>
+              <a:ext uri="{96DAC541-7B7A-43D3-8B79-37D633B846F1}">
+                <asvg:svgBlip xmlns:asvg="http://schemas.microsoft.com/office/drawing/2016/SVG/main" r:embed="rId8"/>
+              </a:ext>
+            </a:extLst>
+          </a:blip>
+          <a:stretch>
+            <a:fillRect/>
+          </a:stretch>
+        </p:blipFill>
+        <p:spPr>
+          <a:xfrm>
+            <a:off x="576293" y="2597291"/>
+            <a:ext cx="513455" cy="513455"/>
+          </a:xfrm>
+          <a:prstGeom prst="rect">
+            <a:avLst/>
+          </a:prstGeom>
+        </p:spPr>
+      </p:pic>
+      <p:pic>
+        <p:nvPicPr>
+          <p:cNvPr id="16" name="Graphic 15">
+            <a:extLst>
+              <a:ext uri="{FF2B5EF4-FFF2-40B4-BE49-F238E27FC236}">
+                <a16:creationId xmlns:a16="http://schemas.microsoft.com/office/drawing/2014/main" id="{CA1A46BA-E73A-FB0F-6C12-2862B3B16A45}"/>
+              </a:ext>
+            </a:extLst>
+          </p:cNvPr>
+          <p:cNvPicPr>
+            <a:picLocks noChangeAspect="1"/>
+          </p:cNvPicPr>
+          <p:nvPr userDrawn="1"/>
+        </p:nvPicPr>
+        <p:blipFill>
+          <a:blip r:embed="rId9">
+            <a:extLst>
+              <a:ext uri="{96DAC541-7B7A-43D3-8B79-37D633B846F1}">
+                <asvg:svgBlip xmlns:asvg="http://schemas.microsoft.com/office/drawing/2016/SVG/main" r:embed="rId10"/>
+              </a:ext>
+            </a:extLst>
+          </a:blip>
+          <a:stretch>
+            <a:fillRect/>
+          </a:stretch>
+        </p:blipFill>
+        <p:spPr>
+          <a:xfrm>
+            <a:off x="576292" y="3747255"/>
+            <a:ext cx="513455" cy="513455"/>
+          </a:xfrm>
+          <a:prstGeom prst="rect">
+            <a:avLst/>
+          </a:prstGeom>
+        </p:spPr>
+      </p:pic>
+      <p:pic>
+        <p:nvPicPr>
+          <p:cNvPr id="17" name="Graphic 16">
+            <a:extLst>
+              <a:ext uri="{FF2B5EF4-FFF2-40B4-BE49-F238E27FC236}">
+                <a16:creationId xmlns:a16="http://schemas.microsoft.com/office/drawing/2014/main" id="{50EBEA3C-7EFB-46CC-7FFC-F871C4B12FA2}"/>
+              </a:ext>
+            </a:extLst>
+          </p:cNvPr>
+          <p:cNvPicPr>
+            <a:picLocks noChangeAspect="1"/>
+          </p:cNvPicPr>
+          <p:nvPr userDrawn="1"/>
+        </p:nvPicPr>
+        <p:blipFill>
+          <a:blip r:embed="rId11">
+            <a:extLst>
+              <a:ext uri="{96DAC541-7B7A-43D3-8B79-37D633B846F1}">
+                <asvg:svgBlip xmlns:asvg="http://schemas.microsoft.com/office/drawing/2016/SVG/main" r:embed="rId12"/>
+              </a:ext>
+            </a:extLst>
+          </a:blip>
+          <a:stretch>
+            <a:fillRect/>
+          </a:stretch>
+        </p:blipFill>
+        <p:spPr>
+          <a:xfrm>
+            <a:off x="576292" y="4948495"/>
+            <a:ext cx="513455" cy="513455"/>
+          </a:xfrm>
+          <a:prstGeom prst="rect">
+            <a:avLst/>
+          </a:prstGeom>
+        </p:spPr>
+      </p:pic>
+    </p:spTree>
+    <p:extLst>
+      <p:ext uri="{BB962C8B-B14F-4D97-AF65-F5344CB8AC3E}">
+        <p14:creationId xmlns:p14="http://schemas.microsoft.com/office/powerpoint/2010/main" val="3393990456"/>
+      </p:ext>
+    </p:extLst>
+  </p:cSld>
+  <p:clrMapOvr>
+    <a:masterClrMapping/>
+  </p:clrMapOvr>
+  <p:extLst>
+    <p:ext uri="{DCECCB84-F9BA-43D5-87BE-67443E8EF086}">
+      <p15:sldGuideLst xmlns:p15="http://schemas.microsoft.com/office/powerpoint/2012/main">
+        <p15:guide id="1" orient="horz" pos="2160">
+          <p15:clr>
+            <a:srgbClr val="FBAE40"/>
+          </p15:clr>
+        </p15:guide>
+        <p15:guide id="2" pos="3840">
+          <p15:clr>
+            <a:srgbClr val="FBAE40"/>
+          </p15:clr>
+        </p15:guide>
+      </p15:sldGuideLst>
+    </p:ext>
+  </p:extLst>
+</p:sldLayout>
+</file>
+
+<file path=ppt/slideLayouts/slideLayout11.xml><?xml version="1.0" encoding="utf-8"?>
+<p:sldLayout xmlns:a="http://schemas.openxmlformats.org/drawingml/2006/main" xmlns:r="http://schemas.openxmlformats.org/officeDocument/2006/relationships" xmlns:p="http://schemas.openxmlformats.org/presentationml/2006/main" preserve="1" userDrawn="1">
+  <p:cSld name="Branding Slide #2 should always be added at the end of the deck">
     <p:spTree>
       <p:nvGrpSpPr>
         <p:cNvPr id="1" name=""/>
@@ -1148,271 +1999,1226 @@
       </p:grpSpPr>
       <p:sp>
         <p:nvSpPr>
-          <p:cNvPr id="2" name="Conclusion Title">
-            <a:extLst>
-              <a:ext uri="{FF2B5EF4-FFF2-40B4-BE49-F238E27FC236}">
-                <a16:creationId xmlns:a16="http://schemas.microsoft.com/office/drawing/2014/main" id="{3CD97974-B93C-4C96-B3F6-F69E3D6DE6CA}"/>
-              </a:ext>
-            </a:extLst>
-          </p:cNvPr>
-          <p:cNvSpPr>
-            <a:spLocks noGrp="1"/>
-          </p:cNvSpPr>
-          <p:nvPr>
-            <p:ph type="title" hasCustomPrompt="1"/>
-          </p:nvPr>
+          <p:cNvPr id="13" name="TextBox 12">
+            <a:extLst>
+              <a:ext uri="{FF2B5EF4-FFF2-40B4-BE49-F238E27FC236}">
+                <a16:creationId xmlns:a16="http://schemas.microsoft.com/office/drawing/2014/main" id="{49D92DF9-4B98-A01C-A7B1-352C8B146E6F}"/>
+              </a:ext>
+            </a:extLst>
+          </p:cNvPr>
+          <p:cNvSpPr txBox="1"/>
+          <p:nvPr userDrawn="1"/>
         </p:nvSpPr>
         <p:spPr>
           <a:xfrm>
-            <a:off x="381000" y="381000"/>
-            <a:ext cx="11430000" cy="1325563"/>
-          </a:xfrm>
-          <a:prstGeom prst="rect">
-            <a:avLst/>
-          </a:prstGeom>
+            <a:off x="398954" y="385127"/>
+            <a:ext cx="11445516" cy="646331"/>
+          </a:xfrm>
+          <a:prstGeom prst="rect">
+            <a:avLst/>
+          </a:prstGeom>
+          <a:noFill/>
         </p:spPr>
         <p:txBody>
-          <a:bodyPr vert="horz" lIns="91440" tIns="45720" rIns="91440" bIns="45720" rtlCol="0" anchor="ctr">
-            <a:noAutofit/>
+          <a:bodyPr wrap="square" lIns="91440" tIns="45720" rIns="91440" bIns="45720" rtlCol="0" anchor="t">
+            <a:spAutoFit/>
           </a:bodyPr>
-          <a:lstStyle>
-            <a:lvl1pPr algn="l" defTabSz="914400" rtl="0" eaLnBrk="1" latinLnBrk="0" hangingPunct="1">
-              <a:lnSpc>
-                <a:spcPct val="80000"/>
-              </a:lnSpc>
-              <a:spcBef>
-                <a:spcPct val="0"/>
-              </a:spcBef>
-              <a:buNone/>
-              <a:defRPr sz="4400" b="1" kern="1200">
-                <a:solidFill>
-                  <a:schemeClr val="tx1"/>
-                </a:solidFill>
-                <a:latin typeface="+mn-lt"/>
-                <a:ea typeface="+mj-ea"/>
-                <a:cs typeface="+mj-cs"/>
-              </a:defRPr>
-            </a:lvl1pPr>
-          </a:lstStyle>
+          <a:lstStyle/>
+          <a:p>
+            <a:pPr algn="ctr"/>
+            <a:r>
+              <a:rPr lang="en-US" sz="3600" b="1" dirty="0"/>
+              <a:t>Why ekona</a:t>
+            </a:r>
+            <a:endParaRPr lang="en-US" sz="3600" dirty="0"/>
+          </a:p>
+        </p:txBody>
+      </p:sp>
+      <p:sp>
+        <p:nvSpPr>
+          <p:cNvPr id="18" name="TextBox 17">
+            <a:extLst>
+              <a:ext uri="{FF2B5EF4-FFF2-40B4-BE49-F238E27FC236}">
+                <a16:creationId xmlns:a16="http://schemas.microsoft.com/office/drawing/2014/main" id="{3D76CCEB-1818-1860-AAF8-7A1CA815CF36}"/>
+              </a:ext>
+            </a:extLst>
+          </p:cNvPr>
+          <p:cNvSpPr txBox="1"/>
+          <p:nvPr userDrawn="1"/>
+        </p:nvSpPr>
+        <p:spPr>
+          <a:xfrm>
+            <a:off x="1318169" y="1337258"/>
+            <a:ext cx="6152972" cy="369332"/>
+          </a:xfrm>
+          <a:prstGeom prst="rect">
+            <a:avLst/>
+          </a:prstGeom>
+          <a:noFill/>
+        </p:spPr>
+        <p:txBody>
+          <a:bodyPr wrap="square" lIns="91440" tIns="45720" rIns="91440" bIns="45720" anchor="t">
+            <a:spAutoFit/>
+          </a:bodyPr>
+          <a:lstStyle/>
           <a:p>
             <a:r>
-              <a:rPr lang="en-US" dirty="0"/>
-              <a:t>Short and clear conclusion Title</a:t>
+              <a:rPr lang="en-US" b="1" i="0" dirty="0">
+                <a:solidFill>
+                  <a:srgbClr val="262626"/>
+                </a:solidFill>
+                <a:effectLst/>
+                <a:latin typeface="Calibri"/>
+                <a:ea typeface="Calibri"/>
+                <a:cs typeface="Calibri"/>
+              </a:rPr>
+              <a:t>Deep</a:t>
+            </a:r>
+            <a:r>
+              <a:rPr lang="en-US" b="1" dirty="0">
+                <a:solidFill>
+                  <a:srgbClr val="262626"/>
+                </a:solidFill>
+                <a:latin typeface="Calibri"/>
+                <a:ea typeface="Calibri"/>
+                <a:cs typeface="Calibri"/>
+              </a:rPr>
+              <a:t> </a:t>
+            </a:r>
+            <a:r>
+              <a:rPr lang="en-US" b="1" i="0" dirty="0">
+                <a:solidFill>
+                  <a:srgbClr val="262626"/>
+                </a:solidFill>
+                <a:effectLst/>
+                <a:latin typeface="Calibri"/>
+                <a:ea typeface="Calibri"/>
+                <a:cs typeface="Calibri"/>
+              </a:rPr>
+              <a:t> Expertise</a:t>
             </a:r>
           </a:p>
         </p:txBody>
       </p:sp>
       <p:sp>
         <p:nvSpPr>
-          <p:cNvPr id="3" name="Conclusion text">
-            <a:extLst>
-              <a:ext uri="{FF2B5EF4-FFF2-40B4-BE49-F238E27FC236}">
-                <a16:creationId xmlns:a16="http://schemas.microsoft.com/office/drawing/2014/main" id="{8A6FC6F2-80B4-49A7-9448-33FE2DF0E967}"/>
-              </a:ext>
-            </a:extLst>
-          </p:cNvPr>
-          <p:cNvSpPr>
-            <a:spLocks noGrp="1"/>
-          </p:cNvSpPr>
-          <p:nvPr>
-            <p:ph idx="1" hasCustomPrompt="1"/>
-          </p:nvPr>
+          <p:cNvPr id="19" name="TextBox 18">
+            <a:extLst>
+              <a:ext uri="{FF2B5EF4-FFF2-40B4-BE49-F238E27FC236}">
+                <a16:creationId xmlns:a16="http://schemas.microsoft.com/office/drawing/2014/main" id="{0BCF71B3-5882-0ACA-8F0C-E597CF37495F}"/>
+              </a:ext>
+            </a:extLst>
+          </p:cNvPr>
+          <p:cNvSpPr txBox="1"/>
+          <p:nvPr userDrawn="1"/>
         </p:nvSpPr>
         <p:spPr>
           <a:xfrm>
-            <a:off x="381000" y="1825625"/>
-            <a:ext cx="11430000" cy="4351338"/>
-          </a:xfrm>
-          <a:prstGeom prst="rect">
-            <a:avLst/>
-          </a:prstGeom>
+            <a:off x="1318169" y="2951486"/>
+            <a:ext cx="6152972" cy="369332"/>
+          </a:xfrm>
+          <a:prstGeom prst="rect">
+            <a:avLst/>
+          </a:prstGeom>
+          <a:noFill/>
         </p:spPr>
         <p:txBody>
-          <a:bodyPr vert="horz" lIns="91440" tIns="45720" rIns="91440" bIns="45720" rtlCol="0">
-            <a:noAutofit/>
+          <a:bodyPr wrap="square" lIns="91440" tIns="45720" rIns="91440" bIns="45720" anchor="t">
+            <a:spAutoFit/>
           </a:bodyPr>
-          <a:lstStyle>
-            <a:lvl1pPr marL="0" indent="0" algn="l" defTabSz="914400" rtl="0" eaLnBrk="1" latinLnBrk="0" hangingPunct="1">
-              <a:lnSpc>
-                <a:spcPct val="90000"/>
-              </a:lnSpc>
-              <a:spcBef>
-                <a:spcPts val="1000"/>
-              </a:spcBef>
-              <a:buFont typeface="Arial" panose="020B0604020202020204" pitchFamily="34" charset="0"/>
+          <a:lstStyle/>
+          <a:p>
+            <a:pPr algn="l">
               <a:buNone/>
-              <a:defRPr sz="2000" b="0" kern="1200">
-                <a:solidFill>
-                  <a:schemeClr val="tx1"/>
-                </a:solidFill>
-                <a:latin typeface="+mn-lt"/>
-                <a:ea typeface="+mn-ea"/>
-                <a:cs typeface="+mn-cs"/>
-              </a:defRPr>
-            </a:lvl1pPr>
-            <a:lvl2pPr marL="685800" indent="-228600" algn="l" defTabSz="914400" rtl="0" eaLnBrk="1" latinLnBrk="0" hangingPunct="1">
-              <a:lnSpc>
-                <a:spcPct val="90000"/>
-              </a:lnSpc>
-              <a:spcBef>
-                <a:spcPts val="500"/>
-              </a:spcBef>
-              <a:buFont typeface="Arial" panose="020B0604020202020204" pitchFamily="34" charset="0"/>
-              <a:buChar char="•"/>
-              <a:defRPr sz="2400" b="0" kern="1200">
-                <a:solidFill>
-                  <a:schemeClr val="tx1"/>
-                </a:solidFill>
-                <a:latin typeface="+mn-lt"/>
-                <a:ea typeface="+mn-ea"/>
-                <a:cs typeface="+mn-cs"/>
-              </a:defRPr>
-            </a:lvl2pPr>
-            <a:lvl3pPr marL="1143000" indent="-228600" algn="l" defTabSz="914400" rtl="0" eaLnBrk="1" latinLnBrk="0" hangingPunct="1">
-              <a:lnSpc>
-                <a:spcPct val="90000"/>
-              </a:lnSpc>
-              <a:spcBef>
-                <a:spcPts val="500"/>
-              </a:spcBef>
-              <a:buFont typeface="Arial" panose="020B0604020202020204" pitchFamily="34" charset="0"/>
-              <a:buChar char="•"/>
-              <a:defRPr sz="2000" b="0" kern="1200">
-                <a:solidFill>
-                  <a:schemeClr val="tx1"/>
-                </a:solidFill>
-                <a:latin typeface="+mn-lt"/>
-                <a:ea typeface="+mn-ea"/>
-                <a:cs typeface="+mn-cs"/>
-              </a:defRPr>
-            </a:lvl3pPr>
-            <a:lvl4pPr marL="1600200" indent="-228600" algn="l" defTabSz="914400" rtl="0" eaLnBrk="1" latinLnBrk="0" hangingPunct="1">
-              <a:lnSpc>
-                <a:spcPct val="90000"/>
-              </a:lnSpc>
-              <a:spcBef>
-                <a:spcPts val="500"/>
-              </a:spcBef>
-              <a:buFont typeface="Arial" panose="020B0604020202020204" pitchFamily="34" charset="0"/>
-              <a:buChar char="•"/>
-              <a:defRPr sz="1800" b="0" kern="1200">
-                <a:solidFill>
-                  <a:schemeClr val="tx1"/>
-                </a:solidFill>
-                <a:latin typeface="+mn-lt"/>
-                <a:ea typeface="+mn-ea"/>
-                <a:cs typeface="+mn-cs"/>
-              </a:defRPr>
-            </a:lvl4pPr>
-            <a:lvl5pPr marL="2057400" indent="-228600" algn="l" defTabSz="914400" rtl="0" eaLnBrk="1" latinLnBrk="0" hangingPunct="1">
-              <a:lnSpc>
-                <a:spcPct val="90000"/>
-              </a:lnSpc>
-              <a:spcBef>
-                <a:spcPts val="500"/>
-              </a:spcBef>
-              <a:buFont typeface="Arial" panose="020B0604020202020204" pitchFamily="34" charset="0"/>
-              <a:buChar char="•"/>
-              <a:defRPr sz="1800" b="0" kern="1200">
-                <a:solidFill>
-                  <a:schemeClr val="tx1"/>
-                </a:solidFill>
-                <a:latin typeface="+mn-lt"/>
-                <a:ea typeface="+mn-ea"/>
-                <a:cs typeface="+mn-cs"/>
-              </a:defRPr>
-            </a:lvl5pPr>
-            <a:lvl6pPr marL="2514600" indent="-228600" algn="l" defTabSz="914400" rtl="0" eaLnBrk="1" latinLnBrk="0" hangingPunct="1">
-              <a:lnSpc>
-                <a:spcPct val="90000"/>
-              </a:lnSpc>
-              <a:spcBef>
-                <a:spcPts val="500"/>
-              </a:spcBef>
-              <a:buFont typeface="Arial" panose="020B0604020202020204" pitchFamily="34" charset="0"/>
-              <a:buChar char="•"/>
-              <a:defRPr sz="1800" kern="1200">
-                <a:solidFill>
-                  <a:schemeClr val="tx1"/>
-                </a:solidFill>
-                <a:latin typeface="+mn-lt"/>
-                <a:ea typeface="+mn-ea"/>
-                <a:cs typeface="+mn-cs"/>
-              </a:defRPr>
-            </a:lvl6pPr>
-            <a:lvl7pPr marL="2971800" indent="-228600" algn="l" defTabSz="914400" rtl="0" eaLnBrk="1" latinLnBrk="0" hangingPunct="1">
-              <a:lnSpc>
-                <a:spcPct val="90000"/>
-              </a:lnSpc>
-              <a:spcBef>
-                <a:spcPts val="500"/>
-              </a:spcBef>
-              <a:buFont typeface="Arial" panose="020B0604020202020204" pitchFamily="34" charset="0"/>
-              <a:buChar char="•"/>
-              <a:defRPr sz="1800" kern="1200">
-                <a:solidFill>
-                  <a:schemeClr val="tx1"/>
-                </a:solidFill>
-                <a:latin typeface="+mn-lt"/>
-                <a:ea typeface="+mn-ea"/>
-                <a:cs typeface="+mn-cs"/>
-              </a:defRPr>
-            </a:lvl7pPr>
-            <a:lvl8pPr marL="3429000" indent="-228600" algn="l" defTabSz="914400" rtl="0" eaLnBrk="1" latinLnBrk="0" hangingPunct="1">
-              <a:lnSpc>
-                <a:spcPct val="90000"/>
-              </a:lnSpc>
-              <a:spcBef>
-                <a:spcPts val="500"/>
-              </a:spcBef>
-              <a:buFont typeface="Arial" panose="020B0604020202020204" pitchFamily="34" charset="0"/>
-              <a:buChar char="•"/>
-              <a:defRPr sz="1800" kern="1200">
-                <a:solidFill>
-                  <a:schemeClr val="tx1"/>
-                </a:solidFill>
-                <a:latin typeface="+mn-lt"/>
-                <a:ea typeface="+mn-ea"/>
-                <a:cs typeface="+mn-cs"/>
-              </a:defRPr>
-            </a:lvl8pPr>
-            <a:lvl9pPr marL="3886200" indent="-228600" algn="l" defTabSz="914400" rtl="0" eaLnBrk="1" latinLnBrk="0" hangingPunct="1">
-              <a:lnSpc>
-                <a:spcPct val="90000"/>
-              </a:lnSpc>
-              <a:spcBef>
-                <a:spcPts val="500"/>
-              </a:spcBef>
-              <a:buFont typeface="Arial" panose="020B0604020202020204" pitchFamily="34" charset="0"/>
-              <a:buChar char="•"/>
-              <a:defRPr sz="1800" kern="1200">
-                <a:solidFill>
-                  <a:schemeClr val="tx1"/>
-                </a:solidFill>
-                <a:latin typeface="+mn-lt"/>
-                <a:ea typeface="+mn-ea"/>
-                <a:cs typeface="+mn-cs"/>
-              </a:defRPr>
-            </a:lvl9pPr>
-          </a:lstStyle>
-          <a:p>
+            </a:pPr>
             <a:r>
-              <a:rPr lang="en-US" dirty="0"/>
-              <a:t>A bulleted list of items and a short conclusion text</a:t>
+              <a:rPr lang="en-US" b="1" i="0">
+                <a:solidFill>
+                  <a:srgbClr val="262626"/>
+                </a:solidFill>
+                <a:effectLst/>
+                <a:latin typeface="Calibri"/>
+                <a:ea typeface="Calibri"/>
+                <a:cs typeface="Calibri"/>
+              </a:rPr>
+              <a:t>Proven </a:t>
+            </a:r>
+            <a:r>
+              <a:rPr lang="en-US" b="1">
+                <a:solidFill>
+                  <a:srgbClr val="262626"/>
+                </a:solidFill>
+                <a:latin typeface="Calibri"/>
+                <a:ea typeface="Calibri"/>
+                <a:cs typeface="Calibri"/>
+              </a:rPr>
+              <a:t>Multi-agent</a:t>
+            </a:r>
+            <a:r>
+              <a:rPr lang="en-US" b="1" i="0">
+                <a:solidFill>
+                  <a:srgbClr val="262626"/>
+                </a:solidFill>
+                <a:effectLst/>
+                <a:latin typeface="Calibri"/>
+                <a:ea typeface="Calibri"/>
+                <a:cs typeface="Calibri"/>
+              </a:rPr>
+              <a:t> Track Record</a:t>
             </a:r>
           </a:p>
         </p:txBody>
       </p:sp>
+      <p:sp>
+        <p:nvSpPr>
+          <p:cNvPr id="20" name="TextBox 19">
+            <a:extLst>
+              <a:ext uri="{FF2B5EF4-FFF2-40B4-BE49-F238E27FC236}">
+                <a16:creationId xmlns:a16="http://schemas.microsoft.com/office/drawing/2014/main" id="{130FC3E6-58A5-9CD0-8116-16B821E0D0D2}"/>
+              </a:ext>
+            </a:extLst>
+          </p:cNvPr>
+          <p:cNvSpPr txBox="1"/>
+          <p:nvPr userDrawn="1"/>
+        </p:nvSpPr>
+        <p:spPr>
+          <a:xfrm>
+            <a:off x="931492" y="1708438"/>
+            <a:ext cx="4797039" cy="738664"/>
+          </a:xfrm>
+          <a:prstGeom prst="rect">
+            <a:avLst/>
+          </a:prstGeom>
+          <a:noFill/>
+        </p:spPr>
+        <p:txBody>
+          <a:bodyPr wrap="square" lIns="91440" tIns="45720" rIns="91440" bIns="45720" anchor="t">
+            <a:spAutoFit/>
+          </a:bodyPr>
+          <a:lstStyle/>
+          <a:p>
+            <a:r>
+              <a:rPr lang="en-US" sz="1400" dirty="0"/>
+              <a:t>We bring hands-on experience from multiple industries, facing similar challenges with documentation and maintenance of correct manuals. </a:t>
+            </a:r>
+            <a:endParaRPr lang="en-US" sz="1400" dirty="0">
+              <a:ea typeface="Calibri"/>
+              <a:cs typeface="Calibri"/>
+            </a:endParaRPr>
+          </a:p>
+        </p:txBody>
+      </p:sp>
+      <p:sp>
+        <p:nvSpPr>
+          <p:cNvPr id="21" name="TextBox 20">
+            <a:extLst>
+              <a:ext uri="{FF2B5EF4-FFF2-40B4-BE49-F238E27FC236}">
+                <a16:creationId xmlns:a16="http://schemas.microsoft.com/office/drawing/2014/main" id="{D7ABC5C1-7F24-0E88-1FBE-F391A1D6443E}"/>
+              </a:ext>
+            </a:extLst>
+          </p:cNvPr>
+          <p:cNvSpPr txBox="1"/>
+          <p:nvPr userDrawn="1"/>
+        </p:nvSpPr>
+        <p:spPr>
+          <a:xfrm>
+            <a:off x="931492" y="3324512"/>
+            <a:ext cx="4797039" cy="738664"/>
+          </a:xfrm>
+          <a:prstGeom prst="rect">
+            <a:avLst/>
+          </a:prstGeom>
+          <a:noFill/>
+        </p:spPr>
+        <p:txBody>
+          <a:bodyPr wrap="square" lIns="91440" tIns="45720" rIns="91440" bIns="45720" anchor="t">
+            <a:spAutoFit/>
+          </a:bodyPr>
+          <a:lstStyle/>
+          <a:p>
+            <a:r>
+              <a:rPr lang="en-US" sz="1400" b="0" i="0">
+                <a:effectLst/>
+                <a:cs typeface="Calibri"/>
+              </a:rPr>
+              <a:t>Our team has delivered </a:t>
+            </a:r>
+            <a:r>
+              <a:rPr lang="en-US" sz="1400">
+                <a:cs typeface="Calibri"/>
+              </a:rPr>
+              <a:t>multiple</a:t>
+            </a:r>
+            <a:r>
+              <a:rPr lang="en-US" sz="1400" b="0" i="0">
+                <a:effectLst/>
+                <a:cs typeface="Calibri"/>
+              </a:rPr>
+              <a:t> enterprise-grade </a:t>
+            </a:r>
+            <a:r>
+              <a:rPr lang="en-US" sz="1400">
+                <a:cs typeface="Calibri"/>
+              </a:rPr>
+              <a:t>Multi-agent products</a:t>
+            </a:r>
+            <a:r>
+              <a:rPr lang="en-US" sz="1400" b="0" i="0">
+                <a:effectLst/>
+                <a:cs typeface="Calibri"/>
+              </a:rPr>
+              <a:t> across pharma, retail, and industrial sectors tailored to real-world production needs and scaled for impact.</a:t>
+            </a:r>
+            <a:endParaRPr lang="en-US" sz="1400">
+              <a:cs typeface="Calibri"/>
+            </a:endParaRPr>
+          </a:p>
+        </p:txBody>
+      </p:sp>
+      <p:sp>
+        <p:nvSpPr>
+          <p:cNvPr id="22" name="TextBox 21">
+            <a:extLst>
+              <a:ext uri="{FF2B5EF4-FFF2-40B4-BE49-F238E27FC236}">
+                <a16:creationId xmlns:a16="http://schemas.microsoft.com/office/drawing/2014/main" id="{45583127-2AD4-6B03-1813-71A4E76C8329}"/>
+              </a:ext>
+            </a:extLst>
+          </p:cNvPr>
+          <p:cNvSpPr txBox="1"/>
+          <p:nvPr userDrawn="1"/>
+        </p:nvSpPr>
+        <p:spPr>
+          <a:xfrm>
+            <a:off x="1318168" y="4598939"/>
+            <a:ext cx="4623275" cy="369332"/>
+          </a:xfrm>
+          <a:prstGeom prst="rect">
+            <a:avLst/>
+          </a:prstGeom>
+          <a:noFill/>
+        </p:spPr>
+        <p:txBody>
+          <a:bodyPr wrap="square">
+            <a:spAutoFit/>
+          </a:bodyPr>
+          <a:lstStyle/>
+          <a:p>
+            <a:pPr algn="l"/>
+            <a:r>
+              <a:rPr lang="en-US" b="1" i="0">
+                <a:solidFill>
+                  <a:srgbClr val="262626"/>
+                </a:solidFill>
+                <a:effectLst/>
+                <a:latin typeface="Calibri"/>
+                <a:ea typeface="Calibri"/>
+                <a:cs typeface="Calibri"/>
+              </a:rPr>
+              <a:t>Top Talent, Lean Team</a:t>
+            </a:r>
+          </a:p>
+        </p:txBody>
+      </p:sp>
+      <p:sp>
+        <p:nvSpPr>
+          <p:cNvPr id="23" name="TextBox 22">
+            <a:extLst>
+              <a:ext uri="{FF2B5EF4-FFF2-40B4-BE49-F238E27FC236}">
+                <a16:creationId xmlns:a16="http://schemas.microsoft.com/office/drawing/2014/main" id="{43C77D6C-536D-288A-9A07-AE2C0979AAAF}"/>
+              </a:ext>
+            </a:extLst>
+          </p:cNvPr>
+          <p:cNvSpPr txBox="1"/>
+          <p:nvPr userDrawn="1"/>
+        </p:nvSpPr>
+        <p:spPr>
+          <a:xfrm>
+            <a:off x="905573" y="5032463"/>
+            <a:ext cx="4725824" cy="738664"/>
+          </a:xfrm>
+          <a:prstGeom prst="rect">
+            <a:avLst/>
+          </a:prstGeom>
+          <a:noFill/>
+        </p:spPr>
+        <p:txBody>
+          <a:bodyPr wrap="square">
+            <a:spAutoFit/>
+          </a:bodyPr>
+          <a:lstStyle/>
+          <a:p>
+            <a:r>
+              <a:rPr lang="en-US" sz="1400" b="0" i="0">
+                <a:effectLst/>
+                <a:latin typeface="Calibri" panose="020F0502020204030204" pitchFamily="34" charset="0"/>
+                <a:cs typeface="Calibri" panose="020F0502020204030204" pitchFamily="34" charset="0"/>
+              </a:rPr>
+              <a:t>A senior-led, cross-functional squad ensures rapid delivery and tight feedback loops, with fewer handoffs, faster iteration, and lower total cost of ownership.</a:t>
+            </a:r>
+            <a:endParaRPr lang="en-US" sz="1400">
+              <a:latin typeface="Calibri" panose="020F0502020204030204" pitchFamily="34" charset="0"/>
+              <a:cs typeface="Calibri" panose="020F0502020204030204" pitchFamily="34" charset="0"/>
+            </a:endParaRPr>
+          </a:p>
+        </p:txBody>
+      </p:sp>
+      <p:sp>
+        <p:nvSpPr>
+          <p:cNvPr id="24" name="TextBox 23">
+            <a:extLst>
+              <a:ext uri="{FF2B5EF4-FFF2-40B4-BE49-F238E27FC236}">
+                <a16:creationId xmlns:a16="http://schemas.microsoft.com/office/drawing/2014/main" id="{74DF3F49-B1AD-72D3-895F-DCC4FB73D793}"/>
+              </a:ext>
+            </a:extLst>
+          </p:cNvPr>
+          <p:cNvSpPr txBox="1"/>
+          <p:nvPr userDrawn="1"/>
+        </p:nvSpPr>
+        <p:spPr>
+          <a:xfrm>
+            <a:off x="7271046" y="1339106"/>
+            <a:ext cx="4573424" cy="369332"/>
+          </a:xfrm>
+          <a:prstGeom prst="rect">
+            <a:avLst/>
+          </a:prstGeom>
+          <a:noFill/>
+        </p:spPr>
+        <p:txBody>
+          <a:bodyPr wrap="square">
+            <a:spAutoFit/>
+          </a:bodyPr>
+          <a:lstStyle/>
+          <a:p>
+            <a:pPr algn="l"/>
+            <a:r>
+              <a:rPr lang="en-US" b="1" i="0">
+                <a:solidFill>
+                  <a:srgbClr val="262626"/>
+                </a:solidFill>
+                <a:effectLst/>
+                <a:latin typeface="Calibri" panose="020F0502020204030204" pitchFamily="34" charset="0"/>
+                <a:cs typeface="Calibri" panose="020F0502020204030204" pitchFamily="34" charset="0"/>
+              </a:rPr>
+              <a:t>Built for Production from Day one</a:t>
+            </a:r>
+          </a:p>
+        </p:txBody>
+      </p:sp>
+      <p:sp>
+        <p:nvSpPr>
+          <p:cNvPr id="25" name="TextBox 24">
+            <a:extLst>
+              <a:ext uri="{FF2B5EF4-FFF2-40B4-BE49-F238E27FC236}">
+                <a16:creationId xmlns:a16="http://schemas.microsoft.com/office/drawing/2014/main" id="{FE001DDF-FBDF-E249-6F7B-99181D69AC28}"/>
+              </a:ext>
+            </a:extLst>
+          </p:cNvPr>
+          <p:cNvSpPr txBox="1"/>
+          <p:nvPr userDrawn="1"/>
+        </p:nvSpPr>
+        <p:spPr>
+          <a:xfrm>
+            <a:off x="6929214" y="1708437"/>
+            <a:ext cx="4797039" cy="738664"/>
+          </a:xfrm>
+          <a:prstGeom prst="rect">
+            <a:avLst/>
+          </a:prstGeom>
+          <a:noFill/>
+        </p:spPr>
+        <p:txBody>
+          <a:bodyPr wrap="square">
+            <a:spAutoFit/>
+          </a:bodyPr>
+          <a:lstStyle/>
+          <a:p>
+            <a:r>
+              <a:rPr lang="en-US" sz="1400"/>
+              <a:t>Security, compliance, and monitoring are embedded from the start, not retrofitted later. Our mindset is production-first, not prototype-first.</a:t>
+            </a:r>
+          </a:p>
+        </p:txBody>
+      </p:sp>
+      <p:sp>
+        <p:nvSpPr>
+          <p:cNvPr id="26" name="TextBox 25">
+            <a:extLst>
+              <a:ext uri="{FF2B5EF4-FFF2-40B4-BE49-F238E27FC236}">
+                <a16:creationId xmlns:a16="http://schemas.microsoft.com/office/drawing/2014/main" id="{86912470-7B43-22A2-00D0-17B9520EA500}"/>
+              </a:ext>
+            </a:extLst>
+          </p:cNvPr>
+          <p:cNvSpPr txBox="1"/>
+          <p:nvPr userDrawn="1"/>
+        </p:nvSpPr>
+        <p:spPr>
+          <a:xfrm>
+            <a:off x="7295430" y="2907227"/>
+            <a:ext cx="4573424" cy="369332"/>
+          </a:xfrm>
+          <a:prstGeom prst="rect">
+            <a:avLst/>
+          </a:prstGeom>
+          <a:noFill/>
+        </p:spPr>
+        <p:txBody>
+          <a:bodyPr wrap="square">
+            <a:spAutoFit/>
+          </a:bodyPr>
+          <a:lstStyle/>
+          <a:p>
+            <a:pPr algn="l"/>
+            <a:r>
+              <a:rPr lang="en-US" b="1" i="0">
+                <a:solidFill>
+                  <a:srgbClr val="262626"/>
+                </a:solidFill>
+                <a:effectLst/>
+                <a:latin typeface="Calibri" panose="020F0502020204030204" pitchFamily="34" charset="0"/>
+                <a:cs typeface="Calibri" panose="020F0502020204030204" pitchFamily="34" charset="0"/>
+              </a:rPr>
+              <a:t>A True Partner, Not Just a Vendor</a:t>
+            </a:r>
+          </a:p>
+        </p:txBody>
+      </p:sp>
+      <p:sp>
+        <p:nvSpPr>
+          <p:cNvPr id="27" name="TextBox 26">
+            <a:extLst>
+              <a:ext uri="{FF2B5EF4-FFF2-40B4-BE49-F238E27FC236}">
+                <a16:creationId xmlns:a16="http://schemas.microsoft.com/office/drawing/2014/main" id="{DD4101A6-1B1B-4243-E876-B17CEA780A39}"/>
+              </a:ext>
+            </a:extLst>
+          </p:cNvPr>
+          <p:cNvSpPr txBox="1"/>
+          <p:nvPr userDrawn="1"/>
+        </p:nvSpPr>
+        <p:spPr>
+          <a:xfrm>
+            <a:off x="6929214" y="3283946"/>
+            <a:ext cx="4797039" cy="738664"/>
+          </a:xfrm>
+          <a:prstGeom prst="rect">
+            <a:avLst/>
+          </a:prstGeom>
+          <a:noFill/>
+        </p:spPr>
+        <p:txBody>
+          <a:bodyPr wrap="square">
+            <a:spAutoFit/>
+          </a:bodyPr>
+          <a:lstStyle/>
+          <a:p>
+            <a:r>
+              <a:rPr lang="en-US" sz="1400"/>
+              <a:t>We co-create with your teams, share knowledge openly, and avoid vendor lock-in through open standards and transparent design. Our goal is long-term capability, not dependency.</a:t>
+            </a:r>
+          </a:p>
+        </p:txBody>
+      </p:sp>
+      <p:pic>
+        <p:nvPicPr>
+          <p:cNvPr id="28" name="Graphic 27">
+            <a:extLst>
+              <a:ext uri="{FF2B5EF4-FFF2-40B4-BE49-F238E27FC236}">
+                <a16:creationId xmlns:a16="http://schemas.microsoft.com/office/drawing/2014/main" id="{BBAD7591-F744-4098-E06F-543F90015B7A}"/>
+              </a:ext>
+            </a:extLst>
+          </p:cNvPr>
+          <p:cNvPicPr>
+            <a:picLocks noChangeAspect="1"/>
+          </p:cNvPicPr>
+          <p:nvPr userDrawn="1"/>
+        </p:nvPicPr>
+        <p:blipFill>
+          <a:blip r:embed="rId2">
+            <a:extLst>
+              <a:ext uri="{96DAC541-7B7A-43D3-8B79-37D633B846F1}">
+                <asvg:svgBlip xmlns:asvg="http://schemas.microsoft.com/office/drawing/2016/SVG/main" r:embed="rId3"/>
+              </a:ext>
+            </a:extLst>
+          </a:blip>
+          <a:stretch>
+            <a:fillRect/>
+          </a:stretch>
+        </p:blipFill>
+        <p:spPr>
+          <a:xfrm>
+            <a:off x="329520" y="1270462"/>
+            <a:ext cx="506619" cy="506619"/>
+          </a:xfrm>
+          <a:prstGeom prst="rect">
+            <a:avLst/>
+          </a:prstGeom>
+        </p:spPr>
+      </p:pic>
+      <p:pic>
+        <p:nvPicPr>
+          <p:cNvPr id="29" name="Graphic 28">
+            <a:extLst>
+              <a:ext uri="{FF2B5EF4-FFF2-40B4-BE49-F238E27FC236}">
+                <a16:creationId xmlns:a16="http://schemas.microsoft.com/office/drawing/2014/main" id="{95D0FA04-3AB7-EAAA-0E84-5E95CEFF0D4F}"/>
+              </a:ext>
+            </a:extLst>
+          </p:cNvPr>
+          <p:cNvPicPr>
+            <a:picLocks noChangeAspect="1"/>
+          </p:cNvPicPr>
+          <p:nvPr userDrawn="1"/>
+        </p:nvPicPr>
+        <p:blipFill>
+          <a:blip r:embed="rId2">
+            <a:extLst>
+              <a:ext uri="{96DAC541-7B7A-43D3-8B79-37D633B846F1}">
+                <asvg:svgBlip xmlns:asvg="http://schemas.microsoft.com/office/drawing/2016/SVG/main" r:embed="rId3"/>
+              </a:ext>
+            </a:extLst>
+          </a:blip>
+          <a:stretch>
+            <a:fillRect/>
+          </a:stretch>
+        </p:blipFill>
+        <p:spPr>
+          <a:xfrm>
+            <a:off x="6340202" y="1261195"/>
+            <a:ext cx="506619" cy="506619"/>
+          </a:xfrm>
+          <a:prstGeom prst="rect">
+            <a:avLst/>
+          </a:prstGeom>
+        </p:spPr>
+      </p:pic>
+      <p:pic>
+        <p:nvPicPr>
+          <p:cNvPr id="30" name="Graphic 29">
+            <a:extLst>
+              <a:ext uri="{FF2B5EF4-FFF2-40B4-BE49-F238E27FC236}">
+                <a16:creationId xmlns:a16="http://schemas.microsoft.com/office/drawing/2014/main" id="{D2732E4D-CDD3-0A02-898B-AAE31D61CD92}"/>
+              </a:ext>
+            </a:extLst>
+          </p:cNvPr>
+          <p:cNvPicPr>
+            <a:picLocks noChangeAspect="1"/>
+          </p:cNvPicPr>
+          <p:nvPr userDrawn="1"/>
+        </p:nvPicPr>
+        <p:blipFill>
+          <a:blip r:embed="rId2">
+            <a:extLst>
+              <a:ext uri="{96DAC541-7B7A-43D3-8B79-37D633B846F1}">
+                <asvg:svgBlip xmlns:asvg="http://schemas.microsoft.com/office/drawing/2016/SVG/main" r:embed="rId3"/>
+              </a:ext>
+            </a:extLst>
+          </a:blip>
+          <a:stretch>
+            <a:fillRect/>
+          </a:stretch>
+        </p:blipFill>
+        <p:spPr>
+          <a:xfrm>
+            <a:off x="329520" y="2886536"/>
+            <a:ext cx="506619" cy="506619"/>
+          </a:xfrm>
+          <a:prstGeom prst="rect">
+            <a:avLst/>
+          </a:prstGeom>
+        </p:spPr>
+      </p:pic>
+      <p:pic>
+        <p:nvPicPr>
+          <p:cNvPr id="31" name="Graphic 30">
+            <a:extLst>
+              <a:ext uri="{FF2B5EF4-FFF2-40B4-BE49-F238E27FC236}">
+                <a16:creationId xmlns:a16="http://schemas.microsoft.com/office/drawing/2014/main" id="{327537E7-188C-632A-88A4-0CDB609626B8}"/>
+              </a:ext>
+            </a:extLst>
+          </p:cNvPr>
+          <p:cNvPicPr>
+            <a:picLocks noChangeAspect="1"/>
+          </p:cNvPicPr>
+          <p:nvPr userDrawn="1"/>
+        </p:nvPicPr>
+        <p:blipFill>
+          <a:blip r:embed="rId2">
+            <a:extLst>
+              <a:ext uri="{96DAC541-7B7A-43D3-8B79-37D633B846F1}">
+                <asvg:svgBlip xmlns:asvg="http://schemas.microsoft.com/office/drawing/2016/SVG/main" r:embed="rId3"/>
+              </a:ext>
+            </a:extLst>
+          </a:blip>
+          <a:stretch>
+            <a:fillRect/>
+          </a:stretch>
+        </p:blipFill>
+        <p:spPr>
+          <a:xfrm>
+            <a:off x="398954" y="4566590"/>
+            <a:ext cx="506619" cy="506619"/>
+          </a:xfrm>
+          <a:prstGeom prst="rect">
+            <a:avLst/>
+          </a:prstGeom>
+        </p:spPr>
+      </p:pic>
+      <p:pic>
+        <p:nvPicPr>
+          <p:cNvPr id="32" name="Graphic 31">
+            <a:extLst>
+              <a:ext uri="{FF2B5EF4-FFF2-40B4-BE49-F238E27FC236}">
+                <a16:creationId xmlns:a16="http://schemas.microsoft.com/office/drawing/2014/main" id="{E9A888FE-DFD9-54E1-04FD-46DD1AB73143}"/>
+              </a:ext>
+            </a:extLst>
+          </p:cNvPr>
+          <p:cNvPicPr>
+            <a:picLocks noChangeAspect="1"/>
+          </p:cNvPicPr>
+          <p:nvPr userDrawn="1"/>
+        </p:nvPicPr>
+        <p:blipFill>
+          <a:blip r:embed="rId2">
+            <a:extLst>
+              <a:ext uri="{96DAC541-7B7A-43D3-8B79-37D633B846F1}">
+                <asvg:svgBlip xmlns:asvg="http://schemas.microsoft.com/office/drawing/2016/SVG/main" r:embed="rId3"/>
+              </a:ext>
+            </a:extLst>
+          </a:blip>
+          <a:stretch>
+            <a:fillRect/>
+          </a:stretch>
+        </p:blipFill>
+        <p:spPr>
+          <a:xfrm>
+            <a:off x="6340202" y="2863970"/>
+            <a:ext cx="506619" cy="506619"/>
+          </a:xfrm>
+          <a:prstGeom prst="rect">
+            <a:avLst/>
+          </a:prstGeom>
+        </p:spPr>
+      </p:pic>
+      <p:pic>
+        <p:nvPicPr>
+          <p:cNvPr id="33" name="Graphic 32">
+            <a:extLst>
+              <a:ext uri="{FF2B5EF4-FFF2-40B4-BE49-F238E27FC236}">
+                <a16:creationId xmlns:a16="http://schemas.microsoft.com/office/drawing/2014/main" id="{D4538602-E74E-0718-5FA7-047BC0C9B4DC}"/>
+              </a:ext>
+            </a:extLst>
+          </p:cNvPr>
+          <p:cNvPicPr>
+            <a:picLocks noChangeAspect="1"/>
+          </p:cNvPicPr>
+          <p:nvPr userDrawn="1"/>
+        </p:nvPicPr>
+        <p:blipFill>
+          <a:blip r:embed="rId4">
+            <a:extLst>
+              <a:ext uri="{96DAC541-7B7A-43D3-8B79-37D633B846F1}">
+                <asvg:svgBlip xmlns:asvg="http://schemas.microsoft.com/office/drawing/2016/SVG/main" r:embed="rId5"/>
+              </a:ext>
+            </a:extLst>
+          </a:blip>
+          <a:stretch>
+            <a:fillRect/>
+          </a:stretch>
+        </p:blipFill>
+        <p:spPr>
+          <a:xfrm>
+            <a:off x="1013538" y="2983837"/>
+            <a:ext cx="304631" cy="304631"/>
+          </a:xfrm>
+          <a:prstGeom prst="rect">
+            <a:avLst/>
+          </a:prstGeom>
+        </p:spPr>
+      </p:pic>
+      <p:pic>
+        <p:nvPicPr>
+          <p:cNvPr id="34" name="Graphic 33">
+            <a:extLst>
+              <a:ext uri="{FF2B5EF4-FFF2-40B4-BE49-F238E27FC236}">
+                <a16:creationId xmlns:a16="http://schemas.microsoft.com/office/drawing/2014/main" id="{5E7BF02C-615A-3088-AF8E-15E632D47456}"/>
+              </a:ext>
+            </a:extLst>
+          </p:cNvPr>
+          <p:cNvPicPr>
+            <a:picLocks noChangeAspect="1"/>
+          </p:cNvPicPr>
+          <p:nvPr userDrawn="1"/>
+        </p:nvPicPr>
+        <p:blipFill>
+          <a:blip r:embed="rId6">
+            <a:extLst>
+              <a:ext uri="{96DAC541-7B7A-43D3-8B79-37D633B846F1}">
+                <asvg:svgBlip xmlns:asvg="http://schemas.microsoft.com/office/drawing/2016/SVG/main" r:embed="rId7"/>
+              </a:ext>
+            </a:extLst>
+          </a:blip>
+          <a:stretch>
+            <a:fillRect/>
+          </a:stretch>
+        </p:blipFill>
+        <p:spPr>
+          <a:xfrm>
+            <a:off x="1013537" y="4631290"/>
+            <a:ext cx="304631" cy="304631"/>
+          </a:xfrm>
+          <a:prstGeom prst="rect">
+            <a:avLst/>
+          </a:prstGeom>
+        </p:spPr>
+      </p:pic>
+      <p:pic>
+        <p:nvPicPr>
+          <p:cNvPr id="35" name="Graphic 34">
+            <a:extLst>
+              <a:ext uri="{FF2B5EF4-FFF2-40B4-BE49-F238E27FC236}">
+                <a16:creationId xmlns:a16="http://schemas.microsoft.com/office/drawing/2014/main" id="{5AA8A8E1-06B7-4373-90E9-1E30C3724DEB}"/>
+              </a:ext>
+            </a:extLst>
+          </p:cNvPr>
+          <p:cNvPicPr>
+            <a:picLocks noChangeAspect="1"/>
+          </p:cNvPicPr>
+          <p:nvPr userDrawn="1"/>
+        </p:nvPicPr>
+        <p:blipFill>
+          <a:blip r:embed="rId8">
+            <a:extLst>
+              <a:ext uri="{96DAC541-7B7A-43D3-8B79-37D633B846F1}">
+                <asvg:svgBlip xmlns:asvg="http://schemas.microsoft.com/office/drawing/2016/SVG/main" r:embed="rId9"/>
+              </a:ext>
+            </a:extLst>
+          </a:blip>
+          <a:stretch>
+            <a:fillRect/>
+          </a:stretch>
+        </p:blipFill>
+        <p:spPr>
+          <a:xfrm>
+            <a:off x="7022862" y="1368929"/>
+            <a:ext cx="305989" cy="305989"/>
+          </a:xfrm>
+          <a:prstGeom prst="rect">
+            <a:avLst/>
+          </a:prstGeom>
+        </p:spPr>
+      </p:pic>
+      <p:pic>
+        <p:nvPicPr>
+          <p:cNvPr id="36" name="Graphic 35">
+            <a:extLst>
+              <a:ext uri="{FF2B5EF4-FFF2-40B4-BE49-F238E27FC236}">
+                <a16:creationId xmlns:a16="http://schemas.microsoft.com/office/drawing/2014/main" id="{159525F5-F14E-A4CB-D96F-FF4281DDC8EB}"/>
+              </a:ext>
+            </a:extLst>
+          </p:cNvPr>
+          <p:cNvPicPr>
+            <a:picLocks noChangeAspect="1"/>
+          </p:cNvPicPr>
+          <p:nvPr userDrawn="1"/>
+        </p:nvPicPr>
+        <p:blipFill>
+          <a:blip r:embed="rId10">
+            <a:extLst>
+              <a:ext uri="{96DAC541-7B7A-43D3-8B79-37D633B846F1}">
+                <asvg:svgBlip xmlns:asvg="http://schemas.microsoft.com/office/drawing/2016/SVG/main" r:embed="rId11"/>
+              </a:ext>
+            </a:extLst>
+          </a:blip>
+          <a:stretch>
+            <a:fillRect/>
+          </a:stretch>
+        </p:blipFill>
+        <p:spPr>
+          <a:xfrm>
+            <a:off x="6966415" y="2955271"/>
+            <a:ext cx="304631" cy="304631"/>
+          </a:xfrm>
+          <a:prstGeom prst="rect">
+            <a:avLst/>
+          </a:prstGeom>
+        </p:spPr>
+      </p:pic>
+      <p:pic>
+        <p:nvPicPr>
+          <p:cNvPr id="37" name="Picture 36" descr="Download IKEA Logo in SVG Vector or PNG File Format - Logo.wine">
+            <a:extLst>
+              <a:ext uri="{FF2B5EF4-FFF2-40B4-BE49-F238E27FC236}">
+                <a16:creationId xmlns:a16="http://schemas.microsoft.com/office/drawing/2014/main" id="{21C476F9-E6D3-0A4B-C426-8A1E5FB20E13}"/>
+              </a:ext>
+            </a:extLst>
+          </p:cNvPr>
+          <p:cNvPicPr>
+            <a:picLocks noChangeAspect="1"/>
+          </p:cNvPicPr>
+          <p:nvPr userDrawn="1"/>
+        </p:nvPicPr>
+        <p:blipFill>
+          <a:blip r:embed="rId12"/>
+          <a:stretch>
+            <a:fillRect/>
+          </a:stretch>
+        </p:blipFill>
+        <p:spPr>
+          <a:xfrm>
+            <a:off x="7067636" y="4898362"/>
+            <a:ext cx="853861" cy="809619"/>
+          </a:xfrm>
+          <a:prstGeom prst="rect">
+            <a:avLst/>
+          </a:prstGeom>
+          <a:ln>
+            <a:noFill/>
+          </a:ln>
+        </p:spPr>
+      </p:pic>
+      <p:pic>
+        <p:nvPicPr>
+          <p:cNvPr id="38" name="Picture 37" descr="Novo Nordisk - Wikipedia">
+            <a:extLst>
+              <a:ext uri="{FF2B5EF4-FFF2-40B4-BE49-F238E27FC236}">
+                <a16:creationId xmlns:a16="http://schemas.microsoft.com/office/drawing/2014/main" id="{F2D5E519-A47C-7694-5CD1-E81E57C25B5D}"/>
+              </a:ext>
+            </a:extLst>
+          </p:cNvPr>
+          <p:cNvPicPr>
+            <a:picLocks noChangeAspect="1"/>
+          </p:cNvPicPr>
+          <p:nvPr userDrawn="1"/>
+        </p:nvPicPr>
+        <p:blipFill>
+          <a:blip r:embed="rId13"/>
+          <a:stretch>
+            <a:fillRect/>
+          </a:stretch>
+        </p:blipFill>
+        <p:spPr>
+          <a:xfrm>
+            <a:off x="9212971" y="5032463"/>
+            <a:ext cx="853860" cy="623807"/>
+          </a:xfrm>
+          <a:prstGeom prst="rect">
+            <a:avLst/>
+          </a:prstGeom>
+          <a:ln>
+            <a:noFill/>
+          </a:ln>
+        </p:spPr>
+      </p:pic>
+      <p:pic>
+        <p:nvPicPr>
+          <p:cNvPr id="39" name="Picture 38" descr="Volvo Logo PNG Vectors Free Download">
+            <a:extLst>
+              <a:ext uri="{FF2B5EF4-FFF2-40B4-BE49-F238E27FC236}">
+                <a16:creationId xmlns:a16="http://schemas.microsoft.com/office/drawing/2014/main" id="{72E483E8-247A-32FF-E55C-B3B693F060F8}"/>
+              </a:ext>
+            </a:extLst>
+          </p:cNvPr>
+          <p:cNvPicPr>
+            <a:picLocks noChangeAspect="1"/>
+          </p:cNvPicPr>
+          <p:nvPr userDrawn="1"/>
+        </p:nvPicPr>
+        <p:blipFill>
+          <a:blip r:embed="rId14"/>
+          <a:stretch>
+            <a:fillRect/>
+          </a:stretch>
+        </p:blipFill>
+        <p:spPr>
+          <a:xfrm>
+            <a:off x="8145802" y="5008424"/>
+            <a:ext cx="596239" cy="605209"/>
+          </a:xfrm>
+          <a:prstGeom prst="rect">
+            <a:avLst/>
+          </a:prstGeom>
+          <a:ln>
+            <a:noFill/>
+          </a:ln>
+        </p:spPr>
+      </p:pic>
+      <p:pic>
+        <p:nvPicPr>
+          <p:cNvPr id="40" name="Picture 39" descr="Tetra Laval | Tetra Laval">
+            <a:extLst>
+              <a:ext uri="{FF2B5EF4-FFF2-40B4-BE49-F238E27FC236}">
+                <a16:creationId xmlns:a16="http://schemas.microsoft.com/office/drawing/2014/main" id="{76DB1012-F4EF-F66E-9015-3D60A0635AF3}"/>
+              </a:ext>
+            </a:extLst>
+          </p:cNvPr>
+          <p:cNvPicPr>
+            <a:picLocks noChangeAspect="1"/>
+          </p:cNvPicPr>
+          <p:nvPr userDrawn="1"/>
+        </p:nvPicPr>
+        <p:blipFill>
+          <a:blip r:embed="rId15"/>
+          <a:stretch>
+            <a:fillRect/>
+          </a:stretch>
+        </p:blipFill>
+        <p:spPr>
+          <a:xfrm>
+            <a:off x="7022862" y="5656778"/>
+            <a:ext cx="1635687" cy="207535"/>
+          </a:xfrm>
+          <a:prstGeom prst="rect">
+            <a:avLst/>
+          </a:prstGeom>
+          <a:ln>
+            <a:noFill/>
+          </a:ln>
+        </p:spPr>
+      </p:pic>
+      <p:pic>
+        <p:nvPicPr>
+          <p:cNvPr id="41" name="Picture 40" descr="Novartis Logo, symbol, meaning, history ...">
+            <a:extLst>
+              <a:ext uri="{FF2B5EF4-FFF2-40B4-BE49-F238E27FC236}">
+                <a16:creationId xmlns:a16="http://schemas.microsoft.com/office/drawing/2014/main" id="{AD420B4B-954A-D141-F1E8-0FE269447133}"/>
+              </a:ext>
+            </a:extLst>
+          </p:cNvPr>
+          <p:cNvPicPr>
+            <a:picLocks noChangeAspect="1"/>
+          </p:cNvPicPr>
+          <p:nvPr userDrawn="1"/>
+        </p:nvPicPr>
+        <p:blipFill>
+          <a:blip r:embed="rId16"/>
+          <a:stretch>
+            <a:fillRect/>
+          </a:stretch>
+        </p:blipFill>
+        <p:spPr>
+          <a:xfrm>
+            <a:off x="10075017" y="5109625"/>
+            <a:ext cx="859887" cy="508778"/>
+          </a:xfrm>
+          <a:prstGeom prst="rect">
+            <a:avLst/>
+          </a:prstGeom>
+          <a:ln>
+            <a:noFill/>
+          </a:ln>
+        </p:spPr>
+      </p:pic>
+      <p:pic>
+        <p:nvPicPr>
+          <p:cNvPr id="42" name="Google Shape;920;p15">
+            <a:extLst>
+              <a:ext uri="{FF2B5EF4-FFF2-40B4-BE49-F238E27FC236}">
+                <a16:creationId xmlns:a16="http://schemas.microsoft.com/office/drawing/2014/main" id="{A3FE8608-9DB4-ACFD-20F0-E31C800B57D1}"/>
+              </a:ext>
+            </a:extLst>
+          </p:cNvPr>
+          <p:cNvPicPr preferRelativeResize="0"/>
+          <p:nvPr userDrawn="1"/>
+        </p:nvPicPr>
+        <p:blipFill rotWithShape="1">
+          <a:blip r:embed="rId17" cstate="screen">
+            <a:alphaModFix/>
+            <a:extLst>
+              <a:ext uri="{28A0092B-C50C-407E-A947-70E740481C1C}">
+                <a14:useLocalDpi xmlns:a14="http://schemas.microsoft.com/office/drawing/2010/main"/>
+              </a:ext>
+            </a:extLst>
+          </a:blip>
+          <a:srcRect/>
+          <a:stretch/>
+        </p:blipFill>
+        <p:spPr>
+          <a:xfrm>
+            <a:off x="9179458" y="5700588"/>
+            <a:ext cx="1755446" cy="163725"/>
+          </a:xfrm>
+          <a:prstGeom prst="rect">
+            <a:avLst/>
+          </a:prstGeom>
+          <a:noFill/>
+          <a:ln>
+            <a:noFill/>
+          </a:ln>
+        </p:spPr>
+      </p:pic>
+      <p:sp>
+        <p:nvSpPr>
+          <p:cNvPr id="43" name="TextBox 42">
+            <a:extLst>
+              <a:ext uri="{FF2B5EF4-FFF2-40B4-BE49-F238E27FC236}">
+                <a16:creationId xmlns:a16="http://schemas.microsoft.com/office/drawing/2014/main" id="{DE242BD1-E8F0-2635-BF7D-9643DA4A8844}"/>
+              </a:ext>
+            </a:extLst>
+          </p:cNvPr>
+          <p:cNvSpPr txBox="1"/>
+          <p:nvPr userDrawn="1"/>
+        </p:nvSpPr>
+        <p:spPr>
+          <a:xfrm>
+            <a:off x="7259158" y="4631751"/>
+            <a:ext cx="4797038" cy="369332"/>
+          </a:xfrm>
+          <a:prstGeom prst="rect">
+            <a:avLst/>
+          </a:prstGeom>
+          <a:noFill/>
+        </p:spPr>
+        <p:txBody>
+          <a:bodyPr wrap="square">
+            <a:spAutoFit/>
+          </a:bodyPr>
+          <a:lstStyle/>
+          <a:p>
+            <a:r>
+              <a:rPr lang="en-US" b="1">
+                <a:solidFill>
+                  <a:srgbClr val="101826"/>
+                </a:solidFill>
+              </a:rPr>
+              <a:t>Over 15 years of expertise in top 500 companies</a:t>
+            </a:r>
+            <a:endParaRPr lang="en-US"/>
+          </a:p>
+        </p:txBody>
+      </p:sp>
+      <p:pic>
+        <p:nvPicPr>
+          <p:cNvPr id="44" name="Graphic 43">
+            <a:extLst>
+              <a:ext uri="{FF2B5EF4-FFF2-40B4-BE49-F238E27FC236}">
+                <a16:creationId xmlns:a16="http://schemas.microsoft.com/office/drawing/2014/main" id="{B215E11D-C506-B6AF-57D4-6EDD9DBD59BE}"/>
+              </a:ext>
+            </a:extLst>
+          </p:cNvPr>
+          <p:cNvPicPr>
+            <a:picLocks noChangeAspect="1"/>
+          </p:cNvPicPr>
+          <p:nvPr userDrawn="1"/>
+        </p:nvPicPr>
+        <p:blipFill>
+          <a:blip r:embed="rId2">
+            <a:extLst>
+              <a:ext uri="{96DAC541-7B7A-43D3-8B79-37D633B846F1}">
+                <asvg:svgBlip xmlns:asvg="http://schemas.microsoft.com/office/drawing/2016/SVG/main" r:embed="rId3"/>
+              </a:ext>
+            </a:extLst>
+          </a:blip>
+          <a:stretch>
+            <a:fillRect/>
+          </a:stretch>
+        </p:blipFill>
+        <p:spPr>
+          <a:xfrm>
+            <a:off x="6339930" y="4570494"/>
+            <a:ext cx="506619" cy="506619"/>
+          </a:xfrm>
+          <a:prstGeom prst="rect">
+            <a:avLst/>
+          </a:prstGeom>
+        </p:spPr>
+      </p:pic>
+      <p:pic>
+        <p:nvPicPr>
+          <p:cNvPr id="45" name="Graphic 44">
+            <a:extLst>
+              <a:ext uri="{FF2B5EF4-FFF2-40B4-BE49-F238E27FC236}">
+                <a16:creationId xmlns:a16="http://schemas.microsoft.com/office/drawing/2014/main" id="{65D7D50D-033A-59ED-8EEA-390729267733}"/>
+              </a:ext>
+            </a:extLst>
+          </p:cNvPr>
+          <p:cNvPicPr>
+            <a:picLocks noChangeAspect="1"/>
+          </p:cNvPicPr>
+          <p:nvPr userDrawn="1"/>
+        </p:nvPicPr>
+        <p:blipFill>
+          <a:blip r:embed="rId18">
+            <a:extLst>
+              <a:ext uri="{96DAC541-7B7A-43D3-8B79-37D633B846F1}">
+                <asvg:svgBlip xmlns:asvg="http://schemas.microsoft.com/office/drawing/2016/SVG/main" r:embed="rId19"/>
+              </a:ext>
+            </a:extLst>
+          </a:blip>
+          <a:stretch>
+            <a:fillRect/>
+          </a:stretch>
+        </p:blipFill>
+        <p:spPr>
+          <a:xfrm>
+            <a:off x="6980926" y="4671079"/>
+            <a:ext cx="275608" cy="275608"/>
+          </a:xfrm>
+          <a:prstGeom prst="rect">
+            <a:avLst/>
+          </a:prstGeom>
+        </p:spPr>
+      </p:pic>
+      <p:pic>
+        <p:nvPicPr>
+          <p:cNvPr id="46" name="Graphic 45">
+            <a:extLst>
+              <a:ext uri="{FF2B5EF4-FFF2-40B4-BE49-F238E27FC236}">
+                <a16:creationId xmlns:a16="http://schemas.microsoft.com/office/drawing/2014/main" id="{3AFCA702-B7A3-1F38-1616-7308C99E9BDE}"/>
+              </a:ext>
+            </a:extLst>
+          </p:cNvPr>
+          <p:cNvPicPr>
+            <a:picLocks noChangeAspect="1"/>
+          </p:cNvPicPr>
+          <p:nvPr userDrawn="1"/>
+        </p:nvPicPr>
+        <p:blipFill>
+          <a:blip r:embed="rId20">
+            <a:extLst>
+              <a:ext uri="{96DAC541-7B7A-43D3-8B79-37D633B846F1}">
+                <asvg:svgBlip xmlns:asvg="http://schemas.microsoft.com/office/drawing/2016/SVG/main" r:embed="rId21"/>
+              </a:ext>
+            </a:extLst>
+          </a:blip>
+          <a:stretch>
+            <a:fillRect/>
+          </a:stretch>
+        </p:blipFill>
+        <p:spPr>
+          <a:xfrm>
+            <a:off x="981529" y="1333500"/>
+            <a:ext cx="359228" cy="373742"/>
+          </a:xfrm>
+          <a:prstGeom prst="rect">
+            <a:avLst/>
+          </a:prstGeom>
+        </p:spPr>
+      </p:pic>
     </p:spTree>
     <p:extLst>
       <p:ext uri="{BB962C8B-B14F-4D97-AF65-F5344CB8AC3E}">
-        <p14:creationId xmlns:p14="http://schemas.microsoft.com/office/powerpoint/2010/main" val="374089928"/>
+        <p14:creationId xmlns:p14="http://schemas.microsoft.com/office/powerpoint/2010/main" val="2955669845"/>
       </p:ext>
     </p:extLst>
   </p:cSld>
   <p:clrMapOvr>
     <a:masterClrMapping/>
   </p:clrMapOvr>
+  <p:extLst>
+    <p:ext uri="{DCECCB84-F9BA-43D5-87BE-67443E8EF086}">
+      <p15:sldGuideLst xmlns:p15="http://schemas.microsoft.com/office/powerpoint/2012/main">
+        <p15:guide id="1" orient="horz" pos="2160">
+          <p15:clr>
+            <a:srgbClr val="FBAE40"/>
+          </p15:clr>
+        </p15:guide>
+        <p15:guide id="2" pos="3840">
+          <p15:clr>
+            <a:srgbClr val="FBAE40"/>
+          </p15:clr>
+        </p15:guide>
+      </p15:sldGuideLst>
+    </p:ext>
+  </p:extLst>
 </p:sldLayout>
 </file>
 
@@ -1710,2010 +3516,6 @@
 
 <file path=ppt/slideLayouts/slideLayout3.xml><?xml version="1.0" encoding="utf-8"?>
 <p:sldLayout xmlns:a="http://schemas.openxmlformats.org/drawingml/2006/main" xmlns:r="http://schemas.openxmlformats.org/officeDocument/2006/relationships" xmlns:p="http://schemas.openxmlformats.org/presentationml/2006/main" preserve="1" userDrawn="1">
-  <p:cSld name="why_ekona_slide Should be used as a slide after the title">
-    <p:spTree>
-      <p:nvGrpSpPr>
-        <p:cNvPr id="1" name=""/>
-        <p:cNvGrpSpPr/>
-        <p:nvPr/>
-      </p:nvGrpSpPr>
-      <p:grpSpPr>
-        <a:xfrm>
-          <a:off x="0" y="0"/>
-          <a:ext cx="0" cy="0"/>
-          <a:chOff x="0" y="0"/>
-          <a:chExt cx="0" cy="0"/>
-        </a:xfrm>
-      </p:grpSpPr>
-      <p:pic>
-        <p:nvPicPr>
-          <p:cNvPr id="4" name="Picture 3" descr="A snowy mountain tops with clouds in the background&#10;&#10;AI-generated content may be incorrect.">
-            <a:extLst>
-              <a:ext uri="{FF2B5EF4-FFF2-40B4-BE49-F238E27FC236}">
-                <a16:creationId xmlns:a16="http://schemas.microsoft.com/office/drawing/2014/main" id="{E92912F8-6299-B5F5-C99C-1BF14D2F0334}"/>
-              </a:ext>
-            </a:extLst>
-          </p:cNvPr>
-          <p:cNvPicPr>
-            <a:picLocks noGrp="1" noRot="1" noChangeAspect="1" noMove="1" noResize="1" noEditPoints="1" noAdjustHandles="1" noChangeArrowheads="1" noChangeShapeType="1" noCrop="1"/>
-          </p:cNvPicPr>
-          <p:nvPr userDrawn="1"/>
-        </p:nvPicPr>
-        <p:blipFill>
-          <a:blip r:embed="rId2">
-            <a:duotone>
-              <a:schemeClr val="bg2">
-                <a:shade val="45000"/>
-                <a:satMod val="135000"/>
-              </a:schemeClr>
-              <a:prstClr val="white"/>
-            </a:duotone>
-            <a:alphaModFix amt="35000"/>
-            <a:extLst>
-              <a:ext uri="{BEBA8EAE-BF5A-486C-A8C5-ECC9F3942E4B}">
-                <a14:imgProps xmlns:a14="http://schemas.microsoft.com/office/drawing/2010/main">
-                  <a14:imgLayer r:embed="rId3">
-                    <a14:imgEffect>
-                      <a14:saturation sat="0"/>
-                    </a14:imgEffect>
-                  </a14:imgLayer>
-                </a14:imgProps>
-              </a:ext>
-              <a:ext uri="{28A0092B-C50C-407E-A947-70E740481C1C}">
-                <a14:useLocalDpi xmlns:a14="http://schemas.microsoft.com/office/drawing/2010/main" val="0"/>
-              </a:ext>
-            </a:extLst>
-          </a:blip>
-          <a:srcRect b="9610"/>
-          <a:stretch/>
-        </p:blipFill>
-        <p:spPr>
-          <a:xfrm>
-            <a:off x="0" y="0"/>
-            <a:ext cx="12192000" cy="6246421"/>
-          </a:xfrm>
-          <a:prstGeom prst="rect">
-            <a:avLst/>
-          </a:prstGeom>
-        </p:spPr>
-      </p:pic>
-      <p:sp>
-        <p:nvSpPr>
-          <p:cNvPr id="2" name="Rounded Rectangle 1">
-            <a:extLst>
-              <a:ext uri="{FF2B5EF4-FFF2-40B4-BE49-F238E27FC236}">
-                <a16:creationId xmlns:a16="http://schemas.microsoft.com/office/drawing/2014/main" id="{6372FCEB-FEC1-18CC-54A6-09739A289B26}"/>
-              </a:ext>
-            </a:extLst>
-          </p:cNvPr>
-          <p:cNvSpPr/>
-          <p:nvPr userDrawn="1"/>
-        </p:nvSpPr>
-        <p:spPr>
-          <a:xfrm>
-            <a:off x="7855153" y="2401368"/>
-            <a:ext cx="3878223" cy="2385232"/>
-          </a:xfrm>
-          <a:prstGeom prst="roundRect">
-            <a:avLst>
-              <a:gd name="adj" fmla="val 4127"/>
-            </a:avLst>
-          </a:prstGeom>
-          <a:solidFill>
-            <a:schemeClr val="bg1">
-              <a:lumMod val="85000"/>
-              <a:alpha val="13425"/>
-            </a:schemeClr>
-          </a:solidFill>
-          <a:ln>
-            <a:noFill/>
-          </a:ln>
-          <a:effectLst>
-            <a:innerShdw blurRad="63500" dist="50800" dir="13500000">
-              <a:prstClr val="black">
-                <a:alpha val="50000"/>
-              </a:prstClr>
-            </a:innerShdw>
-          </a:effectLst>
-        </p:spPr>
-        <p:style>
-          <a:lnRef idx="2">
-            <a:schemeClr val="accent1">
-              <a:shade val="15000"/>
-            </a:schemeClr>
-          </a:lnRef>
-          <a:fillRef idx="1">
-            <a:schemeClr val="accent1"/>
-          </a:fillRef>
-          <a:effectRef idx="0">
-            <a:schemeClr val="accent1"/>
-          </a:effectRef>
-          <a:fontRef idx="minor">
-            <a:schemeClr val="lt1"/>
-          </a:fontRef>
-        </p:style>
-        <p:txBody>
-          <a:bodyPr rtlCol="0" anchor="ctr"/>
-          <a:lstStyle/>
-          <a:p>
-            <a:pPr algn="ctr"/>
-            <a:endParaRPr lang="en-US"/>
-          </a:p>
-        </p:txBody>
-      </p:sp>
-      <p:pic>
-        <p:nvPicPr>
-          <p:cNvPr id="3" name="Picture 2" descr="A black and white logo&#10;&#10;AI-generated content may be incorrect.">
-            <a:extLst>
-              <a:ext uri="{FF2B5EF4-FFF2-40B4-BE49-F238E27FC236}">
-                <a16:creationId xmlns:a16="http://schemas.microsoft.com/office/drawing/2014/main" id="{2CB979AF-52B6-8198-E16B-E489C26655CC}"/>
-              </a:ext>
-            </a:extLst>
-          </p:cNvPr>
-          <p:cNvPicPr>
-            <a:picLocks noChangeAspect="1"/>
-          </p:cNvPicPr>
-          <p:nvPr userDrawn="1"/>
-        </p:nvPicPr>
-        <p:blipFill>
-          <a:blip r:embed="rId4">
-            <a:extLst>
-              <a:ext uri="{28A0092B-C50C-407E-A947-70E740481C1C}">
-                <a14:useLocalDpi xmlns:a14="http://schemas.microsoft.com/office/drawing/2010/main" val="0"/>
-              </a:ext>
-            </a:extLst>
-          </a:blip>
-          <a:stretch>
-            <a:fillRect/>
-          </a:stretch>
-        </p:blipFill>
-        <p:spPr>
-          <a:xfrm>
-            <a:off x="614681" y="420826"/>
-            <a:ext cx="2062951" cy="873084"/>
-          </a:xfrm>
-          <a:prstGeom prst="rect">
-            <a:avLst/>
-          </a:prstGeom>
-        </p:spPr>
-      </p:pic>
-      <p:sp>
-        <p:nvSpPr>
-          <p:cNvPr id="5" name="TextBox 4">
-            <a:extLst>
-              <a:ext uri="{FF2B5EF4-FFF2-40B4-BE49-F238E27FC236}">
-                <a16:creationId xmlns:a16="http://schemas.microsoft.com/office/drawing/2014/main" id="{24B54DAF-BA2D-A789-444C-FA860250E4C4}"/>
-              </a:ext>
-            </a:extLst>
-          </p:cNvPr>
-          <p:cNvSpPr txBox="1"/>
-          <p:nvPr userDrawn="1"/>
-        </p:nvSpPr>
-        <p:spPr>
-          <a:xfrm>
-            <a:off x="537678" y="1243124"/>
-            <a:ext cx="7865177" cy="1077218"/>
-          </a:xfrm>
-          <a:prstGeom prst="rect">
-            <a:avLst/>
-          </a:prstGeom>
-          <a:noFill/>
-        </p:spPr>
-        <p:txBody>
-          <a:bodyPr wrap="square">
-            <a:spAutoFit/>
-          </a:bodyPr>
-          <a:lstStyle/>
-          <a:p>
-            <a:r>
-              <a:rPr lang="en-US" sz="4000" b="1">
-                <a:solidFill>
-                  <a:schemeClr val="tx1">
-                    <a:lumMod val="75000"/>
-                    <a:lumOff val="25000"/>
-                  </a:schemeClr>
-                </a:solidFill>
-                <a:latin typeface="Calibri" panose="020F0502020204030204" pitchFamily="34" charset="0"/>
-                <a:cs typeface="Calibri" panose="020F0502020204030204" pitchFamily="34" charset="0"/>
-              </a:rPr>
-              <a:t>WE BUILD YOUR AI</a:t>
-            </a:r>
-          </a:p>
-          <a:p>
-            <a:r>
-              <a:rPr lang="en-US" sz="2400">
-                <a:solidFill>
-                  <a:srgbClr val="101826"/>
-                </a:solidFill>
-                <a:cs typeface="Arial" panose="020B0604020202020204" pitchFamily="34" charset="0"/>
-              </a:rPr>
-              <a:t>They deliver results you can trust.</a:t>
-            </a:r>
-            <a:endParaRPr lang="en-US" sz="2400">
-              <a:solidFill>
-                <a:srgbClr val="101826"/>
-              </a:solidFill>
-            </a:endParaRPr>
-          </a:p>
-        </p:txBody>
-      </p:sp>
-      <p:sp>
-        <p:nvSpPr>
-          <p:cNvPr id="6" name="Rectangle 5">
-            <a:extLst>
-              <a:ext uri="{FF2B5EF4-FFF2-40B4-BE49-F238E27FC236}">
-                <a16:creationId xmlns:a16="http://schemas.microsoft.com/office/drawing/2014/main" id="{F8EBCBDC-7DC7-57A3-68F3-C1F199D1F242}"/>
-              </a:ext>
-            </a:extLst>
-          </p:cNvPr>
-          <p:cNvSpPr/>
-          <p:nvPr userDrawn="1"/>
-        </p:nvSpPr>
-        <p:spPr>
-          <a:xfrm>
-            <a:off x="1244178" y="2854019"/>
-            <a:ext cx="5892445" cy="721963"/>
-          </a:xfrm>
-          <a:prstGeom prst="rect">
-            <a:avLst/>
-          </a:prstGeom>
-          <a:noFill/>
-          <a:ln>
-            <a:noFill/>
-          </a:ln>
-        </p:spPr>
-        <p:style>
-          <a:lnRef idx="2">
-            <a:schemeClr val="accent1">
-              <a:shade val="15000"/>
-            </a:schemeClr>
-          </a:lnRef>
-          <a:fillRef idx="1">
-            <a:schemeClr val="accent1"/>
-          </a:fillRef>
-          <a:effectRef idx="0">
-            <a:schemeClr val="accent1"/>
-          </a:effectRef>
-          <a:fontRef idx="minor">
-            <a:schemeClr val="lt1"/>
-          </a:fontRef>
-        </p:style>
-        <p:txBody>
-          <a:bodyPr rtlCol="0" anchor="ctr"/>
-          <a:lstStyle/>
-          <a:p>
-            <a:r>
-              <a:rPr lang="en-US" sz="1400">
-                <a:solidFill>
-                  <a:schemeClr val="tx1">
-                    <a:lumMod val="85000"/>
-                    <a:lumOff val="15000"/>
-                  </a:schemeClr>
-                </a:solidFill>
-              </a:rPr>
-              <a:t>We architect and implement AI systems where specialized agents collaborate to tackle complex, real‑world workflows end‑to‑end.</a:t>
-            </a:r>
-          </a:p>
-        </p:txBody>
-      </p:sp>
-      <p:sp>
-        <p:nvSpPr>
-          <p:cNvPr id="7" name="TextBox 6">
-            <a:extLst>
-              <a:ext uri="{FF2B5EF4-FFF2-40B4-BE49-F238E27FC236}">
-                <a16:creationId xmlns:a16="http://schemas.microsoft.com/office/drawing/2014/main" id="{A0172EA7-EE16-8BF8-D83B-8289FF215701}"/>
-              </a:ext>
-            </a:extLst>
-          </p:cNvPr>
-          <p:cNvSpPr txBox="1"/>
-          <p:nvPr userDrawn="1"/>
-        </p:nvSpPr>
-        <p:spPr>
-          <a:xfrm>
-            <a:off x="1244178" y="2562020"/>
-            <a:ext cx="3220129" cy="400110"/>
-          </a:xfrm>
-          <a:prstGeom prst="rect">
-            <a:avLst/>
-          </a:prstGeom>
-          <a:noFill/>
-        </p:spPr>
-        <p:txBody>
-          <a:bodyPr wrap="square">
-            <a:spAutoFit/>
-          </a:bodyPr>
-          <a:lstStyle/>
-          <a:p>
-            <a:r>
-              <a:rPr lang="en-US" sz="2000" b="1">
-                <a:solidFill>
-                  <a:srgbClr val="DD2525"/>
-                </a:solidFill>
-                <a:cs typeface="Arial" panose="020B0604020202020204" pitchFamily="34" charset="0"/>
-              </a:rPr>
-              <a:t>AI MULTI-AGENTS</a:t>
-            </a:r>
-            <a:endParaRPr lang="en-US" sz="2000" b="1">
-              <a:solidFill>
-                <a:srgbClr val="DD2525"/>
-              </a:solidFill>
-            </a:endParaRPr>
-          </a:p>
-        </p:txBody>
-      </p:sp>
-      <p:sp>
-        <p:nvSpPr>
-          <p:cNvPr id="8" name="Rectangle 7">
-            <a:extLst>
-              <a:ext uri="{FF2B5EF4-FFF2-40B4-BE49-F238E27FC236}">
-                <a16:creationId xmlns:a16="http://schemas.microsoft.com/office/drawing/2014/main" id="{E4E97082-EE78-4A4A-9BA5-90CC786B29DF}"/>
-              </a:ext>
-            </a:extLst>
-          </p:cNvPr>
-          <p:cNvSpPr/>
-          <p:nvPr userDrawn="1"/>
-        </p:nvSpPr>
-        <p:spPr>
-          <a:xfrm>
-            <a:off x="1244178" y="4064637"/>
-            <a:ext cx="5892445" cy="721963"/>
-          </a:xfrm>
-          <a:prstGeom prst="rect">
-            <a:avLst/>
-          </a:prstGeom>
-          <a:noFill/>
-          <a:ln>
-            <a:noFill/>
-          </a:ln>
-        </p:spPr>
-        <p:style>
-          <a:lnRef idx="2">
-            <a:schemeClr val="accent1">
-              <a:shade val="15000"/>
-            </a:schemeClr>
-          </a:lnRef>
-          <a:fillRef idx="1">
-            <a:schemeClr val="accent1"/>
-          </a:fillRef>
-          <a:effectRef idx="0">
-            <a:schemeClr val="accent1"/>
-          </a:effectRef>
-          <a:fontRef idx="minor">
-            <a:schemeClr val="lt1"/>
-          </a:fontRef>
-        </p:style>
-        <p:txBody>
-          <a:bodyPr rtlCol="0" anchor="ctr"/>
-          <a:lstStyle/>
-          <a:p>
-            <a:r>
-              <a:rPr lang="en-US" sz="1400">
-                <a:solidFill>
-                  <a:schemeClr val="tx1">
-                    <a:lumMod val="85000"/>
-                    <a:lumOff val="15000"/>
-                  </a:schemeClr>
-                </a:solidFill>
-              </a:rPr>
-              <a:t>We automate your systems from reproducible experimentation to continuous testing, ensuring your models &amp; Agents stay performant, monitored and compliant in production.</a:t>
-            </a:r>
-          </a:p>
-        </p:txBody>
-      </p:sp>
-      <p:sp>
-        <p:nvSpPr>
-          <p:cNvPr id="9" name="TextBox 8">
-            <a:extLst>
-              <a:ext uri="{FF2B5EF4-FFF2-40B4-BE49-F238E27FC236}">
-                <a16:creationId xmlns:a16="http://schemas.microsoft.com/office/drawing/2014/main" id="{2FAD454B-708B-C32D-9945-96B09BE516CA}"/>
-              </a:ext>
-            </a:extLst>
-          </p:cNvPr>
-          <p:cNvSpPr txBox="1"/>
-          <p:nvPr userDrawn="1"/>
-        </p:nvSpPr>
-        <p:spPr>
-          <a:xfrm>
-            <a:off x="1244178" y="3664527"/>
-            <a:ext cx="3220129" cy="400110"/>
-          </a:xfrm>
-          <a:prstGeom prst="rect">
-            <a:avLst/>
-          </a:prstGeom>
-          <a:noFill/>
-        </p:spPr>
-        <p:txBody>
-          <a:bodyPr wrap="square">
-            <a:spAutoFit/>
-          </a:bodyPr>
-          <a:lstStyle/>
-          <a:p>
-            <a:r>
-              <a:rPr lang="en-US" sz="2000" b="1">
-                <a:solidFill>
-                  <a:srgbClr val="DD2525"/>
-                </a:solidFill>
-                <a:cs typeface="Arial" panose="020B0604020202020204" pitchFamily="34" charset="0"/>
-              </a:rPr>
-              <a:t>AI &amp; ML Infrastructure</a:t>
-            </a:r>
-            <a:endParaRPr lang="en-US" sz="2000" b="1">
-              <a:solidFill>
-                <a:srgbClr val="DD2525"/>
-              </a:solidFill>
-            </a:endParaRPr>
-          </a:p>
-        </p:txBody>
-      </p:sp>
-      <p:sp>
-        <p:nvSpPr>
-          <p:cNvPr id="10" name="Rectangle 9">
-            <a:extLst>
-              <a:ext uri="{FF2B5EF4-FFF2-40B4-BE49-F238E27FC236}">
-                <a16:creationId xmlns:a16="http://schemas.microsoft.com/office/drawing/2014/main" id="{2D2DA866-5869-7DF3-B720-22AF42CEED04}"/>
-              </a:ext>
-            </a:extLst>
-          </p:cNvPr>
-          <p:cNvSpPr/>
-          <p:nvPr userDrawn="1"/>
-        </p:nvSpPr>
-        <p:spPr>
-          <a:xfrm>
-            <a:off x="1244178" y="5274423"/>
-            <a:ext cx="5892445" cy="721963"/>
-          </a:xfrm>
-          <a:prstGeom prst="rect">
-            <a:avLst/>
-          </a:prstGeom>
-          <a:noFill/>
-          <a:ln>
-            <a:noFill/>
-          </a:ln>
-        </p:spPr>
-        <p:style>
-          <a:lnRef idx="2">
-            <a:schemeClr val="accent1">
-              <a:shade val="15000"/>
-            </a:schemeClr>
-          </a:lnRef>
-          <a:fillRef idx="1">
-            <a:schemeClr val="accent1"/>
-          </a:fillRef>
-          <a:effectRef idx="0">
-            <a:schemeClr val="accent1"/>
-          </a:effectRef>
-          <a:fontRef idx="minor">
-            <a:schemeClr val="lt1"/>
-          </a:fontRef>
-        </p:style>
-        <p:txBody>
-          <a:bodyPr rtlCol="0" anchor="ctr"/>
-          <a:lstStyle/>
-          <a:p>
-            <a:r>
-              <a:rPr lang="en-US" sz="1400">
-                <a:solidFill>
-                  <a:schemeClr val="tx1">
-                    <a:lumMod val="85000"/>
-                    <a:lumOff val="15000"/>
-                  </a:schemeClr>
-                </a:solidFill>
-              </a:rPr>
-              <a:t>We translate technical capability into business value, build roadmaps, ROI evaluation, and risk‑aware governance frameworks that align multi‑agent solutions with your organization’s goals.</a:t>
-            </a:r>
-          </a:p>
-        </p:txBody>
-      </p:sp>
-      <p:sp>
-        <p:nvSpPr>
-          <p:cNvPr id="11" name="TextBox 10">
-            <a:extLst>
-              <a:ext uri="{FF2B5EF4-FFF2-40B4-BE49-F238E27FC236}">
-                <a16:creationId xmlns:a16="http://schemas.microsoft.com/office/drawing/2014/main" id="{FDDBB755-0FD4-D1C9-DC17-4BA387134BBB}"/>
-              </a:ext>
-            </a:extLst>
-          </p:cNvPr>
-          <p:cNvSpPr txBox="1"/>
-          <p:nvPr userDrawn="1"/>
-        </p:nvSpPr>
-        <p:spPr>
-          <a:xfrm>
-            <a:off x="1244178" y="4874313"/>
-            <a:ext cx="3220129" cy="400110"/>
-          </a:xfrm>
-          <a:prstGeom prst="rect">
-            <a:avLst/>
-          </a:prstGeom>
-          <a:noFill/>
-        </p:spPr>
-        <p:txBody>
-          <a:bodyPr wrap="square">
-            <a:spAutoFit/>
-          </a:bodyPr>
-          <a:lstStyle/>
-          <a:p>
-            <a:r>
-              <a:rPr lang="en-US" sz="2000" b="1">
-                <a:solidFill>
-                  <a:srgbClr val="DD2525"/>
-                </a:solidFill>
-                <a:cs typeface="Arial" panose="020B0604020202020204" pitchFamily="34" charset="0"/>
-              </a:rPr>
-              <a:t>AI STRATEGY</a:t>
-            </a:r>
-            <a:endParaRPr lang="en-US" sz="2000" b="1">
-              <a:solidFill>
-                <a:srgbClr val="DD2525"/>
-              </a:solidFill>
-            </a:endParaRPr>
-          </a:p>
-        </p:txBody>
-      </p:sp>
-      <p:sp>
-        <p:nvSpPr>
-          <p:cNvPr id="12" name="TextBox 11">
-            <a:extLst>
-              <a:ext uri="{FF2B5EF4-FFF2-40B4-BE49-F238E27FC236}">
-                <a16:creationId xmlns:a16="http://schemas.microsoft.com/office/drawing/2014/main" id="{EFC724FB-B7D0-20F8-923C-E4CD8D9194CA}"/>
-              </a:ext>
-            </a:extLst>
-          </p:cNvPr>
-          <p:cNvSpPr txBox="1"/>
-          <p:nvPr userDrawn="1"/>
-        </p:nvSpPr>
-        <p:spPr>
-          <a:xfrm>
-            <a:off x="7944857" y="2525381"/>
-            <a:ext cx="3788519" cy="1569660"/>
-          </a:xfrm>
-          <a:prstGeom prst="rect">
-            <a:avLst/>
-          </a:prstGeom>
-          <a:noFill/>
-        </p:spPr>
-        <p:txBody>
-          <a:bodyPr wrap="square">
-            <a:spAutoFit/>
-          </a:bodyPr>
-          <a:lstStyle/>
-          <a:p>
-            <a:pPr algn="ctr"/>
-            <a:r>
-              <a:rPr lang="en-US" sz="2400" b="1" i="0">
-                <a:solidFill>
-                  <a:schemeClr val="tx1">
-                    <a:lumMod val="75000"/>
-                    <a:lumOff val="25000"/>
-                  </a:schemeClr>
-                </a:solidFill>
-                <a:effectLst/>
-                <a:cs typeface="Arial" panose="020B0604020202020204" pitchFamily="34" charset="0"/>
-              </a:rPr>
-              <a:t>WE PARTNER WITH CLIENTS FROM LARGE ORGANIZATIONS TO STARTUPS</a:t>
-            </a:r>
-          </a:p>
-        </p:txBody>
-      </p:sp>
-      <p:pic>
-        <p:nvPicPr>
-          <p:cNvPr id="14" name="Graphic 13" descr="Anger Symbol with solid fill">
-            <a:extLst>
-              <a:ext uri="{FF2B5EF4-FFF2-40B4-BE49-F238E27FC236}">
-                <a16:creationId xmlns:a16="http://schemas.microsoft.com/office/drawing/2014/main" id="{981C10B9-9817-EB54-2841-E3C1D957E143}"/>
-              </a:ext>
-            </a:extLst>
-          </p:cNvPr>
-          <p:cNvPicPr>
-            <a:picLocks noChangeAspect="1"/>
-          </p:cNvPicPr>
-          <p:nvPr userDrawn="1"/>
-        </p:nvPicPr>
-        <p:blipFill>
-          <a:blip r:embed="rId5">
-            <a:extLst>
-              <a:ext uri="{96DAC541-7B7A-43D3-8B79-37D633B846F1}">
-                <asvg:svgBlip xmlns:asvg="http://schemas.microsoft.com/office/drawing/2016/SVG/main" r:embed="rId6"/>
-              </a:ext>
-            </a:extLst>
-          </a:blip>
-          <a:stretch>
-            <a:fillRect/>
-          </a:stretch>
-        </p:blipFill>
-        <p:spPr>
-          <a:xfrm>
-            <a:off x="9454583" y="3953226"/>
-            <a:ext cx="914400" cy="914400"/>
-          </a:xfrm>
-          <a:prstGeom prst="rect">
-            <a:avLst/>
-          </a:prstGeom>
-          <a:effectLst>
-            <a:reflection blurRad="6350" stA="52000" endA="300" endPos="35000" dir="5400000" sy="-100000" algn="bl" rotWithShape="0"/>
-          </a:effectLst>
-        </p:spPr>
-      </p:pic>
-      <p:pic>
-        <p:nvPicPr>
-          <p:cNvPr id="15" name="Graphic 14">
-            <a:extLst>
-              <a:ext uri="{FF2B5EF4-FFF2-40B4-BE49-F238E27FC236}">
-                <a16:creationId xmlns:a16="http://schemas.microsoft.com/office/drawing/2014/main" id="{A4B69331-9158-072D-86DF-19E93D7C2AE4}"/>
-              </a:ext>
-            </a:extLst>
-          </p:cNvPr>
-          <p:cNvPicPr>
-            <a:picLocks noChangeAspect="1"/>
-          </p:cNvPicPr>
-          <p:nvPr userDrawn="1"/>
-        </p:nvPicPr>
-        <p:blipFill>
-          <a:blip r:embed="rId7">
-            <a:extLst>
-              <a:ext uri="{96DAC541-7B7A-43D3-8B79-37D633B846F1}">
-                <asvg:svgBlip xmlns:asvg="http://schemas.microsoft.com/office/drawing/2016/SVG/main" r:embed="rId8"/>
-              </a:ext>
-            </a:extLst>
-          </a:blip>
-          <a:stretch>
-            <a:fillRect/>
-          </a:stretch>
-        </p:blipFill>
-        <p:spPr>
-          <a:xfrm>
-            <a:off x="576293" y="2597291"/>
-            <a:ext cx="513455" cy="513455"/>
-          </a:xfrm>
-          <a:prstGeom prst="rect">
-            <a:avLst/>
-          </a:prstGeom>
-        </p:spPr>
-      </p:pic>
-      <p:pic>
-        <p:nvPicPr>
-          <p:cNvPr id="16" name="Graphic 15">
-            <a:extLst>
-              <a:ext uri="{FF2B5EF4-FFF2-40B4-BE49-F238E27FC236}">
-                <a16:creationId xmlns:a16="http://schemas.microsoft.com/office/drawing/2014/main" id="{CA1A46BA-E73A-FB0F-6C12-2862B3B16A45}"/>
-              </a:ext>
-            </a:extLst>
-          </p:cNvPr>
-          <p:cNvPicPr>
-            <a:picLocks noChangeAspect="1"/>
-          </p:cNvPicPr>
-          <p:nvPr userDrawn="1"/>
-        </p:nvPicPr>
-        <p:blipFill>
-          <a:blip r:embed="rId9">
-            <a:extLst>
-              <a:ext uri="{96DAC541-7B7A-43D3-8B79-37D633B846F1}">
-                <asvg:svgBlip xmlns:asvg="http://schemas.microsoft.com/office/drawing/2016/SVG/main" r:embed="rId10"/>
-              </a:ext>
-            </a:extLst>
-          </a:blip>
-          <a:stretch>
-            <a:fillRect/>
-          </a:stretch>
-        </p:blipFill>
-        <p:spPr>
-          <a:xfrm>
-            <a:off x="576292" y="3747255"/>
-            <a:ext cx="513455" cy="513455"/>
-          </a:xfrm>
-          <a:prstGeom prst="rect">
-            <a:avLst/>
-          </a:prstGeom>
-        </p:spPr>
-      </p:pic>
-      <p:pic>
-        <p:nvPicPr>
-          <p:cNvPr id="17" name="Graphic 16">
-            <a:extLst>
-              <a:ext uri="{FF2B5EF4-FFF2-40B4-BE49-F238E27FC236}">
-                <a16:creationId xmlns:a16="http://schemas.microsoft.com/office/drawing/2014/main" id="{50EBEA3C-7EFB-46CC-7FFC-F871C4B12FA2}"/>
-              </a:ext>
-            </a:extLst>
-          </p:cNvPr>
-          <p:cNvPicPr>
-            <a:picLocks noChangeAspect="1"/>
-          </p:cNvPicPr>
-          <p:nvPr userDrawn="1"/>
-        </p:nvPicPr>
-        <p:blipFill>
-          <a:blip r:embed="rId11">
-            <a:extLst>
-              <a:ext uri="{96DAC541-7B7A-43D3-8B79-37D633B846F1}">
-                <asvg:svgBlip xmlns:asvg="http://schemas.microsoft.com/office/drawing/2016/SVG/main" r:embed="rId12"/>
-              </a:ext>
-            </a:extLst>
-          </a:blip>
-          <a:stretch>
-            <a:fillRect/>
-          </a:stretch>
-        </p:blipFill>
-        <p:spPr>
-          <a:xfrm>
-            <a:off x="576292" y="4948495"/>
-            <a:ext cx="513455" cy="513455"/>
-          </a:xfrm>
-          <a:prstGeom prst="rect">
-            <a:avLst/>
-          </a:prstGeom>
-        </p:spPr>
-      </p:pic>
-    </p:spTree>
-    <p:extLst>
-      <p:ext uri="{BB962C8B-B14F-4D97-AF65-F5344CB8AC3E}">
-        <p14:creationId xmlns:p14="http://schemas.microsoft.com/office/powerpoint/2010/main" val="3393990456"/>
-      </p:ext>
-    </p:extLst>
-  </p:cSld>
-  <p:clrMapOvr>
-    <a:masterClrMapping/>
-  </p:clrMapOvr>
-  <p:extLst>
-    <p:ext uri="{DCECCB84-F9BA-43D5-87BE-67443E8EF086}">
-      <p15:sldGuideLst xmlns:p15="http://schemas.microsoft.com/office/powerpoint/2012/main">
-        <p15:guide id="1" orient="horz" pos="2160">
-          <p15:clr>
-            <a:srgbClr val="FBAE40"/>
-          </p15:clr>
-        </p15:guide>
-        <p15:guide id="2" pos="3840">
-          <p15:clr>
-            <a:srgbClr val="FBAE40"/>
-          </p15:clr>
-        </p15:guide>
-      </p15:sldGuideLst>
-    </p:ext>
-  </p:extLst>
-</p:sldLayout>
-</file>
-
-<file path=ppt/slideLayouts/slideLayout4.xml><?xml version="1.0" encoding="utf-8"?>
-<p:sldLayout xmlns:a="http://schemas.openxmlformats.org/drawingml/2006/main" xmlns:r="http://schemas.openxmlformats.org/officeDocument/2006/relationships" xmlns:p="http://schemas.openxmlformats.org/presentationml/2006/main" preserve="1" userDrawn="1">
-  <p:cSld name="why_ekona_slide_2 - Should be used as a slide after the first why ekona slide">
-    <p:spTree>
-      <p:nvGrpSpPr>
-        <p:cNvPr id="1" name=""/>
-        <p:cNvGrpSpPr/>
-        <p:nvPr/>
-      </p:nvGrpSpPr>
-      <p:grpSpPr>
-        <a:xfrm>
-          <a:off x="0" y="0"/>
-          <a:ext cx="0" cy="0"/>
-          <a:chOff x="0" y="0"/>
-          <a:chExt cx="0" cy="0"/>
-        </a:xfrm>
-      </p:grpSpPr>
-      <p:sp>
-        <p:nvSpPr>
-          <p:cNvPr id="13" name="TextBox 12">
-            <a:extLst>
-              <a:ext uri="{FF2B5EF4-FFF2-40B4-BE49-F238E27FC236}">
-                <a16:creationId xmlns:a16="http://schemas.microsoft.com/office/drawing/2014/main" id="{49D92DF9-4B98-A01C-A7B1-352C8B146E6F}"/>
-              </a:ext>
-            </a:extLst>
-          </p:cNvPr>
-          <p:cNvSpPr txBox="1"/>
-          <p:nvPr userDrawn="1"/>
-        </p:nvSpPr>
-        <p:spPr>
-          <a:xfrm>
-            <a:off x="398954" y="385127"/>
-            <a:ext cx="11445516" cy="646331"/>
-          </a:xfrm>
-          <a:prstGeom prst="rect">
-            <a:avLst/>
-          </a:prstGeom>
-          <a:noFill/>
-        </p:spPr>
-        <p:txBody>
-          <a:bodyPr wrap="square" lIns="91440" tIns="45720" rIns="91440" bIns="45720" rtlCol="0" anchor="t">
-            <a:spAutoFit/>
-          </a:bodyPr>
-          <a:lstStyle/>
-          <a:p>
-            <a:pPr algn="ctr"/>
-            <a:r>
-              <a:rPr lang="en-US" sz="3600" b="1" dirty="0"/>
-              <a:t>Why ekona</a:t>
-            </a:r>
-            <a:endParaRPr lang="en-US" sz="3600" dirty="0"/>
-          </a:p>
-        </p:txBody>
-      </p:sp>
-      <p:sp>
-        <p:nvSpPr>
-          <p:cNvPr id="18" name="TextBox 17">
-            <a:extLst>
-              <a:ext uri="{FF2B5EF4-FFF2-40B4-BE49-F238E27FC236}">
-                <a16:creationId xmlns:a16="http://schemas.microsoft.com/office/drawing/2014/main" id="{3D76CCEB-1818-1860-AAF8-7A1CA815CF36}"/>
-              </a:ext>
-            </a:extLst>
-          </p:cNvPr>
-          <p:cNvSpPr txBox="1"/>
-          <p:nvPr userDrawn="1"/>
-        </p:nvSpPr>
-        <p:spPr>
-          <a:xfrm>
-            <a:off x="1318169" y="1337258"/>
-            <a:ext cx="6152972" cy="369332"/>
-          </a:xfrm>
-          <a:prstGeom prst="rect">
-            <a:avLst/>
-          </a:prstGeom>
-          <a:noFill/>
-        </p:spPr>
-        <p:txBody>
-          <a:bodyPr wrap="square" lIns="91440" tIns="45720" rIns="91440" bIns="45720" anchor="t">
-            <a:spAutoFit/>
-          </a:bodyPr>
-          <a:lstStyle/>
-          <a:p>
-            <a:r>
-              <a:rPr lang="en-US" b="1" i="0" dirty="0">
-                <a:solidFill>
-                  <a:srgbClr val="262626"/>
-                </a:solidFill>
-                <a:effectLst/>
-                <a:latin typeface="Calibri"/>
-                <a:ea typeface="Calibri"/>
-                <a:cs typeface="Calibri"/>
-              </a:rPr>
-              <a:t>Deep</a:t>
-            </a:r>
-            <a:r>
-              <a:rPr lang="en-US" b="1" dirty="0">
-                <a:solidFill>
-                  <a:srgbClr val="262626"/>
-                </a:solidFill>
-                <a:latin typeface="Calibri"/>
-                <a:ea typeface="Calibri"/>
-                <a:cs typeface="Calibri"/>
-              </a:rPr>
-              <a:t> </a:t>
-            </a:r>
-            <a:r>
-              <a:rPr lang="en-US" b="1" i="0" dirty="0">
-                <a:solidFill>
-                  <a:srgbClr val="262626"/>
-                </a:solidFill>
-                <a:effectLst/>
-                <a:latin typeface="Calibri"/>
-                <a:ea typeface="Calibri"/>
-                <a:cs typeface="Calibri"/>
-              </a:rPr>
-              <a:t> Expertise</a:t>
-            </a:r>
-          </a:p>
-        </p:txBody>
-      </p:sp>
-      <p:sp>
-        <p:nvSpPr>
-          <p:cNvPr id="19" name="TextBox 18">
-            <a:extLst>
-              <a:ext uri="{FF2B5EF4-FFF2-40B4-BE49-F238E27FC236}">
-                <a16:creationId xmlns:a16="http://schemas.microsoft.com/office/drawing/2014/main" id="{0BCF71B3-5882-0ACA-8F0C-E597CF37495F}"/>
-              </a:ext>
-            </a:extLst>
-          </p:cNvPr>
-          <p:cNvSpPr txBox="1"/>
-          <p:nvPr userDrawn="1"/>
-        </p:nvSpPr>
-        <p:spPr>
-          <a:xfrm>
-            <a:off x="1318169" y="2951486"/>
-            <a:ext cx="6152972" cy="369332"/>
-          </a:xfrm>
-          <a:prstGeom prst="rect">
-            <a:avLst/>
-          </a:prstGeom>
-          <a:noFill/>
-        </p:spPr>
-        <p:txBody>
-          <a:bodyPr wrap="square" lIns="91440" tIns="45720" rIns="91440" bIns="45720" anchor="t">
-            <a:spAutoFit/>
-          </a:bodyPr>
-          <a:lstStyle/>
-          <a:p>
-            <a:pPr algn="l">
-              <a:buNone/>
-            </a:pPr>
-            <a:r>
-              <a:rPr lang="en-US" b="1" i="0">
-                <a:solidFill>
-                  <a:srgbClr val="262626"/>
-                </a:solidFill>
-                <a:effectLst/>
-                <a:latin typeface="Calibri"/>
-                <a:ea typeface="Calibri"/>
-                <a:cs typeface="Calibri"/>
-              </a:rPr>
-              <a:t>Proven </a:t>
-            </a:r>
-            <a:r>
-              <a:rPr lang="en-US" b="1">
-                <a:solidFill>
-                  <a:srgbClr val="262626"/>
-                </a:solidFill>
-                <a:latin typeface="Calibri"/>
-                <a:ea typeface="Calibri"/>
-                <a:cs typeface="Calibri"/>
-              </a:rPr>
-              <a:t>Multi-agent</a:t>
-            </a:r>
-            <a:r>
-              <a:rPr lang="en-US" b="1" i="0">
-                <a:solidFill>
-                  <a:srgbClr val="262626"/>
-                </a:solidFill>
-                <a:effectLst/>
-                <a:latin typeface="Calibri"/>
-                <a:ea typeface="Calibri"/>
-                <a:cs typeface="Calibri"/>
-              </a:rPr>
-              <a:t> Track Record</a:t>
-            </a:r>
-          </a:p>
-        </p:txBody>
-      </p:sp>
-      <p:sp>
-        <p:nvSpPr>
-          <p:cNvPr id="20" name="TextBox 19">
-            <a:extLst>
-              <a:ext uri="{FF2B5EF4-FFF2-40B4-BE49-F238E27FC236}">
-                <a16:creationId xmlns:a16="http://schemas.microsoft.com/office/drawing/2014/main" id="{130FC3E6-58A5-9CD0-8116-16B821E0D0D2}"/>
-              </a:ext>
-            </a:extLst>
-          </p:cNvPr>
-          <p:cNvSpPr txBox="1"/>
-          <p:nvPr userDrawn="1"/>
-        </p:nvSpPr>
-        <p:spPr>
-          <a:xfrm>
-            <a:off x="931492" y="1708438"/>
-            <a:ext cx="4797039" cy="738664"/>
-          </a:xfrm>
-          <a:prstGeom prst="rect">
-            <a:avLst/>
-          </a:prstGeom>
-          <a:noFill/>
-        </p:spPr>
-        <p:txBody>
-          <a:bodyPr wrap="square" lIns="91440" tIns="45720" rIns="91440" bIns="45720" anchor="t">
-            <a:spAutoFit/>
-          </a:bodyPr>
-          <a:lstStyle/>
-          <a:p>
-            <a:r>
-              <a:rPr lang="en-US" sz="1400" dirty="0"/>
-              <a:t>We bring hands-on experience from multiple industries, facing similar challenges with documentation and maintenance of correct manuals. </a:t>
-            </a:r>
-            <a:endParaRPr lang="en-US" sz="1400" dirty="0">
-              <a:ea typeface="Calibri"/>
-              <a:cs typeface="Calibri"/>
-            </a:endParaRPr>
-          </a:p>
-        </p:txBody>
-      </p:sp>
-      <p:sp>
-        <p:nvSpPr>
-          <p:cNvPr id="21" name="TextBox 20">
-            <a:extLst>
-              <a:ext uri="{FF2B5EF4-FFF2-40B4-BE49-F238E27FC236}">
-                <a16:creationId xmlns:a16="http://schemas.microsoft.com/office/drawing/2014/main" id="{D7ABC5C1-7F24-0E88-1FBE-F391A1D6443E}"/>
-              </a:ext>
-            </a:extLst>
-          </p:cNvPr>
-          <p:cNvSpPr txBox="1"/>
-          <p:nvPr userDrawn="1"/>
-        </p:nvSpPr>
-        <p:spPr>
-          <a:xfrm>
-            <a:off x="931492" y="3324512"/>
-            <a:ext cx="4797039" cy="738664"/>
-          </a:xfrm>
-          <a:prstGeom prst="rect">
-            <a:avLst/>
-          </a:prstGeom>
-          <a:noFill/>
-        </p:spPr>
-        <p:txBody>
-          <a:bodyPr wrap="square" lIns="91440" tIns="45720" rIns="91440" bIns="45720" anchor="t">
-            <a:spAutoFit/>
-          </a:bodyPr>
-          <a:lstStyle/>
-          <a:p>
-            <a:r>
-              <a:rPr lang="en-US" sz="1400" b="0" i="0">
-                <a:effectLst/>
-                <a:cs typeface="Calibri"/>
-              </a:rPr>
-              <a:t>Our team has delivered </a:t>
-            </a:r>
-            <a:r>
-              <a:rPr lang="en-US" sz="1400">
-                <a:cs typeface="Calibri"/>
-              </a:rPr>
-              <a:t>multiple</a:t>
-            </a:r>
-            <a:r>
-              <a:rPr lang="en-US" sz="1400" b="0" i="0">
-                <a:effectLst/>
-                <a:cs typeface="Calibri"/>
-              </a:rPr>
-              <a:t> enterprise-grade </a:t>
-            </a:r>
-            <a:r>
-              <a:rPr lang="en-US" sz="1400">
-                <a:cs typeface="Calibri"/>
-              </a:rPr>
-              <a:t>Multi-agent products</a:t>
-            </a:r>
-            <a:r>
-              <a:rPr lang="en-US" sz="1400" b="0" i="0">
-                <a:effectLst/>
-                <a:cs typeface="Calibri"/>
-              </a:rPr>
-              <a:t> across pharma, retail, and industrial sectors tailored to real-world production needs and scaled for impact.</a:t>
-            </a:r>
-            <a:endParaRPr lang="en-US" sz="1400">
-              <a:cs typeface="Calibri"/>
-            </a:endParaRPr>
-          </a:p>
-        </p:txBody>
-      </p:sp>
-      <p:sp>
-        <p:nvSpPr>
-          <p:cNvPr id="22" name="TextBox 21">
-            <a:extLst>
-              <a:ext uri="{FF2B5EF4-FFF2-40B4-BE49-F238E27FC236}">
-                <a16:creationId xmlns:a16="http://schemas.microsoft.com/office/drawing/2014/main" id="{45583127-2AD4-6B03-1813-71A4E76C8329}"/>
-              </a:ext>
-            </a:extLst>
-          </p:cNvPr>
-          <p:cNvSpPr txBox="1"/>
-          <p:nvPr userDrawn="1"/>
-        </p:nvSpPr>
-        <p:spPr>
-          <a:xfrm>
-            <a:off x="1318168" y="4598939"/>
-            <a:ext cx="4623275" cy="369332"/>
-          </a:xfrm>
-          <a:prstGeom prst="rect">
-            <a:avLst/>
-          </a:prstGeom>
-          <a:noFill/>
-        </p:spPr>
-        <p:txBody>
-          <a:bodyPr wrap="square">
-            <a:spAutoFit/>
-          </a:bodyPr>
-          <a:lstStyle/>
-          <a:p>
-            <a:pPr algn="l"/>
-            <a:r>
-              <a:rPr lang="en-US" b="1" i="0">
-                <a:solidFill>
-                  <a:srgbClr val="262626"/>
-                </a:solidFill>
-                <a:effectLst/>
-                <a:latin typeface="Calibri"/>
-                <a:ea typeface="Calibri"/>
-                <a:cs typeface="Calibri"/>
-              </a:rPr>
-              <a:t>Top Talent, Lean Team</a:t>
-            </a:r>
-          </a:p>
-        </p:txBody>
-      </p:sp>
-      <p:sp>
-        <p:nvSpPr>
-          <p:cNvPr id="23" name="TextBox 22">
-            <a:extLst>
-              <a:ext uri="{FF2B5EF4-FFF2-40B4-BE49-F238E27FC236}">
-                <a16:creationId xmlns:a16="http://schemas.microsoft.com/office/drawing/2014/main" id="{43C77D6C-536D-288A-9A07-AE2C0979AAAF}"/>
-              </a:ext>
-            </a:extLst>
-          </p:cNvPr>
-          <p:cNvSpPr txBox="1"/>
-          <p:nvPr userDrawn="1"/>
-        </p:nvSpPr>
-        <p:spPr>
-          <a:xfrm>
-            <a:off x="905573" y="5032463"/>
-            <a:ext cx="4725824" cy="738664"/>
-          </a:xfrm>
-          <a:prstGeom prst="rect">
-            <a:avLst/>
-          </a:prstGeom>
-          <a:noFill/>
-        </p:spPr>
-        <p:txBody>
-          <a:bodyPr wrap="square">
-            <a:spAutoFit/>
-          </a:bodyPr>
-          <a:lstStyle/>
-          <a:p>
-            <a:r>
-              <a:rPr lang="en-US" sz="1400" b="0" i="0">
-                <a:effectLst/>
-                <a:latin typeface="Calibri" panose="020F0502020204030204" pitchFamily="34" charset="0"/>
-                <a:cs typeface="Calibri" panose="020F0502020204030204" pitchFamily="34" charset="0"/>
-              </a:rPr>
-              <a:t>A senior-led, cross-functional squad ensures rapid delivery and tight feedback loops, with fewer handoffs, faster iteration, and lower total cost of ownership.</a:t>
-            </a:r>
-            <a:endParaRPr lang="en-US" sz="1400">
-              <a:latin typeface="Calibri" panose="020F0502020204030204" pitchFamily="34" charset="0"/>
-              <a:cs typeface="Calibri" panose="020F0502020204030204" pitchFamily="34" charset="0"/>
-            </a:endParaRPr>
-          </a:p>
-        </p:txBody>
-      </p:sp>
-      <p:sp>
-        <p:nvSpPr>
-          <p:cNvPr id="24" name="TextBox 23">
-            <a:extLst>
-              <a:ext uri="{FF2B5EF4-FFF2-40B4-BE49-F238E27FC236}">
-                <a16:creationId xmlns:a16="http://schemas.microsoft.com/office/drawing/2014/main" id="{74DF3F49-B1AD-72D3-895F-DCC4FB73D793}"/>
-              </a:ext>
-            </a:extLst>
-          </p:cNvPr>
-          <p:cNvSpPr txBox="1"/>
-          <p:nvPr userDrawn="1"/>
-        </p:nvSpPr>
-        <p:spPr>
-          <a:xfrm>
-            <a:off x="7271046" y="1339106"/>
-            <a:ext cx="4573424" cy="369332"/>
-          </a:xfrm>
-          <a:prstGeom prst="rect">
-            <a:avLst/>
-          </a:prstGeom>
-          <a:noFill/>
-        </p:spPr>
-        <p:txBody>
-          <a:bodyPr wrap="square">
-            <a:spAutoFit/>
-          </a:bodyPr>
-          <a:lstStyle/>
-          <a:p>
-            <a:pPr algn="l"/>
-            <a:r>
-              <a:rPr lang="en-US" b="1" i="0">
-                <a:solidFill>
-                  <a:srgbClr val="262626"/>
-                </a:solidFill>
-                <a:effectLst/>
-                <a:latin typeface="Calibri" panose="020F0502020204030204" pitchFamily="34" charset="0"/>
-                <a:cs typeface="Calibri" panose="020F0502020204030204" pitchFamily="34" charset="0"/>
-              </a:rPr>
-              <a:t>Built for Production from Day one</a:t>
-            </a:r>
-          </a:p>
-        </p:txBody>
-      </p:sp>
-      <p:sp>
-        <p:nvSpPr>
-          <p:cNvPr id="25" name="TextBox 24">
-            <a:extLst>
-              <a:ext uri="{FF2B5EF4-FFF2-40B4-BE49-F238E27FC236}">
-                <a16:creationId xmlns:a16="http://schemas.microsoft.com/office/drawing/2014/main" id="{FE001DDF-FBDF-E249-6F7B-99181D69AC28}"/>
-              </a:ext>
-            </a:extLst>
-          </p:cNvPr>
-          <p:cNvSpPr txBox="1"/>
-          <p:nvPr userDrawn="1"/>
-        </p:nvSpPr>
-        <p:spPr>
-          <a:xfrm>
-            <a:off x="6929214" y="1708437"/>
-            <a:ext cx="4797039" cy="738664"/>
-          </a:xfrm>
-          <a:prstGeom prst="rect">
-            <a:avLst/>
-          </a:prstGeom>
-          <a:noFill/>
-        </p:spPr>
-        <p:txBody>
-          <a:bodyPr wrap="square">
-            <a:spAutoFit/>
-          </a:bodyPr>
-          <a:lstStyle/>
-          <a:p>
-            <a:r>
-              <a:rPr lang="en-US" sz="1400"/>
-              <a:t>Security, compliance, and monitoring are embedded from the start, not retrofitted later. Our mindset is production-first, not prototype-first.</a:t>
-            </a:r>
-          </a:p>
-        </p:txBody>
-      </p:sp>
-      <p:sp>
-        <p:nvSpPr>
-          <p:cNvPr id="26" name="TextBox 25">
-            <a:extLst>
-              <a:ext uri="{FF2B5EF4-FFF2-40B4-BE49-F238E27FC236}">
-                <a16:creationId xmlns:a16="http://schemas.microsoft.com/office/drawing/2014/main" id="{86912470-7B43-22A2-00D0-17B9520EA500}"/>
-              </a:ext>
-            </a:extLst>
-          </p:cNvPr>
-          <p:cNvSpPr txBox="1"/>
-          <p:nvPr userDrawn="1"/>
-        </p:nvSpPr>
-        <p:spPr>
-          <a:xfrm>
-            <a:off x="7295430" y="2907227"/>
-            <a:ext cx="4573424" cy="369332"/>
-          </a:xfrm>
-          <a:prstGeom prst="rect">
-            <a:avLst/>
-          </a:prstGeom>
-          <a:noFill/>
-        </p:spPr>
-        <p:txBody>
-          <a:bodyPr wrap="square">
-            <a:spAutoFit/>
-          </a:bodyPr>
-          <a:lstStyle/>
-          <a:p>
-            <a:pPr algn="l"/>
-            <a:r>
-              <a:rPr lang="en-US" b="1" i="0">
-                <a:solidFill>
-                  <a:srgbClr val="262626"/>
-                </a:solidFill>
-                <a:effectLst/>
-                <a:latin typeface="Calibri" panose="020F0502020204030204" pitchFamily="34" charset="0"/>
-                <a:cs typeface="Calibri" panose="020F0502020204030204" pitchFamily="34" charset="0"/>
-              </a:rPr>
-              <a:t>A True Partner, Not Just a Vendor</a:t>
-            </a:r>
-          </a:p>
-        </p:txBody>
-      </p:sp>
-      <p:sp>
-        <p:nvSpPr>
-          <p:cNvPr id="27" name="TextBox 26">
-            <a:extLst>
-              <a:ext uri="{FF2B5EF4-FFF2-40B4-BE49-F238E27FC236}">
-                <a16:creationId xmlns:a16="http://schemas.microsoft.com/office/drawing/2014/main" id="{DD4101A6-1B1B-4243-E876-B17CEA780A39}"/>
-              </a:ext>
-            </a:extLst>
-          </p:cNvPr>
-          <p:cNvSpPr txBox="1"/>
-          <p:nvPr userDrawn="1"/>
-        </p:nvSpPr>
-        <p:spPr>
-          <a:xfrm>
-            <a:off x="6929214" y="3283946"/>
-            <a:ext cx="4797039" cy="738664"/>
-          </a:xfrm>
-          <a:prstGeom prst="rect">
-            <a:avLst/>
-          </a:prstGeom>
-          <a:noFill/>
-        </p:spPr>
-        <p:txBody>
-          <a:bodyPr wrap="square">
-            <a:spAutoFit/>
-          </a:bodyPr>
-          <a:lstStyle/>
-          <a:p>
-            <a:r>
-              <a:rPr lang="en-US" sz="1400"/>
-              <a:t>We co-create with your teams, share knowledge openly, and avoid vendor lock-in through open standards and transparent design. Our goal is long-term capability, not dependency.</a:t>
-            </a:r>
-          </a:p>
-        </p:txBody>
-      </p:sp>
-      <p:pic>
-        <p:nvPicPr>
-          <p:cNvPr id="28" name="Graphic 27">
-            <a:extLst>
-              <a:ext uri="{FF2B5EF4-FFF2-40B4-BE49-F238E27FC236}">
-                <a16:creationId xmlns:a16="http://schemas.microsoft.com/office/drawing/2014/main" id="{BBAD7591-F744-4098-E06F-543F90015B7A}"/>
-              </a:ext>
-            </a:extLst>
-          </p:cNvPr>
-          <p:cNvPicPr>
-            <a:picLocks noChangeAspect="1"/>
-          </p:cNvPicPr>
-          <p:nvPr userDrawn="1"/>
-        </p:nvPicPr>
-        <p:blipFill>
-          <a:blip r:embed="rId2">
-            <a:extLst>
-              <a:ext uri="{96DAC541-7B7A-43D3-8B79-37D633B846F1}">
-                <asvg:svgBlip xmlns:asvg="http://schemas.microsoft.com/office/drawing/2016/SVG/main" r:embed="rId3"/>
-              </a:ext>
-            </a:extLst>
-          </a:blip>
-          <a:stretch>
-            <a:fillRect/>
-          </a:stretch>
-        </p:blipFill>
-        <p:spPr>
-          <a:xfrm>
-            <a:off x="329520" y="1270462"/>
-            <a:ext cx="506619" cy="506619"/>
-          </a:xfrm>
-          <a:prstGeom prst="rect">
-            <a:avLst/>
-          </a:prstGeom>
-        </p:spPr>
-      </p:pic>
-      <p:pic>
-        <p:nvPicPr>
-          <p:cNvPr id="29" name="Graphic 28">
-            <a:extLst>
-              <a:ext uri="{FF2B5EF4-FFF2-40B4-BE49-F238E27FC236}">
-                <a16:creationId xmlns:a16="http://schemas.microsoft.com/office/drawing/2014/main" id="{95D0FA04-3AB7-EAAA-0E84-5E95CEFF0D4F}"/>
-              </a:ext>
-            </a:extLst>
-          </p:cNvPr>
-          <p:cNvPicPr>
-            <a:picLocks noChangeAspect="1"/>
-          </p:cNvPicPr>
-          <p:nvPr userDrawn="1"/>
-        </p:nvPicPr>
-        <p:blipFill>
-          <a:blip r:embed="rId2">
-            <a:extLst>
-              <a:ext uri="{96DAC541-7B7A-43D3-8B79-37D633B846F1}">
-                <asvg:svgBlip xmlns:asvg="http://schemas.microsoft.com/office/drawing/2016/SVG/main" r:embed="rId3"/>
-              </a:ext>
-            </a:extLst>
-          </a:blip>
-          <a:stretch>
-            <a:fillRect/>
-          </a:stretch>
-        </p:blipFill>
-        <p:spPr>
-          <a:xfrm>
-            <a:off x="6340202" y="1261195"/>
-            <a:ext cx="506619" cy="506619"/>
-          </a:xfrm>
-          <a:prstGeom prst="rect">
-            <a:avLst/>
-          </a:prstGeom>
-        </p:spPr>
-      </p:pic>
-      <p:pic>
-        <p:nvPicPr>
-          <p:cNvPr id="30" name="Graphic 29">
-            <a:extLst>
-              <a:ext uri="{FF2B5EF4-FFF2-40B4-BE49-F238E27FC236}">
-                <a16:creationId xmlns:a16="http://schemas.microsoft.com/office/drawing/2014/main" id="{D2732E4D-CDD3-0A02-898B-AAE31D61CD92}"/>
-              </a:ext>
-            </a:extLst>
-          </p:cNvPr>
-          <p:cNvPicPr>
-            <a:picLocks noChangeAspect="1"/>
-          </p:cNvPicPr>
-          <p:nvPr userDrawn="1"/>
-        </p:nvPicPr>
-        <p:blipFill>
-          <a:blip r:embed="rId2">
-            <a:extLst>
-              <a:ext uri="{96DAC541-7B7A-43D3-8B79-37D633B846F1}">
-                <asvg:svgBlip xmlns:asvg="http://schemas.microsoft.com/office/drawing/2016/SVG/main" r:embed="rId3"/>
-              </a:ext>
-            </a:extLst>
-          </a:blip>
-          <a:stretch>
-            <a:fillRect/>
-          </a:stretch>
-        </p:blipFill>
-        <p:spPr>
-          <a:xfrm>
-            <a:off x="329520" y="2886536"/>
-            <a:ext cx="506619" cy="506619"/>
-          </a:xfrm>
-          <a:prstGeom prst="rect">
-            <a:avLst/>
-          </a:prstGeom>
-        </p:spPr>
-      </p:pic>
-      <p:pic>
-        <p:nvPicPr>
-          <p:cNvPr id="31" name="Graphic 30">
-            <a:extLst>
-              <a:ext uri="{FF2B5EF4-FFF2-40B4-BE49-F238E27FC236}">
-                <a16:creationId xmlns:a16="http://schemas.microsoft.com/office/drawing/2014/main" id="{327537E7-188C-632A-88A4-0CDB609626B8}"/>
-              </a:ext>
-            </a:extLst>
-          </p:cNvPr>
-          <p:cNvPicPr>
-            <a:picLocks noChangeAspect="1"/>
-          </p:cNvPicPr>
-          <p:nvPr userDrawn="1"/>
-        </p:nvPicPr>
-        <p:blipFill>
-          <a:blip r:embed="rId2">
-            <a:extLst>
-              <a:ext uri="{96DAC541-7B7A-43D3-8B79-37D633B846F1}">
-                <asvg:svgBlip xmlns:asvg="http://schemas.microsoft.com/office/drawing/2016/SVG/main" r:embed="rId3"/>
-              </a:ext>
-            </a:extLst>
-          </a:blip>
-          <a:stretch>
-            <a:fillRect/>
-          </a:stretch>
-        </p:blipFill>
-        <p:spPr>
-          <a:xfrm>
-            <a:off x="398954" y="4566590"/>
-            <a:ext cx="506619" cy="506619"/>
-          </a:xfrm>
-          <a:prstGeom prst="rect">
-            <a:avLst/>
-          </a:prstGeom>
-        </p:spPr>
-      </p:pic>
-      <p:pic>
-        <p:nvPicPr>
-          <p:cNvPr id="32" name="Graphic 31">
-            <a:extLst>
-              <a:ext uri="{FF2B5EF4-FFF2-40B4-BE49-F238E27FC236}">
-                <a16:creationId xmlns:a16="http://schemas.microsoft.com/office/drawing/2014/main" id="{E9A888FE-DFD9-54E1-04FD-46DD1AB73143}"/>
-              </a:ext>
-            </a:extLst>
-          </p:cNvPr>
-          <p:cNvPicPr>
-            <a:picLocks noChangeAspect="1"/>
-          </p:cNvPicPr>
-          <p:nvPr userDrawn="1"/>
-        </p:nvPicPr>
-        <p:blipFill>
-          <a:blip r:embed="rId2">
-            <a:extLst>
-              <a:ext uri="{96DAC541-7B7A-43D3-8B79-37D633B846F1}">
-                <asvg:svgBlip xmlns:asvg="http://schemas.microsoft.com/office/drawing/2016/SVG/main" r:embed="rId3"/>
-              </a:ext>
-            </a:extLst>
-          </a:blip>
-          <a:stretch>
-            <a:fillRect/>
-          </a:stretch>
-        </p:blipFill>
-        <p:spPr>
-          <a:xfrm>
-            <a:off x="6340202" y="2863970"/>
-            <a:ext cx="506619" cy="506619"/>
-          </a:xfrm>
-          <a:prstGeom prst="rect">
-            <a:avLst/>
-          </a:prstGeom>
-        </p:spPr>
-      </p:pic>
-      <p:pic>
-        <p:nvPicPr>
-          <p:cNvPr id="33" name="Graphic 32">
-            <a:extLst>
-              <a:ext uri="{FF2B5EF4-FFF2-40B4-BE49-F238E27FC236}">
-                <a16:creationId xmlns:a16="http://schemas.microsoft.com/office/drawing/2014/main" id="{D4538602-E74E-0718-5FA7-047BC0C9B4DC}"/>
-              </a:ext>
-            </a:extLst>
-          </p:cNvPr>
-          <p:cNvPicPr>
-            <a:picLocks noChangeAspect="1"/>
-          </p:cNvPicPr>
-          <p:nvPr userDrawn="1"/>
-        </p:nvPicPr>
-        <p:blipFill>
-          <a:blip r:embed="rId4">
-            <a:extLst>
-              <a:ext uri="{96DAC541-7B7A-43D3-8B79-37D633B846F1}">
-                <asvg:svgBlip xmlns:asvg="http://schemas.microsoft.com/office/drawing/2016/SVG/main" r:embed="rId5"/>
-              </a:ext>
-            </a:extLst>
-          </a:blip>
-          <a:stretch>
-            <a:fillRect/>
-          </a:stretch>
-        </p:blipFill>
-        <p:spPr>
-          <a:xfrm>
-            <a:off x="1013538" y="2983837"/>
-            <a:ext cx="304631" cy="304631"/>
-          </a:xfrm>
-          <a:prstGeom prst="rect">
-            <a:avLst/>
-          </a:prstGeom>
-        </p:spPr>
-      </p:pic>
-      <p:pic>
-        <p:nvPicPr>
-          <p:cNvPr id="34" name="Graphic 33">
-            <a:extLst>
-              <a:ext uri="{FF2B5EF4-FFF2-40B4-BE49-F238E27FC236}">
-                <a16:creationId xmlns:a16="http://schemas.microsoft.com/office/drawing/2014/main" id="{5E7BF02C-615A-3088-AF8E-15E632D47456}"/>
-              </a:ext>
-            </a:extLst>
-          </p:cNvPr>
-          <p:cNvPicPr>
-            <a:picLocks noChangeAspect="1"/>
-          </p:cNvPicPr>
-          <p:nvPr userDrawn="1"/>
-        </p:nvPicPr>
-        <p:blipFill>
-          <a:blip r:embed="rId6">
-            <a:extLst>
-              <a:ext uri="{96DAC541-7B7A-43D3-8B79-37D633B846F1}">
-                <asvg:svgBlip xmlns:asvg="http://schemas.microsoft.com/office/drawing/2016/SVG/main" r:embed="rId7"/>
-              </a:ext>
-            </a:extLst>
-          </a:blip>
-          <a:stretch>
-            <a:fillRect/>
-          </a:stretch>
-        </p:blipFill>
-        <p:spPr>
-          <a:xfrm>
-            <a:off x="1013537" y="4631290"/>
-            <a:ext cx="304631" cy="304631"/>
-          </a:xfrm>
-          <a:prstGeom prst="rect">
-            <a:avLst/>
-          </a:prstGeom>
-        </p:spPr>
-      </p:pic>
-      <p:pic>
-        <p:nvPicPr>
-          <p:cNvPr id="35" name="Graphic 34">
-            <a:extLst>
-              <a:ext uri="{FF2B5EF4-FFF2-40B4-BE49-F238E27FC236}">
-                <a16:creationId xmlns:a16="http://schemas.microsoft.com/office/drawing/2014/main" id="{5AA8A8E1-06B7-4373-90E9-1E30C3724DEB}"/>
-              </a:ext>
-            </a:extLst>
-          </p:cNvPr>
-          <p:cNvPicPr>
-            <a:picLocks noChangeAspect="1"/>
-          </p:cNvPicPr>
-          <p:nvPr userDrawn="1"/>
-        </p:nvPicPr>
-        <p:blipFill>
-          <a:blip r:embed="rId8">
-            <a:extLst>
-              <a:ext uri="{96DAC541-7B7A-43D3-8B79-37D633B846F1}">
-                <asvg:svgBlip xmlns:asvg="http://schemas.microsoft.com/office/drawing/2016/SVG/main" r:embed="rId9"/>
-              </a:ext>
-            </a:extLst>
-          </a:blip>
-          <a:stretch>
-            <a:fillRect/>
-          </a:stretch>
-        </p:blipFill>
-        <p:spPr>
-          <a:xfrm>
-            <a:off x="7022862" y="1368929"/>
-            <a:ext cx="305989" cy="305989"/>
-          </a:xfrm>
-          <a:prstGeom prst="rect">
-            <a:avLst/>
-          </a:prstGeom>
-        </p:spPr>
-      </p:pic>
-      <p:pic>
-        <p:nvPicPr>
-          <p:cNvPr id="36" name="Graphic 35">
-            <a:extLst>
-              <a:ext uri="{FF2B5EF4-FFF2-40B4-BE49-F238E27FC236}">
-                <a16:creationId xmlns:a16="http://schemas.microsoft.com/office/drawing/2014/main" id="{159525F5-F14E-A4CB-D96F-FF4281DDC8EB}"/>
-              </a:ext>
-            </a:extLst>
-          </p:cNvPr>
-          <p:cNvPicPr>
-            <a:picLocks noChangeAspect="1"/>
-          </p:cNvPicPr>
-          <p:nvPr userDrawn="1"/>
-        </p:nvPicPr>
-        <p:blipFill>
-          <a:blip r:embed="rId10">
-            <a:extLst>
-              <a:ext uri="{96DAC541-7B7A-43D3-8B79-37D633B846F1}">
-                <asvg:svgBlip xmlns:asvg="http://schemas.microsoft.com/office/drawing/2016/SVG/main" r:embed="rId11"/>
-              </a:ext>
-            </a:extLst>
-          </a:blip>
-          <a:stretch>
-            <a:fillRect/>
-          </a:stretch>
-        </p:blipFill>
-        <p:spPr>
-          <a:xfrm>
-            <a:off x="6966415" y="2955271"/>
-            <a:ext cx="304631" cy="304631"/>
-          </a:xfrm>
-          <a:prstGeom prst="rect">
-            <a:avLst/>
-          </a:prstGeom>
-        </p:spPr>
-      </p:pic>
-      <p:pic>
-        <p:nvPicPr>
-          <p:cNvPr id="37" name="Picture 36" descr="Download IKEA Logo in SVG Vector or PNG File Format - Logo.wine">
-            <a:extLst>
-              <a:ext uri="{FF2B5EF4-FFF2-40B4-BE49-F238E27FC236}">
-                <a16:creationId xmlns:a16="http://schemas.microsoft.com/office/drawing/2014/main" id="{21C476F9-E6D3-0A4B-C426-8A1E5FB20E13}"/>
-              </a:ext>
-            </a:extLst>
-          </p:cNvPr>
-          <p:cNvPicPr>
-            <a:picLocks noChangeAspect="1"/>
-          </p:cNvPicPr>
-          <p:nvPr userDrawn="1"/>
-        </p:nvPicPr>
-        <p:blipFill>
-          <a:blip r:embed="rId12"/>
-          <a:stretch>
-            <a:fillRect/>
-          </a:stretch>
-        </p:blipFill>
-        <p:spPr>
-          <a:xfrm>
-            <a:off x="7067636" y="4898362"/>
-            <a:ext cx="853861" cy="809619"/>
-          </a:xfrm>
-          <a:prstGeom prst="rect">
-            <a:avLst/>
-          </a:prstGeom>
-          <a:ln>
-            <a:noFill/>
-          </a:ln>
-        </p:spPr>
-      </p:pic>
-      <p:pic>
-        <p:nvPicPr>
-          <p:cNvPr id="38" name="Picture 37" descr="Novo Nordisk - Wikipedia">
-            <a:extLst>
-              <a:ext uri="{FF2B5EF4-FFF2-40B4-BE49-F238E27FC236}">
-                <a16:creationId xmlns:a16="http://schemas.microsoft.com/office/drawing/2014/main" id="{F2D5E519-A47C-7694-5CD1-E81E57C25B5D}"/>
-              </a:ext>
-            </a:extLst>
-          </p:cNvPr>
-          <p:cNvPicPr>
-            <a:picLocks noChangeAspect="1"/>
-          </p:cNvPicPr>
-          <p:nvPr userDrawn="1"/>
-        </p:nvPicPr>
-        <p:blipFill>
-          <a:blip r:embed="rId13"/>
-          <a:stretch>
-            <a:fillRect/>
-          </a:stretch>
-        </p:blipFill>
-        <p:spPr>
-          <a:xfrm>
-            <a:off x="9212971" y="5032463"/>
-            <a:ext cx="853860" cy="623807"/>
-          </a:xfrm>
-          <a:prstGeom prst="rect">
-            <a:avLst/>
-          </a:prstGeom>
-          <a:ln>
-            <a:noFill/>
-          </a:ln>
-        </p:spPr>
-      </p:pic>
-      <p:pic>
-        <p:nvPicPr>
-          <p:cNvPr id="39" name="Picture 38" descr="Volvo Logo PNG Vectors Free Download">
-            <a:extLst>
-              <a:ext uri="{FF2B5EF4-FFF2-40B4-BE49-F238E27FC236}">
-                <a16:creationId xmlns:a16="http://schemas.microsoft.com/office/drawing/2014/main" id="{72E483E8-247A-32FF-E55C-B3B693F060F8}"/>
-              </a:ext>
-            </a:extLst>
-          </p:cNvPr>
-          <p:cNvPicPr>
-            <a:picLocks noChangeAspect="1"/>
-          </p:cNvPicPr>
-          <p:nvPr userDrawn="1"/>
-        </p:nvPicPr>
-        <p:blipFill>
-          <a:blip r:embed="rId14"/>
-          <a:stretch>
-            <a:fillRect/>
-          </a:stretch>
-        </p:blipFill>
-        <p:spPr>
-          <a:xfrm>
-            <a:off x="8145802" y="5008424"/>
-            <a:ext cx="596239" cy="605209"/>
-          </a:xfrm>
-          <a:prstGeom prst="rect">
-            <a:avLst/>
-          </a:prstGeom>
-          <a:ln>
-            <a:noFill/>
-          </a:ln>
-        </p:spPr>
-      </p:pic>
-      <p:pic>
-        <p:nvPicPr>
-          <p:cNvPr id="40" name="Picture 39" descr="Tetra Laval | Tetra Laval">
-            <a:extLst>
-              <a:ext uri="{FF2B5EF4-FFF2-40B4-BE49-F238E27FC236}">
-                <a16:creationId xmlns:a16="http://schemas.microsoft.com/office/drawing/2014/main" id="{76DB1012-F4EF-F66E-9015-3D60A0635AF3}"/>
-              </a:ext>
-            </a:extLst>
-          </p:cNvPr>
-          <p:cNvPicPr>
-            <a:picLocks noChangeAspect="1"/>
-          </p:cNvPicPr>
-          <p:nvPr userDrawn="1"/>
-        </p:nvPicPr>
-        <p:blipFill>
-          <a:blip r:embed="rId15"/>
-          <a:stretch>
-            <a:fillRect/>
-          </a:stretch>
-        </p:blipFill>
-        <p:spPr>
-          <a:xfrm>
-            <a:off x="7022862" y="5656778"/>
-            <a:ext cx="1635687" cy="207535"/>
-          </a:xfrm>
-          <a:prstGeom prst="rect">
-            <a:avLst/>
-          </a:prstGeom>
-          <a:ln>
-            <a:noFill/>
-          </a:ln>
-        </p:spPr>
-      </p:pic>
-      <p:pic>
-        <p:nvPicPr>
-          <p:cNvPr id="41" name="Picture 40" descr="Novartis Logo, symbol, meaning, history ...">
-            <a:extLst>
-              <a:ext uri="{FF2B5EF4-FFF2-40B4-BE49-F238E27FC236}">
-                <a16:creationId xmlns:a16="http://schemas.microsoft.com/office/drawing/2014/main" id="{AD420B4B-954A-D141-F1E8-0FE269447133}"/>
-              </a:ext>
-            </a:extLst>
-          </p:cNvPr>
-          <p:cNvPicPr>
-            <a:picLocks noChangeAspect="1"/>
-          </p:cNvPicPr>
-          <p:nvPr userDrawn="1"/>
-        </p:nvPicPr>
-        <p:blipFill>
-          <a:blip r:embed="rId16"/>
-          <a:stretch>
-            <a:fillRect/>
-          </a:stretch>
-        </p:blipFill>
-        <p:spPr>
-          <a:xfrm>
-            <a:off x="10075017" y="5109625"/>
-            <a:ext cx="859887" cy="508778"/>
-          </a:xfrm>
-          <a:prstGeom prst="rect">
-            <a:avLst/>
-          </a:prstGeom>
-          <a:ln>
-            <a:noFill/>
-          </a:ln>
-        </p:spPr>
-      </p:pic>
-      <p:pic>
-        <p:nvPicPr>
-          <p:cNvPr id="42" name="Google Shape;920;p15">
-            <a:extLst>
-              <a:ext uri="{FF2B5EF4-FFF2-40B4-BE49-F238E27FC236}">
-                <a16:creationId xmlns:a16="http://schemas.microsoft.com/office/drawing/2014/main" id="{A3FE8608-9DB4-ACFD-20F0-E31C800B57D1}"/>
-              </a:ext>
-            </a:extLst>
-          </p:cNvPr>
-          <p:cNvPicPr preferRelativeResize="0"/>
-          <p:nvPr userDrawn="1"/>
-        </p:nvPicPr>
-        <p:blipFill rotWithShape="1">
-          <a:blip r:embed="rId17" cstate="screen">
-            <a:alphaModFix/>
-            <a:extLst>
-              <a:ext uri="{28A0092B-C50C-407E-A947-70E740481C1C}">
-                <a14:useLocalDpi xmlns:a14="http://schemas.microsoft.com/office/drawing/2010/main"/>
-              </a:ext>
-            </a:extLst>
-          </a:blip>
-          <a:srcRect/>
-          <a:stretch/>
-        </p:blipFill>
-        <p:spPr>
-          <a:xfrm>
-            <a:off x="9179458" y="5700588"/>
-            <a:ext cx="1755446" cy="163725"/>
-          </a:xfrm>
-          <a:prstGeom prst="rect">
-            <a:avLst/>
-          </a:prstGeom>
-          <a:noFill/>
-          <a:ln>
-            <a:noFill/>
-          </a:ln>
-        </p:spPr>
-      </p:pic>
-      <p:sp>
-        <p:nvSpPr>
-          <p:cNvPr id="43" name="TextBox 42">
-            <a:extLst>
-              <a:ext uri="{FF2B5EF4-FFF2-40B4-BE49-F238E27FC236}">
-                <a16:creationId xmlns:a16="http://schemas.microsoft.com/office/drawing/2014/main" id="{DE242BD1-E8F0-2635-BF7D-9643DA4A8844}"/>
-              </a:ext>
-            </a:extLst>
-          </p:cNvPr>
-          <p:cNvSpPr txBox="1"/>
-          <p:nvPr userDrawn="1"/>
-        </p:nvSpPr>
-        <p:spPr>
-          <a:xfrm>
-            <a:off x="7259158" y="4631751"/>
-            <a:ext cx="4797038" cy="369332"/>
-          </a:xfrm>
-          <a:prstGeom prst="rect">
-            <a:avLst/>
-          </a:prstGeom>
-          <a:noFill/>
-        </p:spPr>
-        <p:txBody>
-          <a:bodyPr wrap="square">
-            <a:spAutoFit/>
-          </a:bodyPr>
-          <a:lstStyle/>
-          <a:p>
-            <a:r>
-              <a:rPr lang="en-US" b="1">
-                <a:solidFill>
-                  <a:srgbClr val="101826"/>
-                </a:solidFill>
-              </a:rPr>
-              <a:t>Over 15 years of expertise in top 500 companies</a:t>
-            </a:r>
-            <a:endParaRPr lang="en-US"/>
-          </a:p>
-        </p:txBody>
-      </p:sp>
-      <p:pic>
-        <p:nvPicPr>
-          <p:cNvPr id="44" name="Graphic 43">
-            <a:extLst>
-              <a:ext uri="{FF2B5EF4-FFF2-40B4-BE49-F238E27FC236}">
-                <a16:creationId xmlns:a16="http://schemas.microsoft.com/office/drawing/2014/main" id="{B215E11D-C506-B6AF-57D4-6EDD9DBD59BE}"/>
-              </a:ext>
-            </a:extLst>
-          </p:cNvPr>
-          <p:cNvPicPr>
-            <a:picLocks noChangeAspect="1"/>
-          </p:cNvPicPr>
-          <p:nvPr userDrawn="1"/>
-        </p:nvPicPr>
-        <p:blipFill>
-          <a:blip r:embed="rId2">
-            <a:extLst>
-              <a:ext uri="{96DAC541-7B7A-43D3-8B79-37D633B846F1}">
-                <asvg:svgBlip xmlns:asvg="http://schemas.microsoft.com/office/drawing/2016/SVG/main" r:embed="rId3"/>
-              </a:ext>
-            </a:extLst>
-          </a:blip>
-          <a:stretch>
-            <a:fillRect/>
-          </a:stretch>
-        </p:blipFill>
-        <p:spPr>
-          <a:xfrm>
-            <a:off x="6339930" y="4570494"/>
-            <a:ext cx="506619" cy="506619"/>
-          </a:xfrm>
-          <a:prstGeom prst="rect">
-            <a:avLst/>
-          </a:prstGeom>
-        </p:spPr>
-      </p:pic>
-      <p:pic>
-        <p:nvPicPr>
-          <p:cNvPr id="45" name="Graphic 44">
-            <a:extLst>
-              <a:ext uri="{FF2B5EF4-FFF2-40B4-BE49-F238E27FC236}">
-                <a16:creationId xmlns:a16="http://schemas.microsoft.com/office/drawing/2014/main" id="{65D7D50D-033A-59ED-8EEA-390729267733}"/>
-              </a:ext>
-            </a:extLst>
-          </p:cNvPr>
-          <p:cNvPicPr>
-            <a:picLocks noChangeAspect="1"/>
-          </p:cNvPicPr>
-          <p:nvPr userDrawn="1"/>
-        </p:nvPicPr>
-        <p:blipFill>
-          <a:blip r:embed="rId18">
-            <a:extLst>
-              <a:ext uri="{96DAC541-7B7A-43D3-8B79-37D633B846F1}">
-                <asvg:svgBlip xmlns:asvg="http://schemas.microsoft.com/office/drawing/2016/SVG/main" r:embed="rId19"/>
-              </a:ext>
-            </a:extLst>
-          </a:blip>
-          <a:stretch>
-            <a:fillRect/>
-          </a:stretch>
-        </p:blipFill>
-        <p:spPr>
-          <a:xfrm>
-            <a:off x="6980926" y="4671079"/>
-            <a:ext cx="275608" cy="275608"/>
-          </a:xfrm>
-          <a:prstGeom prst="rect">
-            <a:avLst/>
-          </a:prstGeom>
-        </p:spPr>
-      </p:pic>
-      <p:pic>
-        <p:nvPicPr>
-          <p:cNvPr id="46" name="Graphic 45">
-            <a:extLst>
-              <a:ext uri="{FF2B5EF4-FFF2-40B4-BE49-F238E27FC236}">
-                <a16:creationId xmlns:a16="http://schemas.microsoft.com/office/drawing/2014/main" id="{3AFCA702-B7A3-1F38-1616-7308C99E9BDE}"/>
-              </a:ext>
-            </a:extLst>
-          </p:cNvPr>
-          <p:cNvPicPr>
-            <a:picLocks noChangeAspect="1"/>
-          </p:cNvPicPr>
-          <p:nvPr userDrawn="1"/>
-        </p:nvPicPr>
-        <p:blipFill>
-          <a:blip r:embed="rId20">
-            <a:extLst>
-              <a:ext uri="{96DAC541-7B7A-43D3-8B79-37D633B846F1}">
-                <asvg:svgBlip xmlns:asvg="http://schemas.microsoft.com/office/drawing/2016/SVG/main" r:embed="rId21"/>
-              </a:ext>
-            </a:extLst>
-          </a:blip>
-          <a:stretch>
-            <a:fillRect/>
-          </a:stretch>
-        </p:blipFill>
-        <p:spPr>
-          <a:xfrm>
-            <a:off x="981529" y="1333500"/>
-            <a:ext cx="359228" cy="373742"/>
-          </a:xfrm>
-          <a:prstGeom prst="rect">
-            <a:avLst/>
-          </a:prstGeom>
-        </p:spPr>
-      </p:pic>
-    </p:spTree>
-    <p:extLst>
-      <p:ext uri="{BB962C8B-B14F-4D97-AF65-F5344CB8AC3E}">
-        <p14:creationId xmlns:p14="http://schemas.microsoft.com/office/powerpoint/2010/main" val="2955669845"/>
-      </p:ext>
-    </p:extLst>
-  </p:cSld>
-  <p:clrMapOvr>
-    <a:masterClrMapping/>
-  </p:clrMapOvr>
-  <p:extLst>
-    <p:ext uri="{DCECCB84-F9BA-43D5-87BE-67443E8EF086}">
-      <p15:sldGuideLst xmlns:p15="http://schemas.microsoft.com/office/powerpoint/2012/main">
-        <p15:guide id="1" orient="horz" pos="2160">
-          <p15:clr>
-            <a:srgbClr val="FBAE40"/>
-          </p15:clr>
-        </p15:guide>
-        <p15:guide id="2" pos="3840">
-          <p15:clr>
-            <a:srgbClr val="FBAE40"/>
-          </p15:clr>
-        </p15:guide>
-      </p15:sldGuideLst>
-    </p:ext>
-  </p:extLst>
-</p:sldLayout>
-</file>
-
-<file path=ppt/slideLayouts/slideLayout5.xml><?xml version="1.0" encoding="utf-8"?>
-<p:sldLayout xmlns:a="http://schemas.openxmlformats.org/drawingml/2006/main" xmlns:r="http://schemas.openxmlformats.org/officeDocument/2006/relationships" xmlns:p="http://schemas.openxmlformats.org/presentationml/2006/main" preserve="1" userDrawn="1">
   <p:cSld name="Title and Picture">
     <p:spTree>
       <p:nvGrpSpPr>
@@ -3999,7 +3801,7 @@
 </p:sldLayout>
 </file>
 
-<file path=ppt/slideLayouts/slideLayout6.xml><?xml version="1.0" encoding="utf-8"?>
+<file path=ppt/slideLayouts/slideLayout4.xml><?xml version="1.0" encoding="utf-8"?>
 <p:sldLayout xmlns:a="http://schemas.openxmlformats.org/drawingml/2006/main" xmlns:r="http://schemas.openxmlformats.org/officeDocument/2006/relationships" xmlns:p="http://schemas.openxmlformats.org/presentationml/2006/main" preserve="1" userDrawn="1">
   <p:cSld name="Title and Text Content">
     <p:spTree>
@@ -4286,7 +4088,7 @@
 </p:sldLayout>
 </file>
 
-<file path=ppt/slideLayouts/slideLayout7.xml><?xml version="1.0" encoding="utf-8"?>
+<file path=ppt/slideLayouts/slideLayout5.xml><?xml version="1.0" encoding="utf-8"?>
 <p:sldLayout xmlns:a="http://schemas.openxmlformats.org/drawingml/2006/main" xmlns:r="http://schemas.openxmlformats.org/officeDocument/2006/relationships" xmlns:p="http://schemas.openxmlformats.org/presentationml/2006/main" preserve="1" userDrawn="1">
   <p:cSld name="Single Chart Slide">
     <p:spTree>
@@ -4573,7 +4375,7 @@
 </p:sldLayout>
 </file>
 
-<file path=ppt/slideLayouts/slideLayout8.xml><?xml version="1.0" encoding="utf-8"?>
+<file path=ppt/slideLayouts/slideLayout6.xml><?xml version="1.0" encoding="utf-8"?>
 <p:sldLayout xmlns:a="http://schemas.openxmlformats.org/drawingml/2006/main" xmlns:r="http://schemas.openxmlformats.org/officeDocument/2006/relationships" xmlns:p="http://schemas.openxmlformats.org/presentationml/2006/main" preserve="1" userDrawn="1">
   <p:cSld name="Title and Two Column Content">
     <p:spTree>
@@ -5061,7 +4863,7 @@
 </p:sldLayout>
 </file>
 
-<file path=ppt/slideLayouts/slideLayout9.xml><?xml version="1.0" encoding="utf-8"?>
+<file path=ppt/slideLayouts/slideLayout7.xml><?xml version="1.0" encoding="utf-8"?>
 <p:sldLayout xmlns:a="http://schemas.openxmlformats.org/drawingml/2006/main" xmlns:r="http://schemas.openxmlformats.org/officeDocument/2006/relationships" xmlns:p="http://schemas.openxmlformats.org/presentationml/2006/main" preserve="1" userDrawn="1">
   <p:cSld name="Slide with 6 icons and short text as a list of items">
     <p:spTree>
@@ -5731,6 +5533,580 @@
     <p:extLst>
       <p:ext uri="{BB962C8B-B14F-4D97-AF65-F5344CB8AC3E}">
         <p14:creationId xmlns:p14="http://schemas.microsoft.com/office/powerpoint/2010/main" val="1049941252"/>
+      </p:ext>
+    </p:extLst>
+  </p:cSld>
+  <p:clrMapOvr>
+    <a:masterClrMapping/>
+  </p:clrMapOvr>
+</p:sldLayout>
+</file>
+
+<file path=ppt/slideLayouts/slideLayout8.xml><?xml version="1.0" encoding="utf-8"?>
+<p:sldLayout xmlns:a="http://schemas.openxmlformats.org/drawingml/2006/main" xmlns:r="http://schemas.openxmlformats.org/officeDocument/2006/relationships" xmlns:p="http://schemas.openxmlformats.org/presentationml/2006/main" preserve="1" userDrawn="1">
+  <p:cSld name="Conclusion Slide">
+    <p:spTree>
+      <p:nvGrpSpPr>
+        <p:cNvPr id="1" name=""/>
+        <p:cNvGrpSpPr/>
+        <p:nvPr/>
+      </p:nvGrpSpPr>
+      <p:grpSpPr>
+        <a:xfrm>
+          <a:off x="0" y="0"/>
+          <a:ext cx="0" cy="0"/>
+          <a:chOff x="0" y="0"/>
+          <a:chExt cx="0" cy="0"/>
+        </a:xfrm>
+      </p:grpSpPr>
+      <p:sp>
+        <p:nvSpPr>
+          <p:cNvPr id="2" name="Conclusion Title">
+            <a:extLst>
+              <a:ext uri="{FF2B5EF4-FFF2-40B4-BE49-F238E27FC236}">
+                <a16:creationId xmlns:a16="http://schemas.microsoft.com/office/drawing/2014/main" id="{3CD97974-B93C-4C96-B3F6-F69E3D6DE6CA}"/>
+              </a:ext>
+            </a:extLst>
+          </p:cNvPr>
+          <p:cNvSpPr>
+            <a:spLocks noGrp="1"/>
+          </p:cNvSpPr>
+          <p:nvPr>
+            <p:ph type="title" hasCustomPrompt="1"/>
+          </p:nvPr>
+        </p:nvSpPr>
+        <p:spPr>
+          <a:xfrm>
+            <a:off x="381000" y="381000"/>
+            <a:ext cx="11430000" cy="1325563"/>
+          </a:xfrm>
+          <a:prstGeom prst="rect">
+            <a:avLst/>
+          </a:prstGeom>
+        </p:spPr>
+        <p:txBody>
+          <a:bodyPr vert="horz" lIns="91440" tIns="45720" rIns="91440" bIns="45720" rtlCol="0" anchor="ctr">
+            <a:noAutofit/>
+          </a:bodyPr>
+          <a:lstStyle>
+            <a:lvl1pPr algn="l" defTabSz="914400" rtl="0" eaLnBrk="1" latinLnBrk="0" hangingPunct="1">
+              <a:lnSpc>
+                <a:spcPct val="80000"/>
+              </a:lnSpc>
+              <a:spcBef>
+                <a:spcPct val="0"/>
+              </a:spcBef>
+              <a:buNone/>
+              <a:defRPr sz="4400" b="1" kern="1200">
+                <a:solidFill>
+                  <a:schemeClr val="tx1"/>
+                </a:solidFill>
+                <a:latin typeface="+mn-lt"/>
+                <a:ea typeface="+mj-ea"/>
+                <a:cs typeface="+mj-cs"/>
+              </a:defRPr>
+            </a:lvl1pPr>
+          </a:lstStyle>
+          <a:p>
+            <a:r>
+              <a:rPr lang="en-US" dirty="0"/>
+              <a:t>Short and clear conclusion Title</a:t>
+            </a:r>
+          </a:p>
+        </p:txBody>
+      </p:sp>
+      <p:sp>
+        <p:nvSpPr>
+          <p:cNvPr id="3" name="Conclusion text">
+            <a:extLst>
+              <a:ext uri="{FF2B5EF4-FFF2-40B4-BE49-F238E27FC236}">
+                <a16:creationId xmlns:a16="http://schemas.microsoft.com/office/drawing/2014/main" id="{8A6FC6F2-80B4-49A7-9448-33FE2DF0E967}"/>
+              </a:ext>
+            </a:extLst>
+          </p:cNvPr>
+          <p:cNvSpPr>
+            <a:spLocks noGrp="1"/>
+          </p:cNvSpPr>
+          <p:nvPr>
+            <p:ph idx="1" hasCustomPrompt="1"/>
+          </p:nvPr>
+        </p:nvSpPr>
+        <p:spPr>
+          <a:xfrm>
+            <a:off x="381000" y="1825625"/>
+            <a:ext cx="11430000" cy="4351338"/>
+          </a:xfrm>
+          <a:prstGeom prst="rect">
+            <a:avLst/>
+          </a:prstGeom>
+        </p:spPr>
+        <p:txBody>
+          <a:bodyPr vert="horz" lIns="91440" tIns="45720" rIns="91440" bIns="45720" rtlCol="0">
+            <a:noAutofit/>
+          </a:bodyPr>
+          <a:lstStyle>
+            <a:lvl1pPr marL="0" indent="0" algn="l" defTabSz="914400" rtl="0" eaLnBrk="1" latinLnBrk="0" hangingPunct="1">
+              <a:lnSpc>
+                <a:spcPct val="90000"/>
+              </a:lnSpc>
+              <a:spcBef>
+                <a:spcPts val="1000"/>
+              </a:spcBef>
+              <a:buFont typeface="Arial" panose="020B0604020202020204" pitchFamily="34" charset="0"/>
+              <a:buNone/>
+              <a:defRPr sz="2000" b="0" kern="1200">
+                <a:solidFill>
+                  <a:schemeClr val="tx1"/>
+                </a:solidFill>
+                <a:latin typeface="+mn-lt"/>
+                <a:ea typeface="+mn-ea"/>
+                <a:cs typeface="+mn-cs"/>
+              </a:defRPr>
+            </a:lvl1pPr>
+            <a:lvl2pPr marL="685800" indent="-228600" algn="l" defTabSz="914400" rtl="0" eaLnBrk="1" latinLnBrk="0" hangingPunct="1">
+              <a:lnSpc>
+                <a:spcPct val="90000"/>
+              </a:lnSpc>
+              <a:spcBef>
+                <a:spcPts val="500"/>
+              </a:spcBef>
+              <a:buFont typeface="Arial" panose="020B0604020202020204" pitchFamily="34" charset="0"/>
+              <a:buChar char="•"/>
+              <a:defRPr sz="2400" b="0" kern="1200">
+                <a:solidFill>
+                  <a:schemeClr val="tx1"/>
+                </a:solidFill>
+                <a:latin typeface="+mn-lt"/>
+                <a:ea typeface="+mn-ea"/>
+                <a:cs typeface="+mn-cs"/>
+              </a:defRPr>
+            </a:lvl2pPr>
+            <a:lvl3pPr marL="1143000" indent="-228600" algn="l" defTabSz="914400" rtl="0" eaLnBrk="1" latinLnBrk="0" hangingPunct="1">
+              <a:lnSpc>
+                <a:spcPct val="90000"/>
+              </a:lnSpc>
+              <a:spcBef>
+                <a:spcPts val="500"/>
+              </a:spcBef>
+              <a:buFont typeface="Arial" panose="020B0604020202020204" pitchFamily="34" charset="0"/>
+              <a:buChar char="•"/>
+              <a:defRPr sz="2000" b="0" kern="1200">
+                <a:solidFill>
+                  <a:schemeClr val="tx1"/>
+                </a:solidFill>
+                <a:latin typeface="+mn-lt"/>
+                <a:ea typeface="+mn-ea"/>
+                <a:cs typeface="+mn-cs"/>
+              </a:defRPr>
+            </a:lvl3pPr>
+            <a:lvl4pPr marL="1600200" indent="-228600" algn="l" defTabSz="914400" rtl="0" eaLnBrk="1" latinLnBrk="0" hangingPunct="1">
+              <a:lnSpc>
+                <a:spcPct val="90000"/>
+              </a:lnSpc>
+              <a:spcBef>
+                <a:spcPts val="500"/>
+              </a:spcBef>
+              <a:buFont typeface="Arial" panose="020B0604020202020204" pitchFamily="34" charset="0"/>
+              <a:buChar char="•"/>
+              <a:defRPr sz="1800" b="0" kern="1200">
+                <a:solidFill>
+                  <a:schemeClr val="tx1"/>
+                </a:solidFill>
+                <a:latin typeface="+mn-lt"/>
+                <a:ea typeface="+mn-ea"/>
+                <a:cs typeface="+mn-cs"/>
+              </a:defRPr>
+            </a:lvl4pPr>
+            <a:lvl5pPr marL="2057400" indent="-228600" algn="l" defTabSz="914400" rtl="0" eaLnBrk="1" latinLnBrk="0" hangingPunct="1">
+              <a:lnSpc>
+                <a:spcPct val="90000"/>
+              </a:lnSpc>
+              <a:spcBef>
+                <a:spcPts val="500"/>
+              </a:spcBef>
+              <a:buFont typeface="Arial" panose="020B0604020202020204" pitchFamily="34" charset="0"/>
+              <a:buChar char="•"/>
+              <a:defRPr sz="1800" b="0" kern="1200">
+                <a:solidFill>
+                  <a:schemeClr val="tx1"/>
+                </a:solidFill>
+                <a:latin typeface="+mn-lt"/>
+                <a:ea typeface="+mn-ea"/>
+                <a:cs typeface="+mn-cs"/>
+              </a:defRPr>
+            </a:lvl5pPr>
+            <a:lvl6pPr marL="2514600" indent="-228600" algn="l" defTabSz="914400" rtl="0" eaLnBrk="1" latinLnBrk="0" hangingPunct="1">
+              <a:lnSpc>
+                <a:spcPct val="90000"/>
+              </a:lnSpc>
+              <a:spcBef>
+                <a:spcPts val="500"/>
+              </a:spcBef>
+              <a:buFont typeface="Arial" panose="020B0604020202020204" pitchFamily="34" charset="0"/>
+              <a:buChar char="•"/>
+              <a:defRPr sz="1800" kern="1200">
+                <a:solidFill>
+                  <a:schemeClr val="tx1"/>
+                </a:solidFill>
+                <a:latin typeface="+mn-lt"/>
+                <a:ea typeface="+mn-ea"/>
+                <a:cs typeface="+mn-cs"/>
+              </a:defRPr>
+            </a:lvl6pPr>
+            <a:lvl7pPr marL="2971800" indent="-228600" algn="l" defTabSz="914400" rtl="0" eaLnBrk="1" latinLnBrk="0" hangingPunct="1">
+              <a:lnSpc>
+                <a:spcPct val="90000"/>
+              </a:lnSpc>
+              <a:spcBef>
+                <a:spcPts val="500"/>
+              </a:spcBef>
+              <a:buFont typeface="Arial" panose="020B0604020202020204" pitchFamily="34" charset="0"/>
+              <a:buChar char="•"/>
+              <a:defRPr sz="1800" kern="1200">
+                <a:solidFill>
+                  <a:schemeClr val="tx1"/>
+                </a:solidFill>
+                <a:latin typeface="+mn-lt"/>
+                <a:ea typeface="+mn-ea"/>
+                <a:cs typeface="+mn-cs"/>
+              </a:defRPr>
+            </a:lvl7pPr>
+            <a:lvl8pPr marL="3429000" indent="-228600" algn="l" defTabSz="914400" rtl="0" eaLnBrk="1" latinLnBrk="0" hangingPunct="1">
+              <a:lnSpc>
+                <a:spcPct val="90000"/>
+              </a:lnSpc>
+              <a:spcBef>
+                <a:spcPts val="500"/>
+              </a:spcBef>
+              <a:buFont typeface="Arial" panose="020B0604020202020204" pitchFamily="34" charset="0"/>
+              <a:buChar char="•"/>
+              <a:defRPr sz="1800" kern="1200">
+                <a:solidFill>
+                  <a:schemeClr val="tx1"/>
+                </a:solidFill>
+                <a:latin typeface="+mn-lt"/>
+                <a:ea typeface="+mn-ea"/>
+                <a:cs typeface="+mn-cs"/>
+              </a:defRPr>
+            </a:lvl8pPr>
+            <a:lvl9pPr marL="3886200" indent="-228600" algn="l" defTabSz="914400" rtl="0" eaLnBrk="1" latinLnBrk="0" hangingPunct="1">
+              <a:lnSpc>
+                <a:spcPct val="90000"/>
+              </a:lnSpc>
+              <a:spcBef>
+                <a:spcPts val="500"/>
+              </a:spcBef>
+              <a:buFont typeface="Arial" panose="020B0604020202020204" pitchFamily="34" charset="0"/>
+              <a:buChar char="•"/>
+              <a:defRPr sz="1800" kern="1200">
+                <a:solidFill>
+                  <a:schemeClr val="tx1"/>
+                </a:solidFill>
+                <a:latin typeface="+mn-lt"/>
+                <a:ea typeface="+mn-ea"/>
+                <a:cs typeface="+mn-cs"/>
+              </a:defRPr>
+            </a:lvl9pPr>
+          </a:lstStyle>
+          <a:p>
+            <a:r>
+              <a:rPr lang="en-US" dirty="0"/>
+              <a:t>A bulleted list of items and a short conclusion text</a:t>
+            </a:r>
+          </a:p>
+        </p:txBody>
+      </p:sp>
+    </p:spTree>
+    <p:extLst>
+      <p:ext uri="{BB962C8B-B14F-4D97-AF65-F5344CB8AC3E}">
+        <p14:creationId xmlns:p14="http://schemas.microsoft.com/office/powerpoint/2010/main" val="374089928"/>
+      </p:ext>
+    </p:extLst>
+  </p:cSld>
+  <p:clrMapOvr>
+    <a:masterClrMapping/>
+  </p:clrMapOvr>
+</p:sldLayout>
+</file>
+
+<file path=ppt/slideLayouts/slideLayout9.xml><?xml version="1.0" encoding="utf-8"?>
+<p:sldLayout xmlns:a="http://schemas.openxmlformats.org/drawingml/2006/main" xmlns:r="http://schemas.openxmlformats.org/officeDocument/2006/relationships" xmlns:p="http://schemas.openxmlformats.org/presentationml/2006/main" preserve="1" userDrawn="1">
+  <p:cSld name="1_Conclusion Slide">
+    <p:spTree>
+      <p:nvGrpSpPr>
+        <p:cNvPr id="1" name=""/>
+        <p:cNvGrpSpPr/>
+        <p:nvPr/>
+      </p:nvGrpSpPr>
+      <p:grpSpPr>
+        <a:xfrm>
+          <a:off x="0" y="0"/>
+          <a:ext cx="0" cy="0"/>
+          <a:chOff x="0" y="0"/>
+          <a:chExt cx="0" cy="0"/>
+        </a:xfrm>
+      </p:grpSpPr>
+      <p:sp>
+        <p:nvSpPr>
+          <p:cNvPr id="2" name="Conclusion Title">
+            <a:extLst>
+              <a:ext uri="{FF2B5EF4-FFF2-40B4-BE49-F238E27FC236}">
+                <a16:creationId xmlns:a16="http://schemas.microsoft.com/office/drawing/2014/main" id="{3CD97974-B93C-4C96-B3F6-F69E3D6DE6CA}"/>
+              </a:ext>
+            </a:extLst>
+          </p:cNvPr>
+          <p:cNvSpPr>
+            <a:spLocks noGrp="1"/>
+          </p:cNvSpPr>
+          <p:nvPr>
+            <p:ph type="title" hasCustomPrompt="1"/>
+          </p:nvPr>
+        </p:nvSpPr>
+        <p:spPr>
+          <a:xfrm>
+            <a:off x="381000" y="381000"/>
+            <a:ext cx="11430000" cy="1325563"/>
+          </a:xfrm>
+          <a:prstGeom prst="rect">
+            <a:avLst/>
+          </a:prstGeom>
+        </p:spPr>
+        <p:txBody>
+          <a:bodyPr vert="horz" lIns="91440" tIns="45720" rIns="91440" bIns="45720" rtlCol="0" anchor="ctr">
+            <a:noAutofit/>
+          </a:bodyPr>
+          <a:lstStyle>
+            <a:lvl1pPr algn="l" defTabSz="914400" rtl="0" eaLnBrk="1" latinLnBrk="0" hangingPunct="1">
+              <a:lnSpc>
+                <a:spcPct val="80000"/>
+              </a:lnSpc>
+              <a:spcBef>
+                <a:spcPct val="0"/>
+              </a:spcBef>
+              <a:buNone/>
+              <a:defRPr sz="4400" b="1" kern="1200">
+                <a:solidFill>
+                  <a:schemeClr val="tx1"/>
+                </a:solidFill>
+                <a:latin typeface="+mn-lt"/>
+                <a:ea typeface="+mj-ea"/>
+                <a:cs typeface="+mj-cs"/>
+              </a:defRPr>
+            </a:lvl1pPr>
+          </a:lstStyle>
+          <a:p>
+            <a:r>
+              <a:rPr lang="en-US" dirty="0"/>
+              <a:t>Short and clear conclusion Title</a:t>
+            </a:r>
+          </a:p>
+        </p:txBody>
+      </p:sp>
+      <p:sp>
+        <p:nvSpPr>
+          <p:cNvPr id="3" name="Conclusion text">
+            <a:extLst>
+              <a:ext uri="{FF2B5EF4-FFF2-40B4-BE49-F238E27FC236}">
+                <a16:creationId xmlns:a16="http://schemas.microsoft.com/office/drawing/2014/main" id="{8A6FC6F2-80B4-49A7-9448-33FE2DF0E967}"/>
+              </a:ext>
+            </a:extLst>
+          </p:cNvPr>
+          <p:cNvSpPr>
+            <a:spLocks noGrp="1"/>
+          </p:cNvSpPr>
+          <p:nvPr>
+            <p:ph idx="1" hasCustomPrompt="1"/>
+          </p:nvPr>
+        </p:nvSpPr>
+        <p:spPr>
+          <a:xfrm>
+            <a:off x="381000" y="1825625"/>
+            <a:ext cx="11430000" cy="4351338"/>
+          </a:xfrm>
+          <a:prstGeom prst="rect">
+            <a:avLst/>
+          </a:prstGeom>
+        </p:spPr>
+        <p:txBody>
+          <a:bodyPr vert="horz" lIns="91440" tIns="45720" rIns="91440" bIns="45720" rtlCol="0">
+            <a:noAutofit/>
+          </a:bodyPr>
+          <a:lstStyle>
+            <a:lvl1pPr marL="0" indent="0" algn="l" defTabSz="914400" rtl="0" eaLnBrk="1" latinLnBrk="0" hangingPunct="1">
+              <a:lnSpc>
+                <a:spcPct val="90000"/>
+              </a:lnSpc>
+              <a:spcBef>
+                <a:spcPts val="1000"/>
+              </a:spcBef>
+              <a:buFont typeface="Arial" panose="020B0604020202020204" pitchFamily="34" charset="0"/>
+              <a:buNone/>
+              <a:defRPr sz="2000" b="0" kern="1200">
+                <a:solidFill>
+                  <a:schemeClr val="tx1"/>
+                </a:solidFill>
+                <a:latin typeface="+mn-lt"/>
+                <a:ea typeface="+mn-ea"/>
+                <a:cs typeface="+mn-cs"/>
+              </a:defRPr>
+            </a:lvl1pPr>
+            <a:lvl2pPr marL="685800" indent="-228600" algn="l" defTabSz="914400" rtl="0" eaLnBrk="1" latinLnBrk="0" hangingPunct="1">
+              <a:lnSpc>
+                <a:spcPct val="90000"/>
+              </a:lnSpc>
+              <a:spcBef>
+                <a:spcPts val="500"/>
+              </a:spcBef>
+              <a:buFont typeface="Arial" panose="020B0604020202020204" pitchFamily="34" charset="0"/>
+              <a:buChar char="•"/>
+              <a:defRPr sz="2400" b="0" kern="1200">
+                <a:solidFill>
+                  <a:schemeClr val="tx1"/>
+                </a:solidFill>
+                <a:latin typeface="+mn-lt"/>
+                <a:ea typeface="+mn-ea"/>
+                <a:cs typeface="+mn-cs"/>
+              </a:defRPr>
+            </a:lvl2pPr>
+            <a:lvl3pPr marL="1143000" indent="-228600" algn="l" defTabSz="914400" rtl="0" eaLnBrk="1" latinLnBrk="0" hangingPunct="1">
+              <a:lnSpc>
+                <a:spcPct val="90000"/>
+              </a:lnSpc>
+              <a:spcBef>
+                <a:spcPts val="500"/>
+              </a:spcBef>
+              <a:buFont typeface="Arial" panose="020B0604020202020204" pitchFamily="34" charset="0"/>
+              <a:buChar char="•"/>
+              <a:defRPr sz="2000" b="0" kern="1200">
+                <a:solidFill>
+                  <a:schemeClr val="tx1"/>
+                </a:solidFill>
+                <a:latin typeface="+mn-lt"/>
+                <a:ea typeface="+mn-ea"/>
+                <a:cs typeface="+mn-cs"/>
+              </a:defRPr>
+            </a:lvl3pPr>
+            <a:lvl4pPr marL="1600200" indent="-228600" algn="l" defTabSz="914400" rtl="0" eaLnBrk="1" latinLnBrk="0" hangingPunct="1">
+              <a:lnSpc>
+                <a:spcPct val="90000"/>
+              </a:lnSpc>
+              <a:spcBef>
+                <a:spcPts val="500"/>
+              </a:spcBef>
+              <a:buFont typeface="Arial" panose="020B0604020202020204" pitchFamily="34" charset="0"/>
+              <a:buChar char="•"/>
+              <a:defRPr sz="1800" b="0" kern="1200">
+                <a:solidFill>
+                  <a:schemeClr val="tx1"/>
+                </a:solidFill>
+                <a:latin typeface="+mn-lt"/>
+                <a:ea typeface="+mn-ea"/>
+                <a:cs typeface="+mn-cs"/>
+              </a:defRPr>
+            </a:lvl4pPr>
+            <a:lvl5pPr marL="2057400" indent="-228600" algn="l" defTabSz="914400" rtl="0" eaLnBrk="1" latinLnBrk="0" hangingPunct="1">
+              <a:lnSpc>
+                <a:spcPct val="90000"/>
+              </a:lnSpc>
+              <a:spcBef>
+                <a:spcPts val="500"/>
+              </a:spcBef>
+              <a:buFont typeface="Arial" panose="020B0604020202020204" pitchFamily="34" charset="0"/>
+              <a:buChar char="•"/>
+              <a:defRPr sz="1800" b="0" kern="1200">
+                <a:solidFill>
+                  <a:schemeClr val="tx1"/>
+                </a:solidFill>
+                <a:latin typeface="+mn-lt"/>
+                <a:ea typeface="+mn-ea"/>
+                <a:cs typeface="+mn-cs"/>
+              </a:defRPr>
+            </a:lvl5pPr>
+            <a:lvl6pPr marL="2514600" indent="-228600" algn="l" defTabSz="914400" rtl="0" eaLnBrk="1" latinLnBrk="0" hangingPunct="1">
+              <a:lnSpc>
+                <a:spcPct val="90000"/>
+              </a:lnSpc>
+              <a:spcBef>
+                <a:spcPts val="500"/>
+              </a:spcBef>
+              <a:buFont typeface="Arial" panose="020B0604020202020204" pitchFamily="34" charset="0"/>
+              <a:buChar char="•"/>
+              <a:defRPr sz="1800" kern="1200">
+                <a:solidFill>
+                  <a:schemeClr val="tx1"/>
+                </a:solidFill>
+                <a:latin typeface="+mn-lt"/>
+                <a:ea typeface="+mn-ea"/>
+                <a:cs typeface="+mn-cs"/>
+              </a:defRPr>
+            </a:lvl6pPr>
+            <a:lvl7pPr marL="2971800" indent="-228600" algn="l" defTabSz="914400" rtl="0" eaLnBrk="1" latinLnBrk="0" hangingPunct="1">
+              <a:lnSpc>
+                <a:spcPct val="90000"/>
+              </a:lnSpc>
+              <a:spcBef>
+                <a:spcPts val="500"/>
+              </a:spcBef>
+              <a:buFont typeface="Arial" panose="020B0604020202020204" pitchFamily="34" charset="0"/>
+              <a:buChar char="•"/>
+              <a:defRPr sz="1800" kern="1200">
+                <a:solidFill>
+                  <a:schemeClr val="tx1"/>
+                </a:solidFill>
+                <a:latin typeface="+mn-lt"/>
+                <a:ea typeface="+mn-ea"/>
+                <a:cs typeface="+mn-cs"/>
+              </a:defRPr>
+            </a:lvl7pPr>
+            <a:lvl8pPr marL="3429000" indent="-228600" algn="l" defTabSz="914400" rtl="0" eaLnBrk="1" latinLnBrk="0" hangingPunct="1">
+              <a:lnSpc>
+                <a:spcPct val="90000"/>
+              </a:lnSpc>
+              <a:spcBef>
+                <a:spcPts val="500"/>
+              </a:spcBef>
+              <a:buFont typeface="Arial" panose="020B0604020202020204" pitchFamily="34" charset="0"/>
+              <a:buChar char="•"/>
+              <a:defRPr sz="1800" kern="1200">
+                <a:solidFill>
+                  <a:schemeClr val="tx1"/>
+                </a:solidFill>
+                <a:latin typeface="+mn-lt"/>
+                <a:ea typeface="+mn-ea"/>
+                <a:cs typeface="+mn-cs"/>
+              </a:defRPr>
+            </a:lvl8pPr>
+            <a:lvl9pPr marL="3886200" indent="-228600" algn="l" defTabSz="914400" rtl="0" eaLnBrk="1" latinLnBrk="0" hangingPunct="1">
+              <a:lnSpc>
+                <a:spcPct val="90000"/>
+              </a:lnSpc>
+              <a:spcBef>
+                <a:spcPts val="500"/>
+              </a:spcBef>
+              <a:buFont typeface="Arial" panose="020B0604020202020204" pitchFamily="34" charset="0"/>
+              <a:buChar char="•"/>
+              <a:defRPr sz="1800" kern="1200">
+                <a:solidFill>
+                  <a:schemeClr val="tx1"/>
+                </a:solidFill>
+                <a:latin typeface="+mn-lt"/>
+                <a:ea typeface="+mn-ea"/>
+                <a:cs typeface="+mn-cs"/>
+              </a:defRPr>
+            </a:lvl9pPr>
+          </a:lstStyle>
+          <a:p>
+            <a:r>
+              <a:rPr lang="en-US" dirty="0"/>
+              <a:t>A bulleted list of items and a short conclusion text</a:t>
+            </a:r>
+          </a:p>
+        </p:txBody>
+      </p:sp>
+    </p:spTree>
+    <p:extLst>
+      <p:ext uri="{BB962C8B-B14F-4D97-AF65-F5344CB8AC3E}">
+        <p14:creationId xmlns:p14="http://schemas.microsoft.com/office/powerpoint/2010/main" val="88811751"/>
       </p:ext>
     </p:extLst>
   </p:cSld>
@@ -5883,7 +6259,7 @@
           <p:nvPr userDrawn="1"/>
         </p:nvPicPr>
         <p:blipFill>
-          <a:blip r:embed="rId12"/>
+          <a:blip r:embed="rId13"/>
           <a:stretch>
             <a:fillRect/>
           </a:stretch>
@@ -5946,14 +6322,15 @@
   <p:sldLayoutIdLst>
     <p:sldLayoutId id="2147483649" r:id="rId1"/>
     <p:sldLayoutId id="2147483671" r:id="rId2"/>
-    <p:sldLayoutId id="2147483672" r:id="rId3"/>
-    <p:sldLayoutId id="2147483673" r:id="rId4"/>
-    <p:sldLayoutId id="2147483666" r:id="rId5"/>
-    <p:sldLayoutId id="2147483667" r:id="rId6"/>
-    <p:sldLayoutId id="2147483668" r:id="rId7"/>
-    <p:sldLayoutId id="2147483650" r:id="rId8"/>
-    <p:sldLayoutId id="2147483675" r:id="rId9"/>
-    <p:sldLayoutId id="2147483674" r:id="rId10"/>
+    <p:sldLayoutId id="2147483666" r:id="rId3"/>
+    <p:sldLayoutId id="2147483667" r:id="rId4"/>
+    <p:sldLayoutId id="2147483668" r:id="rId5"/>
+    <p:sldLayoutId id="2147483650" r:id="rId6"/>
+    <p:sldLayoutId id="2147483675" r:id="rId7"/>
+    <p:sldLayoutId id="2147483674" r:id="rId8"/>
+    <p:sldLayoutId id="2147483676" r:id="rId9"/>
+    <p:sldLayoutId id="2147483672" r:id="rId10"/>
+    <p:sldLayoutId id="2147483673" r:id="rId11"/>
   </p:sldLayoutIdLst>
   <p:hf hdr="0" ftr="0" dt="0"/>
   <p:txStyles>

--- a/ekona_slides_template_new.pptx
+++ b/ekona_slides_template_new.pptx
@@ -7,6 +7,9 @@
   <p:notesMasterIdLst>
     <p:notesMasterId r:id="rId5"/>
   </p:notesMasterIdLst>
+  <p:handoutMasterIdLst>
+    <p:handoutMasterId r:id="rId6"/>
+  </p:handoutMasterIdLst>
   <p:sldSz cx="12192000" cy="6858000"/>
   <p:notesSz cx="6858000" cy="9144000"/>
   <p:defaultTextStyle>
@@ -115,7 +118,7 @@
 <file path=ppt/revisionInfo.xml><?xml version="1.0" encoding="utf-8"?>
 <p1510:revInfo xmlns:a="http://schemas.openxmlformats.org/drawingml/2006/main" xmlns:r="http://schemas.openxmlformats.org/officeDocument/2006/relationships" xmlns:p1510="http://schemas.microsoft.com/office/powerpoint/2015/10/main">
   <p1510:revLst>
-    <p1510:client id="{651B6F30-EC96-2340-AD4B-07A6B9855D0C}" v="124" dt="2025-07-17T20:39:56.478"/>
+    <p1510:client id="{651B6F30-EC96-2340-AD4B-07A6B9855D0C}" v="125" dt="2025-07-17T22:12:58.955"/>
   </p1510:revLst>
 </p1510:revInfo>
 </file>
@@ -125,7 +128,7 @@
   <pc:docChgLst>
     <pc:chgData name="Sam Khalil" userId="82cd1ec2-6208-465b-9d4d-40ce8f0cbf96" providerId="ADAL" clId="{651B6F30-EC96-2340-AD4B-07A6B9855D0C}"/>
     <pc:docChg chg="undo custSel addSld delSld modSld modMainMaster">
-      <pc:chgData name="Sam Khalil" userId="82cd1ec2-6208-465b-9d4d-40ce8f0cbf96" providerId="ADAL" clId="{651B6F30-EC96-2340-AD4B-07A6B9855D0C}" dt="2025-07-17T21:10:32.513" v="1239" actId="20578"/>
+      <pc:chgData name="Sam Khalil" userId="82cd1ec2-6208-465b-9d4d-40ce8f0cbf96" providerId="ADAL" clId="{651B6F30-EC96-2340-AD4B-07A6B9855D0C}" dt="2025-07-17T22:40:18.173" v="1351" actId="1076"/>
       <pc:docMkLst>
         <pc:docMk/>
       </pc:docMkLst>
@@ -188,7 +191,7 @@
         </pc:sldMkLst>
       </pc:sldChg>
       <pc:sldMasterChg chg="addSldLayout delSldLayout modSldLayout sldLayoutOrd">
-        <pc:chgData name="Sam Khalil" userId="82cd1ec2-6208-465b-9d4d-40ce8f0cbf96" providerId="ADAL" clId="{651B6F30-EC96-2340-AD4B-07A6B9855D0C}" dt="2025-07-17T21:10:32.513" v="1239" actId="20578"/>
+        <pc:chgData name="Sam Khalil" userId="82cd1ec2-6208-465b-9d4d-40ce8f0cbf96" providerId="ADAL" clId="{651B6F30-EC96-2340-AD4B-07A6B9855D0C}" dt="2025-07-17T22:40:18.173" v="1351" actId="1076"/>
         <pc:sldMasterMkLst>
           <pc:docMk/>
           <pc:sldMasterMk cId="2940896467" sldId="2147483648"/>
@@ -730,10 +733,332 @@
             </ac:spMkLst>
           </pc:spChg>
         </pc:sldLayoutChg>
+        <pc:sldLayoutChg chg="modSp add mod modTransition">
+          <pc:chgData name="Sam Khalil" userId="82cd1ec2-6208-465b-9d4d-40ce8f0cbf96" providerId="ADAL" clId="{651B6F30-EC96-2340-AD4B-07A6B9855D0C}" dt="2025-07-17T22:12:58.955" v="1348" actId="962"/>
+          <pc:sldLayoutMkLst>
+            <pc:docMk/>
+            <pc:sldMasterMk cId="2940896467" sldId="2147483648"/>
+            <pc:sldLayoutMk cId="3855316400" sldId="2147483677"/>
+          </pc:sldLayoutMkLst>
+          <pc:spChg chg="mod">
+            <ac:chgData name="Sam Khalil" userId="82cd1ec2-6208-465b-9d4d-40ce8f0cbf96" providerId="ADAL" clId="{651B6F30-EC96-2340-AD4B-07A6B9855D0C}" dt="2025-07-17T22:12:58.955" v="1348" actId="962"/>
+            <ac:spMkLst>
+              <pc:docMk/>
+              <pc:sldMasterMk cId="2940896467" sldId="2147483648"/>
+              <pc:sldLayoutMk cId="3855316400" sldId="2147483677"/>
+              <ac:spMk id="15" creationId="{6AB10746-1273-02BA-C457-602DEDA7F5F4}"/>
+            </ac:spMkLst>
+          </pc:spChg>
+        </pc:sldLayoutChg>
+        <pc:sldLayoutChg chg="delSp modSp add mod modTransition">
+          <pc:chgData name="Sam Khalil" userId="82cd1ec2-6208-465b-9d4d-40ce8f0cbf96" providerId="ADAL" clId="{651B6F30-EC96-2340-AD4B-07A6B9855D0C}" dt="2025-07-17T22:40:18.173" v="1351" actId="1076"/>
+          <pc:sldLayoutMkLst>
+            <pc:docMk/>
+            <pc:sldMasterMk cId="2940896467" sldId="2147483648"/>
+            <pc:sldLayoutMk cId="2538074859" sldId="2147483678"/>
+          </pc:sldLayoutMkLst>
+          <pc:spChg chg="mod">
+            <ac:chgData name="Sam Khalil" userId="82cd1ec2-6208-465b-9d4d-40ce8f0cbf96" providerId="ADAL" clId="{651B6F30-EC96-2340-AD4B-07A6B9855D0C}" dt="2025-07-17T22:40:18.173" v="1351" actId="1076"/>
+            <ac:spMkLst>
+              <pc:docMk/>
+              <pc:sldMasterMk cId="2940896467" sldId="2147483648"/>
+              <pc:sldLayoutMk cId="2538074859" sldId="2147483678"/>
+              <ac:spMk id="3" creationId="{B62AA6DB-552A-718F-DB54-C39FC857289E}"/>
+            </ac:spMkLst>
+          </pc:spChg>
+          <pc:spChg chg="mod">
+            <ac:chgData name="Sam Khalil" userId="82cd1ec2-6208-465b-9d4d-40ce8f0cbf96" providerId="ADAL" clId="{651B6F30-EC96-2340-AD4B-07A6B9855D0C}" dt="2025-07-17T22:40:18.173" v="1351" actId="1076"/>
+            <ac:spMkLst>
+              <pc:docMk/>
+              <pc:sldMasterMk cId="2940896467" sldId="2147483648"/>
+              <pc:sldLayoutMk cId="2538074859" sldId="2147483678"/>
+              <ac:spMk id="4" creationId="{127F3D65-4217-C7DF-99AC-5D0069212872}"/>
+            </ac:spMkLst>
+          </pc:spChg>
+          <pc:spChg chg="del">
+            <ac:chgData name="Sam Khalil" userId="82cd1ec2-6208-465b-9d4d-40ce8f0cbf96" providerId="ADAL" clId="{651B6F30-EC96-2340-AD4B-07A6B9855D0C}" dt="2025-07-17T22:40:12.022" v="1350" actId="478"/>
+            <ac:spMkLst>
+              <pc:docMk/>
+              <pc:sldMasterMk cId="2940896467" sldId="2147483648"/>
+              <pc:sldLayoutMk cId="2538074859" sldId="2147483678"/>
+              <ac:spMk id="5" creationId="{3EC742A8-1DE0-BB3C-0CAC-88DE22F8BB50}"/>
+            </ac:spMkLst>
+          </pc:spChg>
+          <pc:spChg chg="del">
+            <ac:chgData name="Sam Khalil" userId="82cd1ec2-6208-465b-9d4d-40ce8f0cbf96" providerId="ADAL" clId="{651B6F30-EC96-2340-AD4B-07A6B9855D0C}" dt="2025-07-17T22:40:12.022" v="1350" actId="478"/>
+            <ac:spMkLst>
+              <pc:docMk/>
+              <pc:sldMasterMk cId="2940896467" sldId="2147483648"/>
+              <pc:sldLayoutMk cId="2538074859" sldId="2147483678"/>
+              <ac:spMk id="6" creationId="{78C25294-674A-0237-57DC-CE5D5F857C77}"/>
+            </ac:spMkLst>
+          </pc:spChg>
+          <pc:spChg chg="mod">
+            <ac:chgData name="Sam Khalil" userId="82cd1ec2-6208-465b-9d4d-40ce8f0cbf96" providerId="ADAL" clId="{651B6F30-EC96-2340-AD4B-07A6B9855D0C}" dt="2025-07-17T22:40:18.173" v="1351" actId="1076"/>
+            <ac:spMkLst>
+              <pc:docMk/>
+              <pc:sldMasterMk cId="2940896467" sldId="2147483648"/>
+              <pc:sldLayoutMk cId="2538074859" sldId="2147483678"/>
+              <ac:spMk id="7" creationId="{B52E7DE5-AE9F-8300-785A-713154A75462}"/>
+            </ac:spMkLst>
+          </pc:spChg>
+          <pc:spChg chg="del">
+            <ac:chgData name="Sam Khalil" userId="82cd1ec2-6208-465b-9d4d-40ce8f0cbf96" providerId="ADAL" clId="{651B6F30-EC96-2340-AD4B-07A6B9855D0C}" dt="2025-07-17T22:40:12.022" v="1350" actId="478"/>
+            <ac:spMkLst>
+              <pc:docMk/>
+              <pc:sldMasterMk cId="2940896467" sldId="2147483648"/>
+              <pc:sldLayoutMk cId="2538074859" sldId="2147483678"/>
+              <ac:spMk id="8" creationId="{DCEA0E39-252E-0FD3-E342-D8B9B2DD48A8}"/>
+            </ac:spMkLst>
+          </pc:spChg>
+          <pc:spChg chg="mod">
+            <ac:chgData name="Sam Khalil" userId="82cd1ec2-6208-465b-9d4d-40ce8f0cbf96" providerId="ADAL" clId="{651B6F30-EC96-2340-AD4B-07A6B9855D0C}" dt="2025-07-17T22:40:18.173" v="1351" actId="1076"/>
+            <ac:spMkLst>
+              <pc:docMk/>
+              <pc:sldMasterMk cId="2940896467" sldId="2147483648"/>
+              <pc:sldLayoutMk cId="2538074859" sldId="2147483678"/>
+              <ac:spMk id="9" creationId="{07863F40-906D-B17E-DD34-0C4676049440}"/>
+            </ac:spMkLst>
+          </pc:spChg>
+          <pc:spChg chg="mod">
+            <ac:chgData name="Sam Khalil" userId="82cd1ec2-6208-465b-9d4d-40ce8f0cbf96" providerId="ADAL" clId="{651B6F30-EC96-2340-AD4B-07A6B9855D0C}" dt="2025-07-17T22:40:18.173" v="1351" actId="1076"/>
+            <ac:spMkLst>
+              <pc:docMk/>
+              <pc:sldMasterMk cId="2940896467" sldId="2147483648"/>
+              <pc:sldLayoutMk cId="2538074859" sldId="2147483678"/>
+              <ac:spMk id="10" creationId="{043770B4-6CFD-292F-F28C-20F74E151142}"/>
+            </ac:spMkLst>
+          </pc:spChg>
+          <pc:spChg chg="mod">
+            <ac:chgData name="Sam Khalil" userId="82cd1ec2-6208-465b-9d4d-40ce8f0cbf96" providerId="ADAL" clId="{651B6F30-EC96-2340-AD4B-07A6B9855D0C}" dt="2025-07-17T22:40:18.173" v="1351" actId="1076"/>
+            <ac:spMkLst>
+              <pc:docMk/>
+              <pc:sldMasterMk cId="2940896467" sldId="2147483648"/>
+              <pc:sldLayoutMk cId="2538074859" sldId="2147483678"/>
+              <ac:spMk id="11" creationId="{F718040C-7B8A-9487-484F-776F0815B5C6}"/>
+            </ac:spMkLst>
+          </pc:spChg>
+          <pc:spChg chg="mod">
+            <ac:chgData name="Sam Khalil" userId="82cd1ec2-6208-465b-9d4d-40ce8f0cbf96" providerId="ADAL" clId="{651B6F30-EC96-2340-AD4B-07A6B9855D0C}" dt="2025-07-17T22:40:18.173" v="1351" actId="1076"/>
+            <ac:spMkLst>
+              <pc:docMk/>
+              <pc:sldMasterMk cId="2940896467" sldId="2147483648"/>
+              <pc:sldLayoutMk cId="2538074859" sldId="2147483678"/>
+              <ac:spMk id="12" creationId="{C9C69509-EA90-629E-7594-6FF7D385A0E7}"/>
+            </ac:spMkLst>
+          </pc:spChg>
+          <pc:spChg chg="mod">
+            <ac:chgData name="Sam Khalil" userId="82cd1ec2-6208-465b-9d4d-40ce8f0cbf96" providerId="ADAL" clId="{651B6F30-EC96-2340-AD4B-07A6B9855D0C}" dt="2025-07-17T22:40:18.173" v="1351" actId="1076"/>
+            <ac:spMkLst>
+              <pc:docMk/>
+              <pc:sldMasterMk cId="2940896467" sldId="2147483648"/>
+              <pc:sldLayoutMk cId="2538074859" sldId="2147483678"/>
+              <ac:spMk id="13" creationId="{72AA8F7B-26F0-198C-F59E-D4EAAA390678}"/>
+            </ac:spMkLst>
+          </pc:spChg>
+          <pc:spChg chg="del">
+            <ac:chgData name="Sam Khalil" userId="82cd1ec2-6208-465b-9d4d-40ce8f0cbf96" providerId="ADAL" clId="{651B6F30-EC96-2340-AD4B-07A6B9855D0C}" dt="2025-07-17T22:40:12.022" v="1350" actId="478"/>
+            <ac:spMkLst>
+              <pc:docMk/>
+              <pc:sldMasterMk cId="2940896467" sldId="2147483648"/>
+              <pc:sldLayoutMk cId="2538074859" sldId="2147483678"/>
+              <ac:spMk id="14" creationId="{BCEDE17A-C31D-39B6-1DD5-DFF09F743405}"/>
+            </ac:spMkLst>
+          </pc:spChg>
+        </pc:sldLayoutChg>
       </pc:sldMasterChg>
     </pc:docChg>
   </pc:docChgLst>
 </pc:chgInfo>
+</file>
+
+<file path=ppt/handoutMasters/handoutMaster1.xml><?xml version="1.0" encoding="utf-8"?>
+<p:handoutMaster xmlns:a="http://schemas.openxmlformats.org/drawingml/2006/main" xmlns:r="http://schemas.openxmlformats.org/officeDocument/2006/relationships" xmlns:p="http://schemas.openxmlformats.org/presentationml/2006/main">
+  <p:cSld>
+    <p:bg>
+      <p:bgRef idx="1001">
+        <a:schemeClr val="bg1"/>
+      </p:bgRef>
+    </p:bg>
+    <p:spTree>
+      <p:nvGrpSpPr>
+        <p:cNvPr id="1" name=""/>
+        <p:cNvGrpSpPr/>
+        <p:nvPr/>
+      </p:nvGrpSpPr>
+      <p:grpSpPr>
+        <a:xfrm>
+          <a:off x="0" y="0"/>
+          <a:ext cx="0" cy="0"/>
+          <a:chOff x="0" y="0"/>
+          <a:chExt cx="0" cy="0"/>
+        </a:xfrm>
+      </p:grpSpPr>
+      <p:sp>
+        <p:nvSpPr>
+          <p:cNvPr id="2" name="Header Placeholder 1">
+            <a:extLst>
+              <a:ext uri="{FF2B5EF4-FFF2-40B4-BE49-F238E27FC236}">
+                <a16:creationId xmlns:a16="http://schemas.microsoft.com/office/drawing/2014/main" id="{8F176276-5C93-B291-1FFA-5EE57E770999}"/>
+              </a:ext>
+            </a:extLst>
+          </p:cNvPr>
+          <p:cNvSpPr>
+            <a:spLocks noGrp="1"/>
+          </p:cNvSpPr>
+          <p:nvPr>
+            <p:ph type="hdr" sz="quarter"/>
+          </p:nvPr>
+        </p:nvSpPr>
+        <p:spPr>
+          <a:xfrm>
+            <a:off x="0" y="0"/>
+            <a:ext cx="2971800" cy="458788"/>
+          </a:xfrm>
+          <a:prstGeom prst="rect">
+            <a:avLst/>
+          </a:prstGeom>
+        </p:spPr>
+        <p:txBody>
+          <a:bodyPr vert="horz" lIns="91440" tIns="45720" rIns="91440" bIns="45720" rtlCol="0"/>
+          <a:lstStyle>
+            <a:lvl1pPr algn="l">
+              <a:defRPr sz="1200"/>
+            </a:lvl1pPr>
+          </a:lstStyle>
+          <a:p>
+            <a:endParaRPr lang="en-US"/>
+          </a:p>
+        </p:txBody>
+      </p:sp>
+      <p:sp>
+        <p:nvSpPr>
+          <p:cNvPr id="3" name="Date Placeholder 2">
+            <a:extLst>
+              <a:ext uri="{FF2B5EF4-FFF2-40B4-BE49-F238E27FC236}">
+                <a16:creationId xmlns:a16="http://schemas.microsoft.com/office/drawing/2014/main" id="{82ABEB5B-200E-F336-CA88-E868C611F540}"/>
+              </a:ext>
+            </a:extLst>
+          </p:cNvPr>
+          <p:cNvSpPr>
+            <a:spLocks noGrp="1"/>
+          </p:cNvSpPr>
+          <p:nvPr>
+            <p:ph type="dt" sz="quarter" idx="1"/>
+          </p:nvPr>
+        </p:nvSpPr>
+        <p:spPr>
+          <a:xfrm>
+            <a:off x="3884613" y="0"/>
+            <a:ext cx="2971800" cy="458788"/>
+          </a:xfrm>
+          <a:prstGeom prst="rect">
+            <a:avLst/>
+          </a:prstGeom>
+        </p:spPr>
+        <p:txBody>
+          <a:bodyPr vert="horz" lIns="91440" tIns="45720" rIns="91440" bIns="45720" rtlCol="0"/>
+          <a:lstStyle>
+            <a:lvl1pPr algn="r">
+              <a:defRPr sz="1200"/>
+            </a:lvl1pPr>
+          </a:lstStyle>
+          <a:p>
+            <a:fld id="{D2339670-67E6-CD42-B7B2-F285F1108ED9}" type="datetimeFigureOut">
+              <a:rPr lang="en-US" smtClean="0"/>
+              <a:t>7/18/25</a:t>
+            </a:fld>
+            <a:endParaRPr lang="en-US"/>
+          </a:p>
+        </p:txBody>
+      </p:sp>
+      <p:sp>
+        <p:nvSpPr>
+          <p:cNvPr id="4" name="Footer Placeholder 3">
+            <a:extLst>
+              <a:ext uri="{FF2B5EF4-FFF2-40B4-BE49-F238E27FC236}">
+                <a16:creationId xmlns:a16="http://schemas.microsoft.com/office/drawing/2014/main" id="{E6ACAD6E-E91B-6F1E-E490-AC92B1EAA655}"/>
+              </a:ext>
+            </a:extLst>
+          </p:cNvPr>
+          <p:cNvSpPr>
+            <a:spLocks noGrp="1"/>
+          </p:cNvSpPr>
+          <p:nvPr>
+            <p:ph type="ftr" sz="quarter" idx="2"/>
+          </p:nvPr>
+        </p:nvSpPr>
+        <p:spPr>
+          <a:xfrm>
+            <a:off x="0" y="8685213"/>
+            <a:ext cx="2971800" cy="458787"/>
+          </a:xfrm>
+          <a:prstGeom prst="rect">
+            <a:avLst/>
+          </a:prstGeom>
+        </p:spPr>
+        <p:txBody>
+          <a:bodyPr vert="horz" lIns="91440" tIns="45720" rIns="91440" bIns="45720" rtlCol="0" anchor="b"/>
+          <a:lstStyle>
+            <a:lvl1pPr algn="l">
+              <a:defRPr sz="1200"/>
+            </a:lvl1pPr>
+          </a:lstStyle>
+          <a:p>
+            <a:endParaRPr lang="en-US"/>
+          </a:p>
+        </p:txBody>
+      </p:sp>
+      <p:sp>
+        <p:nvSpPr>
+          <p:cNvPr id="5" name="Slide Number Placeholder 4">
+            <a:extLst>
+              <a:ext uri="{FF2B5EF4-FFF2-40B4-BE49-F238E27FC236}">
+                <a16:creationId xmlns:a16="http://schemas.microsoft.com/office/drawing/2014/main" id="{EFFA7424-9AC4-0A8C-73C0-968DEE32D004}"/>
+              </a:ext>
+            </a:extLst>
+          </p:cNvPr>
+          <p:cNvSpPr>
+            <a:spLocks noGrp="1"/>
+          </p:cNvSpPr>
+          <p:nvPr>
+            <p:ph type="sldNum" sz="quarter" idx="3"/>
+          </p:nvPr>
+        </p:nvSpPr>
+        <p:spPr>
+          <a:xfrm>
+            <a:off x="3884613" y="8685213"/>
+            <a:ext cx="2971800" cy="458787"/>
+          </a:xfrm>
+          <a:prstGeom prst="rect">
+            <a:avLst/>
+          </a:prstGeom>
+        </p:spPr>
+        <p:txBody>
+          <a:bodyPr vert="horz" lIns="91440" tIns="45720" rIns="91440" bIns="45720" rtlCol="0" anchor="b"/>
+          <a:lstStyle>
+            <a:lvl1pPr algn="r">
+              <a:defRPr sz="1200"/>
+            </a:lvl1pPr>
+          </a:lstStyle>
+          <a:p>
+            <a:fld id="{258E359B-77B9-AE44-954F-84AC5F143DB8}" type="slidenum">
+              <a:rPr lang="en-US" smtClean="0"/>
+              <a:t>‹#›</a:t>
+            </a:fld>
+            <a:endParaRPr lang="en-US"/>
+          </a:p>
+        </p:txBody>
+      </p:sp>
+    </p:spTree>
+    <p:extLst>
+      <p:ext uri="{BB962C8B-B14F-4D97-AF65-F5344CB8AC3E}">
+        <p14:creationId xmlns:p14="http://schemas.microsoft.com/office/powerpoint/2010/main" val="1304214745"/>
+      </p:ext>
+    </p:extLst>
+  </p:cSld>
+  <p:clrMap bg1="lt1" tx1="dk1" bg2="lt2" tx2="dk2" accent1="accent1" accent2="accent2" accent3="accent3" accent4="accent4" accent5="accent5" accent6="accent6" hlink="hlink" folHlink="folHlink"/>
+</p:handoutMaster>
 </file>
 
 <file path=ppt/notesMasters/notesMaster1.xml><?xml version="1.0" encoding="utf-8"?>
@@ -1220,6 +1545,293 @@
 
 <file path=ppt/slideLayouts/slideLayout10.xml><?xml version="1.0" encoding="utf-8"?>
 <p:sldLayout xmlns:a="http://schemas.openxmlformats.org/drawingml/2006/main" xmlns:r="http://schemas.openxmlformats.org/officeDocument/2006/relationships" xmlns:p="http://schemas.openxmlformats.org/presentationml/2006/main" preserve="1" userDrawn="1">
+  <p:cSld name="1_Conclusion Slide">
+    <p:spTree>
+      <p:nvGrpSpPr>
+        <p:cNvPr id="1" name=""/>
+        <p:cNvGrpSpPr/>
+        <p:nvPr/>
+      </p:nvGrpSpPr>
+      <p:grpSpPr>
+        <a:xfrm>
+          <a:off x="0" y="0"/>
+          <a:ext cx="0" cy="0"/>
+          <a:chOff x="0" y="0"/>
+          <a:chExt cx="0" cy="0"/>
+        </a:xfrm>
+      </p:grpSpPr>
+      <p:sp>
+        <p:nvSpPr>
+          <p:cNvPr id="2" name="Conclusion Title">
+            <a:extLst>
+              <a:ext uri="{FF2B5EF4-FFF2-40B4-BE49-F238E27FC236}">
+                <a16:creationId xmlns:a16="http://schemas.microsoft.com/office/drawing/2014/main" id="{3CD97974-B93C-4C96-B3F6-F69E3D6DE6CA}"/>
+              </a:ext>
+            </a:extLst>
+          </p:cNvPr>
+          <p:cNvSpPr>
+            <a:spLocks noGrp="1"/>
+          </p:cNvSpPr>
+          <p:nvPr>
+            <p:ph type="title" hasCustomPrompt="1"/>
+          </p:nvPr>
+        </p:nvSpPr>
+        <p:spPr>
+          <a:xfrm>
+            <a:off x="381000" y="381000"/>
+            <a:ext cx="11430000" cy="1325563"/>
+          </a:xfrm>
+          <a:prstGeom prst="rect">
+            <a:avLst/>
+          </a:prstGeom>
+        </p:spPr>
+        <p:txBody>
+          <a:bodyPr vert="horz" lIns="91440" tIns="45720" rIns="91440" bIns="45720" rtlCol="0" anchor="ctr">
+            <a:noAutofit/>
+          </a:bodyPr>
+          <a:lstStyle>
+            <a:lvl1pPr algn="l" defTabSz="914400" rtl="0" eaLnBrk="1" latinLnBrk="0" hangingPunct="1">
+              <a:lnSpc>
+                <a:spcPct val="80000"/>
+              </a:lnSpc>
+              <a:spcBef>
+                <a:spcPct val="0"/>
+              </a:spcBef>
+              <a:buNone/>
+              <a:defRPr sz="4400" b="1" kern="1200">
+                <a:solidFill>
+                  <a:schemeClr val="tx1"/>
+                </a:solidFill>
+                <a:latin typeface="+mn-lt"/>
+                <a:ea typeface="+mj-ea"/>
+                <a:cs typeface="+mj-cs"/>
+              </a:defRPr>
+            </a:lvl1pPr>
+          </a:lstStyle>
+          <a:p>
+            <a:r>
+              <a:rPr lang="en-US" dirty="0"/>
+              <a:t>Short and clear conclusion Title</a:t>
+            </a:r>
+          </a:p>
+        </p:txBody>
+      </p:sp>
+      <p:sp>
+        <p:nvSpPr>
+          <p:cNvPr id="3" name="Conclusion text">
+            <a:extLst>
+              <a:ext uri="{FF2B5EF4-FFF2-40B4-BE49-F238E27FC236}">
+                <a16:creationId xmlns:a16="http://schemas.microsoft.com/office/drawing/2014/main" id="{8A6FC6F2-80B4-49A7-9448-33FE2DF0E967}"/>
+              </a:ext>
+            </a:extLst>
+          </p:cNvPr>
+          <p:cNvSpPr>
+            <a:spLocks noGrp="1"/>
+          </p:cNvSpPr>
+          <p:nvPr>
+            <p:ph idx="1" hasCustomPrompt="1"/>
+          </p:nvPr>
+        </p:nvSpPr>
+        <p:spPr>
+          <a:xfrm>
+            <a:off x="381000" y="1825625"/>
+            <a:ext cx="11430000" cy="4351338"/>
+          </a:xfrm>
+          <a:prstGeom prst="rect">
+            <a:avLst/>
+          </a:prstGeom>
+        </p:spPr>
+        <p:txBody>
+          <a:bodyPr vert="horz" lIns="91440" tIns="45720" rIns="91440" bIns="45720" rtlCol="0">
+            <a:noAutofit/>
+          </a:bodyPr>
+          <a:lstStyle>
+            <a:lvl1pPr marL="0" indent="0" algn="l" defTabSz="914400" rtl="0" eaLnBrk="1" latinLnBrk="0" hangingPunct="1">
+              <a:lnSpc>
+                <a:spcPct val="90000"/>
+              </a:lnSpc>
+              <a:spcBef>
+                <a:spcPts val="1000"/>
+              </a:spcBef>
+              <a:buFont typeface="Arial" panose="020B0604020202020204" pitchFamily="34" charset="0"/>
+              <a:buNone/>
+              <a:defRPr sz="2000" b="0" kern="1200">
+                <a:solidFill>
+                  <a:schemeClr val="tx1"/>
+                </a:solidFill>
+                <a:latin typeface="+mn-lt"/>
+                <a:ea typeface="+mn-ea"/>
+                <a:cs typeface="+mn-cs"/>
+              </a:defRPr>
+            </a:lvl1pPr>
+            <a:lvl2pPr marL="685800" indent="-228600" algn="l" defTabSz="914400" rtl="0" eaLnBrk="1" latinLnBrk="0" hangingPunct="1">
+              <a:lnSpc>
+                <a:spcPct val="90000"/>
+              </a:lnSpc>
+              <a:spcBef>
+                <a:spcPts val="500"/>
+              </a:spcBef>
+              <a:buFont typeface="Arial" panose="020B0604020202020204" pitchFamily="34" charset="0"/>
+              <a:buChar char="•"/>
+              <a:defRPr sz="2400" b="0" kern="1200">
+                <a:solidFill>
+                  <a:schemeClr val="tx1"/>
+                </a:solidFill>
+                <a:latin typeface="+mn-lt"/>
+                <a:ea typeface="+mn-ea"/>
+                <a:cs typeface="+mn-cs"/>
+              </a:defRPr>
+            </a:lvl2pPr>
+            <a:lvl3pPr marL="1143000" indent="-228600" algn="l" defTabSz="914400" rtl="0" eaLnBrk="1" latinLnBrk="0" hangingPunct="1">
+              <a:lnSpc>
+                <a:spcPct val="90000"/>
+              </a:lnSpc>
+              <a:spcBef>
+                <a:spcPts val="500"/>
+              </a:spcBef>
+              <a:buFont typeface="Arial" panose="020B0604020202020204" pitchFamily="34" charset="0"/>
+              <a:buChar char="•"/>
+              <a:defRPr sz="2000" b="0" kern="1200">
+                <a:solidFill>
+                  <a:schemeClr val="tx1"/>
+                </a:solidFill>
+                <a:latin typeface="+mn-lt"/>
+                <a:ea typeface="+mn-ea"/>
+                <a:cs typeface="+mn-cs"/>
+              </a:defRPr>
+            </a:lvl3pPr>
+            <a:lvl4pPr marL="1600200" indent="-228600" algn="l" defTabSz="914400" rtl="0" eaLnBrk="1" latinLnBrk="0" hangingPunct="1">
+              <a:lnSpc>
+                <a:spcPct val="90000"/>
+              </a:lnSpc>
+              <a:spcBef>
+                <a:spcPts val="500"/>
+              </a:spcBef>
+              <a:buFont typeface="Arial" panose="020B0604020202020204" pitchFamily="34" charset="0"/>
+              <a:buChar char="•"/>
+              <a:defRPr sz="1800" b="0" kern="1200">
+                <a:solidFill>
+                  <a:schemeClr val="tx1"/>
+                </a:solidFill>
+                <a:latin typeface="+mn-lt"/>
+                <a:ea typeface="+mn-ea"/>
+                <a:cs typeface="+mn-cs"/>
+              </a:defRPr>
+            </a:lvl4pPr>
+            <a:lvl5pPr marL="2057400" indent="-228600" algn="l" defTabSz="914400" rtl="0" eaLnBrk="1" latinLnBrk="0" hangingPunct="1">
+              <a:lnSpc>
+                <a:spcPct val="90000"/>
+              </a:lnSpc>
+              <a:spcBef>
+                <a:spcPts val="500"/>
+              </a:spcBef>
+              <a:buFont typeface="Arial" panose="020B0604020202020204" pitchFamily="34" charset="0"/>
+              <a:buChar char="•"/>
+              <a:defRPr sz="1800" b="0" kern="1200">
+                <a:solidFill>
+                  <a:schemeClr val="tx1"/>
+                </a:solidFill>
+                <a:latin typeface="+mn-lt"/>
+                <a:ea typeface="+mn-ea"/>
+                <a:cs typeface="+mn-cs"/>
+              </a:defRPr>
+            </a:lvl5pPr>
+            <a:lvl6pPr marL="2514600" indent="-228600" algn="l" defTabSz="914400" rtl="0" eaLnBrk="1" latinLnBrk="0" hangingPunct="1">
+              <a:lnSpc>
+                <a:spcPct val="90000"/>
+              </a:lnSpc>
+              <a:spcBef>
+                <a:spcPts val="500"/>
+              </a:spcBef>
+              <a:buFont typeface="Arial" panose="020B0604020202020204" pitchFamily="34" charset="0"/>
+              <a:buChar char="•"/>
+              <a:defRPr sz="1800" kern="1200">
+                <a:solidFill>
+                  <a:schemeClr val="tx1"/>
+                </a:solidFill>
+                <a:latin typeface="+mn-lt"/>
+                <a:ea typeface="+mn-ea"/>
+                <a:cs typeface="+mn-cs"/>
+              </a:defRPr>
+            </a:lvl6pPr>
+            <a:lvl7pPr marL="2971800" indent="-228600" algn="l" defTabSz="914400" rtl="0" eaLnBrk="1" latinLnBrk="0" hangingPunct="1">
+              <a:lnSpc>
+                <a:spcPct val="90000"/>
+              </a:lnSpc>
+              <a:spcBef>
+                <a:spcPts val="500"/>
+              </a:spcBef>
+              <a:buFont typeface="Arial" panose="020B0604020202020204" pitchFamily="34" charset="0"/>
+              <a:buChar char="•"/>
+              <a:defRPr sz="1800" kern="1200">
+                <a:solidFill>
+                  <a:schemeClr val="tx1"/>
+                </a:solidFill>
+                <a:latin typeface="+mn-lt"/>
+                <a:ea typeface="+mn-ea"/>
+                <a:cs typeface="+mn-cs"/>
+              </a:defRPr>
+            </a:lvl7pPr>
+            <a:lvl8pPr marL="3429000" indent="-228600" algn="l" defTabSz="914400" rtl="0" eaLnBrk="1" latinLnBrk="0" hangingPunct="1">
+              <a:lnSpc>
+                <a:spcPct val="90000"/>
+              </a:lnSpc>
+              <a:spcBef>
+                <a:spcPts val="500"/>
+              </a:spcBef>
+              <a:buFont typeface="Arial" panose="020B0604020202020204" pitchFamily="34" charset="0"/>
+              <a:buChar char="•"/>
+              <a:defRPr sz="1800" kern="1200">
+                <a:solidFill>
+                  <a:schemeClr val="tx1"/>
+                </a:solidFill>
+                <a:latin typeface="+mn-lt"/>
+                <a:ea typeface="+mn-ea"/>
+                <a:cs typeface="+mn-cs"/>
+              </a:defRPr>
+            </a:lvl8pPr>
+            <a:lvl9pPr marL="3886200" indent="-228600" algn="l" defTabSz="914400" rtl="0" eaLnBrk="1" latinLnBrk="0" hangingPunct="1">
+              <a:lnSpc>
+                <a:spcPct val="90000"/>
+              </a:lnSpc>
+              <a:spcBef>
+                <a:spcPts val="500"/>
+              </a:spcBef>
+              <a:buFont typeface="Arial" panose="020B0604020202020204" pitchFamily="34" charset="0"/>
+              <a:buChar char="•"/>
+              <a:defRPr sz="1800" kern="1200">
+                <a:solidFill>
+                  <a:schemeClr val="tx1"/>
+                </a:solidFill>
+                <a:latin typeface="+mn-lt"/>
+                <a:ea typeface="+mn-ea"/>
+                <a:cs typeface="+mn-cs"/>
+              </a:defRPr>
+            </a:lvl9pPr>
+          </a:lstStyle>
+          <a:p>
+            <a:r>
+              <a:rPr lang="en-US" dirty="0"/>
+              <a:t>A bulleted list of items and a short conclusion text</a:t>
+            </a:r>
+          </a:p>
+        </p:txBody>
+      </p:sp>
+    </p:spTree>
+    <p:extLst>
+      <p:ext uri="{BB962C8B-B14F-4D97-AF65-F5344CB8AC3E}">
+        <p14:creationId xmlns:p14="http://schemas.microsoft.com/office/powerpoint/2010/main" val="88811751"/>
+      </p:ext>
+    </p:extLst>
+  </p:cSld>
+  <p:clrMapOvr>
+    <a:masterClrMapping/>
+  </p:clrMapOvr>
+</p:sldLayout>
+</file>
+
+<file path=ppt/slideLayouts/slideLayout11.xml><?xml version="1.0" encoding="utf-8"?>
+<p:sldLayout xmlns:a="http://schemas.openxmlformats.org/drawingml/2006/main" xmlns:r="http://schemas.openxmlformats.org/officeDocument/2006/relationships" xmlns:p="http://schemas.openxmlformats.org/presentationml/2006/main" preserve="1" userDrawn="1">
   <p:cSld name="Branding Slide should always be added at the end of the deck">
     <p:spTree>
       <p:nvGrpSpPr>
@@ -1980,7 +2592,7 @@
 </p:sldLayout>
 </file>
 
-<file path=ppt/slideLayouts/slideLayout11.xml><?xml version="1.0" encoding="utf-8"?>
+<file path=ppt/slideLayouts/slideLayout12.xml><?xml version="1.0" encoding="utf-8"?>
 <p:sldLayout xmlns:a="http://schemas.openxmlformats.org/drawingml/2006/main" xmlns:r="http://schemas.openxmlformats.org/officeDocument/2006/relationships" xmlns:p="http://schemas.openxmlformats.org/presentationml/2006/main" preserve="1" userDrawn="1">
   <p:cSld name="Branding Slide #2 should always be added at the end of the deck">
     <p:spTree>
@@ -3803,6 +4415,301 @@
 
 <file path=ppt/slideLayouts/slideLayout4.xml><?xml version="1.0" encoding="utf-8"?>
 <p:sldLayout xmlns:a="http://schemas.openxmlformats.org/drawingml/2006/main" xmlns:r="http://schemas.openxmlformats.org/officeDocument/2006/relationships" xmlns:p="http://schemas.openxmlformats.org/presentationml/2006/main" preserve="1" userDrawn="1">
+  <p:cSld name="Title and Picture generated from HTML">
+    <p:spTree>
+      <p:nvGrpSpPr>
+        <p:cNvPr id="1" name=""/>
+        <p:cNvGrpSpPr/>
+        <p:nvPr/>
+      </p:nvGrpSpPr>
+      <p:grpSpPr>
+        <a:xfrm>
+          <a:off x="0" y="0"/>
+          <a:ext cx="0" cy="0"/>
+          <a:chOff x="0" y="0"/>
+          <a:chExt cx="0" cy="0"/>
+        </a:xfrm>
+      </p:grpSpPr>
+      <p:sp>
+        <p:nvSpPr>
+          <p:cNvPr id="2" name="Title">
+            <a:extLst>
+              <a:ext uri="{FF2B5EF4-FFF2-40B4-BE49-F238E27FC236}">
+                <a16:creationId xmlns:a16="http://schemas.microsoft.com/office/drawing/2014/main" id="{3CD97974-B93C-4C96-B3F6-F69E3D6DE6CA}"/>
+              </a:ext>
+            </a:extLst>
+          </p:cNvPr>
+          <p:cNvSpPr>
+            <a:spLocks noGrp="1"/>
+          </p:cNvSpPr>
+          <p:nvPr>
+            <p:ph type="title" hasCustomPrompt="1"/>
+          </p:nvPr>
+        </p:nvSpPr>
+        <p:spPr>
+          <a:xfrm>
+            <a:off x="381000" y="381000"/>
+            <a:ext cx="11430000" cy="1325563"/>
+          </a:xfrm>
+          <a:prstGeom prst="rect">
+            <a:avLst/>
+          </a:prstGeom>
+        </p:spPr>
+        <p:txBody>
+          <a:bodyPr vert="horz" lIns="91440" tIns="45720" rIns="91440" bIns="45720" rtlCol="0" anchor="ctr">
+            <a:noAutofit/>
+          </a:bodyPr>
+          <a:lstStyle>
+            <a:lvl1pPr algn="l" defTabSz="914400" rtl="0" eaLnBrk="1" latinLnBrk="0" hangingPunct="1">
+              <a:lnSpc>
+                <a:spcPct val="80000"/>
+              </a:lnSpc>
+              <a:spcBef>
+                <a:spcPct val="0"/>
+              </a:spcBef>
+              <a:buNone/>
+              <a:defRPr sz="4400" b="1" kern="1200">
+                <a:solidFill>
+                  <a:schemeClr val="tx1"/>
+                </a:solidFill>
+                <a:latin typeface="Calibri" panose="020F0502020204030204" pitchFamily="34" charset="0"/>
+                <a:ea typeface="+mj-ea"/>
+                <a:cs typeface="Calibri" panose="020F0502020204030204" pitchFamily="34" charset="0"/>
+              </a:defRPr>
+            </a:lvl1pPr>
+          </a:lstStyle>
+          <a:p>
+            <a:r>
+              <a:rPr lang="en-US" dirty="0"/>
+              <a:t>Title of the slide, short and concise</a:t>
+            </a:r>
+          </a:p>
+        </p:txBody>
+      </p:sp>
+      <p:sp>
+        <p:nvSpPr>
+          <p:cNvPr id="15" name="Picture from HTML">
+            <a:extLst>
+              <a:ext uri="{FF2B5EF4-FFF2-40B4-BE49-F238E27FC236}">
+                <a16:creationId xmlns:a16="http://schemas.microsoft.com/office/drawing/2014/main" id="{6AB10746-1273-02BA-C457-602DEDA7F5F4}"/>
+              </a:ext>
+            </a:extLst>
+          </p:cNvPr>
+          <p:cNvSpPr>
+            <a:spLocks noGrp="1"/>
+          </p:cNvSpPr>
+          <p:nvPr>
+            <p:ph type="pic" sz="quarter" idx="10" hasCustomPrompt="1"/>
+          </p:nvPr>
+        </p:nvSpPr>
+        <p:spPr>
+          <a:xfrm>
+            <a:off x="381000" y="1825625"/>
+            <a:ext cx="11430000" cy="4351338"/>
+          </a:xfrm>
+          <a:prstGeom prst="rect">
+            <a:avLst/>
+          </a:prstGeom>
+        </p:spPr>
+        <p:txBody>
+          <a:bodyPr vert="horz" lIns="91440" tIns="45720" rIns="91440" bIns="45720" rtlCol="0">
+            <a:noAutofit/>
+          </a:bodyPr>
+          <a:lstStyle>
+            <a:lvl1pPr marL="0" indent="0" algn="l" defTabSz="914400" rtl="0" eaLnBrk="1" latinLnBrk="0" hangingPunct="1">
+              <a:lnSpc>
+                <a:spcPct val="90000"/>
+              </a:lnSpc>
+              <a:spcBef>
+                <a:spcPts val="1000"/>
+              </a:spcBef>
+              <a:buFont typeface="Arial" panose="020B0604020202020204" pitchFamily="34" charset="0"/>
+              <a:buNone/>
+              <a:defRPr sz="2000" kern="1200">
+                <a:solidFill>
+                  <a:schemeClr val="tx1"/>
+                </a:solidFill>
+                <a:latin typeface="+mn-lt"/>
+                <a:ea typeface="+mn-ea"/>
+                <a:cs typeface="+mn-cs"/>
+              </a:defRPr>
+            </a:lvl1pPr>
+            <a:lvl2pPr marL="685800" indent="-228600" algn="l" defTabSz="914400" rtl="0" eaLnBrk="1" latinLnBrk="0" hangingPunct="1">
+              <a:lnSpc>
+                <a:spcPct val="90000"/>
+              </a:lnSpc>
+              <a:spcBef>
+                <a:spcPts val="500"/>
+              </a:spcBef>
+              <a:buFont typeface="Arial" panose="020B0604020202020204" pitchFamily="34" charset="0"/>
+              <a:buChar char="•"/>
+              <a:defRPr sz="2400" kern="1200">
+                <a:solidFill>
+                  <a:schemeClr val="tx1"/>
+                </a:solidFill>
+                <a:latin typeface="+mn-lt"/>
+                <a:ea typeface="+mn-ea"/>
+                <a:cs typeface="+mn-cs"/>
+              </a:defRPr>
+            </a:lvl2pPr>
+            <a:lvl3pPr marL="1143000" indent="-228600" algn="l" defTabSz="914400" rtl="0" eaLnBrk="1" latinLnBrk="0" hangingPunct="1">
+              <a:lnSpc>
+                <a:spcPct val="90000"/>
+              </a:lnSpc>
+              <a:spcBef>
+                <a:spcPts val="500"/>
+              </a:spcBef>
+              <a:buFont typeface="Arial" panose="020B0604020202020204" pitchFamily="34" charset="0"/>
+              <a:buChar char="•"/>
+              <a:defRPr sz="2000" kern="1200">
+                <a:solidFill>
+                  <a:schemeClr val="tx1"/>
+                </a:solidFill>
+                <a:latin typeface="+mn-lt"/>
+                <a:ea typeface="+mn-ea"/>
+                <a:cs typeface="+mn-cs"/>
+              </a:defRPr>
+            </a:lvl3pPr>
+            <a:lvl4pPr marL="1600200" indent="-228600" algn="l" defTabSz="914400" rtl="0" eaLnBrk="1" latinLnBrk="0" hangingPunct="1">
+              <a:lnSpc>
+                <a:spcPct val="90000"/>
+              </a:lnSpc>
+              <a:spcBef>
+                <a:spcPts val="500"/>
+              </a:spcBef>
+              <a:buFont typeface="Arial" panose="020B0604020202020204" pitchFamily="34" charset="0"/>
+              <a:buChar char="•"/>
+              <a:defRPr sz="1800" kern="1200">
+                <a:solidFill>
+                  <a:schemeClr val="tx1"/>
+                </a:solidFill>
+                <a:latin typeface="+mn-lt"/>
+                <a:ea typeface="+mn-ea"/>
+                <a:cs typeface="+mn-cs"/>
+              </a:defRPr>
+            </a:lvl4pPr>
+            <a:lvl5pPr marL="2057400" indent="-228600" algn="l" defTabSz="914400" rtl="0" eaLnBrk="1" latinLnBrk="0" hangingPunct="1">
+              <a:lnSpc>
+                <a:spcPct val="90000"/>
+              </a:lnSpc>
+              <a:spcBef>
+                <a:spcPts val="500"/>
+              </a:spcBef>
+              <a:buFont typeface="Arial" panose="020B0604020202020204" pitchFamily="34" charset="0"/>
+              <a:buChar char="•"/>
+              <a:defRPr sz="1800" kern="1200">
+                <a:solidFill>
+                  <a:schemeClr val="tx1"/>
+                </a:solidFill>
+                <a:latin typeface="+mn-lt"/>
+                <a:ea typeface="+mn-ea"/>
+                <a:cs typeface="+mn-cs"/>
+              </a:defRPr>
+            </a:lvl5pPr>
+            <a:lvl6pPr marL="2514600" indent="-228600" algn="l" defTabSz="914400" rtl="0" eaLnBrk="1" latinLnBrk="0" hangingPunct="1">
+              <a:lnSpc>
+                <a:spcPct val="90000"/>
+              </a:lnSpc>
+              <a:spcBef>
+                <a:spcPts val="500"/>
+              </a:spcBef>
+              <a:buFont typeface="Arial" panose="020B0604020202020204" pitchFamily="34" charset="0"/>
+              <a:buChar char="•"/>
+              <a:defRPr sz="1800" kern="1200">
+                <a:solidFill>
+                  <a:schemeClr val="tx1"/>
+                </a:solidFill>
+                <a:latin typeface="+mn-lt"/>
+                <a:ea typeface="+mn-ea"/>
+                <a:cs typeface="+mn-cs"/>
+              </a:defRPr>
+            </a:lvl6pPr>
+            <a:lvl7pPr marL="2971800" indent="-228600" algn="l" defTabSz="914400" rtl="0" eaLnBrk="1" latinLnBrk="0" hangingPunct="1">
+              <a:lnSpc>
+                <a:spcPct val="90000"/>
+              </a:lnSpc>
+              <a:spcBef>
+                <a:spcPts val="500"/>
+              </a:spcBef>
+              <a:buFont typeface="Arial" panose="020B0604020202020204" pitchFamily="34" charset="0"/>
+              <a:buChar char="•"/>
+              <a:defRPr sz="1800" kern="1200">
+                <a:solidFill>
+                  <a:schemeClr val="tx1"/>
+                </a:solidFill>
+                <a:latin typeface="+mn-lt"/>
+                <a:ea typeface="+mn-ea"/>
+                <a:cs typeface="+mn-cs"/>
+              </a:defRPr>
+            </a:lvl7pPr>
+            <a:lvl8pPr marL="3429000" indent="-228600" algn="l" defTabSz="914400" rtl="0" eaLnBrk="1" latinLnBrk="0" hangingPunct="1">
+              <a:lnSpc>
+                <a:spcPct val="90000"/>
+              </a:lnSpc>
+              <a:spcBef>
+                <a:spcPts val="500"/>
+              </a:spcBef>
+              <a:buFont typeface="Arial" panose="020B0604020202020204" pitchFamily="34" charset="0"/>
+              <a:buChar char="•"/>
+              <a:defRPr sz="1800" kern="1200">
+                <a:solidFill>
+                  <a:schemeClr val="tx1"/>
+                </a:solidFill>
+                <a:latin typeface="+mn-lt"/>
+                <a:ea typeface="+mn-ea"/>
+                <a:cs typeface="+mn-cs"/>
+              </a:defRPr>
+            </a:lvl8pPr>
+            <a:lvl9pPr marL="3886200" indent="-228600" algn="l" defTabSz="914400" rtl="0" eaLnBrk="1" latinLnBrk="0" hangingPunct="1">
+              <a:lnSpc>
+                <a:spcPct val="90000"/>
+              </a:lnSpc>
+              <a:spcBef>
+                <a:spcPts val="500"/>
+              </a:spcBef>
+              <a:buFont typeface="Arial" panose="020B0604020202020204" pitchFamily="34" charset="0"/>
+              <a:buChar char="•"/>
+              <a:defRPr sz="1800" kern="1200">
+                <a:solidFill>
+                  <a:schemeClr val="tx1"/>
+                </a:solidFill>
+                <a:latin typeface="+mn-lt"/>
+                <a:ea typeface="+mn-ea"/>
+                <a:cs typeface="+mn-cs"/>
+              </a:defRPr>
+            </a:lvl9pPr>
+          </a:lstStyle>
+          <a:p>
+            <a:r>
+              <a:rPr lang="en-US" dirty="0"/>
+              <a:t>A picture that has been generated from an HTML code (</a:t>
+            </a:r>
+            <a:r>
+              <a:rPr lang="en-US" dirty="0" err="1"/>
+              <a:t>e.g</a:t>
+            </a:r>
+            <a:r>
+              <a:rPr lang="en-US" dirty="0"/>
+              <a:t> Timelines, steps of action ,etc..)</a:t>
+            </a:r>
+          </a:p>
+        </p:txBody>
+      </p:sp>
+    </p:spTree>
+    <p:extLst>
+      <p:ext uri="{BB962C8B-B14F-4D97-AF65-F5344CB8AC3E}">
+        <p14:creationId xmlns:p14="http://schemas.microsoft.com/office/powerpoint/2010/main" val="3855316400"/>
+      </p:ext>
+    </p:extLst>
+  </p:cSld>
+  <p:clrMapOvr>
+    <a:masterClrMapping/>
+  </p:clrMapOvr>
+</p:sldLayout>
+</file>
+
+<file path=ppt/slideLayouts/slideLayout5.xml><?xml version="1.0" encoding="utf-8"?>
+<p:sldLayout xmlns:a="http://schemas.openxmlformats.org/drawingml/2006/main" xmlns:r="http://schemas.openxmlformats.org/officeDocument/2006/relationships" xmlns:p="http://schemas.openxmlformats.org/presentationml/2006/main" preserve="1" userDrawn="1">
   <p:cSld name="Title and Text Content">
     <p:spTree>
       <p:nvGrpSpPr>
@@ -4088,7 +4995,7 @@
 </p:sldLayout>
 </file>
 
-<file path=ppt/slideLayouts/slideLayout5.xml><?xml version="1.0" encoding="utf-8"?>
+<file path=ppt/slideLayouts/slideLayout6.xml><?xml version="1.0" encoding="utf-8"?>
 <p:sldLayout xmlns:a="http://schemas.openxmlformats.org/drawingml/2006/main" xmlns:r="http://schemas.openxmlformats.org/officeDocument/2006/relationships" xmlns:p="http://schemas.openxmlformats.org/presentationml/2006/main" preserve="1" userDrawn="1">
   <p:cSld name="Single Chart Slide">
     <p:spTree>
@@ -4375,7 +5282,7 @@
 </p:sldLayout>
 </file>
 
-<file path=ppt/slideLayouts/slideLayout6.xml><?xml version="1.0" encoding="utf-8"?>
+<file path=ppt/slideLayouts/slideLayout7.xml><?xml version="1.0" encoding="utf-8"?>
 <p:sldLayout xmlns:a="http://schemas.openxmlformats.org/drawingml/2006/main" xmlns:r="http://schemas.openxmlformats.org/officeDocument/2006/relationships" xmlns:p="http://schemas.openxmlformats.org/presentationml/2006/main" preserve="1" userDrawn="1">
   <p:cSld name="Title and Two Column Content">
     <p:spTree>
@@ -4863,7 +5770,7 @@
 </p:sldLayout>
 </file>
 
-<file path=ppt/slideLayouts/slideLayout7.xml><?xml version="1.0" encoding="utf-8"?>
+<file path=ppt/slideLayouts/slideLayout8.xml><?xml version="1.0" encoding="utf-8"?>
 <p:sldLayout xmlns:a="http://schemas.openxmlformats.org/drawingml/2006/main" xmlns:r="http://schemas.openxmlformats.org/officeDocument/2006/relationships" xmlns:p="http://schemas.openxmlformats.org/presentationml/2006/main" preserve="1" userDrawn="1">
   <p:cSld name="Slide with 6 icons and short text as a list of items">
     <p:spTree>
@@ -5542,9 +6449,9 @@
 </p:sldLayout>
 </file>
 
-<file path=ppt/slideLayouts/slideLayout8.xml><?xml version="1.0" encoding="utf-8"?>
+<file path=ppt/slideLayouts/slideLayout9.xml><?xml version="1.0" encoding="utf-8"?>
 <p:sldLayout xmlns:a="http://schemas.openxmlformats.org/drawingml/2006/main" xmlns:r="http://schemas.openxmlformats.org/officeDocument/2006/relationships" xmlns:p="http://schemas.openxmlformats.org/presentationml/2006/main" preserve="1" userDrawn="1">
-  <p:cSld name="Conclusion Slide">
+  <p:cSld name="1_Slide with 4 icons and short text as a list of items">
     <p:spTree>
       <p:nvGrpSpPr>
         <p:cNvPr id="1" name=""/>
@@ -5610,17 +6517,17 @@
           <a:p>
             <a:r>
               <a:rPr lang="en-US" dirty="0"/>
-              <a:t>Short and clear conclusion Title</a:t>
+              <a:t>Title of the slide, short and concise</a:t>
             </a:r>
           </a:p>
         </p:txBody>
       </p:sp>
       <p:sp>
         <p:nvSpPr>
-          <p:cNvPr id="3" name="Conclusion text">
-            <a:extLst>
-              <a:ext uri="{FF2B5EF4-FFF2-40B4-BE49-F238E27FC236}">
-                <a16:creationId xmlns:a16="http://schemas.microsoft.com/office/drawing/2014/main" id="{8A6FC6F2-80B4-49A7-9448-33FE2DF0E967}"/>
+          <p:cNvPr id="7" name="Icon 1">
+            <a:extLst>
+              <a:ext uri="{FF2B5EF4-FFF2-40B4-BE49-F238E27FC236}">
+                <a16:creationId xmlns:a16="http://schemas.microsoft.com/office/drawing/2014/main" id="{B52E7DE5-AE9F-8300-785A-713154A75462}"/>
               </a:ext>
             </a:extLst>
           </p:cNvPr>
@@ -5628,190 +6535,376 @@
             <a:spLocks noGrp="1"/>
           </p:cNvSpPr>
           <p:nvPr>
-            <p:ph idx="1" hasCustomPrompt="1"/>
+            <p:ph type="pic" sz="quarter" idx="10" hasCustomPrompt="1"/>
           </p:nvPr>
         </p:nvSpPr>
         <p:spPr>
           <a:xfrm>
-            <a:off x="381000" y="1825625"/>
-            <a:ext cx="11430000" cy="4351338"/>
-          </a:xfrm>
-          <a:prstGeom prst="rect">
-            <a:avLst/>
-          </a:prstGeom>
+            <a:off x="460022" y="2937664"/>
+            <a:ext cx="830263" cy="746125"/>
+          </a:xfrm>
+          <a:prstGeom prst="rect">
+            <a:avLst/>
+          </a:prstGeom>
+          <a:noFill/>
+          <a:effectLst>
+            <a:outerShdw blurRad="50800" dist="38100" dir="2700000" algn="tl" rotWithShape="0">
+              <a:prstClr val="black">
+                <a:alpha val="40000"/>
+              </a:prstClr>
+            </a:outerShdw>
+          </a:effectLst>
         </p:spPr>
         <p:txBody>
-          <a:bodyPr vert="horz" lIns="91440" tIns="45720" rIns="91440" bIns="45720" rtlCol="0">
-            <a:noAutofit/>
-          </a:bodyPr>
+          <a:bodyPr/>
           <a:lstStyle>
-            <a:lvl1pPr marL="0" indent="0" algn="l" defTabSz="914400" rtl="0" eaLnBrk="1" latinLnBrk="0" hangingPunct="1">
+            <a:lvl1pPr marL="0" indent="0" algn="ctr">
+              <a:buNone/>
+              <a:defRPr sz="2000"/>
+            </a:lvl1pPr>
+          </a:lstStyle>
+          <a:p>
+            <a:r>
+              <a:rPr lang="en-US" dirty="0"/>
+              <a:t>Icon1</a:t>
+            </a:r>
+          </a:p>
+        </p:txBody>
+      </p:sp>
+      <p:sp>
+        <p:nvSpPr>
+          <p:cNvPr id="9" name="Text Beside Icon 1">
+            <a:extLst>
+              <a:ext uri="{FF2B5EF4-FFF2-40B4-BE49-F238E27FC236}">
+                <a16:creationId xmlns:a16="http://schemas.microsoft.com/office/drawing/2014/main" id="{07863F40-906D-B17E-DD34-0C4676049440}"/>
+              </a:ext>
+            </a:extLst>
+          </p:cNvPr>
+          <p:cNvSpPr>
+            <a:spLocks noGrp="1"/>
+          </p:cNvSpPr>
+          <p:nvPr>
+            <p:ph type="body" sz="quarter" idx="11" hasCustomPrompt="1"/>
+          </p:nvPr>
+        </p:nvSpPr>
+        <p:spPr>
+          <a:xfrm>
+            <a:off x="1387122" y="2930563"/>
+            <a:ext cx="4249738" cy="769937"/>
+          </a:xfrm>
+          <a:prstGeom prst="rect">
+            <a:avLst/>
+          </a:prstGeom>
+        </p:spPr>
+        <p:txBody>
+          <a:bodyPr anchor="ctr"/>
+          <a:lstStyle>
+            <a:lvl1pPr marL="0" indent="0">
+              <a:buNone/>
+              <a:defRPr/>
+            </a:lvl1pPr>
+          </a:lstStyle>
+          <a:p>
+            <a:pPr lvl="0"/>
+            <a:r>
+              <a:rPr lang="en-US" dirty="0"/>
+              <a:t>Text beside icon 1 maximum 8 words</a:t>
+            </a:r>
+          </a:p>
+        </p:txBody>
+      </p:sp>
+      <p:sp>
+        <p:nvSpPr>
+          <p:cNvPr id="10" name="Icon 2">
+            <a:extLst>
+              <a:ext uri="{FF2B5EF4-FFF2-40B4-BE49-F238E27FC236}">
+                <a16:creationId xmlns:a16="http://schemas.microsoft.com/office/drawing/2014/main" id="{043770B4-6CFD-292F-F28C-20F74E151142}"/>
+              </a:ext>
+            </a:extLst>
+          </p:cNvPr>
+          <p:cNvSpPr>
+            <a:spLocks noGrp="1"/>
+          </p:cNvSpPr>
+          <p:nvPr>
+            <p:ph type="pic" sz="quarter" idx="12" hasCustomPrompt="1"/>
+          </p:nvPr>
+        </p:nvSpPr>
+        <p:spPr>
+          <a:xfrm>
+            <a:off x="6713184" y="2920953"/>
+            <a:ext cx="830263" cy="746125"/>
+          </a:xfrm>
+          <a:prstGeom prst="rect">
+            <a:avLst/>
+          </a:prstGeom>
+          <a:effectLst>
+            <a:outerShdw blurRad="50800" dist="38100" dir="2700000" algn="tl" rotWithShape="0">
+              <a:prstClr val="black">
+                <a:alpha val="40000"/>
+              </a:prstClr>
+            </a:outerShdw>
+          </a:effectLst>
+        </p:spPr>
+        <p:txBody>
+          <a:bodyPr/>
+          <a:lstStyle>
+            <a:lvl1pPr marL="0" indent="0">
+              <a:buNone/>
+              <a:defRPr sz="2000"/>
+            </a:lvl1pPr>
+          </a:lstStyle>
+          <a:p>
+            <a:r>
+              <a:rPr lang="en-US" dirty="0"/>
+              <a:t>Icon 2</a:t>
+            </a:r>
+          </a:p>
+        </p:txBody>
+      </p:sp>
+      <p:sp>
+        <p:nvSpPr>
+          <p:cNvPr id="11" name="Text Beside Icon 2">
+            <a:extLst>
+              <a:ext uri="{FF2B5EF4-FFF2-40B4-BE49-F238E27FC236}">
+                <a16:creationId xmlns:a16="http://schemas.microsoft.com/office/drawing/2014/main" id="{F718040C-7B8A-9487-484F-776F0815B5C6}"/>
+              </a:ext>
+            </a:extLst>
+          </p:cNvPr>
+          <p:cNvSpPr>
+            <a:spLocks noGrp="1"/>
+          </p:cNvSpPr>
+          <p:nvPr>
+            <p:ph type="body" sz="quarter" idx="13" hasCustomPrompt="1"/>
+          </p:nvPr>
+        </p:nvSpPr>
+        <p:spPr>
+          <a:xfrm>
+            <a:off x="7640284" y="2913852"/>
+            <a:ext cx="4249738" cy="769937"/>
+          </a:xfrm>
+          <a:prstGeom prst="rect">
+            <a:avLst/>
+          </a:prstGeom>
+        </p:spPr>
+        <p:txBody>
+          <a:bodyPr anchor="ctr"/>
+          <a:lstStyle>
+            <a:lvl1pPr marL="0" indent="0">
+              <a:buNone/>
+              <a:defRPr/>
+            </a:lvl1pPr>
+          </a:lstStyle>
+          <a:p>
+            <a:pPr lvl="0"/>
+            <a:r>
+              <a:rPr lang="en-US" dirty="0"/>
+              <a:t>Text beside icon 2 maximum 8 words</a:t>
+            </a:r>
+          </a:p>
+        </p:txBody>
+      </p:sp>
+      <p:sp>
+        <p:nvSpPr>
+          <p:cNvPr id="12" name="Icon 3">
+            <a:extLst>
+              <a:ext uri="{FF2B5EF4-FFF2-40B4-BE49-F238E27FC236}">
+                <a16:creationId xmlns:a16="http://schemas.microsoft.com/office/drawing/2014/main" id="{C9C69509-EA90-629E-7594-6FF7D385A0E7}"/>
+              </a:ext>
+            </a:extLst>
+          </p:cNvPr>
+          <p:cNvSpPr>
+            <a:spLocks noGrp="1"/>
+          </p:cNvSpPr>
+          <p:nvPr>
+            <p:ph type="pic" sz="quarter" idx="14" hasCustomPrompt="1"/>
+          </p:nvPr>
+        </p:nvSpPr>
+        <p:spPr>
+          <a:xfrm>
+            <a:off x="460022" y="3988422"/>
+            <a:ext cx="830263" cy="746125"/>
+          </a:xfrm>
+          <a:prstGeom prst="rect">
+            <a:avLst/>
+          </a:prstGeom>
+          <a:effectLst>
+            <a:outerShdw blurRad="50800" dist="38100" dir="2700000" algn="tl" rotWithShape="0">
+              <a:prstClr val="black">
+                <a:alpha val="40000"/>
+              </a:prstClr>
+            </a:outerShdw>
+          </a:effectLst>
+        </p:spPr>
+        <p:txBody>
+          <a:bodyPr/>
+          <a:lstStyle>
+            <a:lvl1pPr marL="0" marR="0" indent="0" algn="l" defTabSz="914400" rtl="0" eaLnBrk="1" fontAlgn="auto" latinLnBrk="0" hangingPunct="1">
               <a:lnSpc>
                 <a:spcPct val="90000"/>
               </a:lnSpc>
               <a:spcBef>
                 <a:spcPts val="1000"/>
               </a:spcBef>
+              <a:spcAft>
+                <a:spcPts val="0"/>
+              </a:spcAft>
+              <a:buClrTx/>
+              <a:buSzTx/>
               <a:buFont typeface="Arial" panose="020B0604020202020204" pitchFamily="34" charset="0"/>
               <a:buNone/>
-              <a:defRPr sz="2000" b="0" kern="1200">
-                <a:solidFill>
-                  <a:schemeClr val="tx1"/>
-                </a:solidFill>
-                <a:latin typeface="+mn-lt"/>
-                <a:ea typeface="+mn-ea"/>
-                <a:cs typeface="+mn-cs"/>
-              </a:defRPr>
+              <a:tabLst/>
+              <a:defRPr sz="2000"/>
             </a:lvl1pPr>
-            <a:lvl2pPr marL="685800" indent="-228600" algn="l" defTabSz="914400" rtl="0" eaLnBrk="1" latinLnBrk="0" hangingPunct="1">
+          </a:lstStyle>
+          <a:p>
+            <a:r>
+              <a:rPr lang="en-US" dirty="0"/>
+              <a:t>Icon 3</a:t>
+            </a:r>
+          </a:p>
+        </p:txBody>
+      </p:sp>
+      <p:sp>
+        <p:nvSpPr>
+          <p:cNvPr id="13" name="Text Beside Icon 3">
+            <a:extLst>
+              <a:ext uri="{FF2B5EF4-FFF2-40B4-BE49-F238E27FC236}">
+                <a16:creationId xmlns:a16="http://schemas.microsoft.com/office/drawing/2014/main" id="{72AA8F7B-26F0-198C-F59E-D4EAAA390678}"/>
+              </a:ext>
+            </a:extLst>
+          </p:cNvPr>
+          <p:cNvSpPr>
+            <a:spLocks noGrp="1"/>
+          </p:cNvSpPr>
+          <p:nvPr>
+            <p:ph type="body" sz="quarter" idx="15" hasCustomPrompt="1"/>
+          </p:nvPr>
+        </p:nvSpPr>
+        <p:spPr>
+          <a:xfrm>
+            <a:off x="1387122" y="3981321"/>
+            <a:ext cx="4249738" cy="769937"/>
+          </a:xfrm>
+          <a:prstGeom prst="rect">
+            <a:avLst/>
+          </a:prstGeom>
+        </p:spPr>
+        <p:txBody>
+          <a:bodyPr anchor="ctr"/>
+          <a:lstStyle>
+            <a:lvl1pPr marL="0" indent="0">
+              <a:buNone/>
+              <a:defRPr/>
+            </a:lvl1pPr>
+          </a:lstStyle>
+          <a:p>
+            <a:pPr lvl="0"/>
+            <a:r>
+              <a:rPr lang="en-US" dirty="0"/>
+              <a:t>Text beside icon 3 maximum 8 words</a:t>
+            </a:r>
+          </a:p>
+        </p:txBody>
+      </p:sp>
+      <p:sp>
+        <p:nvSpPr>
+          <p:cNvPr id="3" name="Icon 4">
+            <a:extLst>
+              <a:ext uri="{FF2B5EF4-FFF2-40B4-BE49-F238E27FC236}">
+                <a16:creationId xmlns:a16="http://schemas.microsoft.com/office/drawing/2014/main" id="{B62AA6DB-552A-718F-DB54-C39FC857289E}"/>
+              </a:ext>
+            </a:extLst>
+          </p:cNvPr>
+          <p:cNvSpPr>
+            <a:spLocks noGrp="1"/>
+          </p:cNvSpPr>
+          <p:nvPr>
+            <p:ph type="pic" sz="quarter" idx="16" hasCustomPrompt="1"/>
+          </p:nvPr>
+        </p:nvSpPr>
+        <p:spPr>
+          <a:xfrm>
+            <a:off x="6713184" y="3971711"/>
+            <a:ext cx="830263" cy="746125"/>
+          </a:xfrm>
+          <a:prstGeom prst="rect">
+            <a:avLst/>
+          </a:prstGeom>
+          <a:effectLst>
+            <a:outerShdw blurRad="50800" dist="38100" dir="2700000" algn="tl" rotWithShape="0">
+              <a:prstClr val="black">
+                <a:alpha val="40000"/>
+              </a:prstClr>
+            </a:outerShdw>
+          </a:effectLst>
+        </p:spPr>
+        <p:txBody>
+          <a:bodyPr/>
+          <a:lstStyle>
+            <a:lvl1pPr marL="0" marR="0" indent="0" algn="l" defTabSz="914400" rtl="0" eaLnBrk="1" fontAlgn="auto" latinLnBrk="0" hangingPunct="1">
               <a:lnSpc>
                 <a:spcPct val="90000"/>
               </a:lnSpc>
               <a:spcBef>
-                <a:spcPts val="500"/>
+                <a:spcPts val="1000"/>
               </a:spcBef>
+              <a:spcAft>
+                <a:spcPts val="0"/>
+              </a:spcAft>
+              <a:buClrTx/>
+              <a:buSzTx/>
               <a:buFont typeface="Arial" panose="020B0604020202020204" pitchFamily="34" charset="0"/>
-              <a:buChar char="•"/>
-              <a:defRPr sz="2400" b="0" kern="1200">
-                <a:solidFill>
-                  <a:schemeClr val="tx1"/>
-                </a:solidFill>
-                <a:latin typeface="+mn-lt"/>
-                <a:ea typeface="+mn-ea"/>
-                <a:cs typeface="+mn-cs"/>
-              </a:defRPr>
-            </a:lvl2pPr>
-            <a:lvl3pPr marL="1143000" indent="-228600" algn="l" defTabSz="914400" rtl="0" eaLnBrk="1" latinLnBrk="0" hangingPunct="1">
-              <a:lnSpc>
-                <a:spcPct val="90000"/>
-              </a:lnSpc>
-              <a:spcBef>
-                <a:spcPts val="500"/>
-              </a:spcBef>
-              <a:buFont typeface="Arial" panose="020B0604020202020204" pitchFamily="34" charset="0"/>
-              <a:buChar char="•"/>
-              <a:defRPr sz="2000" b="0" kern="1200">
-                <a:solidFill>
-                  <a:schemeClr val="tx1"/>
-                </a:solidFill>
-                <a:latin typeface="+mn-lt"/>
-                <a:ea typeface="+mn-ea"/>
-                <a:cs typeface="+mn-cs"/>
-              </a:defRPr>
-            </a:lvl3pPr>
-            <a:lvl4pPr marL="1600200" indent="-228600" algn="l" defTabSz="914400" rtl="0" eaLnBrk="1" latinLnBrk="0" hangingPunct="1">
-              <a:lnSpc>
-                <a:spcPct val="90000"/>
-              </a:lnSpc>
-              <a:spcBef>
-                <a:spcPts val="500"/>
-              </a:spcBef>
-              <a:buFont typeface="Arial" panose="020B0604020202020204" pitchFamily="34" charset="0"/>
-              <a:buChar char="•"/>
-              <a:defRPr sz="1800" b="0" kern="1200">
-                <a:solidFill>
-                  <a:schemeClr val="tx1"/>
-                </a:solidFill>
-                <a:latin typeface="+mn-lt"/>
-                <a:ea typeface="+mn-ea"/>
-                <a:cs typeface="+mn-cs"/>
-              </a:defRPr>
-            </a:lvl4pPr>
-            <a:lvl5pPr marL="2057400" indent="-228600" algn="l" defTabSz="914400" rtl="0" eaLnBrk="1" latinLnBrk="0" hangingPunct="1">
-              <a:lnSpc>
-                <a:spcPct val="90000"/>
-              </a:lnSpc>
-              <a:spcBef>
-                <a:spcPts val="500"/>
-              </a:spcBef>
-              <a:buFont typeface="Arial" panose="020B0604020202020204" pitchFamily="34" charset="0"/>
-              <a:buChar char="•"/>
-              <a:defRPr sz="1800" b="0" kern="1200">
-                <a:solidFill>
-                  <a:schemeClr val="tx1"/>
-                </a:solidFill>
-                <a:latin typeface="+mn-lt"/>
-                <a:ea typeface="+mn-ea"/>
-                <a:cs typeface="+mn-cs"/>
-              </a:defRPr>
-            </a:lvl5pPr>
-            <a:lvl6pPr marL="2514600" indent="-228600" algn="l" defTabSz="914400" rtl="0" eaLnBrk="1" latinLnBrk="0" hangingPunct="1">
-              <a:lnSpc>
-                <a:spcPct val="90000"/>
-              </a:lnSpc>
-              <a:spcBef>
-                <a:spcPts val="500"/>
-              </a:spcBef>
-              <a:buFont typeface="Arial" panose="020B0604020202020204" pitchFamily="34" charset="0"/>
-              <a:buChar char="•"/>
-              <a:defRPr sz="1800" kern="1200">
-                <a:solidFill>
-                  <a:schemeClr val="tx1"/>
-                </a:solidFill>
-                <a:latin typeface="+mn-lt"/>
-                <a:ea typeface="+mn-ea"/>
-                <a:cs typeface="+mn-cs"/>
-              </a:defRPr>
-            </a:lvl6pPr>
-            <a:lvl7pPr marL="2971800" indent="-228600" algn="l" defTabSz="914400" rtl="0" eaLnBrk="1" latinLnBrk="0" hangingPunct="1">
-              <a:lnSpc>
-                <a:spcPct val="90000"/>
-              </a:lnSpc>
-              <a:spcBef>
-                <a:spcPts val="500"/>
-              </a:spcBef>
-              <a:buFont typeface="Arial" panose="020B0604020202020204" pitchFamily="34" charset="0"/>
-              <a:buChar char="•"/>
-              <a:defRPr sz="1800" kern="1200">
-                <a:solidFill>
-                  <a:schemeClr val="tx1"/>
-                </a:solidFill>
-                <a:latin typeface="+mn-lt"/>
-                <a:ea typeface="+mn-ea"/>
-                <a:cs typeface="+mn-cs"/>
-              </a:defRPr>
-            </a:lvl7pPr>
-            <a:lvl8pPr marL="3429000" indent="-228600" algn="l" defTabSz="914400" rtl="0" eaLnBrk="1" latinLnBrk="0" hangingPunct="1">
-              <a:lnSpc>
-                <a:spcPct val="90000"/>
-              </a:lnSpc>
-              <a:spcBef>
-                <a:spcPts val="500"/>
-              </a:spcBef>
-              <a:buFont typeface="Arial" panose="020B0604020202020204" pitchFamily="34" charset="0"/>
-              <a:buChar char="•"/>
-              <a:defRPr sz="1800" kern="1200">
-                <a:solidFill>
-                  <a:schemeClr val="tx1"/>
-                </a:solidFill>
-                <a:latin typeface="+mn-lt"/>
-                <a:ea typeface="+mn-ea"/>
-                <a:cs typeface="+mn-cs"/>
-              </a:defRPr>
-            </a:lvl8pPr>
-            <a:lvl9pPr marL="3886200" indent="-228600" algn="l" defTabSz="914400" rtl="0" eaLnBrk="1" latinLnBrk="0" hangingPunct="1">
-              <a:lnSpc>
-                <a:spcPct val="90000"/>
-              </a:lnSpc>
-              <a:spcBef>
-                <a:spcPts val="500"/>
-              </a:spcBef>
-              <a:buFont typeface="Arial" panose="020B0604020202020204" pitchFamily="34" charset="0"/>
-              <a:buChar char="•"/>
-              <a:defRPr sz="1800" kern="1200">
-                <a:solidFill>
-                  <a:schemeClr val="tx1"/>
-                </a:solidFill>
-                <a:latin typeface="+mn-lt"/>
-                <a:ea typeface="+mn-ea"/>
-                <a:cs typeface="+mn-cs"/>
-              </a:defRPr>
-            </a:lvl9pPr>
+              <a:buNone/>
+              <a:tabLst/>
+              <a:defRPr sz="2000"/>
+            </a:lvl1pPr>
           </a:lstStyle>
           <a:p>
             <a:r>
               <a:rPr lang="en-US" dirty="0"/>
-              <a:t>A bulleted list of items and a short conclusion text</a:t>
+              <a:t>Icon 4</a:t>
+            </a:r>
+          </a:p>
+        </p:txBody>
+      </p:sp>
+      <p:sp>
+        <p:nvSpPr>
+          <p:cNvPr id="4" name="Text Beside Icon 4">
+            <a:extLst>
+              <a:ext uri="{FF2B5EF4-FFF2-40B4-BE49-F238E27FC236}">
+                <a16:creationId xmlns:a16="http://schemas.microsoft.com/office/drawing/2014/main" id="{127F3D65-4217-C7DF-99AC-5D0069212872}"/>
+              </a:ext>
+            </a:extLst>
+          </p:cNvPr>
+          <p:cNvSpPr>
+            <a:spLocks noGrp="1"/>
+          </p:cNvSpPr>
+          <p:nvPr>
+            <p:ph type="body" sz="quarter" idx="17" hasCustomPrompt="1"/>
+          </p:nvPr>
+        </p:nvSpPr>
+        <p:spPr>
+          <a:xfrm>
+            <a:off x="7640284" y="3964610"/>
+            <a:ext cx="4249738" cy="769937"/>
+          </a:xfrm>
+          <a:prstGeom prst="rect">
+            <a:avLst/>
+          </a:prstGeom>
+        </p:spPr>
+        <p:txBody>
+          <a:bodyPr anchor="ctr"/>
+          <a:lstStyle>
+            <a:lvl1pPr marL="0" indent="0">
+              <a:buNone/>
+              <a:defRPr/>
+            </a:lvl1pPr>
+          </a:lstStyle>
+          <a:p>
+            <a:pPr lvl="0"/>
+            <a:r>
+              <a:rPr lang="en-US" dirty="0"/>
+              <a:t>Text beside icon 4 maximum 8 words</a:t>
             </a:r>
           </a:p>
         </p:txBody>
@@ -5819,294 +6912,7 @@
     </p:spTree>
     <p:extLst>
       <p:ext uri="{BB962C8B-B14F-4D97-AF65-F5344CB8AC3E}">
-        <p14:creationId xmlns:p14="http://schemas.microsoft.com/office/powerpoint/2010/main" val="374089928"/>
-      </p:ext>
-    </p:extLst>
-  </p:cSld>
-  <p:clrMapOvr>
-    <a:masterClrMapping/>
-  </p:clrMapOvr>
-</p:sldLayout>
-</file>
-
-<file path=ppt/slideLayouts/slideLayout9.xml><?xml version="1.0" encoding="utf-8"?>
-<p:sldLayout xmlns:a="http://schemas.openxmlformats.org/drawingml/2006/main" xmlns:r="http://schemas.openxmlformats.org/officeDocument/2006/relationships" xmlns:p="http://schemas.openxmlformats.org/presentationml/2006/main" preserve="1" userDrawn="1">
-  <p:cSld name="1_Conclusion Slide">
-    <p:spTree>
-      <p:nvGrpSpPr>
-        <p:cNvPr id="1" name=""/>
-        <p:cNvGrpSpPr/>
-        <p:nvPr/>
-      </p:nvGrpSpPr>
-      <p:grpSpPr>
-        <a:xfrm>
-          <a:off x="0" y="0"/>
-          <a:ext cx="0" cy="0"/>
-          <a:chOff x="0" y="0"/>
-          <a:chExt cx="0" cy="0"/>
-        </a:xfrm>
-      </p:grpSpPr>
-      <p:sp>
-        <p:nvSpPr>
-          <p:cNvPr id="2" name="Conclusion Title">
-            <a:extLst>
-              <a:ext uri="{FF2B5EF4-FFF2-40B4-BE49-F238E27FC236}">
-                <a16:creationId xmlns:a16="http://schemas.microsoft.com/office/drawing/2014/main" id="{3CD97974-B93C-4C96-B3F6-F69E3D6DE6CA}"/>
-              </a:ext>
-            </a:extLst>
-          </p:cNvPr>
-          <p:cNvSpPr>
-            <a:spLocks noGrp="1"/>
-          </p:cNvSpPr>
-          <p:nvPr>
-            <p:ph type="title" hasCustomPrompt="1"/>
-          </p:nvPr>
-        </p:nvSpPr>
-        <p:spPr>
-          <a:xfrm>
-            <a:off x="381000" y="381000"/>
-            <a:ext cx="11430000" cy="1325563"/>
-          </a:xfrm>
-          <a:prstGeom prst="rect">
-            <a:avLst/>
-          </a:prstGeom>
-        </p:spPr>
-        <p:txBody>
-          <a:bodyPr vert="horz" lIns="91440" tIns="45720" rIns="91440" bIns="45720" rtlCol="0" anchor="ctr">
-            <a:noAutofit/>
-          </a:bodyPr>
-          <a:lstStyle>
-            <a:lvl1pPr algn="l" defTabSz="914400" rtl="0" eaLnBrk="1" latinLnBrk="0" hangingPunct="1">
-              <a:lnSpc>
-                <a:spcPct val="80000"/>
-              </a:lnSpc>
-              <a:spcBef>
-                <a:spcPct val="0"/>
-              </a:spcBef>
-              <a:buNone/>
-              <a:defRPr sz="4400" b="1" kern="1200">
-                <a:solidFill>
-                  <a:schemeClr val="tx1"/>
-                </a:solidFill>
-                <a:latin typeface="+mn-lt"/>
-                <a:ea typeface="+mj-ea"/>
-                <a:cs typeface="+mj-cs"/>
-              </a:defRPr>
-            </a:lvl1pPr>
-          </a:lstStyle>
-          <a:p>
-            <a:r>
-              <a:rPr lang="en-US" dirty="0"/>
-              <a:t>Short and clear conclusion Title</a:t>
-            </a:r>
-          </a:p>
-        </p:txBody>
-      </p:sp>
-      <p:sp>
-        <p:nvSpPr>
-          <p:cNvPr id="3" name="Conclusion text">
-            <a:extLst>
-              <a:ext uri="{FF2B5EF4-FFF2-40B4-BE49-F238E27FC236}">
-                <a16:creationId xmlns:a16="http://schemas.microsoft.com/office/drawing/2014/main" id="{8A6FC6F2-80B4-49A7-9448-33FE2DF0E967}"/>
-              </a:ext>
-            </a:extLst>
-          </p:cNvPr>
-          <p:cNvSpPr>
-            <a:spLocks noGrp="1"/>
-          </p:cNvSpPr>
-          <p:nvPr>
-            <p:ph idx="1" hasCustomPrompt="1"/>
-          </p:nvPr>
-        </p:nvSpPr>
-        <p:spPr>
-          <a:xfrm>
-            <a:off x="381000" y="1825625"/>
-            <a:ext cx="11430000" cy="4351338"/>
-          </a:xfrm>
-          <a:prstGeom prst="rect">
-            <a:avLst/>
-          </a:prstGeom>
-        </p:spPr>
-        <p:txBody>
-          <a:bodyPr vert="horz" lIns="91440" tIns="45720" rIns="91440" bIns="45720" rtlCol="0">
-            <a:noAutofit/>
-          </a:bodyPr>
-          <a:lstStyle>
-            <a:lvl1pPr marL="0" indent="0" algn="l" defTabSz="914400" rtl="0" eaLnBrk="1" latinLnBrk="0" hangingPunct="1">
-              <a:lnSpc>
-                <a:spcPct val="90000"/>
-              </a:lnSpc>
-              <a:spcBef>
-                <a:spcPts val="1000"/>
-              </a:spcBef>
-              <a:buFont typeface="Arial" panose="020B0604020202020204" pitchFamily="34" charset="0"/>
-              <a:buNone/>
-              <a:defRPr sz="2000" b="0" kern="1200">
-                <a:solidFill>
-                  <a:schemeClr val="tx1"/>
-                </a:solidFill>
-                <a:latin typeface="+mn-lt"/>
-                <a:ea typeface="+mn-ea"/>
-                <a:cs typeface="+mn-cs"/>
-              </a:defRPr>
-            </a:lvl1pPr>
-            <a:lvl2pPr marL="685800" indent="-228600" algn="l" defTabSz="914400" rtl="0" eaLnBrk="1" latinLnBrk="0" hangingPunct="1">
-              <a:lnSpc>
-                <a:spcPct val="90000"/>
-              </a:lnSpc>
-              <a:spcBef>
-                <a:spcPts val="500"/>
-              </a:spcBef>
-              <a:buFont typeface="Arial" panose="020B0604020202020204" pitchFamily="34" charset="0"/>
-              <a:buChar char="•"/>
-              <a:defRPr sz="2400" b="0" kern="1200">
-                <a:solidFill>
-                  <a:schemeClr val="tx1"/>
-                </a:solidFill>
-                <a:latin typeface="+mn-lt"/>
-                <a:ea typeface="+mn-ea"/>
-                <a:cs typeface="+mn-cs"/>
-              </a:defRPr>
-            </a:lvl2pPr>
-            <a:lvl3pPr marL="1143000" indent="-228600" algn="l" defTabSz="914400" rtl="0" eaLnBrk="1" latinLnBrk="0" hangingPunct="1">
-              <a:lnSpc>
-                <a:spcPct val="90000"/>
-              </a:lnSpc>
-              <a:spcBef>
-                <a:spcPts val="500"/>
-              </a:spcBef>
-              <a:buFont typeface="Arial" panose="020B0604020202020204" pitchFamily="34" charset="0"/>
-              <a:buChar char="•"/>
-              <a:defRPr sz="2000" b="0" kern="1200">
-                <a:solidFill>
-                  <a:schemeClr val="tx1"/>
-                </a:solidFill>
-                <a:latin typeface="+mn-lt"/>
-                <a:ea typeface="+mn-ea"/>
-                <a:cs typeface="+mn-cs"/>
-              </a:defRPr>
-            </a:lvl3pPr>
-            <a:lvl4pPr marL="1600200" indent="-228600" algn="l" defTabSz="914400" rtl="0" eaLnBrk="1" latinLnBrk="0" hangingPunct="1">
-              <a:lnSpc>
-                <a:spcPct val="90000"/>
-              </a:lnSpc>
-              <a:spcBef>
-                <a:spcPts val="500"/>
-              </a:spcBef>
-              <a:buFont typeface="Arial" panose="020B0604020202020204" pitchFamily="34" charset="0"/>
-              <a:buChar char="•"/>
-              <a:defRPr sz="1800" b="0" kern="1200">
-                <a:solidFill>
-                  <a:schemeClr val="tx1"/>
-                </a:solidFill>
-                <a:latin typeface="+mn-lt"/>
-                <a:ea typeface="+mn-ea"/>
-                <a:cs typeface="+mn-cs"/>
-              </a:defRPr>
-            </a:lvl4pPr>
-            <a:lvl5pPr marL="2057400" indent="-228600" algn="l" defTabSz="914400" rtl="0" eaLnBrk="1" latinLnBrk="0" hangingPunct="1">
-              <a:lnSpc>
-                <a:spcPct val="90000"/>
-              </a:lnSpc>
-              <a:spcBef>
-                <a:spcPts val="500"/>
-              </a:spcBef>
-              <a:buFont typeface="Arial" panose="020B0604020202020204" pitchFamily="34" charset="0"/>
-              <a:buChar char="•"/>
-              <a:defRPr sz="1800" b="0" kern="1200">
-                <a:solidFill>
-                  <a:schemeClr val="tx1"/>
-                </a:solidFill>
-                <a:latin typeface="+mn-lt"/>
-                <a:ea typeface="+mn-ea"/>
-                <a:cs typeface="+mn-cs"/>
-              </a:defRPr>
-            </a:lvl5pPr>
-            <a:lvl6pPr marL="2514600" indent="-228600" algn="l" defTabSz="914400" rtl="0" eaLnBrk="1" latinLnBrk="0" hangingPunct="1">
-              <a:lnSpc>
-                <a:spcPct val="90000"/>
-              </a:lnSpc>
-              <a:spcBef>
-                <a:spcPts val="500"/>
-              </a:spcBef>
-              <a:buFont typeface="Arial" panose="020B0604020202020204" pitchFamily="34" charset="0"/>
-              <a:buChar char="•"/>
-              <a:defRPr sz="1800" kern="1200">
-                <a:solidFill>
-                  <a:schemeClr val="tx1"/>
-                </a:solidFill>
-                <a:latin typeface="+mn-lt"/>
-                <a:ea typeface="+mn-ea"/>
-                <a:cs typeface="+mn-cs"/>
-              </a:defRPr>
-            </a:lvl6pPr>
-            <a:lvl7pPr marL="2971800" indent="-228600" algn="l" defTabSz="914400" rtl="0" eaLnBrk="1" latinLnBrk="0" hangingPunct="1">
-              <a:lnSpc>
-                <a:spcPct val="90000"/>
-              </a:lnSpc>
-              <a:spcBef>
-                <a:spcPts val="500"/>
-              </a:spcBef>
-              <a:buFont typeface="Arial" panose="020B0604020202020204" pitchFamily="34" charset="0"/>
-              <a:buChar char="•"/>
-              <a:defRPr sz="1800" kern="1200">
-                <a:solidFill>
-                  <a:schemeClr val="tx1"/>
-                </a:solidFill>
-                <a:latin typeface="+mn-lt"/>
-                <a:ea typeface="+mn-ea"/>
-                <a:cs typeface="+mn-cs"/>
-              </a:defRPr>
-            </a:lvl7pPr>
-            <a:lvl8pPr marL="3429000" indent="-228600" algn="l" defTabSz="914400" rtl="0" eaLnBrk="1" latinLnBrk="0" hangingPunct="1">
-              <a:lnSpc>
-                <a:spcPct val="90000"/>
-              </a:lnSpc>
-              <a:spcBef>
-                <a:spcPts val="500"/>
-              </a:spcBef>
-              <a:buFont typeface="Arial" panose="020B0604020202020204" pitchFamily="34" charset="0"/>
-              <a:buChar char="•"/>
-              <a:defRPr sz="1800" kern="1200">
-                <a:solidFill>
-                  <a:schemeClr val="tx1"/>
-                </a:solidFill>
-                <a:latin typeface="+mn-lt"/>
-                <a:ea typeface="+mn-ea"/>
-                <a:cs typeface="+mn-cs"/>
-              </a:defRPr>
-            </a:lvl8pPr>
-            <a:lvl9pPr marL="3886200" indent="-228600" algn="l" defTabSz="914400" rtl="0" eaLnBrk="1" latinLnBrk="0" hangingPunct="1">
-              <a:lnSpc>
-                <a:spcPct val="90000"/>
-              </a:lnSpc>
-              <a:spcBef>
-                <a:spcPts val="500"/>
-              </a:spcBef>
-              <a:buFont typeface="Arial" panose="020B0604020202020204" pitchFamily="34" charset="0"/>
-              <a:buChar char="•"/>
-              <a:defRPr sz="1800" kern="1200">
-                <a:solidFill>
-                  <a:schemeClr val="tx1"/>
-                </a:solidFill>
-                <a:latin typeface="+mn-lt"/>
-                <a:ea typeface="+mn-ea"/>
-                <a:cs typeface="+mn-cs"/>
-              </a:defRPr>
-            </a:lvl9pPr>
-          </a:lstStyle>
-          <a:p>
-            <a:r>
-              <a:rPr lang="en-US" dirty="0"/>
-              <a:t>A bulleted list of items and a short conclusion text</a:t>
-            </a:r>
-          </a:p>
-        </p:txBody>
-      </p:sp>
-    </p:spTree>
-    <p:extLst>
-      <p:ext uri="{BB962C8B-B14F-4D97-AF65-F5344CB8AC3E}">
-        <p14:creationId xmlns:p14="http://schemas.microsoft.com/office/powerpoint/2010/main" val="88811751"/>
+        <p14:creationId xmlns:p14="http://schemas.microsoft.com/office/powerpoint/2010/main" val="2538074859"/>
       </p:ext>
     </p:extLst>
   </p:cSld>
@@ -6259,7 +7065,7 @@
           <p:nvPr userDrawn="1"/>
         </p:nvPicPr>
         <p:blipFill>
-          <a:blip r:embed="rId13"/>
+          <a:blip r:embed="rId14"/>
           <a:stretch>
             <a:fillRect/>
           </a:stretch>
@@ -6323,14 +7129,15 @@
     <p:sldLayoutId id="2147483649" r:id="rId1"/>
     <p:sldLayoutId id="2147483671" r:id="rId2"/>
     <p:sldLayoutId id="2147483666" r:id="rId3"/>
-    <p:sldLayoutId id="2147483667" r:id="rId4"/>
-    <p:sldLayoutId id="2147483668" r:id="rId5"/>
-    <p:sldLayoutId id="2147483650" r:id="rId6"/>
-    <p:sldLayoutId id="2147483675" r:id="rId7"/>
-    <p:sldLayoutId id="2147483674" r:id="rId8"/>
-    <p:sldLayoutId id="2147483676" r:id="rId9"/>
-    <p:sldLayoutId id="2147483672" r:id="rId10"/>
-    <p:sldLayoutId id="2147483673" r:id="rId11"/>
+    <p:sldLayoutId id="2147483677" r:id="rId4"/>
+    <p:sldLayoutId id="2147483667" r:id="rId5"/>
+    <p:sldLayoutId id="2147483668" r:id="rId6"/>
+    <p:sldLayoutId id="2147483650" r:id="rId7"/>
+    <p:sldLayoutId id="2147483675" r:id="rId8"/>
+    <p:sldLayoutId id="2147483678" r:id="rId9"/>
+    <p:sldLayoutId id="2147483676" r:id="rId10"/>
+    <p:sldLayoutId id="2147483672" r:id="rId11"/>
+    <p:sldLayoutId id="2147483673" r:id="rId12"/>
   </p:sldLayoutIdLst>
   <p:hf hdr="0" ftr="0" dt="0"/>
   <p:txStyles>
@@ -7222,6 +8029,321 @@
 </a:theme>
 </file>
 
+<file path=ppt/theme/theme3.xml><?xml version="1.0" encoding="utf-8"?>
+<a:theme xmlns:a="http://schemas.openxmlformats.org/drawingml/2006/main" name="Office Theme">
+  <a:themeElements>
+    <a:clrScheme name="Office">
+      <a:dk1>
+        <a:sysClr val="windowText" lastClr="000000"/>
+      </a:dk1>
+      <a:lt1>
+        <a:sysClr val="window" lastClr="FFFFFF"/>
+      </a:lt1>
+      <a:dk2>
+        <a:srgbClr val="0E2841"/>
+      </a:dk2>
+      <a:lt2>
+        <a:srgbClr val="E8E8E8"/>
+      </a:lt2>
+      <a:accent1>
+        <a:srgbClr val="156082"/>
+      </a:accent1>
+      <a:accent2>
+        <a:srgbClr val="E97132"/>
+      </a:accent2>
+      <a:accent3>
+        <a:srgbClr val="196B24"/>
+      </a:accent3>
+      <a:accent4>
+        <a:srgbClr val="0F9ED5"/>
+      </a:accent4>
+      <a:accent5>
+        <a:srgbClr val="A02B93"/>
+      </a:accent5>
+      <a:accent6>
+        <a:srgbClr val="4EA72E"/>
+      </a:accent6>
+      <a:hlink>
+        <a:srgbClr val="467886"/>
+      </a:hlink>
+      <a:folHlink>
+        <a:srgbClr val="96607D"/>
+      </a:folHlink>
+    </a:clrScheme>
+    <a:fontScheme name="Office">
+      <a:majorFont>
+        <a:latin typeface="Aptos Display" panose="02110004020202020204"/>
+        <a:ea typeface=""/>
+        <a:cs typeface=""/>
+        <a:font script="Jpan" typeface="游ゴシック Light"/>
+        <a:font script="Hang" typeface="맑은 고딕"/>
+        <a:font script="Hans" typeface="等线 Light"/>
+        <a:font script="Hant" typeface="新細明體"/>
+        <a:font script="Arab" typeface="Times New Roman"/>
+        <a:font script="Hebr" typeface="Times New Roman"/>
+        <a:font script="Thai" typeface="Angsana New"/>
+        <a:font script="Ethi" typeface="Nyala"/>
+        <a:font script="Beng" typeface="Vrinda"/>
+        <a:font script="Gujr" typeface="Shruti"/>
+        <a:font script="Khmr" typeface="MoolBoran"/>
+        <a:font script="Knda" typeface="Tunga"/>
+        <a:font script="Guru" typeface="Raavi"/>
+        <a:font script="Cans" typeface="Euphemia"/>
+        <a:font script="Cher" typeface="Plantagenet Cherokee"/>
+        <a:font script="Yiii" typeface="Microsoft Yi Baiti"/>
+        <a:font script="Tibt" typeface="Microsoft Himalaya"/>
+        <a:font script="Thaa" typeface="MV Boli"/>
+        <a:font script="Deva" typeface="Mangal"/>
+        <a:font script="Telu" typeface="Gautami"/>
+        <a:font script="Taml" typeface="Latha"/>
+        <a:font script="Syrc" typeface="Estrangelo Edessa"/>
+        <a:font script="Orya" typeface="Kalinga"/>
+        <a:font script="Mlym" typeface="Kartika"/>
+        <a:font script="Laoo" typeface="DokChampa"/>
+        <a:font script="Sinh" typeface="Iskoola Pota"/>
+        <a:font script="Mong" typeface="Mongolian Baiti"/>
+        <a:font script="Viet" typeface="Times New Roman"/>
+        <a:font script="Uigh" typeface="Microsoft Uighur"/>
+        <a:font script="Geor" typeface="Sylfaen"/>
+        <a:font script="Armn" typeface="Arial"/>
+        <a:font script="Bugi" typeface="Leelawadee UI"/>
+        <a:font script="Bopo" typeface="Microsoft JhengHei"/>
+        <a:font script="Java" typeface="Javanese Text"/>
+        <a:font script="Lisu" typeface="Segoe UI"/>
+        <a:font script="Mymr" typeface="Myanmar Text"/>
+        <a:font script="Nkoo" typeface="Ebrima"/>
+        <a:font script="Olck" typeface="Nirmala UI"/>
+        <a:font script="Osma" typeface="Ebrima"/>
+        <a:font script="Phag" typeface="Phagspa"/>
+        <a:font script="Syrn" typeface="Estrangelo Edessa"/>
+        <a:font script="Syrj" typeface="Estrangelo Edessa"/>
+        <a:font script="Syre" typeface="Estrangelo Edessa"/>
+        <a:font script="Sora" typeface="Nirmala UI"/>
+        <a:font script="Tale" typeface="Microsoft Tai Le"/>
+        <a:font script="Talu" typeface="Microsoft New Tai Lue"/>
+        <a:font script="Tfng" typeface="Ebrima"/>
+      </a:majorFont>
+      <a:minorFont>
+        <a:latin typeface="Aptos" panose="02110004020202020204"/>
+        <a:ea typeface=""/>
+        <a:cs typeface=""/>
+        <a:font script="Jpan" typeface="游ゴシック"/>
+        <a:font script="Hang" typeface="맑은 고딕"/>
+        <a:font script="Hans" typeface="等线"/>
+        <a:font script="Hant" typeface="新細明體"/>
+        <a:font script="Arab" typeface="Arial"/>
+        <a:font script="Hebr" typeface="Arial"/>
+        <a:font script="Thai" typeface="Cordia New"/>
+        <a:font script="Ethi" typeface="Nyala"/>
+        <a:font script="Beng" typeface="Vrinda"/>
+        <a:font script="Gujr" typeface="Shruti"/>
+        <a:font script="Khmr" typeface="DaunPenh"/>
+        <a:font script="Knda" typeface="Tunga"/>
+        <a:font script="Guru" typeface="Raavi"/>
+        <a:font script="Cans" typeface="Euphemia"/>
+        <a:font script="Cher" typeface="Plantagenet Cherokee"/>
+        <a:font script="Yiii" typeface="Microsoft Yi Baiti"/>
+        <a:font script="Tibt" typeface="Microsoft Himalaya"/>
+        <a:font script="Thaa" typeface="MV Boli"/>
+        <a:font script="Deva" typeface="Mangal"/>
+        <a:font script="Telu" typeface="Gautami"/>
+        <a:font script="Taml" typeface="Latha"/>
+        <a:font script="Syrc" typeface="Estrangelo Edessa"/>
+        <a:font script="Orya" typeface="Kalinga"/>
+        <a:font script="Mlym" typeface="Kartika"/>
+        <a:font script="Laoo" typeface="DokChampa"/>
+        <a:font script="Sinh" typeface="Iskoola Pota"/>
+        <a:font script="Mong" typeface="Mongolian Baiti"/>
+        <a:font script="Viet" typeface="Arial"/>
+        <a:font script="Uigh" typeface="Microsoft Uighur"/>
+        <a:font script="Geor" typeface="Sylfaen"/>
+        <a:font script="Armn" typeface="Arial"/>
+        <a:font script="Bugi" typeface="Leelawadee UI"/>
+        <a:font script="Bopo" typeface="Microsoft JhengHei"/>
+        <a:font script="Java" typeface="Javanese Text"/>
+        <a:font script="Lisu" typeface="Segoe UI"/>
+        <a:font script="Mymr" typeface="Myanmar Text"/>
+        <a:font script="Nkoo" typeface="Ebrima"/>
+        <a:font script="Olck" typeface="Nirmala UI"/>
+        <a:font script="Osma" typeface="Ebrima"/>
+        <a:font script="Phag" typeface="Phagspa"/>
+        <a:font script="Syrn" typeface="Estrangelo Edessa"/>
+        <a:font script="Syrj" typeface="Estrangelo Edessa"/>
+        <a:font script="Syre" typeface="Estrangelo Edessa"/>
+        <a:font script="Sora" typeface="Nirmala UI"/>
+        <a:font script="Tale" typeface="Microsoft Tai Le"/>
+        <a:font script="Talu" typeface="Microsoft New Tai Lue"/>
+        <a:font script="Tfng" typeface="Ebrima"/>
+      </a:minorFont>
+    </a:fontScheme>
+    <a:fmtScheme name="Office">
+      <a:fillStyleLst>
+        <a:solidFill>
+          <a:schemeClr val="phClr"/>
+        </a:solidFill>
+        <a:gradFill rotWithShape="1">
+          <a:gsLst>
+            <a:gs pos="0">
+              <a:schemeClr val="phClr">
+                <a:lumMod val="110000"/>
+                <a:satMod val="105000"/>
+                <a:tint val="67000"/>
+              </a:schemeClr>
+            </a:gs>
+            <a:gs pos="50000">
+              <a:schemeClr val="phClr">
+                <a:lumMod val="105000"/>
+                <a:satMod val="103000"/>
+                <a:tint val="73000"/>
+              </a:schemeClr>
+            </a:gs>
+            <a:gs pos="100000">
+              <a:schemeClr val="phClr">
+                <a:lumMod val="105000"/>
+                <a:satMod val="109000"/>
+                <a:tint val="81000"/>
+              </a:schemeClr>
+            </a:gs>
+          </a:gsLst>
+          <a:lin ang="5400000" scaled="0"/>
+        </a:gradFill>
+        <a:gradFill rotWithShape="1">
+          <a:gsLst>
+            <a:gs pos="0">
+              <a:schemeClr val="phClr">
+                <a:satMod val="103000"/>
+                <a:lumMod val="102000"/>
+                <a:tint val="94000"/>
+              </a:schemeClr>
+            </a:gs>
+            <a:gs pos="50000">
+              <a:schemeClr val="phClr">
+                <a:satMod val="110000"/>
+                <a:lumMod val="100000"/>
+                <a:shade val="100000"/>
+              </a:schemeClr>
+            </a:gs>
+            <a:gs pos="100000">
+              <a:schemeClr val="phClr">
+                <a:lumMod val="99000"/>
+                <a:satMod val="120000"/>
+                <a:shade val="78000"/>
+              </a:schemeClr>
+            </a:gs>
+          </a:gsLst>
+          <a:lin ang="5400000" scaled="0"/>
+        </a:gradFill>
+      </a:fillStyleLst>
+      <a:lnStyleLst>
+        <a:ln w="12700" cap="flat" cmpd="sng" algn="ctr">
+          <a:solidFill>
+            <a:schemeClr val="phClr"/>
+          </a:solidFill>
+          <a:prstDash val="solid"/>
+          <a:miter lim="800000"/>
+        </a:ln>
+        <a:ln w="19050" cap="flat" cmpd="sng" algn="ctr">
+          <a:solidFill>
+            <a:schemeClr val="phClr"/>
+          </a:solidFill>
+          <a:prstDash val="solid"/>
+          <a:miter lim="800000"/>
+        </a:ln>
+        <a:ln w="25400" cap="flat" cmpd="sng" algn="ctr">
+          <a:solidFill>
+            <a:schemeClr val="phClr"/>
+          </a:solidFill>
+          <a:prstDash val="solid"/>
+          <a:miter lim="800000"/>
+        </a:ln>
+      </a:lnStyleLst>
+      <a:effectStyleLst>
+        <a:effectStyle>
+          <a:effectLst/>
+        </a:effectStyle>
+        <a:effectStyle>
+          <a:effectLst/>
+        </a:effectStyle>
+        <a:effectStyle>
+          <a:effectLst>
+            <a:outerShdw blurRad="57150" dist="19050" dir="5400000" algn="ctr" rotWithShape="0">
+              <a:srgbClr val="000000">
+                <a:alpha val="63000"/>
+              </a:srgbClr>
+            </a:outerShdw>
+          </a:effectLst>
+        </a:effectStyle>
+      </a:effectStyleLst>
+      <a:bgFillStyleLst>
+        <a:solidFill>
+          <a:schemeClr val="phClr"/>
+        </a:solidFill>
+        <a:solidFill>
+          <a:schemeClr val="phClr">
+            <a:tint val="95000"/>
+            <a:satMod val="170000"/>
+          </a:schemeClr>
+        </a:solidFill>
+        <a:gradFill rotWithShape="1">
+          <a:gsLst>
+            <a:gs pos="0">
+              <a:schemeClr val="phClr">
+                <a:tint val="93000"/>
+                <a:satMod val="150000"/>
+                <a:shade val="98000"/>
+                <a:lumMod val="102000"/>
+              </a:schemeClr>
+            </a:gs>
+            <a:gs pos="50000">
+              <a:schemeClr val="phClr">
+                <a:tint val="98000"/>
+                <a:satMod val="130000"/>
+                <a:shade val="90000"/>
+                <a:lumMod val="103000"/>
+              </a:schemeClr>
+            </a:gs>
+            <a:gs pos="100000">
+              <a:schemeClr val="phClr">
+                <a:shade val="63000"/>
+                <a:satMod val="120000"/>
+              </a:schemeClr>
+            </a:gs>
+          </a:gsLst>
+          <a:lin ang="5400000" scaled="0"/>
+        </a:gradFill>
+      </a:bgFillStyleLst>
+    </a:fmtScheme>
+  </a:themeElements>
+  <a:objectDefaults>
+    <a:lnDef>
+      <a:spPr/>
+      <a:bodyPr/>
+      <a:lstStyle/>
+      <a:style>
+        <a:lnRef idx="2">
+          <a:schemeClr val="accent1"/>
+        </a:lnRef>
+        <a:fillRef idx="0">
+          <a:schemeClr val="accent1"/>
+        </a:fillRef>
+        <a:effectRef idx="1">
+          <a:schemeClr val="accent1"/>
+        </a:effectRef>
+        <a:fontRef idx="minor">
+          <a:schemeClr val="tx1"/>
+        </a:fontRef>
+      </a:style>
+    </a:lnDef>
+  </a:objectDefaults>
+  <a:extraClrSchemeLst/>
+  <a:extLst>
+    <a:ext uri="{05A4C25C-085E-4340-85A3-A5531E510DB2}">
+      <thm15:themeFamily xmlns:thm15="http://schemas.microsoft.com/office/thememl/2012/main" name="Office Theme" id="{2E142A2C-CD16-42D6-873A-C26D2A0506FA}" vid="{1BDDFF52-6CD6-40A5-AB3C-68EB2F1E4D0A}"/>
+    </a:ext>
+  </a:extLst>
+</a:theme>
+</file>
+
 <file path=customXml/item1.xml><?xml version="1.0" encoding="utf-8"?>
 <p:properties xmlns:p="http://schemas.microsoft.com/office/2006/metadata/properties" xmlns:xsi="http://www.w3.org/2001/XMLSchema-instance" xmlns:pc="http://schemas.microsoft.com/office/infopath/2007/PartnerControls">
   <documentManagement>

--- a/ekona_slides_template_new.pptx
+++ b/ekona_slides_template_new.pptx
@@ -111,6 +111,9 @@
     <p:ext uri="{EFAFB233-063F-42B5-8137-9DF3F51BA10A}">
       <p15:sldGuideLst xmlns:p15="http://schemas.microsoft.com/office/powerpoint/2012/main"/>
     </p:ext>
+    <p:ext uri="{2D200454-40CA-4A62-9FC3-DE9A4176ACB9}">
+      <p15:notesGuideLst xmlns:p15="http://schemas.microsoft.com/office/powerpoint/2012/main"/>
+    </p:ext>
   </p:extLst>
 </p:presentation>
 </file>
@@ -128,7 +131,7 @@
   <pc:docChgLst>
     <pc:chgData name="Sam Khalil" userId="82cd1ec2-6208-465b-9d4d-40ce8f0cbf96" providerId="ADAL" clId="{651B6F30-EC96-2340-AD4B-07A6B9855D0C}"/>
     <pc:docChg chg="undo custSel addSld delSld modSld modMainMaster">
-      <pc:chgData name="Sam Khalil" userId="82cd1ec2-6208-465b-9d4d-40ce8f0cbf96" providerId="ADAL" clId="{651B6F30-EC96-2340-AD4B-07A6B9855D0C}" dt="2025-07-17T22:40:18.173" v="1351" actId="1076"/>
+      <pc:chgData name="Sam Khalil" userId="82cd1ec2-6208-465b-9d4d-40ce8f0cbf96" providerId="ADAL" clId="{651B6F30-EC96-2340-AD4B-07A6B9855D0C}" dt="2025-07-20T12:56:25.527" v="1353" actId="2696"/>
       <pc:docMkLst>
         <pc:docMk/>
       </pc:docMkLst>
@@ -137,6 +140,13 @@
         <pc:sldMkLst>
           <pc:docMk/>
           <pc:sldMk cId="1425710479" sldId="256"/>
+        </pc:sldMkLst>
+      </pc:sldChg>
+      <pc:sldChg chg="new del">
+        <pc:chgData name="Sam Khalil" userId="82cd1ec2-6208-465b-9d4d-40ce8f0cbf96" providerId="ADAL" clId="{651B6F30-EC96-2340-AD4B-07A6B9855D0C}" dt="2025-07-20T12:56:25.527" v="1353" actId="2696"/>
+        <pc:sldMkLst>
+          <pc:docMk/>
+          <pc:sldMk cId="1599994850" sldId="256"/>
         </pc:sldMkLst>
       </pc:sldChg>
       <pc:sldChg chg="new del">
@@ -159,22 +169,6 @@
           <pc:docMk/>
           <pc:sldMk cId="1866868894" sldId="257"/>
         </pc:sldMkLst>
-        <pc:spChg chg="del">
-          <ac:chgData name="Sam Khalil" userId="82cd1ec2-6208-465b-9d4d-40ce8f0cbf96" providerId="ADAL" clId="{651B6F30-EC96-2340-AD4B-07A6B9855D0C}" dt="2025-07-17T20:40:36.576" v="1230"/>
-          <ac:spMkLst>
-            <pc:docMk/>
-            <pc:sldMk cId="1866868894" sldId="257"/>
-            <ac:spMk id="3" creationId="{C6B887A7-ADAA-F876-68AC-B7FF7EA3EE0E}"/>
-          </ac:spMkLst>
-        </pc:spChg>
-        <pc:graphicFrameChg chg="add">
-          <ac:chgData name="Sam Khalil" userId="82cd1ec2-6208-465b-9d4d-40ce8f0cbf96" providerId="ADAL" clId="{651B6F30-EC96-2340-AD4B-07A6B9855D0C}" dt="2025-07-17T20:40:36.576" v="1230"/>
-          <ac:graphicFrameMkLst>
-            <pc:docMk/>
-            <pc:sldMk cId="1866868894" sldId="257"/>
-            <ac:graphicFrameMk id="4" creationId="{5B477F69-9AB2-1667-89A8-A0118C958FCE}"/>
-          </ac:graphicFrameMkLst>
-        </pc:graphicFrameChg>
       </pc:sldChg>
       <pc:sldChg chg="del">
         <pc:chgData name="Sam Khalil" userId="82cd1ec2-6208-465b-9d4d-40ce8f0cbf96" providerId="ADAL" clId="{651B6F30-EC96-2340-AD4B-07A6B9855D0C}" dt="2025-07-16T20:03:04.043" v="1" actId="2696"/>
@@ -236,15 +230,6 @@
               <pc:sldMasterMk cId="2940896467" sldId="2147483648"/>
               <pc:sldLayoutMk cId="3074954578" sldId="2147483650"/>
               <ac:spMk id="4" creationId="{097092C2-9408-32E2-1B17-858560948F97}"/>
-            </ac:spMkLst>
-          </pc:spChg>
-          <pc:spChg chg="add del mod">
-            <ac:chgData name="Sam Khalil" userId="82cd1ec2-6208-465b-9d4d-40ce8f0cbf96" providerId="ADAL" clId="{651B6F30-EC96-2340-AD4B-07A6B9855D0C}" dt="2025-07-17T11:14:27.957" v="971" actId="478"/>
-            <ac:spMkLst>
-              <pc:docMk/>
-              <pc:sldMasterMk cId="2940896467" sldId="2147483648"/>
-              <pc:sldLayoutMk cId="3074954578" sldId="2147483650"/>
-              <ac:spMk id="5" creationId="{59EF2013-F952-FF54-0589-E05FCBA038F9}"/>
             </ac:spMkLst>
           </pc:spChg>
         </pc:sldLayoutChg>
@@ -341,15 +326,6 @@
             <pc:sldMasterMk cId="2940896467" sldId="2147483648"/>
             <pc:sldLayoutMk cId="976521419" sldId="2147483671"/>
           </pc:sldLayoutMkLst>
-          <pc:spChg chg="add del">
-            <ac:chgData name="Sam Khalil" userId="82cd1ec2-6208-465b-9d4d-40ce8f0cbf96" providerId="ADAL" clId="{651B6F30-EC96-2340-AD4B-07A6B9855D0C}" dt="2025-07-16T20:05:30.359" v="19" actId="11529"/>
-            <ac:spMkLst>
-              <pc:docMk/>
-              <pc:sldMasterMk cId="2940896467" sldId="2147483648"/>
-              <pc:sldLayoutMk cId="976521419" sldId="2147483671"/>
-              <ac:spMk id="2" creationId="{3A6CAF80-5DD9-23A5-1ABF-4D93FF94E181}"/>
-            </ac:spMkLst>
-          </pc:spChg>
           <pc:spChg chg="add mod">
             <ac:chgData name="Sam Khalil" userId="82cd1ec2-6208-465b-9d4d-40ce8f0cbf96" providerId="ADAL" clId="{651B6F30-EC96-2340-AD4B-07A6B9855D0C}" dt="2025-07-17T09:03:56.085" v="152" actId="962"/>
             <ac:spMkLst>
@@ -359,33 +335,6 @@
               <ac:spMk id="2" creationId="{451BA699-B22C-5269-513E-35DC959DE690}"/>
             </ac:spMkLst>
           </pc:spChg>
-          <pc:spChg chg="add del">
-            <ac:chgData name="Sam Khalil" userId="82cd1ec2-6208-465b-9d4d-40ce8f0cbf96" providerId="ADAL" clId="{651B6F30-EC96-2340-AD4B-07A6B9855D0C}" dt="2025-07-16T20:09:11.764" v="29" actId="11529"/>
-            <ac:spMkLst>
-              <pc:docMk/>
-              <pc:sldMasterMk cId="2940896467" sldId="2147483648"/>
-              <pc:sldLayoutMk cId="976521419" sldId="2147483671"/>
-              <ac:spMk id="2" creationId="{75ED3873-1E7A-889E-06A1-08006230BB0F}"/>
-            </ac:spMkLst>
-          </pc:spChg>
-          <pc:spChg chg="add del mod">
-            <ac:chgData name="Sam Khalil" userId="82cd1ec2-6208-465b-9d4d-40ce8f0cbf96" providerId="ADAL" clId="{651B6F30-EC96-2340-AD4B-07A6B9855D0C}" dt="2025-07-16T20:10:32.867" v="79" actId="478"/>
-            <ac:spMkLst>
-              <pc:docMk/>
-              <pc:sldMasterMk cId="2940896467" sldId="2147483648"/>
-              <pc:sldLayoutMk cId="976521419" sldId="2147483671"/>
-              <ac:spMk id="3" creationId="{00041EF7-62D8-57AD-657E-C0D07A8C89DB}"/>
-            </ac:spMkLst>
-          </pc:spChg>
-          <pc:spChg chg="add del mod">
-            <ac:chgData name="Sam Khalil" userId="82cd1ec2-6208-465b-9d4d-40ce8f0cbf96" providerId="ADAL" clId="{651B6F30-EC96-2340-AD4B-07A6B9855D0C}" dt="2025-07-16T20:05:39.462" v="20" actId="478"/>
-            <ac:spMkLst>
-              <pc:docMk/>
-              <pc:sldMasterMk cId="2940896467" sldId="2147483648"/>
-              <pc:sldLayoutMk cId="976521419" sldId="2147483671"/>
-              <ac:spMk id="3" creationId="{3B63ED82-8A8B-D18D-4564-53A8FCFFC3CF}"/>
-            </ac:spMkLst>
-          </pc:spChg>
           <pc:spChg chg="add mod">
             <ac:chgData name="Sam Khalil" userId="82cd1ec2-6208-465b-9d4d-40ce8f0cbf96" providerId="ADAL" clId="{651B6F30-EC96-2340-AD4B-07A6B9855D0C}" dt="2025-07-17T09:51:08.809" v="311" actId="1076"/>
             <ac:spMkLst>
@@ -393,24 +342,6 @@
               <pc:sldMasterMk cId="2940896467" sldId="2147483648"/>
               <pc:sldLayoutMk cId="976521419" sldId="2147483671"/>
               <ac:spMk id="5" creationId="{CBE66CB9-C849-3A55-3368-6C1666C50D4F}"/>
-            </ac:spMkLst>
-          </pc:spChg>
-          <pc:spChg chg="add del mod">
-            <ac:chgData name="Sam Khalil" userId="82cd1ec2-6208-465b-9d4d-40ce8f0cbf96" providerId="ADAL" clId="{651B6F30-EC96-2340-AD4B-07A6B9855D0C}" dt="2025-07-16T20:10:34.115" v="80" actId="478"/>
-            <ac:spMkLst>
-              <pc:docMk/>
-              <pc:sldMasterMk cId="2940896467" sldId="2147483648"/>
-              <pc:sldLayoutMk cId="976521419" sldId="2147483671"/>
-              <ac:spMk id="6" creationId="{FB1D2D01-586E-14CE-4797-8F5742CF1EB4}"/>
-            </ac:spMkLst>
-          </pc:spChg>
-          <pc:spChg chg="add del">
-            <ac:chgData name="Sam Khalil" userId="82cd1ec2-6208-465b-9d4d-40ce8f0cbf96" providerId="ADAL" clId="{651B6F30-EC96-2340-AD4B-07A6B9855D0C}" dt="2025-07-16T20:10:10.377" v="61" actId="11529"/>
-            <ac:spMkLst>
-              <pc:docMk/>
-              <pc:sldMasterMk cId="2940896467" sldId="2147483648"/>
-              <pc:sldLayoutMk cId="976521419" sldId="2147483671"/>
-              <ac:spMk id="7" creationId="{FE056DC3-538D-F364-B193-82122E4699F9}"/>
             </ac:spMkLst>
           </pc:spChg>
           <pc:spChg chg="add mod">
@@ -429,33 +360,6 @@
               <pc:sldMasterMk cId="2940896467" sldId="2147483648"/>
               <pc:sldLayoutMk cId="976521419" sldId="2147483671"/>
               <ac:spMk id="9" creationId="{755D5765-4853-2CD1-FD28-234442F507BD}"/>
-            </ac:spMkLst>
-          </pc:spChg>
-          <pc:spChg chg="del">
-            <ac:chgData name="Sam Khalil" userId="82cd1ec2-6208-465b-9d4d-40ce8f0cbf96" providerId="ADAL" clId="{651B6F30-EC96-2340-AD4B-07A6B9855D0C}" dt="2025-07-16T20:05:47.803" v="21" actId="478"/>
-            <ac:spMkLst>
-              <pc:docMk/>
-              <pc:sldMasterMk cId="2940896467" sldId="2147483648"/>
-              <pc:sldLayoutMk cId="976521419" sldId="2147483671"/>
-              <ac:spMk id="10" creationId="{8C830669-7003-374B-4151-D47904C1A2D8}"/>
-            </ac:spMkLst>
-          </pc:spChg>
-          <pc:spChg chg="del">
-            <ac:chgData name="Sam Khalil" userId="82cd1ec2-6208-465b-9d4d-40ce8f0cbf96" providerId="ADAL" clId="{651B6F30-EC96-2340-AD4B-07A6B9855D0C}" dt="2025-07-16T20:09:05.088" v="27" actId="478"/>
-            <ac:spMkLst>
-              <pc:docMk/>
-              <pc:sldMasterMk cId="2940896467" sldId="2147483648"/>
-              <pc:sldLayoutMk cId="976521419" sldId="2147483671"/>
-              <ac:spMk id="11" creationId="{876686D6-9C7D-E581-BCF7-DD6825BD535A}"/>
-            </ac:spMkLst>
-          </pc:spChg>
-          <pc:spChg chg="del">
-            <ac:chgData name="Sam Khalil" userId="82cd1ec2-6208-465b-9d4d-40ce8f0cbf96" providerId="ADAL" clId="{651B6F30-EC96-2340-AD4B-07A6B9855D0C}" dt="2025-07-16T20:09:06.437" v="28" actId="478"/>
-            <ac:spMkLst>
-              <pc:docMk/>
-              <pc:sldMasterMk cId="2940896467" sldId="2147483648"/>
-              <pc:sldLayoutMk cId="976521419" sldId="2147483671"/>
-              <ac:spMk id="12" creationId="{B5526A54-B1E4-D97E-873D-C8FAFDC5486C}"/>
             </ac:spMkLst>
           </pc:spChg>
         </pc:sldLayoutChg>
@@ -482,24 +386,6 @@
             <pc:sldMasterMk cId="2940896467" sldId="2147483648"/>
             <pc:sldLayoutMk cId="374089928" sldId="2147483674"/>
           </pc:sldLayoutMkLst>
-          <pc:spChg chg="mod">
-            <ac:chgData name="Sam Khalil" userId="82cd1ec2-6208-465b-9d4d-40ce8f0cbf96" providerId="ADAL" clId="{651B6F30-EC96-2340-AD4B-07A6B9855D0C}" dt="2025-07-17T09:55:36.490" v="947" actId="20577"/>
-            <ac:spMkLst>
-              <pc:docMk/>
-              <pc:sldMasterMk cId="2940896467" sldId="2147483648"/>
-              <pc:sldLayoutMk cId="374089928" sldId="2147483674"/>
-              <ac:spMk id="2" creationId="{3CD97974-B93C-4C96-B3F6-F69E3D6DE6CA}"/>
-            </ac:spMkLst>
-          </pc:spChg>
-          <pc:spChg chg="mod">
-            <ac:chgData name="Sam Khalil" userId="82cd1ec2-6208-465b-9d4d-40ce8f0cbf96" providerId="ADAL" clId="{651B6F30-EC96-2340-AD4B-07A6B9855D0C}" dt="2025-07-17T09:48:07.019" v="272" actId="20577"/>
-            <ac:spMkLst>
-              <pc:docMk/>
-              <pc:sldMasterMk cId="2940896467" sldId="2147483648"/>
-              <pc:sldLayoutMk cId="374089928" sldId="2147483674"/>
-              <ac:spMk id="3" creationId="{8A6FC6F2-80B4-49A7-9448-33FE2DF0E967}"/>
-            </ac:spMkLst>
-          </pc:spChg>
         </pc:sldLayoutChg>
         <pc:sldLayoutChg chg="addSp delSp modSp mod ord">
           <pc:chgData name="Sam Khalil" userId="82cd1ec2-6208-465b-9d4d-40ce8f0cbf96" providerId="ADAL" clId="{651B6F30-EC96-2340-AD4B-07A6B9855D0C}" dt="2025-07-17T16:52:43.058" v="1222" actId="20577"/>
@@ -515,15 +401,6 @@
               <pc:sldMasterMk cId="2940896467" sldId="2147483648"/>
               <pc:sldLayoutMk cId="1049941252" sldId="2147483675"/>
               <ac:spMk id="2" creationId="{3CD97974-B93C-4C96-B3F6-F69E3D6DE6CA}"/>
-            </ac:spMkLst>
-          </pc:spChg>
-          <pc:spChg chg="del">
-            <ac:chgData name="Sam Khalil" userId="82cd1ec2-6208-465b-9d4d-40ce8f0cbf96" providerId="ADAL" clId="{651B6F30-EC96-2340-AD4B-07A6B9855D0C}" dt="2025-07-17T11:14:37.253" v="974" actId="478"/>
-            <ac:spMkLst>
-              <pc:docMk/>
-              <pc:sldMasterMk cId="2940896467" sldId="2147483648"/>
-              <pc:sldLayoutMk cId="1049941252" sldId="2147483675"/>
-              <ac:spMk id="3" creationId="{8A6FC6F2-80B4-49A7-9448-33FE2DF0E967}"/>
             </ac:spMkLst>
           </pc:spChg>
           <pc:spChg chg="add mod">
@@ -544,15 +421,6 @@
               <ac:spMk id="4" creationId="{127F3D65-4217-C7DF-99AC-5D0069212872}"/>
             </ac:spMkLst>
           </pc:spChg>
-          <pc:spChg chg="add del">
-            <ac:chgData name="Sam Khalil" userId="82cd1ec2-6208-465b-9d4d-40ce8f0cbf96" providerId="ADAL" clId="{651B6F30-EC96-2340-AD4B-07A6B9855D0C}" dt="2025-07-17T11:14:50.389" v="975" actId="11529"/>
-            <ac:spMkLst>
-              <pc:docMk/>
-              <pc:sldMasterMk cId="2940896467" sldId="2147483648"/>
-              <pc:sldLayoutMk cId="1049941252" sldId="2147483675"/>
-              <ac:spMk id="4" creationId="{C88792CE-84C7-C068-C2A0-96B0DB0924E9}"/>
-            </ac:spMkLst>
-          </pc:spChg>
           <pc:spChg chg="add mod">
             <ac:chgData name="Sam Khalil" userId="82cd1ec2-6208-465b-9d4d-40ce8f0cbf96" providerId="ADAL" clId="{651B6F30-EC96-2340-AD4B-07A6B9855D0C}" dt="2025-07-17T16:43:18.506" v="1199" actId="962"/>
             <ac:spMkLst>
@@ -560,15 +428,6 @@
               <pc:sldMasterMk cId="2940896467" sldId="2147483648"/>
               <pc:sldLayoutMk cId="1049941252" sldId="2147483675"/>
               <ac:spMk id="5" creationId="{3EC742A8-1DE0-BB3C-0CAC-88DE22F8BB50}"/>
-            </ac:spMkLst>
-          </pc:spChg>
-          <pc:spChg chg="add del mod">
-            <ac:chgData name="Sam Khalil" userId="82cd1ec2-6208-465b-9d4d-40ce8f0cbf96" providerId="ADAL" clId="{651B6F30-EC96-2340-AD4B-07A6B9855D0C}" dt="2025-07-17T11:14:59.072" v="976" actId="478"/>
-            <ac:spMkLst>
-              <pc:docMk/>
-              <pc:sldMasterMk cId="2940896467" sldId="2147483648"/>
-              <pc:sldLayoutMk cId="1049941252" sldId="2147483675"/>
-              <ac:spMk id="5" creationId="{88AD5357-20EE-EB12-D254-E11CFBC1501D}"/>
             </ac:spMkLst>
           </pc:spChg>
           <pc:spChg chg="add del mod">
@@ -580,15 +439,6 @@
               <ac:spMk id="6" creationId="{78C25294-674A-0237-57DC-CE5D5F857C77}"/>
             </ac:spMkLst>
           </pc:spChg>
-          <pc:spChg chg="add del">
-            <ac:chgData name="Sam Khalil" userId="82cd1ec2-6208-465b-9d4d-40ce8f0cbf96" providerId="ADAL" clId="{651B6F30-EC96-2340-AD4B-07A6B9855D0C}" dt="2025-07-17T11:15:12.429" v="977" actId="11529"/>
-            <ac:spMkLst>
-              <pc:docMk/>
-              <pc:sldMasterMk cId="2940896467" sldId="2147483648"/>
-              <pc:sldLayoutMk cId="1049941252" sldId="2147483675"/>
-              <ac:spMk id="6" creationId="{AE10B823-812F-E9FB-89EA-A2452C4EBD71}"/>
-            </ac:spMkLst>
-          </pc:spChg>
           <pc:spChg chg="add mod">
             <ac:chgData name="Sam Khalil" userId="82cd1ec2-6208-465b-9d4d-40ce8f0cbf96" providerId="ADAL" clId="{651B6F30-EC96-2340-AD4B-07A6B9855D0C}" dt="2025-07-17T13:45:48.242" v="1146" actId="14861"/>
             <ac:spMkLst>
@@ -596,15 +446,6 @@
               <pc:sldMasterMk cId="2940896467" sldId="2147483648"/>
               <pc:sldLayoutMk cId="1049941252" sldId="2147483675"/>
               <ac:spMk id="7" creationId="{B52E7DE5-AE9F-8300-785A-713154A75462}"/>
-            </ac:spMkLst>
-          </pc:spChg>
-          <pc:spChg chg="add del">
-            <ac:chgData name="Sam Khalil" userId="82cd1ec2-6208-465b-9d4d-40ce8f0cbf96" providerId="ADAL" clId="{651B6F30-EC96-2340-AD4B-07A6B9855D0C}" dt="2025-07-17T11:15:25.562" v="979" actId="11529"/>
-            <ac:spMkLst>
-              <pc:docMk/>
-              <pc:sldMasterMk cId="2940896467" sldId="2147483648"/>
-              <pc:sldLayoutMk cId="1049941252" sldId="2147483675"/>
-              <ac:spMk id="8" creationId="{20B25644-6E6E-5187-E903-21AFB14645FA}"/>
             </ac:spMkLst>
           </pc:spChg>
           <pc:spChg chg="add mod">
@@ -670,24 +511,6 @@
               <ac:spMk id="14" creationId="{BCEDE17A-C31D-39B6-1DD5-DFF09F743405}"/>
             </ac:spMkLst>
           </pc:spChg>
-          <pc:spChg chg="add del">
-            <ac:chgData name="Sam Khalil" userId="82cd1ec2-6208-465b-9d4d-40ce8f0cbf96" providerId="ADAL" clId="{651B6F30-EC96-2340-AD4B-07A6B9855D0C}" dt="2025-07-17T11:22:51.021" v="1093" actId="22"/>
-            <ac:spMkLst>
-              <pc:docMk/>
-              <pc:sldMasterMk cId="2940896467" sldId="2147483648"/>
-              <pc:sldLayoutMk cId="1049941252" sldId="2147483675"/>
-              <ac:spMk id="17" creationId="{2E234903-EB21-A931-C865-BDEC2E5B31D1}"/>
-            </ac:spMkLst>
-          </pc:spChg>
-          <pc:picChg chg="add del mod">
-            <ac:chgData name="Sam Khalil" userId="82cd1ec2-6208-465b-9d4d-40ce8f0cbf96" providerId="ADAL" clId="{651B6F30-EC96-2340-AD4B-07A6B9855D0C}" dt="2025-07-17T11:22:34.336" v="1091" actId="21"/>
-            <ac:picMkLst>
-              <pc:docMk/>
-              <pc:sldMasterMk cId="2940896467" sldId="2147483648"/>
-              <pc:sldLayoutMk cId="1049941252" sldId="2147483675"/>
-              <ac:picMk id="15" creationId="{E6C7B655-A6EE-6FA6-4296-36011B8BF412}"/>
-            </ac:picMkLst>
-          </pc:picChg>
         </pc:sldLayoutChg>
         <pc:sldLayoutChg chg="addSp delSp modSp add mod ord modTransition">
           <pc:chgData name="Sam Khalil" userId="82cd1ec2-6208-465b-9d4d-40ce8f0cbf96" providerId="ADAL" clId="{651B6F30-EC96-2340-AD4B-07A6B9855D0C}" dt="2025-07-17T21:10:25.014" v="1236" actId="20578"/>
@@ -696,42 +519,6 @@
             <pc:sldMasterMk cId="2940896467" sldId="2147483648"/>
             <pc:sldLayoutMk cId="88811751" sldId="2147483676"/>
           </pc:sldLayoutMkLst>
-          <pc:spChg chg="add del">
-            <ac:chgData name="Sam Khalil" userId="82cd1ec2-6208-465b-9d4d-40ce8f0cbf96" providerId="ADAL" clId="{651B6F30-EC96-2340-AD4B-07A6B9855D0C}" dt="2025-07-17T20:39:46.295" v="1224" actId="11529"/>
-            <ac:spMkLst>
-              <pc:docMk/>
-              <pc:sldMasterMk cId="2940896467" sldId="2147483648"/>
-              <pc:sldLayoutMk cId="88811751" sldId="2147483676"/>
-              <ac:spMk id="4" creationId="{D61816B6-E94D-6D9C-D518-C718E848339B}"/>
-            </ac:spMkLst>
-          </pc:spChg>
-          <pc:spChg chg="add del mod">
-            <ac:chgData name="Sam Khalil" userId="82cd1ec2-6208-465b-9d4d-40ce8f0cbf96" providerId="ADAL" clId="{651B6F30-EC96-2340-AD4B-07A6B9855D0C}" dt="2025-07-17T20:39:50.387" v="1225" actId="478"/>
-            <ac:spMkLst>
-              <pc:docMk/>
-              <pc:sldMasterMk cId="2940896467" sldId="2147483648"/>
-              <pc:sldLayoutMk cId="88811751" sldId="2147483676"/>
-              <ac:spMk id="5" creationId="{119B0F57-6873-79DD-D2A5-E4210B5DE9E3}"/>
-            </ac:spMkLst>
-          </pc:spChg>
-          <pc:spChg chg="add del">
-            <ac:chgData name="Sam Khalil" userId="82cd1ec2-6208-465b-9d4d-40ce8f0cbf96" providerId="ADAL" clId="{651B6F30-EC96-2340-AD4B-07A6B9855D0C}" dt="2025-07-17T20:39:56.478" v="1226" actId="11529"/>
-            <ac:spMkLst>
-              <pc:docMk/>
-              <pc:sldMasterMk cId="2940896467" sldId="2147483648"/>
-              <pc:sldLayoutMk cId="88811751" sldId="2147483676"/>
-              <ac:spMk id="6" creationId="{4B52941E-4775-6143-2E36-388B9E09B9E9}"/>
-            </ac:spMkLst>
-          </pc:spChg>
-          <pc:spChg chg="add del mod">
-            <ac:chgData name="Sam Khalil" userId="82cd1ec2-6208-465b-9d4d-40ce8f0cbf96" providerId="ADAL" clId="{651B6F30-EC96-2340-AD4B-07A6B9855D0C}" dt="2025-07-17T20:40:02.195" v="1227" actId="478"/>
-            <ac:spMkLst>
-              <pc:docMk/>
-              <pc:sldMasterMk cId="2940896467" sldId="2147483648"/>
-              <pc:sldLayoutMk cId="88811751" sldId="2147483676"/>
-              <ac:spMk id="7" creationId="{249C9B60-EA2D-6F1F-2E58-4BFDDC84A498}"/>
-            </ac:spMkLst>
-          </pc:spChg>
         </pc:sldLayoutChg>
         <pc:sldLayoutChg chg="modSp add mod modTransition">
           <pc:chgData name="Sam Khalil" userId="82cd1ec2-6208-465b-9d4d-40ce8f0cbf96" providerId="ADAL" clId="{651B6F30-EC96-2340-AD4B-07A6B9855D0C}" dt="2025-07-17T22:12:58.955" v="1348" actId="962"/>
@@ -775,24 +562,6 @@
               <ac:spMk id="4" creationId="{127F3D65-4217-C7DF-99AC-5D0069212872}"/>
             </ac:spMkLst>
           </pc:spChg>
-          <pc:spChg chg="del">
-            <ac:chgData name="Sam Khalil" userId="82cd1ec2-6208-465b-9d4d-40ce8f0cbf96" providerId="ADAL" clId="{651B6F30-EC96-2340-AD4B-07A6B9855D0C}" dt="2025-07-17T22:40:12.022" v="1350" actId="478"/>
-            <ac:spMkLst>
-              <pc:docMk/>
-              <pc:sldMasterMk cId="2940896467" sldId="2147483648"/>
-              <pc:sldLayoutMk cId="2538074859" sldId="2147483678"/>
-              <ac:spMk id="5" creationId="{3EC742A8-1DE0-BB3C-0CAC-88DE22F8BB50}"/>
-            </ac:spMkLst>
-          </pc:spChg>
-          <pc:spChg chg="del">
-            <ac:chgData name="Sam Khalil" userId="82cd1ec2-6208-465b-9d4d-40ce8f0cbf96" providerId="ADAL" clId="{651B6F30-EC96-2340-AD4B-07A6B9855D0C}" dt="2025-07-17T22:40:12.022" v="1350" actId="478"/>
-            <ac:spMkLst>
-              <pc:docMk/>
-              <pc:sldMasterMk cId="2940896467" sldId="2147483648"/>
-              <pc:sldLayoutMk cId="2538074859" sldId="2147483678"/>
-              <ac:spMk id="6" creationId="{78C25294-674A-0237-57DC-CE5D5F857C77}"/>
-            </ac:spMkLst>
-          </pc:spChg>
           <pc:spChg chg="mod">
             <ac:chgData name="Sam Khalil" userId="82cd1ec2-6208-465b-9d4d-40ce8f0cbf96" providerId="ADAL" clId="{651B6F30-EC96-2340-AD4B-07A6B9855D0C}" dt="2025-07-17T22:40:18.173" v="1351" actId="1076"/>
             <ac:spMkLst>
@@ -800,15 +569,6 @@
               <pc:sldMasterMk cId="2940896467" sldId="2147483648"/>
               <pc:sldLayoutMk cId="2538074859" sldId="2147483678"/>
               <ac:spMk id="7" creationId="{B52E7DE5-AE9F-8300-785A-713154A75462}"/>
-            </ac:spMkLst>
-          </pc:spChg>
-          <pc:spChg chg="del">
-            <ac:chgData name="Sam Khalil" userId="82cd1ec2-6208-465b-9d4d-40ce8f0cbf96" providerId="ADAL" clId="{651B6F30-EC96-2340-AD4B-07A6B9855D0C}" dt="2025-07-17T22:40:12.022" v="1350" actId="478"/>
-            <ac:spMkLst>
-              <pc:docMk/>
-              <pc:sldMasterMk cId="2940896467" sldId="2147483648"/>
-              <pc:sldLayoutMk cId="2538074859" sldId="2147483678"/>
-              <ac:spMk id="8" creationId="{DCEA0E39-252E-0FD3-E342-D8B9B2DD48A8}"/>
             </ac:spMkLst>
           </pc:spChg>
           <pc:spChg chg="mod">
@@ -856,15 +616,6 @@
               <ac:spMk id="13" creationId="{72AA8F7B-26F0-198C-F59E-D4EAAA390678}"/>
             </ac:spMkLst>
           </pc:spChg>
-          <pc:spChg chg="del">
-            <ac:chgData name="Sam Khalil" userId="82cd1ec2-6208-465b-9d4d-40ce8f0cbf96" providerId="ADAL" clId="{651B6F30-EC96-2340-AD4B-07A6B9855D0C}" dt="2025-07-17T22:40:12.022" v="1350" actId="478"/>
-            <ac:spMkLst>
-              <pc:docMk/>
-              <pc:sldMasterMk cId="2940896467" sldId="2147483648"/>
-              <pc:sldLayoutMk cId="2538074859" sldId="2147483678"/>
-              <ac:spMk id="14" creationId="{BCEDE17A-C31D-39B6-1DD5-DFF09F743405}"/>
-            </ac:spMkLst>
-          </pc:spChg>
         </pc:sldLayoutChg>
       </pc:sldMasterChg>
     </pc:docChg>
@@ -966,7 +717,7 @@
           <a:p>
             <a:fld id="{D2339670-67E6-CD42-B7B2-F285F1108ED9}" type="datetimeFigureOut">
               <a:rPr lang="en-US" smtClean="0"/>
-              <a:t>7/18/25</a:t>
+              <a:t>7/20/25</a:t>
             </a:fld>
             <a:endParaRPr lang="en-US"/>
           </a:p>
@@ -1142,7 +893,7 @@
           </a:lstStyle>
           <a:p>
             <a:fld id="{1E521F2A-B11E-40E0-8F26-7CD21B55A12D}" type="datetimeFigureOut">
-              <a:t>7/17/25</a:t>
+              <a:t>7/20/25</a:t>
             </a:fld>
             <a:endParaRPr lang="en-GB"/>
           </a:p>
@@ -8345,14 +8096,12 @@
 </file>
 
 <file path=customXml/item1.xml><?xml version="1.0" encoding="utf-8"?>
-<p:properties xmlns:p="http://schemas.microsoft.com/office/2006/metadata/properties" xmlns:xsi="http://www.w3.org/2001/XMLSchema-instance" xmlns:pc="http://schemas.microsoft.com/office/infopath/2007/PartnerControls">
-  <documentManagement>
-    <TaxCatchAll xmlns="2bdccfd7-ed75-47c4-ae3e-45ba8291135b" xsi:nil="true"/>
-    <lcf76f155ced4ddcb4097134ff3c332f xmlns="bdfda862-7558-4f4e-99f8-648970d7935e">
-      <Terms xmlns="http://schemas.microsoft.com/office/infopath/2007/PartnerControls"/>
-    </lcf76f155ced4ddcb4097134ff3c332f>
-  </documentManagement>
-</p:properties>
+<?mso-contentType ?>
+<FormTemplates xmlns="http://schemas.microsoft.com/sharepoint/v3/contenttype/forms">
+  <Display>DocumentLibraryForm</Display>
+  <Edit>DocumentLibraryForm</Edit>
+  <New>DocumentLibraryForm</New>
+</FormTemplates>
 </file>
 
 <file path=customXml/item2.xml><?xml version="1.0" encoding="utf-8"?>
@@ -8563,27 +8312,20 @@
 </file>
 
 <file path=customXml/item3.xml><?xml version="1.0" encoding="utf-8"?>
-<?mso-contentType ?>
-<FormTemplates xmlns="http://schemas.microsoft.com/sharepoint/v3/contenttype/forms">
-  <Display>DocumentLibraryForm</Display>
-  <Edit>DocumentLibraryForm</Edit>
-  <New>DocumentLibraryForm</New>
-</FormTemplates>
+<p:properties xmlns:p="http://schemas.microsoft.com/office/2006/metadata/properties" xmlns:xsi="http://www.w3.org/2001/XMLSchema-instance" xmlns:pc="http://schemas.microsoft.com/office/infopath/2007/PartnerControls">
+  <documentManagement>
+    <TaxCatchAll xmlns="2bdccfd7-ed75-47c4-ae3e-45ba8291135b" xsi:nil="true"/>
+    <lcf76f155ced4ddcb4097134ff3c332f xmlns="bdfda862-7558-4f4e-99f8-648970d7935e">
+      <Terms xmlns="http://schemas.microsoft.com/office/infopath/2007/PartnerControls"/>
+    </lcf76f155ced4ddcb4097134ff3c332f>
+  </documentManagement>
+</p:properties>
 </file>
 
 <file path=customXml/itemProps1.xml><?xml version="1.0" encoding="utf-8"?>
-<ds:datastoreItem xmlns:ds="http://schemas.openxmlformats.org/officeDocument/2006/customXml" ds:itemID="{E18F5EE7-65DF-41C5-963C-25B6B377F939}">
+<ds:datastoreItem xmlns:ds="http://schemas.openxmlformats.org/officeDocument/2006/customXml" ds:itemID="{C2B4E4C2-7A23-4EC8-AE63-F75F63DE72BE}">
   <ds:schemaRefs>
-    <ds:schemaRef ds:uri="http://schemas.microsoft.com/office/2006/metadata/properties"/>
-    <ds:schemaRef ds:uri="http://schemas.openxmlformats.org/package/2006/metadata/core-properties"/>
-    <ds:schemaRef ds:uri="bdfda862-7558-4f4e-99f8-648970d7935e"/>
-    <ds:schemaRef ds:uri="http://www.w3.org/XML/1998/namespace"/>
-    <ds:schemaRef ds:uri="http://purl.org/dc/terms/"/>
-    <ds:schemaRef ds:uri="http://schemas.microsoft.com/office/infopath/2007/PartnerControls"/>
-    <ds:schemaRef ds:uri="http://schemas.microsoft.com/office/2006/documentManagement/types"/>
-    <ds:schemaRef ds:uri="2bdccfd7-ed75-47c4-ae3e-45ba8291135b"/>
-    <ds:schemaRef ds:uri="http://purl.org/dc/dcmitype/"/>
-    <ds:schemaRef ds:uri="http://purl.org/dc/elements/1.1/"/>
+    <ds:schemaRef ds:uri="http://schemas.microsoft.com/sharepoint/v3/contenttype/forms"/>
   </ds:schemaRefs>
 </ds:datastoreItem>
 </file>
@@ -8608,9 +8350,18 @@
 </file>
 
 <file path=customXml/itemProps3.xml><?xml version="1.0" encoding="utf-8"?>
-<ds:datastoreItem xmlns:ds="http://schemas.openxmlformats.org/officeDocument/2006/customXml" ds:itemID="{C2B4E4C2-7A23-4EC8-AE63-F75F63DE72BE}">
+<ds:datastoreItem xmlns:ds="http://schemas.openxmlformats.org/officeDocument/2006/customXml" ds:itemID="{E18F5EE7-65DF-41C5-963C-25B6B377F939}">
   <ds:schemaRefs>
-    <ds:schemaRef ds:uri="http://schemas.microsoft.com/sharepoint/v3/contenttype/forms"/>
+    <ds:schemaRef ds:uri="2bdccfd7-ed75-47c4-ae3e-45ba8291135b"/>
+    <ds:schemaRef ds:uri="http://schemas.microsoft.com/office/infopath/2007/PartnerControls"/>
+    <ds:schemaRef ds:uri="http://purl.org/dc/dcmitype/"/>
+    <ds:schemaRef ds:uri="http://schemas.microsoft.com/office/2006/metadata/properties"/>
+    <ds:schemaRef ds:uri="http://purl.org/dc/terms/"/>
+    <ds:schemaRef ds:uri="http://schemas.microsoft.com/office/2006/documentManagement/types"/>
+    <ds:schemaRef ds:uri="http://purl.org/dc/elements/1.1/"/>
+    <ds:schemaRef ds:uri="http://schemas.openxmlformats.org/package/2006/metadata/core-properties"/>
+    <ds:schemaRef ds:uri="bdfda862-7558-4f4e-99f8-648970d7935e"/>
+    <ds:schemaRef ds:uri="http://www.w3.org/XML/1998/namespace"/>
   </ds:schemaRefs>
 </ds:datastoreItem>
 </file>
--- a/ekona_slides_template_new.pptx
+++ b/ekona_slides_template_new.pptx
@@ -121,7 +121,7 @@
 <file path=ppt/revisionInfo.xml><?xml version="1.0" encoding="utf-8"?>
 <p1510:revInfo xmlns:a="http://schemas.openxmlformats.org/drawingml/2006/main" xmlns:r="http://schemas.openxmlformats.org/officeDocument/2006/relationships" xmlns:p1510="http://schemas.microsoft.com/office/powerpoint/2015/10/main">
   <p1510:revLst>
-    <p1510:client id="{651B6F30-EC96-2340-AD4B-07A6B9855D0C}" v="125" dt="2025-07-17T22:12:58.955"/>
+    <p1510:client id="{651B6F30-EC96-2340-AD4B-07A6B9855D0C}" v="174" dt="2025-07-20T15:51:34.838"/>
   </p1510:revLst>
 </p1510:revInfo>
 </file>
@@ -131,10 +131,17 @@
   <pc:docChgLst>
     <pc:chgData name="Sam Khalil" userId="82cd1ec2-6208-465b-9d4d-40ce8f0cbf96" providerId="ADAL" clId="{651B6F30-EC96-2340-AD4B-07A6B9855D0C}"/>
     <pc:docChg chg="undo custSel addSld delSld modSld modMainMaster">
-      <pc:chgData name="Sam Khalil" userId="82cd1ec2-6208-465b-9d4d-40ce8f0cbf96" providerId="ADAL" clId="{651B6F30-EC96-2340-AD4B-07A6B9855D0C}" dt="2025-07-20T12:56:25.527" v="1353" actId="2696"/>
+      <pc:chgData name="Sam Khalil" userId="82cd1ec2-6208-465b-9d4d-40ce8f0cbf96" providerId="ADAL" clId="{651B6F30-EC96-2340-AD4B-07A6B9855D0C}" dt="2025-07-20T15:51:45.829" v="1447" actId="2696"/>
       <pc:docMkLst>
         <pc:docMk/>
       </pc:docMkLst>
+      <pc:sldChg chg="new del">
+        <pc:chgData name="Sam Khalil" userId="82cd1ec2-6208-465b-9d4d-40ce8f0cbf96" providerId="ADAL" clId="{651B6F30-EC96-2340-AD4B-07A6B9855D0C}" dt="2025-07-20T15:51:45.829" v="1447" actId="2696"/>
+        <pc:sldMkLst>
+          <pc:docMk/>
+          <pc:sldMk cId="812657698" sldId="256"/>
+        </pc:sldMkLst>
+      </pc:sldChg>
       <pc:sldChg chg="new del">
         <pc:chgData name="Sam Khalil" userId="82cd1ec2-6208-465b-9d4d-40ce8f0cbf96" providerId="ADAL" clId="{651B6F30-EC96-2340-AD4B-07A6B9855D0C}" dt="2025-07-16T20:03:10.194" v="3" actId="2696"/>
         <pc:sldMkLst>
@@ -185,7 +192,7 @@
         </pc:sldMkLst>
       </pc:sldChg>
       <pc:sldMasterChg chg="addSldLayout delSldLayout modSldLayout sldLayoutOrd">
-        <pc:chgData name="Sam Khalil" userId="82cd1ec2-6208-465b-9d4d-40ce8f0cbf96" providerId="ADAL" clId="{651B6F30-EC96-2340-AD4B-07A6B9855D0C}" dt="2025-07-17T22:40:18.173" v="1351" actId="1076"/>
+        <pc:chgData name="Sam Khalil" userId="82cd1ec2-6208-465b-9d4d-40ce8f0cbf96" providerId="ADAL" clId="{651B6F30-EC96-2340-AD4B-07A6B9855D0C}" dt="2025-07-20T15:51:34.838" v="1445" actId="404"/>
         <pc:sldMasterMkLst>
           <pc:docMk/>
           <pc:sldMasterMk cId="2940896467" sldId="2147483648"/>
@@ -388,7 +395,7 @@
           </pc:sldLayoutMkLst>
         </pc:sldLayoutChg>
         <pc:sldLayoutChg chg="addSp delSp modSp mod ord">
-          <pc:chgData name="Sam Khalil" userId="82cd1ec2-6208-465b-9d4d-40ce8f0cbf96" providerId="ADAL" clId="{651B6F30-EC96-2340-AD4B-07A6B9855D0C}" dt="2025-07-17T16:52:43.058" v="1222" actId="20577"/>
+          <pc:chgData name="Sam Khalil" userId="82cd1ec2-6208-465b-9d4d-40ce8f0cbf96" providerId="ADAL" clId="{651B6F30-EC96-2340-AD4B-07A6B9855D0C}" dt="2025-07-20T15:51:25.535" v="1443" actId="20577"/>
           <pc:sldLayoutMkLst>
             <pc:docMk/>
             <pc:sldMasterMk cId="2940896467" sldId="2147483648"/>
@@ -404,7 +411,7 @@
             </ac:spMkLst>
           </pc:spChg>
           <pc:spChg chg="add mod">
-            <ac:chgData name="Sam Khalil" userId="82cd1ec2-6208-465b-9d4d-40ce8f0cbf96" providerId="ADAL" clId="{651B6F30-EC96-2340-AD4B-07A6B9855D0C}" dt="2025-07-17T16:43:09.084" v="1196" actId="962"/>
+            <ac:chgData name="Sam Khalil" userId="82cd1ec2-6208-465b-9d4d-40ce8f0cbf96" providerId="ADAL" clId="{651B6F30-EC96-2340-AD4B-07A6B9855D0C}" dt="2025-07-20T15:51:25.535" v="1443" actId="20577"/>
             <ac:spMkLst>
               <pc:docMk/>
               <pc:sldMasterMk cId="2940896467" sldId="2147483648"/>
@@ -413,7 +420,7 @@
             </ac:spMkLst>
           </pc:spChg>
           <pc:spChg chg="add mod">
-            <ac:chgData name="Sam Khalil" userId="82cd1ec2-6208-465b-9d4d-40ce8f0cbf96" providerId="ADAL" clId="{651B6F30-EC96-2340-AD4B-07A6B9855D0C}" dt="2025-07-17T16:52:41.643" v="1221" actId="20577"/>
+            <ac:chgData name="Sam Khalil" userId="82cd1ec2-6208-465b-9d4d-40ce8f0cbf96" providerId="ADAL" clId="{651B6F30-EC96-2340-AD4B-07A6B9855D0C}" dt="2025-07-20T15:49:13.279" v="1361" actId="404"/>
             <ac:spMkLst>
               <pc:docMk/>
               <pc:sldMasterMk cId="2940896467" sldId="2147483648"/>
@@ -422,7 +429,7 @@
             </ac:spMkLst>
           </pc:spChg>
           <pc:spChg chg="add mod">
-            <ac:chgData name="Sam Khalil" userId="82cd1ec2-6208-465b-9d4d-40ce8f0cbf96" providerId="ADAL" clId="{651B6F30-EC96-2340-AD4B-07A6B9855D0C}" dt="2025-07-17T16:43:18.506" v="1199" actId="962"/>
+            <ac:chgData name="Sam Khalil" userId="82cd1ec2-6208-465b-9d4d-40ce8f0cbf96" providerId="ADAL" clId="{651B6F30-EC96-2340-AD4B-07A6B9855D0C}" dt="2025-07-20T15:50:43.304" v="1425" actId="122"/>
             <ac:spMkLst>
               <pc:docMk/>
               <pc:sldMasterMk cId="2940896467" sldId="2147483648"/>
@@ -431,7 +438,7 @@
             </ac:spMkLst>
           </pc:spChg>
           <pc:spChg chg="add del mod">
-            <ac:chgData name="Sam Khalil" userId="82cd1ec2-6208-465b-9d4d-40ce8f0cbf96" providerId="ADAL" clId="{651B6F30-EC96-2340-AD4B-07A6B9855D0C}" dt="2025-07-17T16:52:34.116" v="1217" actId="20577"/>
+            <ac:chgData name="Sam Khalil" userId="82cd1ec2-6208-465b-9d4d-40ce8f0cbf96" providerId="ADAL" clId="{651B6F30-EC96-2340-AD4B-07A6B9855D0C}" dt="2025-07-20T15:49:16.063" v="1363" actId="404"/>
             <ac:spMkLst>
               <pc:docMk/>
               <pc:sldMasterMk cId="2940896467" sldId="2147483648"/>
@@ -440,7 +447,7 @@
             </ac:spMkLst>
           </pc:spChg>
           <pc:spChg chg="add mod">
-            <ac:chgData name="Sam Khalil" userId="82cd1ec2-6208-465b-9d4d-40ce8f0cbf96" providerId="ADAL" clId="{651B6F30-EC96-2340-AD4B-07A6B9855D0C}" dt="2025-07-17T13:45:48.242" v="1146" actId="14861"/>
+            <ac:chgData name="Sam Khalil" userId="82cd1ec2-6208-465b-9d4d-40ce8f0cbf96" providerId="ADAL" clId="{651B6F30-EC96-2340-AD4B-07A6B9855D0C}" dt="2025-07-20T15:50:38.422" v="1423" actId="20577"/>
             <ac:spMkLst>
               <pc:docMk/>
               <pc:sldMasterMk cId="2940896467" sldId="2147483648"/>
@@ -449,7 +456,7 @@
             </ac:spMkLst>
           </pc:spChg>
           <pc:spChg chg="add mod">
-            <ac:chgData name="Sam Khalil" userId="82cd1ec2-6208-465b-9d4d-40ce8f0cbf96" providerId="ADAL" clId="{651B6F30-EC96-2340-AD4B-07A6B9855D0C}" dt="2025-07-17T16:43:29.629" v="1204" actId="962"/>
+            <ac:chgData name="Sam Khalil" userId="82cd1ec2-6208-465b-9d4d-40ce8f0cbf96" providerId="ADAL" clId="{651B6F30-EC96-2340-AD4B-07A6B9855D0C}" dt="2025-07-20T15:51:22.837" v="1441" actId="20577"/>
             <ac:spMkLst>
               <pc:docMk/>
               <pc:sldMasterMk cId="2940896467" sldId="2147483648"/>
@@ -458,7 +465,7 @@
             </ac:spMkLst>
           </pc:spChg>
           <pc:spChg chg="add mod">
-            <ac:chgData name="Sam Khalil" userId="82cd1ec2-6208-465b-9d4d-40ce8f0cbf96" providerId="ADAL" clId="{651B6F30-EC96-2340-AD4B-07A6B9855D0C}" dt="2025-07-17T16:52:25.016" v="1206" actId="20577"/>
+            <ac:chgData name="Sam Khalil" userId="82cd1ec2-6208-465b-9d4d-40ce8f0cbf96" providerId="ADAL" clId="{651B6F30-EC96-2340-AD4B-07A6B9855D0C}" dt="2025-07-20T15:49:07.642" v="1357" actId="404"/>
             <ac:spMkLst>
               <pc:docMk/>
               <pc:sldMasterMk cId="2940896467" sldId="2147483648"/>
@@ -467,7 +474,7 @@
             </ac:spMkLst>
           </pc:spChg>
           <pc:spChg chg="add mod">
-            <ac:chgData name="Sam Khalil" userId="82cd1ec2-6208-465b-9d4d-40ce8f0cbf96" providerId="ADAL" clId="{651B6F30-EC96-2340-AD4B-07A6B9855D0C}" dt="2025-07-17T13:46:00.573" v="1149" actId="14861"/>
+            <ac:chgData name="Sam Khalil" userId="82cd1ec2-6208-465b-9d4d-40ce8f0cbf96" providerId="ADAL" clId="{651B6F30-EC96-2340-AD4B-07A6B9855D0C}" dt="2025-07-20T15:51:00.216" v="1431" actId="404"/>
             <ac:spMkLst>
               <pc:docMk/>
               <pc:sldMasterMk cId="2940896467" sldId="2147483648"/>
@@ -476,7 +483,7 @@
             </ac:spMkLst>
           </pc:spChg>
           <pc:spChg chg="add mod">
-            <ac:chgData name="Sam Khalil" userId="82cd1ec2-6208-465b-9d4d-40ce8f0cbf96" providerId="ADAL" clId="{651B6F30-EC96-2340-AD4B-07A6B9855D0C}" dt="2025-07-17T16:52:43.058" v="1222" actId="20577"/>
+            <ac:chgData name="Sam Khalil" userId="82cd1ec2-6208-465b-9d4d-40ce8f0cbf96" providerId="ADAL" clId="{651B6F30-EC96-2340-AD4B-07A6B9855D0C}" dt="2025-07-20T15:49:11.008" v="1359" actId="404"/>
             <ac:spMkLst>
               <pc:docMk/>
               <pc:sldMasterMk cId="2940896467" sldId="2147483648"/>
@@ -485,7 +492,7 @@
             </ac:spMkLst>
           </pc:spChg>
           <pc:spChg chg="add mod">
-            <ac:chgData name="Sam Khalil" userId="82cd1ec2-6208-465b-9d4d-40ce8f0cbf96" providerId="ADAL" clId="{651B6F30-EC96-2340-AD4B-07A6B9855D0C}" dt="2025-07-17T13:45:53.140" v="1147" actId="14861"/>
+            <ac:chgData name="Sam Khalil" userId="82cd1ec2-6208-465b-9d4d-40ce8f0cbf96" providerId="ADAL" clId="{651B6F30-EC96-2340-AD4B-07A6B9855D0C}" dt="2025-07-20T15:50:41.068" v="1424" actId="122"/>
             <ac:spMkLst>
               <pc:docMk/>
               <pc:sldMasterMk cId="2940896467" sldId="2147483648"/>
@@ -494,7 +501,7 @@
             </ac:spMkLst>
           </pc:spChg>
           <pc:spChg chg="add mod">
-            <ac:chgData name="Sam Khalil" userId="82cd1ec2-6208-465b-9d4d-40ce8f0cbf96" providerId="ADAL" clId="{651B6F30-EC96-2340-AD4B-07A6B9855D0C}" dt="2025-07-17T16:52:27.742" v="1210" actId="20577"/>
+            <ac:chgData name="Sam Khalil" userId="82cd1ec2-6208-465b-9d4d-40ce8f0cbf96" providerId="ADAL" clId="{651B6F30-EC96-2340-AD4B-07A6B9855D0C}" dt="2025-07-20T15:49:04.200" v="1355" actId="404"/>
             <ac:spMkLst>
               <pc:docMk/>
               <pc:sldMasterMk cId="2940896467" sldId="2147483648"/>
@@ -503,7 +510,7 @@
             </ac:spMkLst>
           </pc:spChg>
           <pc:spChg chg="add mod">
-            <ac:chgData name="Sam Khalil" userId="82cd1ec2-6208-465b-9d4d-40ce8f0cbf96" providerId="ADAL" clId="{651B6F30-EC96-2340-AD4B-07A6B9855D0C}" dt="2025-07-17T16:52:38.759" v="1220" actId="20577"/>
+            <ac:chgData name="Sam Khalil" userId="82cd1ec2-6208-465b-9d4d-40ce8f0cbf96" providerId="ADAL" clId="{651B6F30-EC96-2340-AD4B-07A6B9855D0C}" dt="2025-07-20T15:49:18.605" v="1365" actId="404"/>
             <ac:spMkLst>
               <pc:docMk/>
               <pc:sldMasterMk cId="2940896467" sldId="2147483648"/>
@@ -538,7 +545,7 @@
           </pc:spChg>
         </pc:sldLayoutChg>
         <pc:sldLayoutChg chg="delSp modSp add mod modTransition">
-          <pc:chgData name="Sam Khalil" userId="82cd1ec2-6208-465b-9d4d-40ce8f0cbf96" providerId="ADAL" clId="{651B6F30-EC96-2340-AD4B-07A6B9855D0C}" dt="2025-07-17T22:40:18.173" v="1351" actId="1076"/>
+          <pc:chgData name="Sam Khalil" userId="82cd1ec2-6208-465b-9d4d-40ce8f0cbf96" providerId="ADAL" clId="{651B6F30-EC96-2340-AD4B-07A6B9855D0C}" dt="2025-07-20T15:51:34.838" v="1445" actId="404"/>
           <pc:sldLayoutMkLst>
             <pc:docMk/>
             <pc:sldMasterMk cId="2940896467" sldId="2147483648"/>
@@ -554,7 +561,7 @@
             </ac:spMkLst>
           </pc:spChg>
           <pc:spChg chg="mod">
-            <ac:chgData name="Sam Khalil" userId="82cd1ec2-6208-465b-9d4d-40ce8f0cbf96" providerId="ADAL" clId="{651B6F30-EC96-2340-AD4B-07A6B9855D0C}" dt="2025-07-17T22:40:18.173" v="1351" actId="1076"/>
+            <ac:chgData name="Sam Khalil" userId="82cd1ec2-6208-465b-9d4d-40ce8f0cbf96" providerId="ADAL" clId="{651B6F30-EC96-2340-AD4B-07A6B9855D0C}" dt="2025-07-20T15:51:34.838" v="1445" actId="404"/>
             <ac:spMkLst>
               <pc:docMk/>
               <pc:sldMasterMk cId="2940896467" sldId="2147483648"/>
@@ -572,7 +579,7 @@
             </ac:spMkLst>
           </pc:spChg>
           <pc:spChg chg="mod">
-            <ac:chgData name="Sam Khalil" userId="82cd1ec2-6208-465b-9d4d-40ce8f0cbf96" providerId="ADAL" clId="{651B6F30-EC96-2340-AD4B-07A6B9855D0C}" dt="2025-07-17T22:40:18.173" v="1351" actId="1076"/>
+            <ac:chgData name="Sam Khalil" userId="82cd1ec2-6208-465b-9d4d-40ce8f0cbf96" providerId="ADAL" clId="{651B6F30-EC96-2340-AD4B-07A6B9855D0C}" dt="2025-07-20T15:51:34.838" v="1445" actId="404"/>
             <ac:spMkLst>
               <pc:docMk/>
               <pc:sldMasterMk cId="2940896467" sldId="2147483648"/>
@@ -590,7 +597,7 @@
             </ac:spMkLst>
           </pc:spChg>
           <pc:spChg chg="mod">
-            <ac:chgData name="Sam Khalil" userId="82cd1ec2-6208-465b-9d4d-40ce8f0cbf96" providerId="ADAL" clId="{651B6F30-EC96-2340-AD4B-07A6B9855D0C}" dt="2025-07-17T22:40:18.173" v="1351" actId="1076"/>
+            <ac:chgData name="Sam Khalil" userId="82cd1ec2-6208-465b-9d4d-40ce8f0cbf96" providerId="ADAL" clId="{651B6F30-EC96-2340-AD4B-07A6B9855D0C}" dt="2025-07-20T15:51:34.838" v="1445" actId="404"/>
             <ac:spMkLst>
               <pc:docMk/>
               <pc:sldMasterMk cId="2940896467" sldId="2147483648"/>
@@ -608,7 +615,7 @@
             </ac:spMkLst>
           </pc:spChg>
           <pc:spChg chg="mod">
-            <ac:chgData name="Sam Khalil" userId="82cd1ec2-6208-465b-9d4d-40ce8f0cbf96" providerId="ADAL" clId="{651B6F30-EC96-2340-AD4B-07A6B9855D0C}" dt="2025-07-17T22:40:18.173" v="1351" actId="1076"/>
+            <ac:chgData name="Sam Khalil" userId="82cd1ec2-6208-465b-9d4d-40ce8f0cbf96" providerId="ADAL" clId="{651B6F30-EC96-2340-AD4B-07A6B9855D0C}" dt="2025-07-20T15:51:34.838" v="1445" actId="404"/>
             <ac:spMkLst>
               <pc:docMk/>
               <pc:sldMasterMk cId="2940896467" sldId="2147483648"/>
@@ -5632,13 +5639,19 @@
           <a:lstStyle>
             <a:lvl1pPr marL="0" indent="0" algn="ctr">
               <a:buNone/>
-              <a:defRPr sz="2000"/>
+              <a:defRPr sz="1400"/>
             </a:lvl1pPr>
           </a:lstStyle>
           <a:p>
             <a:r>
               <a:rPr lang="en-US" dirty="0"/>
-              <a:t>Icon1</a:t>
+              <a:t>Icon 1</a:t>
+            </a:r>
+          </a:p>
+          <a:p>
+            <a:r>
+              <a:rPr lang="en-US" dirty="0"/>
+              <a:t>24x24px</a:t>
             </a:r>
           </a:p>
         </p:txBody>
@@ -5673,7 +5686,7 @@
           <a:lstStyle>
             <a:lvl1pPr marL="0" indent="0">
               <a:buNone/>
-              <a:defRPr/>
+              <a:defRPr sz="2000"/>
             </a:lvl1pPr>
           </a:lstStyle>
           <a:p>
@@ -5703,7 +5716,7 @@
         </p:nvSpPr>
         <p:spPr>
           <a:xfrm>
-            <a:off x="6634162" y="2266198"/>
+            <a:off x="6634161" y="2275808"/>
             <a:ext cx="830263" cy="746125"/>
           </a:xfrm>
           <a:prstGeom prst="rect">
@@ -5720,9 +5733,9 @@
         <p:txBody>
           <a:bodyPr/>
           <a:lstStyle>
-            <a:lvl1pPr marL="0" indent="0">
+            <a:lvl1pPr marL="0" indent="0" algn="ctr">
               <a:buNone/>
-              <a:defRPr sz="2000"/>
+              <a:defRPr sz="1200"/>
             </a:lvl1pPr>
           </a:lstStyle>
           <a:p>
@@ -5731,6 +5744,12 @@
               <a:t>Icon 2</a:t>
             </a:r>
           </a:p>
+          <a:p>
+            <a:r>
+              <a:rPr lang="en-US" dirty="0"/>
+              <a:t>24x24px</a:t>
+            </a:r>
+          </a:p>
         </p:txBody>
       </p:sp>
       <p:sp>
@@ -5763,7 +5782,7 @@
           <a:lstStyle>
             <a:lvl1pPr marL="0" indent="0">
               <a:buNone/>
-              <a:defRPr/>
+              <a:defRPr sz="2000"/>
             </a:lvl1pPr>
           </a:lstStyle>
           <a:p>
@@ -5810,7 +5829,7 @@
         <p:txBody>
           <a:bodyPr/>
           <a:lstStyle>
-            <a:lvl1pPr marL="0" marR="0" indent="0" algn="l" defTabSz="914400" rtl="0" eaLnBrk="1" fontAlgn="auto" latinLnBrk="0" hangingPunct="1">
+            <a:lvl1pPr marL="0" marR="0" indent="0" algn="ctr" defTabSz="914400" rtl="0" eaLnBrk="1" fontAlgn="auto" latinLnBrk="0" hangingPunct="1">
               <a:lnSpc>
                 <a:spcPct val="90000"/>
               </a:lnSpc>
@@ -5825,7 +5844,7 @@
               <a:buFont typeface="Arial" panose="020B0604020202020204" pitchFamily="34" charset="0"/>
               <a:buNone/>
               <a:tabLst/>
-              <a:defRPr sz="2000"/>
+              <a:defRPr sz="1200"/>
             </a:lvl1pPr>
           </a:lstStyle>
           <a:p>
@@ -5834,6 +5853,12 @@
               <a:t>Icon 3</a:t>
             </a:r>
           </a:p>
+          <a:p>
+            <a:r>
+              <a:rPr lang="en-US" dirty="0"/>
+              <a:t>24x24px</a:t>
+            </a:r>
+          </a:p>
         </p:txBody>
       </p:sp>
       <p:sp>
@@ -5866,7 +5891,7 @@
           <a:lstStyle>
             <a:lvl1pPr marL="0" indent="0">
               <a:buNone/>
-              <a:defRPr/>
+              <a:defRPr sz="2000"/>
             </a:lvl1pPr>
           </a:lstStyle>
           <a:p>
@@ -5913,7 +5938,7 @@
         <p:txBody>
           <a:bodyPr/>
           <a:lstStyle>
-            <a:lvl1pPr marL="0" marR="0" indent="0" algn="l" defTabSz="914400" rtl="0" eaLnBrk="1" fontAlgn="auto" latinLnBrk="0" hangingPunct="1">
+            <a:lvl1pPr marL="0" marR="0" indent="0" algn="ctr" defTabSz="914400" rtl="0" eaLnBrk="1" fontAlgn="auto" latinLnBrk="0" hangingPunct="1">
               <a:lnSpc>
                 <a:spcPct val="90000"/>
               </a:lnSpc>
@@ -5928,7 +5953,7 @@
               <a:buFont typeface="Arial" panose="020B0604020202020204" pitchFamily="34" charset="0"/>
               <a:buNone/>
               <a:tabLst/>
-              <a:defRPr sz="2000"/>
+              <a:defRPr sz="1200"/>
             </a:lvl1pPr>
           </a:lstStyle>
           <a:p>
@@ -5937,6 +5962,12 @@
               <a:t>Icon 4</a:t>
             </a:r>
           </a:p>
+          <a:p>
+            <a:r>
+              <a:rPr lang="en-US" dirty="0"/>
+              <a:t>24x24px</a:t>
+            </a:r>
+          </a:p>
         </p:txBody>
       </p:sp>
       <p:sp>
@@ -5969,7 +6000,7 @@
           <a:lstStyle>
             <a:lvl1pPr marL="0" indent="0">
               <a:buNone/>
-              <a:defRPr/>
+              <a:defRPr sz="2000"/>
             </a:lvl1pPr>
           </a:lstStyle>
           <a:p>
@@ -6016,7 +6047,7 @@
         <p:txBody>
           <a:bodyPr/>
           <a:lstStyle>
-            <a:lvl1pPr marL="0" marR="0" indent="0" algn="l" defTabSz="914400" rtl="0" eaLnBrk="1" fontAlgn="auto" latinLnBrk="0" hangingPunct="1">
+            <a:lvl1pPr marL="0" marR="0" indent="0" algn="ctr" defTabSz="914400" rtl="0" eaLnBrk="1" fontAlgn="auto" latinLnBrk="0" hangingPunct="1">
               <a:lnSpc>
                 <a:spcPct val="90000"/>
               </a:lnSpc>
@@ -6031,7 +6062,7 @@
               <a:buFont typeface="Arial" panose="020B0604020202020204" pitchFamily="34" charset="0"/>
               <a:buNone/>
               <a:tabLst/>
-              <a:defRPr sz="2000"/>
+              <a:defRPr sz="1200"/>
             </a:lvl1pPr>
           </a:lstStyle>
           <a:p>
@@ -6040,6 +6071,12 @@
               <a:t>Icon 5</a:t>
             </a:r>
           </a:p>
+          <a:p>
+            <a:r>
+              <a:rPr lang="en-US" dirty="0"/>
+              <a:t>24x24px</a:t>
+            </a:r>
+          </a:p>
         </p:txBody>
       </p:sp>
       <p:sp>
@@ -6072,7 +6109,7 @@
           <a:lstStyle>
             <a:lvl1pPr marL="0" indent="0">
               <a:buNone/>
-              <a:defRPr/>
+              <a:defRPr sz="2000"/>
             </a:lvl1pPr>
           </a:lstStyle>
           <a:p>
@@ -6119,7 +6156,7 @@
         <p:txBody>
           <a:bodyPr/>
           <a:lstStyle>
-            <a:lvl1pPr marL="0" marR="0" indent="0" algn="l" defTabSz="914400" rtl="0" eaLnBrk="1" fontAlgn="auto" latinLnBrk="0" hangingPunct="1">
+            <a:lvl1pPr marL="0" marR="0" indent="0" algn="ctr" defTabSz="914400" rtl="0" eaLnBrk="1" fontAlgn="auto" latinLnBrk="0" hangingPunct="1">
               <a:lnSpc>
                 <a:spcPct val="90000"/>
               </a:lnSpc>
@@ -6134,7 +6171,7 @@
               <a:buFont typeface="Arial" panose="020B0604020202020204" pitchFamily="34" charset="0"/>
               <a:buNone/>
               <a:tabLst/>
-              <a:defRPr sz="2000"/>
+              <a:defRPr sz="1200"/>
             </a:lvl1pPr>
           </a:lstStyle>
           <a:p>
@@ -6143,6 +6180,12 @@
               <a:t>Icon 6</a:t>
             </a:r>
           </a:p>
+          <a:p>
+            <a:r>
+              <a:rPr lang="en-US" dirty="0"/>
+              <a:t>24x24px</a:t>
+            </a:r>
+          </a:p>
         </p:txBody>
       </p:sp>
       <p:sp>
@@ -6175,7 +6218,7 @@
           <a:lstStyle>
             <a:lvl1pPr marL="0" indent="0">
               <a:buNone/>
-              <a:defRPr/>
+              <a:defRPr sz="2000"/>
             </a:lvl1pPr>
           </a:lstStyle>
           <a:p>
@@ -6352,7 +6395,7 @@
           <a:lstStyle>
             <a:lvl1pPr marL="0" indent="0">
               <a:buNone/>
-              <a:defRPr/>
+              <a:defRPr sz="2000"/>
             </a:lvl1pPr>
           </a:lstStyle>
           <a:p>
@@ -6442,7 +6485,7 @@
           <a:lstStyle>
             <a:lvl1pPr marL="0" indent="0">
               <a:buNone/>
-              <a:defRPr/>
+              <a:defRPr sz="2000"/>
             </a:lvl1pPr>
           </a:lstStyle>
           <a:p>
@@ -6545,7 +6588,7 @@
           <a:lstStyle>
             <a:lvl1pPr marL="0" indent="0">
               <a:buNone/>
-              <a:defRPr/>
+              <a:defRPr sz="2000"/>
             </a:lvl1pPr>
           </a:lstStyle>
           <a:p>
@@ -6648,7 +6691,7 @@
           <a:lstStyle>
             <a:lvl1pPr marL="0" indent="0">
               <a:buNone/>
-              <a:defRPr/>
+              <a:defRPr sz="2000"/>
             </a:lvl1pPr>
           </a:lstStyle>
           <a:p>
@@ -8096,12 +8139,14 @@
 </file>
 
 <file path=customXml/item1.xml><?xml version="1.0" encoding="utf-8"?>
-<?mso-contentType ?>
-<FormTemplates xmlns="http://schemas.microsoft.com/sharepoint/v3/contenttype/forms">
-  <Display>DocumentLibraryForm</Display>
-  <Edit>DocumentLibraryForm</Edit>
-  <New>DocumentLibraryForm</New>
-</FormTemplates>
+<p:properties xmlns:p="http://schemas.microsoft.com/office/2006/metadata/properties" xmlns:xsi="http://www.w3.org/2001/XMLSchema-instance" xmlns:pc="http://schemas.microsoft.com/office/infopath/2007/PartnerControls">
+  <documentManagement>
+    <TaxCatchAll xmlns="2bdccfd7-ed75-47c4-ae3e-45ba8291135b" xsi:nil="true"/>
+    <lcf76f155ced4ddcb4097134ff3c332f xmlns="bdfda862-7558-4f4e-99f8-648970d7935e">
+      <Terms xmlns="http://schemas.microsoft.com/office/infopath/2007/PartnerControls"/>
+    </lcf76f155ced4ddcb4097134ff3c332f>
+  </documentManagement>
+</p:properties>
 </file>
 
 <file path=customXml/item2.xml><?xml version="1.0" encoding="utf-8"?>
@@ -8312,20 +8357,27 @@
 </file>
 
 <file path=customXml/item3.xml><?xml version="1.0" encoding="utf-8"?>
-<p:properties xmlns:p="http://schemas.microsoft.com/office/2006/metadata/properties" xmlns:xsi="http://www.w3.org/2001/XMLSchema-instance" xmlns:pc="http://schemas.microsoft.com/office/infopath/2007/PartnerControls">
-  <documentManagement>
-    <TaxCatchAll xmlns="2bdccfd7-ed75-47c4-ae3e-45ba8291135b" xsi:nil="true"/>
-    <lcf76f155ced4ddcb4097134ff3c332f xmlns="bdfda862-7558-4f4e-99f8-648970d7935e">
-      <Terms xmlns="http://schemas.microsoft.com/office/infopath/2007/PartnerControls"/>
-    </lcf76f155ced4ddcb4097134ff3c332f>
-  </documentManagement>
-</p:properties>
+<?mso-contentType ?>
+<FormTemplates xmlns="http://schemas.microsoft.com/sharepoint/v3/contenttype/forms">
+  <Display>DocumentLibraryForm</Display>
+  <Edit>DocumentLibraryForm</Edit>
+  <New>DocumentLibraryForm</New>
+</FormTemplates>
 </file>
 
 <file path=customXml/itemProps1.xml><?xml version="1.0" encoding="utf-8"?>
-<ds:datastoreItem xmlns:ds="http://schemas.openxmlformats.org/officeDocument/2006/customXml" ds:itemID="{C2B4E4C2-7A23-4EC8-AE63-F75F63DE72BE}">
+<ds:datastoreItem xmlns:ds="http://schemas.openxmlformats.org/officeDocument/2006/customXml" ds:itemID="{E18F5EE7-65DF-41C5-963C-25B6B377F939}">
   <ds:schemaRefs>
-    <ds:schemaRef ds:uri="http://schemas.microsoft.com/sharepoint/v3/contenttype/forms"/>
+    <ds:schemaRef ds:uri="http://purl.org/dc/terms/"/>
+    <ds:schemaRef ds:uri="http://www.w3.org/XML/1998/namespace"/>
+    <ds:schemaRef ds:uri="http://schemas.microsoft.com/office/2006/documentManagement/types"/>
+    <ds:schemaRef ds:uri="bdfda862-7558-4f4e-99f8-648970d7935e"/>
+    <ds:schemaRef ds:uri="http://purl.org/dc/elements/1.1/"/>
+    <ds:schemaRef ds:uri="http://schemas.microsoft.com/office/2006/metadata/properties"/>
+    <ds:schemaRef ds:uri="http://schemas.microsoft.com/office/infopath/2007/PartnerControls"/>
+    <ds:schemaRef ds:uri="http://schemas.openxmlformats.org/package/2006/metadata/core-properties"/>
+    <ds:schemaRef ds:uri="2bdccfd7-ed75-47c4-ae3e-45ba8291135b"/>
+    <ds:schemaRef ds:uri="http://purl.org/dc/dcmitype/"/>
   </ds:schemaRefs>
 </ds:datastoreItem>
 </file>
@@ -8350,18 +8402,9 @@
 </file>
 
 <file path=customXml/itemProps3.xml><?xml version="1.0" encoding="utf-8"?>
-<ds:datastoreItem xmlns:ds="http://schemas.openxmlformats.org/officeDocument/2006/customXml" ds:itemID="{E18F5EE7-65DF-41C5-963C-25B6B377F939}">
+<ds:datastoreItem xmlns:ds="http://schemas.openxmlformats.org/officeDocument/2006/customXml" ds:itemID="{C2B4E4C2-7A23-4EC8-AE63-F75F63DE72BE}">
   <ds:schemaRefs>
-    <ds:schemaRef ds:uri="2bdccfd7-ed75-47c4-ae3e-45ba8291135b"/>
-    <ds:schemaRef ds:uri="http://schemas.microsoft.com/office/infopath/2007/PartnerControls"/>
-    <ds:schemaRef ds:uri="http://purl.org/dc/dcmitype/"/>
-    <ds:schemaRef ds:uri="http://schemas.microsoft.com/office/2006/metadata/properties"/>
-    <ds:schemaRef ds:uri="http://purl.org/dc/terms/"/>
-    <ds:schemaRef ds:uri="http://schemas.microsoft.com/office/2006/documentManagement/types"/>
-    <ds:schemaRef ds:uri="http://purl.org/dc/elements/1.1/"/>
-    <ds:schemaRef ds:uri="http://schemas.openxmlformats.org/package/2006/metadata/core-properties"/>
-    <ds:schemaRef ds:uri="bdfda862-7558-4f4e-99f8-648970d7935e"/>
-    <ds:schemaRef ds:uri="http://www.w3.org/XML/1998/namespace"/>
+    <ds:schemaRef ds:uri="http://schemas.microsoft.com/sharepoint/v3/contenttype/forms"/>
   </ds:schemaRefs>
 </ds:datastoreItem>
 </file>
--- a/ekona_slides_template_new.pptx
+++ b/ekona_slides_template_new.pptx
@@ -121,7 +121,7 @@
 <file path=ppt/revisionInfo.xml><?xml version="1.0" encoding="utf-8"?>
 <p1510:revInfo xmlns:a="http://schemas.openxmlformats.org/drawingml/2006/main" xmlns:r="http://schemas.openxmlformats.org/officeDocument/2006/relationships" xmlns:p1510="http://schemas.microsoft.com/office/powerpoint/2015/10/main">
   <p1510:revLst>
-    <p1510:client id="{651B6F30-EC96-2340-AD4B-07A6B9855D0C}" v="174" dt="2025-07-20T15:51:34.838"/>
+    <p1510:client id="{651B6F30-EC96-2340-AD4B-07A6B9855D0C}" v="209" dt="2025-07-21T08:11:00.613"/>
   </p1510:revLst>
 </p1510:revInfo>
 </file>
@@ -131,7 +131,7 @@
   <pc:docChgLst>
     <pc:chgData name="Sam Khalil" userId="82cd1ec2-6208-465b-9d4d-40ce8f0cbf96" providerId="ADAL" clId="{651B6F30-EC96-2340-AD4B-07A6B9855D0C}"/>
     <pc:docChg chg="undo custSel addSld delSld modSld modMainMaster">
-      <pc:chgData name="Sam Khalil" userId="82cd1ec2-6208-465b-9d4d-40ce8f0cbf96" providerId="ADAL" clId="{651B6F30-EC96-2340-AD4B-07A6B9855D0C}" dt="2025-07-20T15:51:45.829" v="1447" actId="2696"/>
+      <pc:chgData name="Sam Khalil" userId="82cd1ec2-6208-465b-9d4d-40ce8f0cbf96" providerId="ADAL" clId="{651B6F30-EC96-2340-AD4B-07A6B9855D0C}" dt="2025-07-21T08:11:04.944" v="2496" actId="29295"/>
       <pc:docMkLst>
         <pc:docMk/>
       </pc:docMkLst>
@@ -192,7 +192,7 @@
         </pc:sldMkLst>
       </pc:sldChg>
       <pc:sldMasterChg chg="addSldLayout delSldLayout modSldLayout sldLayoutOrd">
-        <pc:chgData name="Sam Khalil" userId="82cd1ec2-6208-465b-9d4d-40ce8f0cbf96" providerId="ADAL" clId="{651B6F30-EC96-2340-AD4B-07A6B9855D0C}" dt="2025-07-20T15:51:34.838" v="1445" actId="404"/>
+        <pc:chgData name="Sam Khalil" userId="82cd1ec2-6208-465b-9d4d-40ce8f0cbf96" providerId="ADAL" clId="{651B6F30-EC96-2340-AD4B-07A6B9855D0C}" dt="2025-07-21T08:11:04.944" v="2496" actId="29295"/>
         <pc:sldMasterMkLst>
           <pc:docMk/>
           <pc:sldMasterMk cId="2940896467" sldId="2147483648"/>
@@ -206,7 +206,7 @@
           </pc:sldLayoutMkLst>
         </pc:sldLayoutChg>
         <pc:sldLayoutChg chg="addSp delSp modSp mod">
-          <pc:chgData name="Sam Khalil" userId="82cd1ec2-6208-465b-9d4d-40ce8f0cbf96" providerId="ADAL" clId="{651B6F30-EC96-2340-AD4B-07A6B9855D0C}" dt="2025-07-17T16:10:12.018" v="1195" actId="20577"/>
+          <pc:chgData name="Sam Khalil" userId="82cd1ec2-6208-465b-9d4d-40ce8f0cbf96" providerId="ADAL" clId="{651B6F30-EC96-2340-AD4B-07A6B9855D0C}" dt="2025-07-21T08:06:20.088" v="2162" actId="20577"/>
           <pc:sldLayoutMkLst>
             <pc:docMk/>
             <pc:sldMasterMk cId="2940896467" sldId="2147483648"/>
@@ -222,7 +222,7 @@
             </ac:spMkLst>
           </pc:spChg>
           <pc:spChg chg="mod">
-            <ac:chgData name="Sam Khalil" userId="82cd1ec2-6208-465b-9d4d-40ce8f0cbf96" providerId="ADAL" clId="{651B6F30-EC96-2340-AD4B-07A6B9855D0C}" dt="2025-07-17T11:10:33.408" v="966" actId="20577"/>
+            <ac:chgData name="Sam Khalil" userId="82cd1ec2-6208-465b-9d4d-40ce8f0cbf96" providerId="ADAL" clId="{651B6F30-EC96-2340-AD4B-07A6B9855D0C}" dt="2025-07-21T08:06:13.638" v="2143" actId="20577"/>
             <ac:spMkLst>
               <pc:docMk/>
               <pc:sldMasterMk cId="2940896467" sldId="2147483648"/>
@@ -231,12 +231,30 @@
             </ac:spMkLst>
           </pc:spChg>
           <pc:spChg chg="mod">
-            <ac:chgData name="Sam Khalil" userId="82cd1ec2-6208-465b-9d4d-40ce8f0cbf96" providerId="ADAL" clId="{651B6F30-EC96-2340-AD4B-07A6B9855D0C}" dt="2025-07-17T16:10:12.018" v="1195" actId="20577"/>
+            <ac:chgData name="Sam Khalil" userId="82cd1ec2-6208-465b-9d4d-40ce8f0cbf96" providerId="ADAL" clId="{651B6F30-EC96-2340-AD4B-07A6B9855D0C}" dt="2025-07-21T08:06:20.088" v="2162" actId="20577"/>
             <ac:spMkLst>
               <pc:docMk/>
               <pc:sldMasterMk cId="2940896467" sldId="2147483648"/>
               <pc:sldLayoutMk cId="3074954578" sldId="2147483650"/>
               <ac:spMk id="4" creationId="{097092C2-9408-32E2-1B17-858560948F97}"/>
+            </ac:spMkLst>
+          </pc:spChg>
+          <pc:spChg chg="add mod">
+            <ac:chgData name="Sam Khalil" userId="82cd1ec2-6208-465b-9d4d-40ce8f0cbf96" providerId="ADAL" clId="{651B6F30-EC96-2340-AD4B-07A6B9855D0C}" dt="2025-07-21T08:05:28.875" v="2112" actId="167"/>
+            <ac:spMkLst>
+              <pc:docMk/>
+              <pc:sldMasterMk cId="2940896467" sldId="2147483648"/>
+              <pc:sldLayoutMk cId="3074954578" sldId="2147483650"/>
+              <ac:spMk id="5" creationId="{4286C11B-CD57-AE94-2379-3F6FBE23504C}"/>
+            </ac:spMkLst>
+          </pc:spChg>
+          <pc:spChg chg="add mod">
+            <ac:chgData name="Sam Khalil" userId="82cd1ec2-6208-465b-9d4d-40ce8f0cbf96" providerId="ADAL" clId="{651B6F30-EC96-2340-AD4B-07A6B9855D0C}" dt="2025-07-21T08:05:52.092" v="2121" actId="14100"/>
+            <ac:spMkLst>
+              <pc:docMk/>
+              <pc:sldMasterMk cId="2940896467" sldId="2147483648"/>
+              <pc:sldLayoutMk cId="3074954578" sldId="2147483650"/>
+              <ac:spMk id="6" creationId="{8755C1BE-9560-A50A-74BD-E0FFF7F5B69F}"/>
             </ac:spMkLst>
           </pc:spChg>
         </pc:sldLayoutChg>
@@ -266,8 +284,8 @@
             </ac:spMkLst>
           </pc:spChg>
         </pc:sldLayoutChg>
-        <pc:sldLayoutChg chg="modSp mod">
-          <pc:chgData name="Sam Khalil" userId="82cd1ec2-6208-465b-9d4d-40ce8f0cbf96" providerId="ADAL" clId="{651B6F30-EC96-2340-AD4B-07A6B9855D0C}" dt="2025-07-17T09:54:02.244" v="668"/>
+        <pc:sldLayoutChg chg="addSp modSp mod">
+          <pc:chgData name="Sam Khalil" userId="82cd1ec2-6208-465b-9d4d-40ce8f0cbf96" providerId="ADAL" clId="{651B6F30-EC96-2340-AD4B-07A6B9855D0C}" dt="2025-07-21T08:05:08.740" v="2106" actId="1076"/>
           <pc:sldLayoutMkLst>
             <pc:docMk/>
             <pc:sldMasterMk cId="2940896467" sldId="2147483648"/>
@@ -283,12 +301,21 @@
             </ac:spMkLst>
           </pc:spChg>
           <pc:spChg chg="mod">
-            <ac:chgData name="Sam Khalil" userId="82cd1ec2-6208-465b-9d4d-40ce8f0cbf96" providerId="ADAL" clId="{651B6F30-EC96-2340-AD4B-07A6B9855D0C}" dt="2025-07-17T09:53:47.272" v="622" actId="20577"/>
+            <ac:chgData name="Sam Khalil" userId="82cd1ec2-6208-465b-9d4d-40ce8f0cbf96" providerId="ADAL" clId="{651B6F30-EC96-2340-AD4B-07A6B9855D0C}" dt="2025-07-21T08:05:08.740" v="2106" actId="1076"/>
             <ac:spMkLst>
               <pc:docMk/>
               <pc:sldMasterMk cId="2940896467" sldId="2147483648"/>
               <pc:sldLayoutMk cId="3100185760" sldId="2147483667"/>
               <ac:spMk id="3" creationId="{8A6FC6F2-80B4-49A7-9448-33FE2DF0E967}"/>
+            </ac:spMkLst>
+          </pc:spChg>
+          <pc:spChg chg="add mod">
+            <ac:chgData name="Sam Khalil" userId="82cd1ec2-6208-465b-9d4d-40ce8f0cbf96" providerId="ADAL" clId="{651B6F30-EC96-2340-AD4B-07A6B9855D0C}" dt="2025-07-21T08:05:01.697" v="2104" actId="14100"/>
+            <ac:spMkLst>
+              <pc:docMk/>
+              <pc:sldMasterMk cId="2940896467" sldId="2147483648"/>
+              <pc:sldLayoutMk cId="3100185760" sldId="2147483667"/>
+              <ac:spMk id="4" creationId="{F8567C99-F3EA-939B-081F-B8C4B329CCCE}"/>
             </ac:spMkLst>
           </pc:spChg>
         </pc:sldLayoutChg>
@@ -370,21 +397,336 @@
             </ac:spMkLst>
           </pc:spChg>
         </pc:sldLayoutChg>
-        <pc:sldLayoutChg chg="ord">
-          <pc:chgData name="Sam Khalil" userId="82cd1ec2-6208-465b-9d4d-40ce8f0cbf96" providerId="ADAL" clId="{651B6F30-EC96-2340-AD4B-07A6B9855D0C}" dt="2025-07-17T21:10:19.682" v="1234" actId="20578"/>
+        <pc:sldLayoutChg chg="addSp delSp modSp mod ord">
+          <pc:chgData name="Sam Khalil" userId="82cd1ec2-6208-465b-9d4d-40ce8f0cbf96" providerId="ADAL" clId="{651B6F30-EC96-2340-AD4B-07A6B9855D0C}" dt="2025-07-21T08:09:17.134" v="2468" actId="207"/>
           <pc:sldLayoutMkLst>
             <pc:docMk/>
             <pc:sldMasterMk cId="2940896467" sldId="2147483648"/>
             <pc:sldLayoutMk cId="3393990456" sldId="2147483672"/>
           </pc:sldLayoutMkLst>
+          <pc:spChg chg="del mod">
+            <ac:chgData name="Sam Khalil" userId="82cd1ec2-6208-465b-9d4d-40ce8f0cbf96" providerId="ADAL" clId="{651B6F30-EC96-2340-AD4B-07A6B9855D0C}" dt="2025-07-21T08:09:05.796" v="2416" actId="478"/>
+            <ac:spMkLst>
+              <pc:docMk/>
+              <pc:sldMasterMk cId="2940896467" sldId="2147483648"/>
+              <pc:sldLayoutMk cId="3393990456" sldId="2147483672"/>
+              <ac:spMk id="2" creationId="{6372FCEB-FEC1-18CC-54A6-09739A289B26}"/>
+            </ac:spMkLst>
+          </pc:spChg>
+          <pc:spChg chg="mod">
+            <ac:chgData name="Sam Khalil" userId="82cd1ec2-6208-465b-9d4d-40ce8f0cbf96" providerId="ADAL" clId="{651B6F30-EC96-2340-AD4B-07A6B9855D0C}" dt="2025-07-21T08:08:36.529" v="2240" actId="1076"/>
+            <ac:spMkLst>
+              <pc:docMk/>
+              <pc:sldMasterMk cId="2940896467" sldId="2147483648"/>
+              <pc:sldLayoutMk cId="3393990456" sldId="2147483672"/>
+              <ac:spMk id="12" creationId="{EFC724FB-B7D0-20F8-923C-E4CD8D9194CA}"/>
+            </ac:spMkLst>
+          </pc:spChg>
+          <pc:spChg chg="add mod">
+            <ac:chgData name="Sam Khalil" userId="82cd1ec2-6208-465b-9d4d-40ce8f0cbf96" providerId="ADAL" clId="{651B6F30-EC96-2340-AD4B-07A6B9855D0C}" dt="2025-07-21T08:09:10.569" v="2417" actId="167"/>
+            <ac:spMkLst>
+              <pc:docMk/>
+              <pc:sldMasterMk cId="2940896467" sldId="2147483648"/>
+              <pc:sldLayoutMk cId="3393990456" sldId="2147483672"/>
+              <ac:spMk id="13" creationId="{0617AC1D-26CB-713E-4508-B01954EF86DF}"/>
+            </ac:spMkLst>
+          </pc:spChg>
+          <pc:spChg chg="add mod">
+            <ac:chgData name="Sam Khalil" userId="82cd1ec2-6208-465b-9d4d-40ce8f0cbf96" providerId="ADAL" clId="{651B6F30-EC96-2340-AD4B-07A6B9855D0C}" dt="2025-07-21T08:09:17.134" v="2468" actId="207"/>
+            <ac:spMkLst>
+              <pc:docMk/>
+              <pc:sldMasterMk cId="2940896467" sldId="2147483648"/>
+              <pc:sldLayoutMk cId="3393990456" sldId="2147483672"/>
+              <ac:spMk id="18" creationId="{12CC8E3F-B2A1-F8CA-0B79-3E642C812BBA}"/>
+            </ac:spMkLst>
+          </pc:spChg>
+          <pc:picChg chg="add del mod">
+            <ac:chgData name="Sam Khalil" userId="82cd1ec2-6208-465b-9d4d-40ce8f0cbf96" providerId="ADAL" clId="{651B6F30-EC96-2340-AD4B-07A6B9855D0C}" dt="2025-07-21T08:08:52.775" v="2246" actId="167"/>
+            <ac:picMkLst>
+              <pc:docMk/>
+              <pc:sldMasterMk cId="2940896467" sldId="2147483648"/>
+              <pc:sldLayoutMk cId="3393990456" sldId="2147483672"/>
+              <ac:picMk id="4" creationId="{E92912F8-6299-B5F5-C99C-1BF14D2F0334}"/>
+            </ac:picMkLst>
+          </pc:picChg>
+          <pc:picChg chg="mod">
+            <ac:chgData name="Sam Khalil" userId="82cd1ec2-6208-465b-9d4d-40ce8f0cbf96" providerId="ADAL" clId="{651B6F30-EC96-2340-AD4B-07A6B9855D0C}" dt="2025-07-21T08:08:36.529" v="2240" actId="1076"/>
+            <ac:picMkLst>
+              <pc:docMk/>
+              <pc:sldMasterMk cId="2940896467" sldId="2147483648"/>
+              <pc:sldLayoutMk cId="3393990456" sldId="2147483672"/>
+              <ac:picMk id="14" creationId="{981C10B9-9817-EB54-2841-E3C1D957E143}"/>
+            </ac:picMkLst>
+          </pc:picChg>
         </pc:sldLayoutChg>
-        <pc:sldLayoutChg chg="ord">
-          <pc:chgData name="Sam Khalil" userId="82cd1ec2-6208-465b-9d4d-40ce8f0cbf96" providerId="ADAL" clId="{651B6F30-EC96-2340-AD4B-07A6B9855D0C}" dt="2025-07-17T21:10:32.513" v="1239" actId="20578"/>
+        <pc:sldLayoutChg chg="addSp modSp mod ord">
+          <pc:chgData name="Sam Khalil" userId="82cd1ec2-6208-465b-9d4d-40ce8f0cbf96" providerId="ADAL" clId="{651B6F30-EC96-2340-AD4B-07A6B9855D0C}" dt="2025-07-21T08:11:04.944" v="2496" actId="29295"/>
           <pc:sldLayoutMkLst>
             <pc:docMk/>
             <pc:sldMasterMk cId="2940896467" sldId="2147483648"/>
             <pc:sldLayoutMk cId="2955669845" sldId="2147483673"/>
           </pc:sldLayoutMkLst>
+          <pc:spChg chg="add mod">
+            <ac:chgData name="Sam Khalil" userId="82cd1ec2-6208-465b-9d4d-40ce8f0cbf96" providerId="ADAL" clId="{651B6F30-EC96-2340-AD4B-07A6B9855D0C}" dt="2025-07-21T08:10:30.455" v="2490" actId="14100"/>
+            <ac:spMkLst>
+              <pc:docMk/>
+              <pc:sldMasterMk cId="2940896467" sldId="2147483648"/>
+              <pc:sldLayoutMk cId="2955669845" sldId="2147483673"/>
+              <ac:spMk id="2" creationId="{E4D1961F-E19F-CE3C-40E8-F910B0EE5077}"/>
+            </ac:spMkLst>
+          </pc:spChg>
+          <pc:spChg chg="mod">
+            <ac:chgData name="Sam Khalil" userId="82cd1ec2-6208-465b-9d4d-40ce8f0cbf96" providerId="ADAL" clId="{651B6F30-EC96-2340-AD4B-07A6B9855D0C}" dt="2025-07-21T08:09:45.759" v="2479" actId="1076"/>
+            <ac:spMkLst>
+              <pc:docMk/>
+              <pc:sldMasterMk cId="2940896467" sldId="2147483648"/>
+              <pc:sldLayoutMk cId="2955669845" sldId="2147483673"/>
+              <ac:spMk id="13" creationId="{49D92DF9-4B98-A01C-A7B1-352C8B146E6F}"/>
+            </ac:spMkLst>
+          </pc:spChg>
+          <pc:spChg chg="mod">
+            <ac:chgData name="Sam Khalil" userId="82cd1ec2-6208-465b-9d4d-40ce8f0cbf96" providerId="ADAL" clId="{651B6F30-EC96-2340-AD4B-07A6B9855D0C}" dt="2025-07-21T08:10:15.058" v="2487" actId="1076"/>
+            <ac:spMkLst>
+              <pc:docMk/>
+              <pc:sldMasterMk cId="2940896467" sldId="2147483648"/>
+              <pc:sldLayoutMk cId="2955669845" sldId="2147483673"/>
+              <ac:spMk id="18" creationId="{3D76CCEB-1818-1860-AAF8-7A1CA815CF36}"/>
+            </ac:spMkLst>
+          </pc:spChg>
+          <pc:spChg chg="mod">
+            <ac:chgData name="Sam Khalil" userId="82cd1ec2-6208-465b-9d4d-40ce8f0cbf96" providerId="ADAL" clId="{651B6F30-EC96-2340-AD4B-07A6B9855D0C}" dt="2025-07-21T08:10:15.058" v="2487" actId="1076"/>
+            <ac:spMkLst>
+              <pc:docMk/>
+              <pc:sldMasterMk cId="2940896467" sldId="2147483648"/>
+              <pc:sldLayoutMk cId="2955669845" sldId="2147483673"/>
+              <ac:spMk id="19" creationId="{0BCF71B3-5882-0ACA-8F0C-E597CF37495F}"/>
+            </ac:spMkLst>
+          </pc:spChg>
+          <pc:spChg chg="mod">
+            <ac:chgData name="Sam Khalil" userId="82cd1ec2-6208-465b-9d4d-40ce8f0cbf96" providerId="ADAL" clId="{651B6F30-EC96-2340-AD4B-07A6B9855D0C}" dt="2025-07-21T08:10:15.058" v="2487" actId="1076"/>
+            <ac:spMkLst>
+              <pc:docMk/>
+              <pc:sldMasterMk cId="2940896467" sldId="2147483648"/>
+              <pc:sldLayoutMk cId="2955669845" sldId="2147483673"/>
+              <ac:spMk id="20" creationId="{130FC3E6-58A5-9CD0-8116-16B821E0D0D2}"/>
+            </ac:spMkLst>
+          </pc:spChg>
+          <pc:spChg chg="mod">
+            <ac:chgData name="Sam Khalil" userId="82cd1ec2-6208-465b-9d4d-40ce8f0cbf96" providerId="ADAL" clId="{651B6F30-EC96-2340-AD4B-07A6B9855D0C}" dt="2025-07-21T08:10:15.058" v="2487" actId="1076"/>
+            <ac:spMkLst>
+              <pc:docMk/>
+              <pc:sldMasterMk cId="2940896467" sldId="2147483648"/>
+              <pc:sldLayoutMk cId="2955669845" sldId="2147483673"/>
+              <ac:spMk id="21" creationId="{D7ABC5C1-7F24-0E88-1FBE-F391A1D6443E}"/>
+            </ac:spMkLst>
+          </pc:spChg>
+          <pc:spChg chg="mod">
+            <ac:chgData name="Sam Khalil" userId="82cd1ec2-6208-465b-9d4d-40ce8f0cbf96" providerId="ADAL" clId="{651B6F30-EC96-2340-AD4B-07A6B9855D0C}" dt="2025-07-21T08:10:15.058" v="2487" actId="1076"/>
+            <ac:spMkLst>
+              <pc:docMk/>
+              <pc:sldMasterMk cId="2940896467" sldId="2147483648"/>
+              <pc:sldLayoutMk cId="2955669845" sldId="2147483673"/>
+              <ac:spMk id="22" creationId="{45583127-2AD4-6B03-1813-71A4E76C8329}"/>
+            </ac:spMkLst>
+          </pc:spChg>
+          <pc:spChg chg="mod">
+            <ac:chgData name="Sam Khalil" userId="82cd1ec2-6208-465b-9d4d-40ce8f0cbf96" providerId="ADAL" clId="{651B6F30-EC96-2340-AD4B-07A6B9855D0C}" dt="2025-07-21T08:10:15.058" v="2487" actId="1076"/>
+            <ac:spMkLst>
+              <pc:docMk/>
+              <pc:sldMasterMk cId="2940896467" sldId="2147483648"/>
+              <pc:sldLayoutMk cId="2955669845" sldId="2147483673"/>
+              <ac:spMk id="23" creationId="{43C77D6C-536D-288A-9A07-AE2C0979AAAF}"/>
+            </ac:spMkLst>
+          </pc:spChg>
+          <pc:spChg chg="mod">
+            <ac:chgData name="Sam Khalil" userId="82cd1ec2-6208-465b-9d4d-40ce8f0cbf96" providerId="ADAL" clId="{651B6F30-EC96-2340-AD4B-07A6B9855D0C}" dt="2025-07-21T08:10:21.949" v="2488" actId="1076"/>
+            <ac:spMkLst>
+              <pc:docMk/>
+              <pc:sldMasterMk cId="2940896467" sldId="2147483648"/>
+              <pc:sldLayoutMk cId="2955669845" sldId="2147483673"/>
+              <ac:spMk id="24" creationId="{74DF3F49-B1AD-72D3-895F-DCC4FB73D793}"/>
+            </ac:spMkLst>
+          </pc:spChg>
+          <pc:spChg chg="mod">
+            <ac:chgData name="Sam Khalil" userId="82cd1ec2-6208-465b-9d4d-40ce8f0cbf96" providerId="ADAL" clId="{651B6F30-EC96-2340-AD4B-07A6B9855D0C}" dt="2025-07-21T08:10:21.949" v="2488" actId="1076"/>
+            <ac:spMkLst>
+              <pc:docMk/>
+              <pc:sldMasterMk cId="2940896467" sldId="2147483648"/>
+              <pc:sldLayoutMk cId="2955669845" sldId="2147483673"/>
+              <ac:spMk id="25" creationId="{FE001DDF-FBDF-E249-6F7B-99181D69AC28}"/>
+            </ac:spMkLst>
+          </pc:spChg>
+          <pc:spChg chg="mod">
+            <ac:chgData name="Sam Khalil" userId="82cd1ec2-6208-465b-9d4d-40ce8f0cbf96" providerId="ADAL" clId="{651B6F30-EC96-2340-AD4B-07A6B9855D0C}" dt="2025-07-21T08:10:21.949" v="2488" actId="1076"/>
+            <ac:spMkLst>
+              <pc:docMk/>
+              <pc:sldMasterMk cId="2940896467" sldId="2147483648"/>
+              <pc:sldLayoutMk cId="2955669845" sldId="2147483673"/>
+              <ac:spMk id="26" creationId="{86912470-7B43-22A2-00D0-17B9520EA500}"/>
+            </ac:spMkLst>
+          </pc:spChg>
+          <pc:spChg chg="mod">
+            <ac:chgData name="Sam Khalil" userId="82cd1ec2-6208-465b-9d4d-40ce8f0cbf96" providerId="ADAL" clId="{651B6F30-EC96-2340-AD4B-07A6B9855D0C}" dt="2025-07-21T08:10:21.949" v="2488" actId="1076"/>
+            <ac:spMkLst>
+              <pc:docMk/>
+              <pc:sldMasterMk cId="2940896467" sldId="2147483648"/>
+              <pc:sldLayoutMk cId="2955669845" sldId="2147483673"/>
+              <ac:spMk id="27" creationId="{DD4101A6-1B1B-4243-E876-B17CEA780A39}"/>
+            </ac:spMkLst>
+          </pc:spChg>
+          <pc:spChg chg="mod">
+            <ac:chgData name="Sam Khalil" userId="82cd1ec2-6208-465b-9d4d-40ce8f0cbf96" providerId="ADAL" clId="{651B6F30-EC96-2340-AD4B-07A6B9855D0C}" dt="2025-07-21T08:10:21.949" v="2488" actId="1076"/>
+            <ac:spMkLst>
+              <pc:docMk/>
+              <pc:sldMasterMk cId="2940896467" sldId="2147483648"/>
+              <pc:sldLayoutMk cId="2955669845" sldId="2147483673"/>
+              <ac:spMk id="43" creationId="{DE242BD1-E8F0-2635-BF7D-9643DA4A8844}"/>
+            </ac:spMkLst>
+          </pc:spChg>
+          <pc:picChg chg="mod">
+            <ac:chgData name="Sam Khalil" userId="82cd1ec2-6208-465b-9d4d-40ce8f0cbf96" providerId="ADAL" clId="{651B6F30-EC96-2340-AD4B-07A6B9855D0C}" dt="2025-07-21T08:10:15.058" v="2487" actId="1076"/>
+            <ac:picMkLst>
+              <pc:docMk/>
+              <pc:sldMasterMk cId="2940896467" sldId="2147483648"/>
+              <pc:sldLayoutMk cId="2955669845" sldId="2147483673"/>
+              <ac:picMk id="28" creationId="{BBAD7591-F744-4098-E06F-543F90015B7A}"/>
+            </ac:picMkLst>
+          </pc:picChg>
+          <pc:picChg chg="mod">
+            <ac:chgData name="Sam Khalil" userId="82cd1ec2-6208-465b-9d4d-40ce8f0cbf96" providerId="ADAL" clId="{651B6F30-EC96-2340-AD4B-07A6B9855D0C}" dt="2025-07-21T08:10:21.949" v="2488" actId="1076"/>
+            <ac:picMkLst>
+              <pc:docMk/>
+              <pc:sldMasterMk cId="2940896467" sldId="2147483648"/>
+              <pc:sldLayoutMk cId="2955669845" sldId="2147483673"/>
+              <ac:picMk id="29" creationId="{95D0FA04-3AB7-EAAA-0E84-5E95CEFF0D4F}"/>
+            </ac:picMkLst>
+          </pc:picChg>
+          <pc:picChg chg="mod">
+            <ac:chgData name="Sam Khalil" userId="82cd1ec2-6208-465b-9d4d-40ce8f0cbf96" providerId="ADAL" clId="{651B6F30-EC96-2340-AD4B-07A6B9855D0C}" dt="2025-07-21T08:10:15.058" v="2487" actId="1076"/>
+            <ac:picMkLst>
+              <pc:docMk/>
+              <pc:sldMasterMk cId="2940896467" sldId="2147483648"/>
+              <pc:sldLayoutMk cId="2955669845" sldId="2147483673"/>
+              <ac:picMk id="30" creationId="{D2732E4D-CDD3-0A02-898B-AAE31D61CD92}"/>
+            </ac:picMkLst>
+          </pc:picChg>
+          <pc:picChg chg="mod">
+            <ac:chgData name="Sam Khalil" userId="82cd1ec2-6208-465b-9d4d-40ce8f0cbf96" providerId="ADAL" clId="{651B6F30-EC96-2340-AD4B-07A6B9855D0C}" dt="2025-07-21T08:10:15.058" v="2487" actId="1076"/>
+            <ac:picMkLst>
+              <pc:docMk/>
+              <pc:sldMasterMk cId="2940896467" sldId="2147483648"/>
+              <pc:sldLayoutMk cId="2955669845" sldId="2147483673"/>
+              <ac:picMk id="31" creationId="{327537E7-188C-632A-88A4-0CDB609626B8}"/>
+            </ac:picMkLst>
+          </pc:picChg>
+          <pc:picChg chg="mod">
+            <ac:chgData name="Sam Khalil" userId="82cd1ec2-6208-465b-9d4d-40ce8f0cbf96" providerId="ADAL" clId="{651B6F30-EC96-2340-AD4B-07A6B9855D0C}" dt="2025-07-21T08:09:59.562" v="2484" actId="1076"/>
+            <ac:picMkLst>
+              <pc:docMk/>
+              <pc:sldMasterMk cId="2940896467" sldId="2147483648"/>
+              <pc:sldLayoutMk cId="2955669845" sldId="2147483673"/>
+              <ac:picMk id="33" creationId="{D4538602-E74E-0718-5FA7-047BC0C9B4DC}"/>
+            </ac:picMkLst>
+          </pc:picChg>
+          <pc:picChg chg="mod">
+            <ac:chgData name="Sam Khalil" userId="82cd1ec2-6208-465b-9d4d-40ce8f0cbf96" providerId="ADAL" clId="{651B6F30-EC96-2340-AD4B-07A6B9855D0C}" dt="2025-07-21T08:10:15.058" v="2487" actId="1076"/>
+            <ac:picMkLst>
+              <pc:docMk/>
+              <pc:sldMasterMk cId="2940896467" sldId="2147483648"/>
+              <pc:sldLayoutMk cId="2955669845" sldId="2147483673"/>
+              <ac:picMk id="34" creationId="{5E7BF02C-615A-3088-AF8E-15E632D47456}"/>
+            </ac:picMkLst>
+          </pc:picChg>
+          <pc:picChg chg="mod">
+            <ac:chgData name="Sam Khalil" userId="82cd1ec2-6208-465b-9d4d-40ce8f0cbf96" providerId="ADAL" clId="{651B6F30-EC96-2340-AD4B-07A6B9855D0C}" dt="2025-07-21T08:10:21.949" v="2488" actId="1076"/>
+            <ac:picMkLst>
+              <pc:docMk/>
+              <pc:sldMasterMk cId="2940896467" sldId="2147483648"/>
+              <pc:sldLayoutMk cId="2955669845" sldId="2147483673"/>
+              <ac:picMk id="35" creationId="{5AA8A8E1-06B7-4373-90E9-1E30C3724DEB}"/>
+            </ac:picMkLst>
+          </pc:picChg>
+          <pc:picChg chg="mod">
+            <ac:chgData name="Sam Khalil" userId="82cd1ec2-6208-465b-9d4d-40ce8f0cbf96" providerId="ADAL" clId="{651B6F30-EC96-2340-AD4B-07A6B9855D0C}" dt="2025-07-21T08:11:04.944" v="2496" actId="29295"/>
+            <ac:picMkLst>
+              <pc:docMk/>
+              <pc:sldMasterMk cId="2940896467" sldId="2147483648"/>
+              <pc:sldLayoutMk cId="2955669845" sldId="2147483673"/>
+              <ac:picMk id="37" creationId="{21C476F9-E6D3-0A4B-C426-8A1E5FB20E13}"/>
+            </ac:picMkLst>
+          </pc:picChg>
+          <pc:picChg chg="mod">
+            <ac:chgData name="Sam Khalil" userId="82cd1ec2-6208-465b-9d4d-40ce8f0cbf96" providerId="ADAL" clId="{651B6F30-EC96-2340-AD4B-07A6B9855D0C}" dt="2025-07-21T08:11:04.944" v="2496" actId="29295"/>
+            <ac:picMkLst>
+              <pc:docMk/>
+              <pc:sldMasterMk cId="2940896467" sldId="2147483648"/>
+              <pc:sldLayoutMk cId="2955669845" sldId="2147483673"/>
+              <ac:picMk id="38" creationId="{F2D5E519-A47C-7694-5CD1-E81E57C25B5D}"/>
+            </ac:picMkLst>
+          </pc:picChg>
+          <pc:picChg chg="mod">
+            <ac:chgData name="Sam Khalil" userId="82cd1ec2-6208-465b-9d4d-40ce8f0cbf96" providerId="ADAL" clId="{651B6F30-EC96-2340-AD4B-07A6B9855D0C}" dt="2025-07-21T08:11:04.944" v="2496" actId="29295"/>
+            <ac:picMkLst>
+              <pc:docMk/>
+              <pc:sldMasterMk cId="2940896467" sldId="2147483648"/>
+              <pc:sldLayoutMk cId="2955669845" sldId="2147483673"/>
+              <ac:picMk id="39" creationId="{72E483E8-247A-32FF-E55C-B3B693F060F8}"/>
+            </ac:picMkLst>
+          </pc:picChg>
+          <pc:picChg chg="mod">
+            <ac:chgData name="Sam Khalil" userId="82cd1ec2-6208-465b-9d4d-40ce8f0cbf96" providerId="ADAL" clId="{651B6F30-EC96-2340-AD4B-07A6B9855D0C}" dt="2025-07-21T08:11:04.944" v="2496" actId="29295"/>
+            <ac:picMkLst>
+              <pc:docMk/>
+              <pc:sldMasterMk cId="2940896467" sldId="2147483648"/>
+              <pc:sldLayoutMk cId="2955669845" sldId="2147483673"/>
+              <ac:picMk id="40" creationId="{76DB1012-F4EF-F66E-9015-3D60A0635AF3}"/>
+            </ac:picMkLst>
+          </pc:picChg>
+          <pc:picChg chg="mod">
+            <ac:chgData name="Sam Khalil" userId="82cd1ec2-6208-465b-9d4d-40ce8f0cbf96" providerId="ADAL" clId="{651B6F30-EC96-2340-AD4B-07A6B9855D0C}" dt="2025-07-21T08:11:04.944" v="2496" actId="29295"/>
+            <ac:picMkLst>
+              <pc:docMk/>
+              <pc:sldMasterMk cId="2940896467" sldId="2147483648"/>
+              <pc:sldLayoutMk cId="2955669845" sldId="2147483673"/>
+              <ac:picMk id="41" creationId="{AD420B4B-954A-D141-F1E8-0FE269447133}"/>
+            </ac:picMkLst>
+          </pc:picChg>
+          <pc:picChg chg="mod">
+            <ac:chgData name="Sam Khalil" userId="82cd1ec2-6208-465b-9d4d-40ce8f0cbf96" providerId="ADAL" clId="{651B6F30-EC96-2340-AD4B-07A6B9855D0C}" dt="2025-07-21T08:11:04.944" v="2496" actId="29295"/>
+            <ac:picMkLst>
+              <pc:docMk/>
+              <pc:sldMasterMk cId="2940896467" sldId="2147483648"/>
+              <pc:sldLayoutMk cId="2955669845" sldId="2147483673"/>
+              <ac:picMk id="42" creationId="{A3FE8608-9DB4-ACFD-20F0-E31C800B57D1}"/>
+            </ac:picMkLst>
+          </pc:picChg>
+          <pc:picChg chg="mod">
+            <ac:chgData name="Sam Khalil" userId="82cd1ec2-6208-465b-9d4d-40ce8f0cbf96" providerId="ADAL" clId="{651B6F30-EC96-2340-AD4B-07A6B9855D0C}" dt="2025-07-21T08:10:09.122" v="2486" actId="1076"/>
+            <ac:picMkLst>
+              <pc:docMk/>
+              <pc:sldMasterMk cId="2940896467" sldId="2147483648"/>
+              <pc:sldLayoutMk cId="2955669845" sldId="2147483673"/>
+              <ac:picMk id="44" creationId="{B215E11D-C506-B6AF-57D4-6EDD9DBD59BE}"/>
+            </ac:picMkLst>
+          </pc:picChg>
+          <pc:picChg chg="mod">
+            <ac:chgData name="Sam Khalil" userId="82cd1ec2-6208-465b-9d4d-40ce8f0cbf96" providerId="ADAL" clId="{651B6F30-EC96-2340-AD4B-07A6B9855D0C}" dt="2025-07-21T08:10:21.949" v="2488" actId="1076"/>
+            <ac:picMkLst>
+              <pc:docMk/>
+              <pc:sldMasterMk cId="2940896467" sldId="2147483648"/>
+              <pc:sldLayoutMk cId="2955669845" sldId="2147483673"/>
+              <ac:picMk id="45" creationId="{65D7D50D-033A-59ED-8EEA-390729267733}"/>
+            </ac:picMkLst>
+          </pc:picChg>
+          <pc:picChg chg="mod">
+            <ac:chgData name="Sam Khalil" userId="82cd1ec2-6208-465b-9d4d-40ce8f0cbf96" providerId="ADAL" clId="{651B6F30-EC96-2340-AD4B-07A6B9855D0C}" dt="2025-07-21T08:09:59.562" v="2484" actId="1076"/>
+            <ac:picMkLst>
+              <pc:docMk/>
+              <pc:sldMasterMk cId="2940896467" sldId="2147483648"/>
+              <pc:sldLayoutMk cId="2955669845" sldId="2147483673"/>
+              <ac:picMk id="46" creationId="{3AFCA702-B7A3-1F38-1616-7308C99E9BDE}"/>
+            </ac:picMkLst>
+          </pc:picChg>
         </pc:sldLayoutChg>
         <pc:sldLayoutChg chg="modSp add mod ord modTransition">
           <pc:chgData name="Sam Khalil" userId="82cd1ec2-6208-465b-9d4d-40ce8f0cbf96" providerId="ADAL" clId="{651B6F30-EC96-2340-AD4B-07A6B9855D0C}" dt="2025-07-17T09:55:36.490" v="947" actId="20577"/>
@@ -395,7 +737,7 @@
           </pc:sldLayoutMkLst>
         </pc:sldLayoutChg>
         <pc:sldLayoutChg chg="addSp delSp modSp mod ord">
-          <pc:chgData name="Sam Khalil" userId="82cd1ec2-6208-465b-9d4d-40ce8f0cbf96" providerId="ADAL" clId="{651B6F30-EC96-2340-AD4B-07A6B9855D0C}" dt="2025-07-20T15:51:25.535" v="1443" actId="20577"/>
+          <pc:chgData name="Sam Khalil" userId="82cd1ec2-6208-465b-9d4d-40ce8f0cbf96" providerId="ADAL" clId="{651B6F30-EC96-2340-AD4B-07A6B9855D0C}" dt="2025-07-21T08:07:35.499" v="2207"/>
           <pc:sldLayoutMkLst>
             <pc:docMk/>
             <pc:sldMasterMk cId="2940896467" sldId="2147483648"/>
@@ -411,7 +753,7 @@
             </ac:spMkLst>
           </pc:spChg>
           <pc:spChg chg="add mod">
-            <ac:chgData name="Sam Khalil" userId="82cd1ec2-6208-465b-9d4d-40ce8f0cbf96" providerId="ADAL" clId="{651B6F30-EC96-2340-AD4B-07A6B9855D0C}" dt="2025-07-20T15:51:25.535" v="1443" actId="20577"/>
+            <ac:chgData name="Sam Khalil" userId="82cd1ec2-6208-465b-9d4d-40ce8f0cbf96" providerId="ADAL" clId="{651B6F30-EC96-2340-AD4B-07A6B9855D0C}" dt="2025-07-21T08:06:45.805" v="2167" actId="1076"/>
             <ac:spMkLst>
               <pc:docMk/>
               <pc:sldMasterMk cId="2940896467" sldId="2147483648"/>
@@ -420,7 +762,7 @@
             </ac:spMkLst>
           </pc:spChg>
           <pc:spChg chg="add mod">
-            <ac:chgData name="Sam Khalil" userId="82cd1ec2-6208-465b-9d4d-40ce8f0cbf96" providerId="ADAL" clId="{651B6F30-EC96-2340-AD4B-07A6B9855D0C}" dt="2025-07-20T15:49:13.279" v="1361" actId="404"/>
+            <ac:chgData name="Sam Khalil" userId="82cd1ec2-6208-465b-9d4d-40ce8f0cbf96" providerId="ADAL" clId="{651B6F30-EC96-2340-AD4B-07A6B9855D0C}" dt="2025-07-21T08:07:33.541" v="2205"/>
             <ac:spMkLst>
               <pc:docMk/>
               <pc:sldMasterMk cId="2940896467" sldId="2147483648"/>
@@ -429,7 +771,7 @@
             </ac:spMkLst>
           </pc:spChg>
           <pc:spChg chg="add mod">
-            <ac:chgData name="Sam Khalil" userId="82cd1ec2-6208-465b-9d4d-40ce8f0cbf96" providerId="ADAL" clId="{651B6F30-EC96-2340-AD4B-07A6B9855D0C}" dt="2025-07-20T15:50:43.304" v="1425" actId="122"/>
+            <ac:chgData name="Sam Khalil" userId="82cd1ec2-6208-465b-9d4d-40ce8f0cbf96" providerId="ADAL" clId="{651B6F30-EC96-2340-AD4B-07A6B9855D0C}" dt="2025-07-21T08:06:41.036" v="2166" actId="1076"/>
             <ac:spMkLst>
               <pc:docMk/>
               <pc:sldMasterMk cId="2940896467" sldId="2147483648"/>
@@ -438,7 +780,7 @@
             </ac:spMkLst>
           </pc:spChg>
           <pc:spChg chg="add del mod">
-            <ac:chgData name="Sam Khalil" userId="82cd1ec2-6208-465b-9d4d-40ce8f0cbf96" providerId="ADAL" clId="{651B6F30-EC96-2340-AD4B-07A6B9855D0C}" dt="2025-07-20T15:49:16.063" v="1363" actId="404"/>
+            <ac:chgData name="Sam Khalil" userId="82cd1ec2-6208-465b-9d4d-40ce8f0cbf96" providerId="ADAL" clId="{651B6F30-EC96-2340-AD4B-07A6B9855D0C}" dt="2025-07-21T08:07:29.210" v="2201"/>
             <ac:spMkLst>
               <pc:docMk/>
               <pc:sldMasterMk cId="2940896467" sldId="2147483648"/>
@@ -447,7 +789,7 @@
             </ac:spMkLst>
           </pc:spChg>
           <pc:spChg chg="add mod">
-            <ac:chgData name="Sam Khalil" userId="82cd1ec2-6208-465b-9d4d-40ce8f0cbf96" providerId="ADAL" clId="{651B6F30-EC96-2340-AD4B-07A6B9855D0C}" dt="2025-07-20T15:50:38.422" v="1423" actId="20577"/>
+            <ac:chgData name="Sam Khalil" userId="82cd1ec2-6208-465b-9d4d-40ce8f0cbf96" providerId="ADAL" clId="{651B6F30-EC96-2340-AD4B-07A6B9855D0C}" dt="2025-07-21T08:06:41.036" v="2166" actId="1076"/>
             <ac:spMkLst>
               <pc:docMk/>
               <pc:sldMasterMk cId="2940896467" sldId="2147483648"/>
@@ -456,7 +798,7 @@
             </ac:spMkLst>
           </pc:spChg>
           <pc:spChg chg="add mod">
-            <ac:chgData name="Sam Khalil" userId="82cd1ec2-6208-465b-9d4d-40ce8f0cbf96" providerId="ADAL" clId="{651B6F30-EC96-2340-AD4B-07A6B9855D0C}" dt="2025-07-20T15:51:22.837" v="1441" actId="20577"/>
+            <ac:chgData name="Sam Khalil" userId="82cd1ec2-6208-465b-9d4d-40ce8f0cbf96" providerId="ADAL" clId="{651B6F30-EC96-2340-AD4B-07A6B9855D0C}" dt="2025-07-21T08:06:45.805" v="2167" actId="1076"/>
             <ac:spMkLst>
               <pc:docMk/>
               <pc:sldMasterMk cId="2940896467" sldId="2147483648"/>
@@ -465,7 +807,7 @@
             </ac:spMkLst>
           </pc:spChg>
           <pc:spChg chg="add mod">
-            <ac:chgData name="Sam Khalil" userId="82cd1ec2-6208-465b-9d4d-40ce8f0cbf96" providerId="ADAL" clId="{651B6F30-EC96-2340-AD4B-07A6B9855D0C}" dt="2025-07-20T15:49:07.642" v="1357" actId="404"/>
+            <ac:chgData name="Sam Khalil" userId="82cd1ec2-6208-465b-9d4d-40ce8f0cbf96" providerId="ADAL" clId="{651B6F30-EC96-2340-AD4B-07A6B9855D0C}" dt="2025-07-21T08:07:26.618" v="2199"/>
             <ac:spMkLst>
               <pc:docMk/>
               <pc:sldMasterMk cId="2940896467" sldId="2147483648"/>
@@ -474,7 +816,7 @@
             </ac:spMkLst>
           </pc:spChg>
           <pc:spChg chg="add mod">
-            <ac:chgData name="Sam Khalil" userId="82cd1ec2-6208-465b-9d4d-40ce8f0cbf96" providerId="ADAL" clId="{651B6F30-EC96-2340-AD4B-07A6B9855D0C}" dt="2025-07-20T15:51:00.216" v="1431" actId="404"/>
+            <ac:chgData name="Sam Khalil" userId="82cd1ec2-6208-465b-9d4d-40ce8f0cbf96" providerId="ADAL" clId="{651B6F30-EC96-2340-AD4B-07A6B9855D0C}" dt="2025-07-21T08:06:45.805" v="2167" actId="1076"/>
             <ac:spMkLst>
               <pc:docMk/>
               <pc:sldMasterMk cId="2940896467" sldId="2147483648"/>
@@ -483,7 +825,7 @@
             </ac:spMkLst>
           </pc:spChg>
           <pc:spChg chg="add mod">
-            <ac:chgData name="Sam Khalil" userId="82cd1ec2-6208-465b-9d4d-40ce8f0cbf96" providerId="ADAL" clId="{651B6F30-EC96-2340-AD4B-07A6B9855D0C}" dt="2025-07-20T15:49:11.008" v="1359" actId="404"/>
+            <ac:chgData name="Sam Khalil" userId="82cd1ec2-6208-465b-9d4d-40ce8f0cbf96" providerId="ADAL" clId="{651B6F30-EC96-2340-AD4B-07A6B9855D0C}" dt="2025-07-21T08:07:31.485" v="2203"/>
             <ac:spMkLst>
               <pc:docMk/>
               <pc:sldMasterMk cId="2940896467" sldId="2147483648"/>
@@ -492,7 +834,7 @@
             </ac:spMkLst>
           </pc:spChg>
           <pc:spChg chg="add mod">
-            <ac:chgData name="Sam Khalil" userId="82cd1ec2-6208-465b-9d4d-40ce8f0cbf96" providerId="ADAL" clId="{651B6F30-EC96-2340-AD4B-07A6B9855D0C}" dt="2025-07-20T15:50:41.068" v="1424" actId="122"/>
+            <ac:chgData name="Sam Khalil" userId="82cd1ec2-6208-465b-9d4d-40ce8f0cbf96" providerId="ADAL" clId="{651B6F30-EC96-2340-AD4B-07A6B9855D0C}" dt="2025-07-21T08:06:41.036" v="2166" actId="1076"/>
             <ac:spMkLst>
               <pc:docMk/>
               <pc:sldMasterMk cId="2940896467" sldId="2147483648"/>
@@ -501,7 +843,7 @@
             </ac:spMkLst>
           </pc:spChg>
           <pc:spChg chg="add mod">
-            <ac:chgData name="Sam Khalil" userId="82cd1ec2-6208-465b-9d4d-40ce8f0cbf96" providerId="ADAL" clId="{651B6F30-EC96-2340-AD4B-07A6B9855D0C}" dt="2025-07-20T15:49:04.200" v="1355" actId="404"/>
+            <ac:chgData name="Sam Khalil" userId="82cd1ec2-6208-465b-9d4d-40ce8f0cbf96" providerId="ADAL" clId="{651B6F30-EC96-2340-AD4B-07A6B9855D0C}" dt="2025-07-21T08:07:27.788" v="2200"/>
             <ac:spMkLst>
               <pc:docMk/>
               <pc:sldMasterMk cId="2940896467" sldId="2147483648"/>
@@ -510,7 +852,7 @@
             </ac:spMkLst>
           </pc:spChg>
           <pc:spChg chg="add mod">
-            <ac:chgData name="Sam Khalil" userId="82cd1ec2-6208-465b-9d4d-40ce8f0cbf96" providerId="ADAL" clId="{651B6F30-EC96-2340-AD4B-07A6B9855D0C}" dt="2025-07-20T15:49:18.605" v="1365" actId="404"/>
+            <ac:chgData name="Sam Khalil" userId="82cd1ec2-6208-465b-9d4d-40ce8f0cbf96" providerId="ADAL" clId="{651B6F30-EC96-2340-AD4B-07A6B9855D0C}" dt="2025-07-21T08:07:35.499" v="2207"/>
             <ac:spMkLst>
               <pc:docMk/>
               <pc:sldMasterMk cId="2940896467" sldId="2147483648"/>
@@ -518,14 +860,41 @@
               <ac:spMk id="14" creationId="{BCEDE17A-C31D-39B6-1DD5-DFF09F743405}"/>
             </ac:spMkLst>
           </pc:spChg>
+          <pc:spChg chg="add mod">
+            <ac:chgData name="Sam Khalil" userId="82cd1ec2-6208-465b-9d4d-40ce8f0cbf96" providerId="ADAL" clId="{651B6F30-EC96-2340-AD4B-07A6B9855D0C}" dt="2025-07-21T08:06:35.192" v="2165" actId="167"/>
+            <ac:spMkLst>
+              <pc:docMk/>
+              <pc:sldMasterMk cId="2940896467" sldId="2147483648"/>
+              <pc:sldLayoutMk cId="1049941252" sldId="2147483675"/>
+              <ac:spMk id="15" creationId="{A947E235-B803-CB82-33BD-ED0DA2439F22}"/>
+            </ac:spMkLst>
+          </pc:spChg>
         </pc:sldLayoutChg>
         <pc:sldLayoutChg chg="addSp delSp modSp add mod ord modTransition">
-          <pc:chgData name="Sam Khalil" userId="82cd1ec2-6208-465b-9d4d-40ce8f0cbf96" providerId="ADAL" clId="{651B6F30-EC96-2340-AD4B-07A6B9855D0C}" dt="2025-07-17T21:10:25.014" v="1236" actId="20578"/>
+          <pc:chgData name="Sam Khalil" userId="82cd1ec2-6208-465b-9d4d-40ce8f0cbf96" providerId="ADAL" clId="{651B6F30-EC96-2340-AD4B-07A6B9855D0C}" dt="2025-07-21T08:07:59.793" v="2234" actId="20577"/>
           <pc:sldLayoutMkLst>
             <pc:docMk/>
             <pc:sldMasterMk cId="2940896467" sldId="2147483648"/>
             <pc:sldLayoutMk cId="88811751" sldId="2147483676"/>
           </pc:sldLayoutMkLst>
+          <pc:spChg chg="mod">
+            <ac:chgData name="Sam Khalil" userId="82cd1ec2-6208-465b-9d4d-40ce8f0cbf96" providerId="ADAL" clId="{651B6F30-EC96-2340-AD4B-07A6B9855D0C}" dt="2025-07-21T08:07:59.793" v="2234" actId="20577"/>
+            <ac:spMkLst>
+              <pc:docMk/>
+              <pc:sldMasterMk cId="2940896467" sldId="2147483648"/>
+              <pc:sldLayoutMk cId="88811751" sldId="2147483676"/>
+              <ac:spMk id="3" creationId="{8A6FC6F2-80B4-49A7-9448-33FE2DF0E967}"/>
+            </ac:spMkLst>
+          </pc:spChg>
+          <pc:spChg chg="add mod">
+            <ac:chgData name="Sam Khalil" userId="82cd1ec2-6208-465b-9d4d-40ce8f0cbf96" providerId="ADAL" clId="{651B6F30-EC96-2340-AD4B-07A6B9855D0C}" dt="2025-07-21T08:07:48.278" v="2210" actId="167"/>
+            <ac:spMkLst>
+              <pc:docMk/>
+              <pc:sldMasterMk cId="2940896467" sldId="2147483648"/>
+              <pc:sldLayoutMk cId="88811751" sldId="2147483676"/>
+              <ac:spMk id="4" creationId="{BE22977E-9585-6DDE-2FD8-59AEA03AE068}"/>
+            </ac:spMkLst>
+          </pc:spChg>
         </pc:sldLayoutChg>
         <pc:sldLayoutChg chg="modSp add mod modTransition">
           <pc:chgData name="Sam Khalil" userId="82cd1ec2-6208-465b-9d4d-40ce8f0cbf96" providerId="ADAL" clId="{651B6F30-EC96-2340-AD4B-07A6B9855D0C}" dt="2025-07-17T22:12:58.955" v="1348" actId="962"/>
@@ -544,15 +913,15 @@
             </ac:spMkLst>
           </pc:spChg>
         </pc:sldLayoutChg>
-        <pc:sldLayoutChg chg="delSp modSp add mod modTransition">
-          <pc:chgData name="Sam Khalil" userId="82cd1ec2-6208-465b-9d4d-40ce8f0cbf96" providerId="ADAL" clId="{651B6F30-EC96-2340-AD4B-07A6B9855D0C}" dt="2025-07-20T15:51:34.838" v="1445" actId="404"/>
+        <pc:sldLayoutChg chg="addSp delSp modSp add mod modTransition">
+          <pc:chgData name="Sam Khalil" userId="82cd1ec2-6208-465b-9d4d-40ce8f0cbf96" providerId="ADAL" clId="{651B6F30-EC96-2340-AD4B-07A6B9855D0C}" dt="2025-07-21T08:07:22.700" v="2197"/>
           <pc:sldLayoutMkLst>
             <pc:docMk/>
             <pc:sldMasterMk cId="2940896467" sldId="2147483648"/>
             <pc:sldLayoutMk cId="2538074859" sldId="2147483678"/>
           </pc:sldLayoutMkLst>
           <pc:spChg chg="mod">
-            <ac:chgData name="Sam Khalil" userId="82cd1ec2-6208-465b-9d4d-40ce8f0cbf96" providerId="ADAL" clId="{651B6F30-EC96-2340-AD4B-07A6B9855D0C}" dt="2025-07-17T22:40:18.173" v="1351" actId="1076"/>
+            <ac:chgData name="Sam Khalil" userId="82cd1ec2-6208-465b-9d4d-40ce8f0cbf96" providerId="ADAL" clId="{651B6F30-EC96-2340-AD4B-07A6B9855D0C}" dt="2025-07-21T08:07:07.892" v="2172" actId="1076"/>
             <ac:spMkLst>
               <pc:docMk/>
               <pc:sldMasterMk cId="2940896467" sldId="2147483648"/>
@@ -561,7 +930,7 @@
             </ac:spMkLst>
           </pc:spChg>
           <pc:spChg chg="mod">
-            <ac:chgData name="Sam Khalil" userId="82cd1ec2-6208-465b-9d4d-40ce8f0cbf96" providerId="ADAL" clId="{651B6F30-EC96-2340-AD4B-07A6B9855D0C}" dt="2025-07-20T15:51:34.838" v="1445" actId="404"/>
+            <ac:chgData name="Sam Khalil" userId="82cd1ec2-6208-465b-9d4d-40ce8f0cbf96" providerId="ADAL" clId="{651B6F30-EC96-2340-AD4B-07A6B9855D0C}" dt="2025-07-21T08:07:22.700" v="2197"/>
             <ac:spMkLst>
               <pc:docMk/>
               <pc:sldMasterMk cId="2940896467" sldId="2147483648"/>
@@ -569,8 +938,17 @@
               <ac:spMk id="4" creationId="{127F3D65-4217-C7DF-99AC-5D0069212872}"/>
             </ac:spMkLst>
           </pc:spChg>
+          <pc:spChg chg="add mod">
+            <ac:chgData name="Sam Khalil" userId="82cd1ec2-6208-465b-9d4d-40ce8f0cbf96" providerId="ADAL" clId="{651B6F30-EC96-2340-AD4B-07A6B9855D0C}" dt="2025-07-21T08:06:56.521" v="2170" actId="167"/>
+            <ac:spMkLst>
+              <pc:docMk/>
+              <pc:sldMasterMk cId="2940896467" sldId="2147483648"/>
+              <pc:sldLayoutMk cId="2538074859" sldId="2147483678"/>
+              <ac:spMk id="5" creationId="{E016E7B1-923A-B9B7-53D4-CEA8E79FC61D}"/>
+            </ac:spMkLst>
+          </pc:spChg>
           <pc:spChg chg="mod">
-            <ac:chgData name="Sam Khalil" userId="82cd1ec2-6208-465b-9d4d-40ce8f0cbf96" providerId="ADAL" clId="{651B6F30-EC96-2340-AD4B-07A6B9855D0C}" dt="2025-07-17T22:40:18.173" v="1351" actId="1076"/>
+            <ac:chgData name="Sam Khalil" userId="82cd1ec2-6208-465b-9d4d-40ce8f0cbf96" providerId="ADAL" clId="{651B6F30-EC96-2340-AD4B-07A6B9855D0C}" dt="2025-07-21T08:07:02.184" v="2171" actId="1076"/>
             <ac:spMkLst>
               <pc:docMk/>
               <pc:sldMasterMk cId="2940896467" sldId="2147483648"/>
@@ -579,7 +957,7 @@
             </ac:spMkLst>
           </pc:spChg>
           <pc:spChg chg="mod">
-            <ac:chgData name="Sam Khalil" userId="82cd1ec2-6208-465b-9d4d-40ce8f0cbf96" providerId="ADAL" clId="{651B6F30-EC96-2340-AD4B-07A6B9855D0C}" dt="2025-07-20T15:51:34.838" v="1445" actId="404"/>
+            <ac:chgData name="Sam Khalil" userId="82cd1ec2-6208-465b-9d4d-40ce8f0cbf96" providerId="ADAL" clId="{651B6F30-EC96-2340-AD4B-07A6B9855D0C}" dt="2025-07-21T08:07:14.822" v="2191" actId="20577"/>
             <ac:spMkLst>
               <pc:docMk/>
               <pc:sldMasterMk cId="2940896467" sldId="2147483648"/>
@@ -588,7 +966,7 @@
             </ac:spMkLst>
           </pc:spChg>
           <pc:spChg chg="mod">
-            <ac:chgData name="Sam Khalil" userId="82cd1ec2-6208-465b-9d4d-40ce8f0cbf96" providerId="ADAL" clId="{651B6F30-EC96-2340-AD4B-07A6B9855D0C}" dt="2025-07-17T22:40:18.173" v="1351" actId="1076"/>
+            <ac:chgData name="Sam Khalil" userId="82cd1ec2-6208-465b-9d4d-40ce8f0cbf96" providerId="ADAL" clId="{651B6F30-EC96-2340-AD4B-07A6B9855D0C}" dt="2025-07-21T08:07:07.892" v="2172" actId="1076"/>
             <ac:spMkLst>
               <pc:docMk/>
               <pc:sldMasterMk cId="2940896467" sldId="2147483648"/>
@@ -597,7 +975,7 @@
             </ac:spMkLst>
           </pc:spChg>
           <pc:spChg chg="mod">
-            <ac:chgData name="Sam Khalil" userId="82cd1ec2-6208-465b-9d4d-40ce8f0cbf96" providerId="ADAL" clId="{651B6F30-EC96-2340-AD4B-07A6B9855D0C}" dt="2025-07-20T15:51:34.838" v="1445" actId="404"/>
+            <ac:chgData name="Sam Khalil" userId="82cd1ec2-6208-465b-9d4d-40ce8f0cbf96" providerId="ADAL" clId="{651B6F30-EC96-2340-AD4B-07A6B9855D0C}" dt="2025-07-21T08:07:20.929" v="2195"/>
             <ac:spMkLst>
               <pc:docMk/>
               <pc:sldMasterMk cId="2940896467" sldId="2147483648"/>
@@ -606,7 +984,7 @@
             </ac:spMkLst>
           </pc:spChg>
           <pc:spChg chg="mod">
-            <ac:chgData name="Sam Khalil" userId="82cd1ec2-6208-465b-9d4d-40ce8f0cbf96" providerId="ADAL" clId="{651B6F30-EC96-2340-AD4B-07A6B9855D0C}" dt="2025-07-17T22:40:18.173" v="1351" actId="1076"/>
+            <ac:chgData name="Sam Khalil" userId="82cd1ec2-6208-465b-9d4d-40ce8f0cbf96" providerId="ADAL" clId="{651B6F30-EC96-2340-AD4B-07A6B9855D0C}" dt="2025-07-21T08:07:02.184" v="2171" actId="1076"/>
             <ac:spMkLst>
               <pc:docMk/>
               <pc:sldMasterMk cId="2940896467" sldId="2147483648"/>
@@ -615,7 +993,7 @@
             </ac:spMkLst>
           </pc:spChg>
           <pc:spChg chg="mod">
-            <ac:chgData name="Sam Khalil" userId="82cd1ec2-6208-465b-9d4d-40ce8f0cbf96" providerId="ADAL" clId="{651B6F30-EC96-2340-AD4B-07A6B9855D0C}" dt="2025-07-20T15:51:34.838" v="1445" actId="404"/>
+            <ac:chgData name="Sam Khalil" userId="82cd1ec2-6208-465b-9d4d-40ce8f0cbf96" providerId="ADAL" clId="{651B6F30-EC96-2340-AD4B-07A6B9855D0C}" dt="2025-07-21T08:07:18.652" v="2193"/>
             <ac:spMkLst>
               <pc:docMk/>
               <pc:sldMasterMk cId="2940896467" sldId="2147483648"/>
@@ -724,7 +1102,7 @@
           <a:p>
             <a:fld id="{D2339670-67E6-CD42-B7B2-F285F1108ED9}" type="datetimeFigureOut">
               <a:rPr lang="en-US" smtClean="0"/>
-              <a:t>7/20/25</a:t>
+              <a:t>7/21/25</a:t>
             </a:fld>
             <a:endParaRPr lang="en-US"/>
           </a:p>
@@ -900,7 +1278,7 @@
           </a:lstStyle>
           <a:p>
             <a:fld id="{1E521F2A-B11E-40E0-8F26-7CD21B55A12D}" type="datetimeFigureOut">
-              <a:t>7/20/25</a:t>
+              <a:t>7/21/25</a:t>
             </a:fld>
             <a:endParaRPr lang="en-GB"/>
           </a:p>
@@ -1320,6 +1698,67 @@
       </p:grpSpPr>
       <p:sp>
         <p:nvSpPr>
+          <p:cNvPr id="4" name="Rounded Rectangle 3">
+            <a:extLst>
+              <a:ext uri="{FF2B5EF4-FFF2-40B4-BE49-F238E27FC236}">
+                <a16:creationId xmlns:a16="http://schemas.microsoft.com/office/drawing/2014/main" id="{BE22977E-9585-6DDE-2FD8-59AEA03AE068}"/>
+              </a:ext>
+            </a:extLst>
+          </p:cNvPr>
+          <p:cNvSpPr/>
+          <p:nvPr userDrawn="1"/>
+        </p:nvSpPr>
+        <p:spPr>
+          <a:xfrm>
+            <a:off x="381000" y="1855425"/>
+            <a:ext cx="11430000" cy="4193309"/>
+          </a:xfrm>
+          <a:prstGeom prst="roundRect">
+            <a:avLst>
+              <a:gd name="adj" fmla="val 4552"/>
+            </a:avLst>
+          </a:prstGeom>
+          <a:solidFill>
+            <a:schemeClr val="bg1"/>
+          </a:solidFill>
+          <a:ln>
+            <a:noFill/>
+          </a:ln>
+          <a:effectLst>
+            <a:outerShdw blurRad="253894" dist="38100" dir="4200000" sx="100317" sy="100317" algn="tl" rotWithShape="0">
+              <a:prstClr val="black">
+                <a:alpha val="22007"/>
+              </a:prstClr>
+            </a:outerShdw>
+          </a:effectLst>
+        </p:spPr>
+        <p:style>
+          <a:lnRef idx="2">
+            <a:schemeClr val="accent1">
+              <a:shade val="15000"/>
+            </a:schemeClr>
+          </a:lnRef>
+          <a:fillRef idx="1">
+            <a:schemeClr val="accent1"/>
+          </a:fillRef>
+          <a:effectRef idx="0">
+            <a:schemeClr val="accent1"/>
+          </a:effectRef>
+          <a:fontRef idx="minor">
+            <a:schemeClr val="lt1"/>
+          </a:fontRef>
+        </p:style>
+        <p:txBody>
+          <a:bodyPr rtlCol="0" anchor="ctr"/>
+          <a:lstStyle/>
+          <a:p>
+            <a:pPr algn="ctr"/>
+            <a:endParaRPr lang="en-US"/>
+          </a:p>
+        </p:txBody>
+      </p:sp>
+      <p:sp>
+        <p:nvSpPr>
           <p:cNvPr id="2" name="Conclusion Title">
             <a:extLst>
               <a:ext uri="{FF2B5EF4-FFF2-40B4-BE49-F238E27FC236}">
@@ -1392,8 +1831,8 @@
         </p:nvSpPr>
         <p:spPr>
           <a:xfrm>
-            <a:off x="381000" y="1825625"/>
-            <a:ext cx="11430000" cy="4351338"/>
+            <a:off x="990600" y="2030660"/>
+            <a:ext cx="10210800" cy="3842837"/>
           </a:xfrm>
           <a:prstGeom prst="rect">
             <a:avLst/>
@@ -1570,7 +2009,7 @@
           <a:p>
             <a:r>
               <a:rPr lang="en-US" dirty="0"/>
-              <a:t>A bulleted list of items and a short conclusion text</a:t>
+              <a:t>A bulleted list of items and a short conclusion text in markdown format</a:t>
             </a:r>
           </a:p>
         </p:txBody>
@@ -1605,6 +2044,69 @@
           <a:chExt cx="0" cy="0"/>
         </a:xfrm>
       </p:grpSpPr>
+      <p:sp>
+        <p:nvSpPr>
+          <p:cNvPr id="13" name="Rounded Rectangle 12">
+            <a:extLst>
+              <a:ext uri="{FF2B5EF4-FFF2-40B4-BE49-F238E27FC236}">
+                <a16:creationId xmlns:a16="http://schemas.microsoft.com/office/drawing/2014/main" id="{0617AC1D-26CB-713E-4508-B01954EF86DF}"/>
+              </a:ext>
+            </a:extLst>
+          </p:cNvPr>
+          <p:cNvSpPr/>
+          <p:nvPr userDrawn="1"/>
+        </p:nvSpPr>
+        <p:spPr>
+          <a:xfrm>
+            <a:off x="381000" y="204537"/>
+            <a:ext cx="11430000" cy="5844197"/>
+          </a:xfrm>
+          <a:prstGeom prst="roundRect">
+            <a:avLst>
+              <a:gd name="adj" fmla="val 4552"/>
+            </a:avLst>
+          </a:prstGeom>
+          <a:solidFill>
+            <a:schemeClr val="bg1">
+              <a:alpha val="82425"/>
+            </a:schemeClr>
+          </a:solidFill>
+          <a:ln>
+            <a:noFill/>
+          </a:ln>
+          <a:effectLst>
+            <a:outerShdw blurRad="253894" dist="38100" dir="4200000" sx="100317" sy="100317" algn="tl" rotWithShape="0">
+              <a:prstClr val="black">
+                <a:alpha val="22007"/>
+              </a:prstClr>
+            </a:outerShdw>
+          </a:effectLst>
+        </p:spPr>
+        <p:style>
+          <a:lnRef idx="2">
+            <a:schemeClr val="accent1">
+              <a:shade val="15000"/>
+            </a:schemeClr>
+          </a:lnRef>
+          <a:fillRef idx="1">
+            <a:schemeClr val="accent1"/>
+          </a:fillRef>
+          <a:effectRef idx="0">
+            <a:schemeClr val="accent1"/>
+          </a:effectRef>
+          <a:fontRef idx="minor">
+            <a:schemeClr val="lt1"/>
+          </a:fontRef>
+        </p:style>
+        <p:txBody>
+          <a:bodyPr rtlCol="0" anchor="ctr"/>
+          <a:lstStyle/>
+          <a:p>
+            <a:pPr algn="ctr"/>
+            <a:endParaRPr lang="en-US"/>
+          </a:p>
+        </p:txBody>
+      </p:sp>
       <p:pic>
         <p:nvPicPr>
           <p:cNvPr id="4" name="Picture 3" descr="A snowy mountain tops with clouds in the background&#10;&#10;AI-generated content may be incorrect.">
@@ -1659,10 +2161,10 @@
       </p:pic>
       <p:sp>
         <p:nvSpPr>
-          <p:cNvPr id="2" name="Rounded Rectangle 1">
-            <a:extLst>
-              <a:ext uri="{FF2B5EF4-FFF2-40B4-BE49-F238E27FC236}">
-                <a16:creationId xmlns:a16="http://schemas.microsoft.com/office/drawing/2014/main" id="{6372FCEB-FEC1-18CC-54A6-09739A289B26}"/>
+          <p:cNvPr id="18" name="Rounded Rectangle 17">
+            <a:extLst>
+              <a:ext uri="{FF2B5EF4-FFF2-40B4-BE49-F238E27FC236}">
+                <a16:creationId xmlns:a16="http://schemas.microsoft.com/office/drawing/2014/main" id="{12CC8E3F-B2A1-F8CA-0B79-3E642C812BBA}"/>
               </a:ext>
             </a:extLst>
           </p:cNvPr>
@@ -1671,29 +2173,28 @@
         </p:nvSpPr>
         <p:spPr>
           <a:xfrm>
-            <a:off x="7855153" y="2401368"/>
-            <a:ext cx="3878223" cy="2385232"/>
+            <a:off x="7579551" y="1999874"/>
+            <a:ext cx="3878224" cy="2385232"/>
           </a:xfrm>
           <a:prstGeom prst="roundRect">
             <a:avLst>
-              <a:gd name="adj" fmla="val 4127"/>
+              <a:gd name="adj" fmla="val 4552"/>
             </a:avLst>
           </a:prstGeom>
           <a:solidFill>
             <a:schemeClr val="bg1">
-              <a:lumMod val="85000"/>
-              <a:alpha val="13425"/>
+              <a:alpha val="84116"/>
             </a:schemeClr>
           </a:solidFill>
           <a:ln>
             <a:noFill/>
           </a:ln>
           <a:effectLst>
-            <a:innerShdw blurRad="63500" dist="50800" dir="13500000">
+            <a:outerShdw blurRad="253894" dist="38100" dir="4200000" sx="100317" sy="100317" algn="tl" rotWithShape="0">
               <a:prstClr val="black">
-                <a:alpha val="50000"/>
+                <a:alpha val="22007"/>
               </a:prstClr>
-            </a:innerShdw>
+            </a:outerShdw>
           </a:effectLst>
         </p:spPr>
         <p:style>
@@ -2143,7 +2644,7 @@
         </p:nvSpPr>
         <p:spPr>
           <a:xfrm>
-            <a:off x="7944857" y="2525381"/>
+            <a:off x="7624404" y="2083374"/>
             <a:ext cx="3788519" cy="1569660"/>
           </a:xfrm>
           <a:prstGeom prst="rect">
@@ -2159,7 +2660,7 @@
           <a:p>
             <a:pPr algn="ctr"/>
             <a:r>
-              <a:rPr lang="en-US" sz="2400" b="1" i="0">
+              <a:rPr lang="en-US" sz="2400" b="1" i="0" dirty="0">
                 <a:solidFill>
                   <a:schemeClr val="tx1">
                     <a:lumMod val="75000"/>
@@ -2202,7 +2703,7 @@
         </p:blipFill>
         <p:spPr>
           <a:xfrm>
-            <a:off x="9454583" y="3953226"/>
+            <a:off x="9134130" y="3511219"/>
             <a:ext cx="914400" cy="914400"/>
           </a:xfrm>
           <a:prstGeom prst="rect">
@@ -2369,6 +2870,67 @@
       </p:grpSpPr>
       <p:sp>
         <p:nvSpPr>
+          <p:cNvPr id="2" name="Rounded Rectangle 1">
+            <a:extLst>
+              <a:ext uri="{FF2B5EF4-FFF2-40B4-BE49-F238E27FC236}">
+                <a16:creationId xmlns:a16="http://schemas.microsoft.com/office/drawing/2014/main" id="{E4D1961F-E19F-CE3C-40E8-F910B0EE5077}"/>
+              </a:ext>
+            </a:extLst>
+          </p:cNvPr>
+          <p:cNvSpPr/>
+          <p:nvPr userDrawn="1"/>
+        </p:nvSpPr>
+        <p:spPr>
+          <a:xfrm>
+            <a:off x="398954" y="1031459"/>
+            <a:ext cx="11513737" cy="5017276"/>
+          </a:xfrm>
+          <a:prstGeom prst="roundRect">
+            <a:avLst>
+              <a:gd name="adj" fmla="val 4552"/>
+            </a:avLst>
+          </a:prstGeom>
+          <a:solidFill>
+            <a:schemeClr val="bg1"/>
+          </a:solidFill>
+          <a:ln>
+            <a:noFill/>
+          </a:ln>
+          <a:effectLst>
+            <a:outerShdw blurRad="253894" dist="38100" dir="4200000" sx="100317" sy="100317" algn="tl" rotWithShape="0">
+              <a:prstClr val="black">
+                <a:alpha val="22007"/>
+              </a:prstClr>
+            </a:outerShdw>
+          </a:effectLst>
+        </p:spPr>
+        <p:style>
+          <a:lnRef idx="2">
+            <a:schemeClr val="accent1">
+              <a:shade val="15000"/>
+            </a:schemeClr>
+          </a:lnRef>
+          <a:fillRef idx="1">
+            <a:schemeClr val="accent1"/>
+          </a:fillRef>
+          <a:effectRef idx="0">
+            <a:schemeClr val="accent1"/>
+          </a:effectRef>
+          <a:fontRef idx="minor">
+            <a:schemeClr val="lt1"/>
+          </a:fontRef>
+        </p:style>
+        <p:txBody>
+          <a:bodyPr rtlCol="0" anchor="ctr"/>
+          <a:lstStyle/>
+          <a:p>
+            <a:pPr algn="ctr"/>
+            <a:endParaRPr lang="en-US"/>
+          </a:p>
+        </p:txBody>
+      </p:sp>
+      <p:sp>
+        <p:nvSpPr>
           <p:cNvPr id="13" name="TextBox 12">
             <a:extLst>
               <a:ext uri="{FF2B5EF4-FFF2-40B4-BE49-F238E27FC236}">
@@ -2381,8 +2943,8 @@
         </p:nvSpPr>
         <p:spPr>
           <a:xfrm>
-            <a:off x="398954" y="385127"/>
-            <a:ext cx="11445516" cy="646331"/>
+            <a:off x="398954" y="123295"/>
+            <a:ext cx="11445516" cy="830997"/>
           </a:xfrm>
           <a:prstGeom prst="rect">
             <a:avLst/>
@@ -2395,12 +2957,12 @@
           </a:bodyPr>
           <a:lstStyle/>
           <a:p>
-            <a:pPr algn="ctr"/>
+            <a:pPr algn="l"/>
             <a:r>
-              <a:rPr lang="en-US" sz="3600" b="1" dirty="0"/>
-              <a:t>Why ekona</a:t>
+              <a:rPr lang="en-US" sz="4800" b="1" dirty="0"/>
+              <a:t>WHY EKONA</a:t>
             </a:r>
-            <a:endParaRPr lang="en-US" sz="3600" dirty="0"/>
+            <a:endParaRPr lang="en-US" sz="4800" dirty="0"/>
           </a:p>
         </p:txBody>
       </p:sp>
@@ -2418,7 +2980,7 @@
         </p:nvSpPr>
         <p:spPr>
           <a:xfrm>
-            <a:off x="1318169" y="1337258"/>
+            <a:off x="1579004" y="1337258"/>
             <a:ext cx="6152972" cy="369332"/>
           </a:xfrm>
           <a:prstGeom prst="rect">
@@ -2484,7 +3046,7 @@
         </p:nvSpPr>
         <p:spPr>
           <a:xfrm>
-            <a:off x="1318169" y="2951486"/>
+            <a:off x="1579004" y="2951486"/>
             <a:ext cx="6152972" cy="369332"/>
           </a:xfrm>
           <a:prstGeom prst="rect">
@@ -2553,7 +3115,7 @@
         </p:nvSpPr>
         <p:spPr>
           <a:xfrm>
-            <a:off x="931492" y="1708438"/>
+            <a:off x="1192327" y="1708438"/>
             <a:ext cx="4797039" cy="738664"/>
           </a:xfrm>
           <a:prstGeom prst="rect">
@@ -2592,7 +3154,7 @@
         </p:nvSpPr>
         <p:spPr>
           <a:xfrm>
-            <a:off x="931492" y="3324512"/>
+            <a:off x="1192327" y="3324512"/>
             <a:ext cx="4797039" cy="738664"/>
           </a:xfrm>
           <a:prstGeom prst="rect">
@@ -2659,7 +3221,7 @@
         </p:nvSpPr>
         <p:spPr>
           <a:xfrm>
-            <a:off x="1318168" y="4598939"/>
+            <a:off x="1579003" y="4598939"/>
             <a:ext cx="4623275" cy="369332"/>
           </a:xfrm>
           <a:prstGeom prst="rect">
@@ -2703,7 +3265,7 @@
         </p:nvSpPr>
         <p:spPr>
           <a:xfrm>
-            <a:off x="905573" y="5032463"/>
+            <a:off x="1166408" y="5032463"/>
             <a:ext cx="4725824" cy="738664"/>
           </a:xfrm>
           <a:prstGeom prst="rect">
@@ -2746,7 +3308,7 @@
         </p:nvSpPr>
         <p:spPr>
           <a:xfrm>
-            <a:off x="7271046" y="1339106"/>
+            <a:off x="7127541" y="1306294"/>
             <a:ext cx="4573424" cy="369332"/>
           </a:xfrm>
           <a:prstGeom prst="rect">
@@ -2789,7 +3351,7 @@
         </p:nvSpPr>
         <p:spPr>
           <a:xfrm>
-            <a:off x="6929214" y="1708437"/>
+            <a:off x="6785709" y="1675625"/>
             <a:ext cx="4797039" cy="738664"/>
           </a:xfrm>
           <a:prstGeom prst="rect">
@@ -2824,7 +3386,7 @@
         </p:nvSpPr>
         <p:spPr>
           <a:xfrm>
-            <a:off x="7295430" y="2907227"/>
+            <a:off x="7151925" y="2874415"/>
             <a:ext cx="4573424" cy="369332"/>
           </a:xfrm>
           <a:prstGeom prst="rect">
@@ -2867,7 +3429,7 @@
         </p:nvSpPr>
         <p:spPr>
           <a:xfrm>
-            <a:off x="6929214" y="3283946"/>
+            <a:off x="6785709" y="3251134"/>
             <a:ext cx="4797039" cy="738664"/>
           </a:xfrm>
           <a:prstGeom prst="rect">
@@ -2916,7 +3478,7 @@
         </p:blipFill>
         <p:spPr>
           <a:xfrm>
-            <a:off x="329520" y="1270462"/>
+            <a:off x="590355" y="1270462"/>
             <a:ext cx="506619" cy="506619"/>
           </a:xfrm>
           <a:prstGeom prst="rect">
@@ -2952,7 +3514,7 @@
         </p:blipFill>
         <p:spPr>
           <a:xfrm>
-            <a:off x="6340202" y="1261195"/>
+            <a:off x="6196697" y="1228383"/>
             <a:ext cx="506619" cy="506619"/>
           </a:xfrm>
           <a:prstGeom prst="rect">
@@ -2988,7 +3550,7 @@
         </p:blipFill>
         <p:spPr>
           <a:xfrm>
-            <a:off x="329520" y="2886536"/>
+            <a:off x="590355" y="2886536"/>
             <a:ext cx="506619" cy="506619"/>
           </a:xfrm>
           <a:prstGeom prst="rect">
@@ -3024,7 +3586,7 @@
         </p:blipFill>
         <p:spPr>
           <a:xfrm>
-            <a:off x="398954" y="4566590"/>
+            <a:off x="659789" y="4566590"/>
             <a:ext cx="506619" cy="506619"/>
           </a:xfrm>
           <a:prstGeom prst="rect">
@@ -3060,7 +3622,7 @@
         </p:blipFill>
         <p:spPr>
           <a:xfrm>
-            <a:off x="6340202" y="2863970"/>
+            <a:off x="6196697" y="2831158"/>
             <a:ext cx="506619" cy="506619"/>
           </a:xfrm>
           <a:prstGeom prst="rect">
@@ -3096,7 +3658,7 @@
         </p:blipFill>
         <p:spPr>
           <a:xfrm>
-            <a:off x="1013538" y="2983837"/>
+            <a:off x="1274373" y="2983837"/>
             <a:ext cx="304631" cy="304631"/>
           </a:xfrm>
           <a:prstGeom prst="rect">
@@ -3132,7 +3694,7 @@
         </p:blipFill>
         <p:spPr>
           <a:xfrm>
-            <a:off x="1013537" y="4631290"/>
+            <a:off x="1274372" y="4631290"/>
             <a:ext cx="304631" cy="304631"/>
           </a:xfrm>
           <a:prstGeom prst="rect">
@@ -3168,7 +3730,7 @@
         </p:blipFill>
         <p:spPr>
           <a:xfrm>
-            <a:off x="7022862" y="1368929"/>
+            <a:off x="6879357" y="1336117"/>
             <a:ext cx="305989" cy="305989"/>
           </a:xfrm>
           <a:prstGeom prst="rect">
@@ -3204,7 +3766,7 @@
         </p:blipFill>
         <p:spPr>
           <a:xfrm>
-            <a:off x="6966415" y="2955271"/>
+            <a:off x="6822910" y="2922459"/>
             <a:ext cx="304631" cy="304631"/>
           </a:xfrm>
           <a:prstGeom prst="rect">
@@ -3234,7 +3796,7 @@
         </p:blipFill>
         <p:spPr>
           <a:xfrm>
-            <a:off x="7067636" y="4898362"/>
+            <a:off x="6924131" y="4865550"/>
             <a:ext cx="853861" cy="809619"/>
           </a:xfrm>
           <a:prstGeom prst="rect">
@@ -3267,7 +3829,7 @@
         </p:blipFill>
         <p:spPr>
           <a:xfrm>
-            <a:off x="9212971" y="5032463"/>
+            <a:off x="9069466" y="4999651"/>
             <a:ext cx="853860" cy="623807"/>
           </a:xfrm>
           <a:prstGeom prst="rect">
@@ -3300,7 +3862,7 @@
         </p:blipFill>
         <p:spPr>
           <a:xfrm>
-            <a:off x="8145802" y="5008424"/>
+            <a:off x="8002297" y="4975612"/>
             <a:ext cx="596239" cy="605209"/>
           </a:xfrm>
           <a:prstGeom prst="rect">
@@ -3333,7 +3895,7 @@
         </p:blipFill>
         <p:spPr>
           <a:xfrm>
-            <a:off x="7022862" y="5656778"/>
+            <a:off x="6879357" y="5623966"/>
             <a:ext cx="1635687" cy="207535"/>
           </a:xfrm>
           <a:prstGeom prst="rect">
@@ -3366,7 +3928,7 @@
         </p:blipFill>
         <p:spPr>
           <a:xfrm>
-            <a:off x="10075017" y="5109625"/>
+            <a:off x="9931512" y="5076813"/>
             <a:ext cx="859887" cy="508778"/>
           </a:xfrm>
           <a:prstGeom prst="rect">
@@ -3403,7 +3965,7 @@
         </p:blipFill>
         <p:spPr>
           <a:xfrm>
-            <a:off x="9179458" y="5700588"/>
+            <a:off x="9035953" y="5667776"/>
             <a:ext cx="1755446" cy="163725"/>
           </a:xfrm>
           <a:prstGeom prst="rect">
@@ -3429,7 +3991,7 @@
         </p:nvSpPr>
         <p:spPr>
           <a:xfrm>
-            <a:off x="7259158" y="4631751"/>
+            <a:off x="7115653" y="4598939"/>
             <a:ext cx="4797038" cy="369332"/>
           </a:xfrm>
           <a:prstGeom prst="rect">
@@ -3483,7 +4045,7 @@
         </p:blipFill>
         <p:spPr>
           <a:xfrm>
-            <a:off x="6339930" y="4570494"/>
+            <a:off x="6196425" y="4537682"/>
             <a:ext cx="506619" cy="506619"/>
           </a:xfrm>
           <a:prstGeom prst="rect">
@@ -3519,7 +4081,7 @@
         </p:blipFill>
         <p:spPr>
           <a:xfrm>
-            <a:off x="6980926" y="4671079"/>
+            <a:off x="6837421" y="4638267"/>
             <a:ext cx="275608" cy="275608"/>
           </a:xfrm>
           <a:prstGeom prst="rect">
@@ -3555,7 +4117,7 @@
         </p:blipFill>
         <p:spPr>
           <a:xfrm>
-            <a:off x="981529" y="1333500"/>
+            <a:off x="1242364" y="1333500"/>
             <a:ext cx="359228" cy="373742"/>
           </a:xfrm>
           <a:prstGeom prst="rect">
@@ -4485,6 +5047,67 @@
       </p:grpSpPr>
       <p:sp>
         <p:nvSpPr>
+          <p:cNvPr id="4" name="Rounded Rectangle 3">
+            <a:extLst>
+              <a:ext uri="{FF2B5EF4-FFF2-40B4-BE49-F238E27FC236}">
+                <a16:creationId xmlns:a16="http://schemas.microsoft.com/office/drawing/2014/main" id="{F8567C99-F3EA-939B-081F-B8C4B329CCCE}"/>
+              </a:ext>
+            </a:extLst>
+          </p:cNvPr>
+          <p:cNvSpPr/>
+          <p:nvPr userDrawn="1"/>
+        </p:nvSpPr>
+        <p:spPr>
+          <a:xfrm>
+            <a:off x="381000" y="1855425"/>
+            <a:ext cx="11430000" cy="4193309"/>
+          </a:xfrm>
+          <a:prstGeom prst="roundRect">
+            <a:avLst>
+              <a:gd name="adj" fmla="val 4552"/>
+            </a:avLst>
+          </a:prstGeom>
+          <a:solidFill>
+            <a:schemeClr val="bg1"/>
+          </a:solidFill>
+          <a:ln>
+            <a:noFill/>
+          </a:ln>
+          <a:effectLst>
+            <a:outerShdw blurRad="253894" dist="38100" dir="4200000" sx="100317" sy="100317" algn="tl" rotWithShape="0">
+              <a:prstClr val="black">
+                <a:alpha val="22007"/>
+              </a:prstClr>
+            </a:outerShdw>
+          </a:effectLst>
+        </p:spPr>
+        <p:style>
+          <a:lnRef idx="2">
+            <a:schemeClr val="accent1">
+              <a:shade val="15000"/>
+            </a:schemeClr>
+          </a:lnRef>
+          <a:fillRef idx="1">
+            <a:schemeClr val="accent1"/>
+          </a:fillRef>
+          <a:effectRef idx="0">
+            <a:schemeClr val="accent1"/>
+          </a:effectRef>
+          <a:fontRef idx="minor">
+            <a:schemeClr val="lt1"/>
+          </a:fontRef>
+        </p:style>
+        <p:txBody>
+          <a:bodyPr rtlCol="0" anchor="ctr"/>
+          <a:lstStyle/>
+          <a:p>
+            <a:pPr algn="ctr"/>
+            <a:endParaRPr lang="en-US"/>
+          </a:p>
+        </p:txBody>
+      </p:sp>
+      <p:sp>
+        <p:nvSpPr>
           <p:cNvPr id="2" name="Title">
             <a:extLst>
               <a:ext uri="{FF2B5EF4-FFF2-40B4-BE49-F238E27FC236}">
@@ -4557,8 +5180,8 @@
         </p:nvSpPr>
         <p:spPr>
           <a:xfrm>
-            <a:off x="381000" y="1825625"/>
-            <a:ext cx="11430000" cy="4351338"/>
+            <a:off x="855517" y="2063717"/>
+            <a:ext cx="10480965" cy="3776723"/>
           </a:xfrm>
           <a:prstGeom prst="rect">
             <a:avLst/>
@@ -4735,7 +5358,7 @@
           <a:p>
             <a:r>
               <a:rPr lang="en-US" dirty="0"/>
-              <a:t>Content can be either a long paragraph, bullet points or a table. It can also be a mix, with no more than 50 words.</a:t>
+              <a:t>Content can be either a long paragraph, bullet points or a table all in markdown format. It can also be a mix, with no more than 100 words.</a:t>
             </a:r>
           </a:p>
         </p:txBody>
@@ -5059,6 +5682,128 @@
       </p:grpSpPr>
       <p:sp>
         <p:nvSpPr>
+          <p:cNvPr id="6" name="Rounded Rectangle 5">
+            <a:extLst>
+              <a:ext uri="{FF2B5EF4-FFF2-40B4-BE49-F238E27FC236}">
+                <a16:creationId xmlns:a16="http://schemas.microsoft.com/office/drawing/2014/main" id="{8755C1BE-9560-A50A-74BD-E0FFF7F5B69F}"/>
+              </a:ext>
+            </a:extLst>
+          </p:cNvPr>
+          <p:cNvSpPr/>
+          <p:nvPr userDrawn="1"/>
+        </p:nvSpPr>
+        <p:spPr>
+          <a:xfrm>
+            <a:off x="6187440" y="1855425"/>
+            <a:ext cx="5623560" cy="4193309"/>
+          </a:xfrm>
+          <a:prstGeom prst="roundRect">
+            <a:avLst>
+              <a:gd name="adj" fmla="val 4552"/>
+            </a:avLst>
+          </a:prstGeom>
+          <a:solidFill>
+            <a:schemeClr val="bg1"/>
+          </a:solidFill>
+          <a:ln>
+            <a:noFill/>
+          </a:ln>
+          <a:effectLst>
+            <a:outerShdw blurRad="253894" dist="38100" dir="4200000" sx="100317" sy="100317" algn="tl" rotWithShape="0">
+              <a:prstClr val="black">
+                <a:alpha val="22007"/>
+              </a:prstClr>
+            </a:outerShdw>
+          </a:effectLst>
+        </p:spPr>
+        <p:style>
+          <a:lnRef idx="2">
+            <a:schemeClr val="accent1">
+              <a:shade val="15000"/>
+            </a:schemeClr>
+          </a:lnRef>
+          <a:fillRef idx="1">
+            <a:schemeClr val="accent1"/>
+          </a:fillRef>
+          <a:effectRef idx="0">
+            <a:schemeClr val="accent1"/>
+          </a:effectRef>
+          <a:fontRef idx="minor">
+            <a:schemeClr val="lt1"/>
+          </a:fontRef>
+        </p:style>
+        <p:txBody>
+          <a:bodyPr rtlCol="0" anchor="ctr"/>
+          <a:lstStyle/>
+          <a:p>
+            <a:pPr algn="ctr"/>
+            <a:endParaRPr lang="en-US"/>
+          </a:p>
+        </p:txBody>
+      </p:sp>
+      <p:sp>
+        <p:nvSpPr>
+          <p:cNvPr id="5" name="Rounded Rectangle 4">
+            <a:extLst>
+              <a:ext uri="{FF2B5EF4-FFF2-40B4-BE49-F238E27FC236}">
+                <a16:creationId xmlns:a16="http://schemas.microsoft.com/office/drawing/2014/main" id="{4286C11B-CD57-AE94-2379-3F6FBE23504C}"/>
+              </a:ext>
+            </a:extLst>
+          </p:cNvPr>
+          <p:cNvSpPr/>
+          <p:nvPr userDrawn="1"/>
+        </p:nvSpPr>
+        <p:spPr>
+          <a:xfrm>
+            <a:off x="381000" y="1855425"/>
+            <a:ext cx="5623560" cy="4193309"/>
+          </a:xfrm>
+          <a:prstGeom prst="roundRect">
+            <a:avLst>
+              <a:gd name="adj" fmla="val 4552"/>
+            </a:avLst>
+          </a:prstGeom>
+          <a:solidFill>
+            <a:schemeClr val="bg1"/>
+          </a:solidFill>
+          <a:ln>
+            <a:noFill/>
+          </a:ln>
+          <a:effectLst>
+            <a:outerShdw blurRad="253894" dist="38100" dir="4200000" sx="100317" sy="100317" algn="tl" rotWithShape="0">
+              <a:prstClr val="black">
+                <a:alpha val="22007"/>
+              </a:prstClr>
+            </a:outerShdw>
+          </a:effectLst>
+        </p:spPr>
+        <p:style>
+          <a:lnRef idx="2">
+            <a:schemeClr val="accent1">
+              <a:shade val="15000"/>
+            </a:schemeClr>
+          </a:lnRef>
+          <a:fillRef idx="1">
+            <a:schemeClr val="accent1"/>
+          </a:fillRef>
+          <a:effectRef idx="0">
+            <a:schemeClr val="accent1"/>
+          </a:effectRef>
+          <a:fontRef idx="minor">
+            <a:schemeClr val="lt1"/>
+          </a:fontRef>
+        </p:style>
+        <p:txBody>
+          <a:bodyPr rtlCol="0" anchor="ctr"/>
+          <a:lstStyle/>
+          <a:p>
+            <a:pPr algn="ctr"/>
+            <a:endParaRPr lang="en-US"/>
+          </a:p>
+        </p:txBody>
+      </p:sp>
+      <p:sp>
+        <p:nvSpPr>
           <p:cNvPr id="2" name="Title">
             <a:extLst>
               <a:ext uri="{FF2B5EF4-FFF2-40B4-BE49-F238E27FC236}">
@@ -5131,8 +5876,8 @@
         </p:nvSpPr>
         <p:spPr>
           <a:xfrm>
-            <a:off x="381000" y="1825625"/>
-            <a:ext cx="5715000" cy="4351338"/>
+            <a:off x="770022" y="2018131"/>
+            <a:ext cx="4824663" cy="3877343"/>
           </a:xfrm>
           <a:prstGeom prst="rect">
             <a:avLst/>
@@ -5309,7 +6054,7 @@
           <a:p>
             <a:r>
               <a:rPr lang="en-US" dirty="0"/>
-              <a:t>First of two columns on a slide split in half. Content can be either paragraphs of text, bullet points or a table. Max 20-30 words.</a:t>
+              <a:t>First of two columns on a slide split in half. Content can be either paragraphs of text, bullet points or a table in markdown format. Max 20-30 words.</a:t>
             </a:r>
           </a:p>
         </p:txBody>
@@ -5332,8 +6077,8 @@
         </p:nvSpPr>
         <p:spPr>
           <a:xfrm>
-            <a:off x="6187440" y="1825625"/>
-            <a:ext cx="5623560" cy="4351338"/>
+            <a:off x="6597315" y="2018131"/>
+            <a:ext cx="4824663" cy="3877343"/>
           </a:xfrm>
           <a:prstGeom prst="rect">
             <a:avLst/>
@@ -5510,7 +6255,7 @@
           <a:p>
             <a:r>
               <a:rPr lang="en-US" dirty="0"/>
-              <a:t>Second of two columns on a slide split in half. Content can be either paragraphs of text, bullet points or a table. Max 20-30 words. Keep same style as in the first column.</a:t>
+              <a:t>Second of two columns on a slide split in half. Content can be either paragraphs of text, bullet points or a table in markdown format. Max 20-30 words. Keep same style as in the first column.</a:t>
             </a:r>
           </a:p>
         </p:txBody>
@@ -5547,6 +6292,67 @@
       </p:grpSpPr>
       <p:sp>
         <p:nvSpPr>
+          <p:cNvPr id="15" name="Rounded Rectangle 14">
+            <a:extLst>
+              <a:ext uri="{FF2B5EF4-FFF2-40B4-BE49-F238E27FC236}">
+                <a16:creationId xmlns:a16="http://schemas.microsoft.com/office/drawing/2014/main" id="{A947E235-B803-CB82-33BD-ED0DA2439F22}"/>
+              </a:ext>
+            </a:extLst>
+          </p:cNvPr>
+          <p:cNvSpPr/>
+          <p:nvPr userDrawn="1"/>
+        </p:nvSpPr>
+        <p:spPr>
+          <a:xfrm>
+            <a:off x="380999" y="1855425"/>
+            <a:ext cx="11429999" cy="4193309"/>
+          </a:xfrm>
+          <a:prstGeom prst="roundRect">
+            <a:avLst>
+              <a:gd name="adj" fmla="val 4552"/>
+            </a:avLst>
+          </a:prstGeom>
+          <a:solidFill>
+            <a:schemeClr val="bg1"/>
+          </a:solidFill>
+          <a:ln>
+            <a:noFill/>
+          </a:ln>
+          <a:effectLst>
+            <a:outerShdw blurRad="253894" dist="38100" dir="4200000" sx="100317" sy="100317" algn="tl" rotWithShape="0">
+              <a:prstClr val="black">
+                <a:alpha val="22007"/>
+              </a:prstClr>
+            </a:outerShdw>
+          </a:effectLst>
+        </p:spPr>
+        <p:style>
+          <a:lnRef idx="2">
+            <a:schemeClr val="accent1">
+              <a:shade val="15000"/>
+            </a:schemeClr>
+          </a:lnRef>
+          <a:fillRef idx="1">
+            <a:schemeClr val="accent1"/>
+          </a:fillRef>
+          <a:effectRef idx="0">
+            <a:schemeClr val="accent1"/>
+          </a:effectRef>
+          <a:fontRef idx="minor">
+            <a:schemeClr val="lt1"/>
+          </a:fontRef>
+        </p:style>
+        <p:txBody>
+          <a:bodyPr rtlCol="0" anchor="ctr"/>
+          <a:lstStyle/>
+          <a:p>
+            <a:pPr algn="ctr"/>
+            <a:endParaRPr lang="en-US"/>
+          </a:p>
+        </p:txBody>
+      </p:sp>
+      <p:sp>
+        <p:nvSpPr>
           <p:cNvPr id="2" name="Conclusion Title">
             <a:extLst>
               <a:ext uri="{FF2B5EF4-FFF2-40B4-BE49-F238E27FC236}">
@@ -5619,7 +6425,7 @@
         </p:nvSpPr>
         <p:spPr>
           <a:xfrm>
-            <a:off x="381000" y="2282909"/>
+            <a:off x="645695" y="2535572"/>
             <a:ext cx="830263" cy="746125"/>
           </a:xfrm>
           <a:prstGeom prst="rect">
@@ -5674,7 +6480,7 @@
         </p:nvSpPr>
         <p:spPr>
           <a:xfrm>
-            <a:off x="1308100" y="2275808"/>
+            <a:off x="1572795" y="2528471"/>
             <a:ext cx="4249738" cy="769937"/>
           </a:xfrm>
           <a:prstGeom prst="rect">
@@ -5693,7 +6499,7 @@
             <a:pPr lvl="0"/>
             <a:r>
               <a:rPr lang="en-US" dirty="0"/>
-              <a:t>Text beside icon 1 maximum 8 words</a:t>
+              <a:t>Text beside icon 1 maximum 8 words in markdown format</a:t>
             </a:r>
           </a:p>
         </p:txBody>
@@ -5716,7 +6522,7 @@
         </p:nvSpPr>
         <p:spPr>
           <a:xfrm>
-            <a:off x="6634161" y="2275808"/>
+            <a:off x="6369469" y="2528471"/>
             <a:ext cx="830263" cy="746125"/>
           </a:xfrm>
           <a:prstGeom prst="rect">
@@ -5770,7 +6576,7 @@
         </p:nvSpPr>
         <p:spPr>
           <a:xfrm>
-            <a:off x="7561262" y="2259097"/>
+            <a:off x="7296570" y="2511760"/>
             <a:ext cx="4249738" cy="769937"/>
           </a:xfrm>
           <a:prstGeom prst="rect">
@@ -5789,7 +6595,7 @@
             <a:pPr lvl="0"/>
             <a:r>
               <a:rPr lang="en-US" dirty="0"/>
-              <a:t>Text beside icon 2 maximum 8 words</a:t>
+              <a:t>Text beside icon 2 maximum 8 words in markdown format</a:t>
             </a:r>
           </a:p>
         </p:txBody>
@@ -5812,7 +6618,7 @@
         </p:nvSpPr>
         <p:spPr>
           <a:xfrm>
-            <a:off x="381000" y="3333667"/>
+            <a:off x="645695" y="3586330"/>
             <a:ext cx="830263" cy="746125"/>
           </a:xfrm>
           <a:prstGeom prst="rect">
@@ -5879,7 +6685,7 @@
         </p:nvSpPr>
         <p:spPr>
           <a:xfrm>
-            <a:off x="1308100" y="3326566"/>
+            <a:off x="1572795" y="3579229"/>
             <a:ext cx="4249738" cy="769937"/>
           </a:xfrm>
           <a:prstGeom prst="rect">
@@ -5898,7 +6704,7 @@
             <a:pPr lvl="0"/>
             <a:r>
               <a:rPr lang="en-US" dirty="0"/>
-              <a:t>Text beside icon 3 maximum 8 words</a:t>
+              <a:t>Text beside icon 3 maximum 8 words in markdown format</a:t>
             </a:r>
           </a:p>
         </p:txBody>
@@ -5921,7 +6727,7 @@
         </p:nvSpPr>
         <p:spPr>
           <a:xfrm>
-            <a:off x="6634162" y="3316956"/>
+            <a:off x="6369470" y="3569619"/>
             <a:ext cx="830263" cy="746125"/>
           </a:xfrm>
           <a:prstGeom prst="rect">
@@ -5988,7 +6794,7 @@
         </p:nvSpPr>
         <p:spPr>
           <a:xfrm>
-            <a:off x="7561262" y="3309855"/>
+            <a:off x="7296570" y="3562518"/>
             <a:ext cx="4249738" cy="769937"/>
           </a:xfrm>
           <a:prstGeom prst="rect">
@@ -6007,7 +6813,7 @@
             <a:pPr lvl="0"/>
             <a:r>
               <a:rPr lang="en-US" dirty="0"/>
-              <a:t>Text beside icon 4 maximum 8 words</a:t>
+              <a:t>Text beside icon 4 maximum 8 words in markdown format</a:t>
             </a:r>
           </a:p>
         </p:txBody>
@@ -6030,7 +6836,7 @@
         </p:nvSpPr>
         <p:spPr>
           <a:xfrm>
-            <a:off x="381000" y="4360613"/>
+            <a:off x="645695" y="4613276"/>
             <a:ext cx="830263" cy="746125"/>
           </a:xfrm>
           <a:prstGeom prst="rect">
@@ -6097,7 +6903,7 @@
         </p:nvSpPr>
         <p:spPr>
           <a:xfrm>
-            <a:off x="1308100" y="4353512"/>
+            <a:off x="1572795" y="4606175"/>
             <a:ext cx="4249738" cy="769937"/>
           </a:xfrm>
           <a:prstGeom prst="rect">
@@ -6116,7 +6922,7 @@
             <a:pPr lvl="0"/>
             <a:r>
               <a:rPr lang="en-US" dirty="0"/>
-              <a:t>Text beside icon 5 maximum 8 words</a:t>
+              <a:t>Text beside icon 5 maximum 8 words in markdown format</a:t>
             </a:r>
           </a:p>
         </p:txBody>
@@ -6139,7 +6945,7 @@
         </p:nvSpPr>
         <p:spPr>
           <a:xfrm>
-            <a:off x="6634162" y="4343902"/>
+            <a:off x="6369470" y="4596565"/>
             <a:ext cx="830263" cy="746125"/>
           </a:xfrm>
           <a:prstGeom prst="rect">
@@ -6206,7 +7012,7 @@
         </p:nvSpPr>
         <p:spPr>
           <a:xfrm>
-            <a:off x="7561262" y="4336801"/>
+            <a:off x="7296570" y="4589464"/>
             <a:ext cx="4249738" cy="769937"/>
           </a:xfrm>
           <a:prstGeom prst="rect">
@@ -6225,7 +7031,7 @@
             <a:pPr lvl="0"/>
             <a:r>
               <a:rPr lang="en-US" dirty="0"/>
-              <a:t>Text beside icon 6 maximum 8 words</a:t>
+              <a:t>Text beside icon 6 maximum 8 words in markdown format</a:t>
             </a:r>
           </a:p>
         </p:txBody>
@@ -6262,6 +7068,67 @@
       </p:grpSpPr>
       <p:sp>
         <p:nvSpPr>
+          <p:cNvPr id="5" name="Rounded Rectangle 4">
+            <a:extLst>
+              <a:ext uri="{FF2B5EF4-FFF2-40B4-BE49-F238E27FC236}">
+                <a16:creationId xmlns:a16="http://schemas.microsoft.com/office/drawing/2014/main" id="{E016E7B1-923A-B9B7-53D4-CEA8E79FC61D}"/>
+              </a:ext>
+            </a:extLst>
+          </p:cNvPr>
+          <p:cNvSpPr/>
+          <p:nvPr userDrawn="1"/>
+        </p:nvSpPr>
+        <p:spPr>
+          <a:xfrm>
+            <a:off x="381000" y="1855425"/>
+            <a:ext cx="11430000" cy="4193309"/>
+          </a:xfrm>
+          <a:prstGeom prst="roundRect">
+            <a:avLst>
+              <a:gd name="adj" fmla="val 4552"/>
+            </a:avLst>
+          </a:prstGeom>
+          <a:solidFill>
+            <a:schemeClr val="bg1"/>
+          </a:solidFill>
+          <a:ln>
+            <a:noFill/>
+          </a:ln>
+          <a:effectLst>
+            <a:outerShdw blurRad="253894" dist="38100" dir="4200000" sx="100317" sy="100317" algn="tl" rotWithShape="0">
+              <a:prstClr val="black">
+                <a:alpha val="22007"/>
+              </a:prstClr>
+            </a:outerShdw>
+          </a:effectLst>
+        </p:spPr>
+        <p:style>
+          <a:lnRef idx="2">
+            <a:schemeClr val="accent1">
+              <a:shade val="15000"/>
+            </a:schemeClr>
+          </a:lnRef>
+          <a:fillRef idx="1">
+            <a:schemeClr val="accent1"/>
+          </a:fillRef>
+          <a:effectRef idx="0">
+            <a:schemeClr val="accent1"/>
+          </a:effectRef>
+          <a:fontRef idx="minor">
+            <a:schemeClr val="lt1"/>
+          </a:fontRef>
+        </p:style>
+        <p:txBody>
+          <a:bodyPr rtlCol="0" anchor="ctr"/>
+          <a:lstStyle/>
+          <a:p>
+            <a:pPr algn="ctr"/>
+            <a:endParaRPr lang="en-US"/>
+          </a:p>
+        </p:txBody>
+      </p:sp>
+      <p:sp>
+        <p:nvSpPr>
           <p:cNvPr id="2" name="Conclusion Title">
             <a:extLst>
               <a:ext uri="{FF2B5EF4-FFF2-40B4-BE49-F238E27FC236}">
@@ -6334,7 +7201,7 @@
         </p:nvSpPr>
         <p:spPr>
           <a:xfrm>
-            <a:off x="460022" y="2937664"/>
+            <a:off x="724716" y="2934190"/>
             <a:ext cx="830263" cy="746125"/>
           </a:xfrm>
           <a:prstGeom prst="rect">
@@ -6383,7 +7250,7 @@
         </p:nvSpPr>
         <p:spPr>
           <a:xfrm>
-            <a:off x="1387122" y="2930563"/>
+            <a:off x="1651816" y="2927089"/>
             <a:ext cx="4249738" cy="769937"/>
           </a:xfrm>
           <a:prstGeom prst="rect">
@@ -6402,7 +7269,7 @@
             <a:pPr lvl="0"/>
             <a:r>
               <a:rPr lang="en-US" dirty="0"/>
-              <a:t>Text beside icon 1 maximum 8 words</a:t>
+              <a:t>Text beside icon 1 maximum 8 words in markdown format</a:t>
             </a:r>
           </a:p>
         </p:txBody>
@@ -6425,7 +7292,7 @@
         </p:nvSpPr>
         <p:spPr>
           <a:xfrm>
-            <a:off x="6713184" y="2920953"/>
+            <a:off x="6412395" y="2948633"/>
             <a:ext cx="830263" cy="746125"/>
           </a:xfrm>
           <a:prstGeom prst="rect">
@@ -6473,7 +7340,7 @@
         </p:nvSpPr>
         <p:spPr>
           <a:xfrm>
-            <a:off x="7640284" y="2913852"/>
+            <a:off x="7339495" y="2941532"/>
             <a:ext cx="4249738" cy="769937"/>
           </a:xfrm>
           <a:prstGeom prst="rect">
@@ -6492,7 +7359,7 @@
             <a:pPr lvl="0"/>
             <a:r>
               <a:rPr lang="en-US" dirty="0"/>
-              <a:t>Text beside icon 2 maximum 8 words</a:t>
+              <a:t>Text beside icon 2 maximum 8 words in markdown format</a:t>
             </a:r>
           </a:p>
         </p:txBody>
@@ -6515,7 +7382,7 @@
         </p:nvSpPr>
         <p:spPr>
           <a:xfrm>
-            <a:off x="460022" y="3988422"/>
+            <a:off x="724716" y="3984948"/>
             <a:ext cx="830263" cy="746125"/>
           </a:xfrm>
           <a:prstGeom prst="rect">
@@ -6576,7 +7443,7 @@
         </p:nvSpPr>
         <p:spPr>
           <a:xfrm>
-            <a:off x="1387122" y="3981321"/>
+            <a:off x="1651816" y="3977847"/>
             <a:ext cx="4249738" cy="769937"/>
           </a:xfrm>
           <a:prstGeom prst="rect">
@@ -6595,7 +7462,7 @@
             <a:pPr lvl="0"/>
             <a:r>
               <a:rPr lang="en-US" dirty="0"/>
-              <a:t>Text beside icon 3 maximum 8 words</a:t>
+              <a:t>Text beside icon 3 maximum 8 words in markdown format</a:t>
             </a:r>
           </a:p>
         </p:txBody>
@@ -6618,7 +7485,7 @@
         </p:nvSpPr>
         <p:spPr>
           <a:xfrm>
-            <a:off x="6713184" y="3971711"/>
+            <a:off x="6412395" y="3999391"/>
             <a:ext cx="830263" cy="746125"/>
           </a:xfrm>
           <a:prstGeom prst="rect">
@@ -6679,7 +7546,7 @@
         </p:nvSpPr>
         <p:spPr>
           <a:xfrm>
-            <a:off x="7640284" y="3964610"/>
+            <a:off x="7339495" y="3992290"/>
             <a:ext cx="4249738" cy="769937"/>
           </a:xfrm>
           <a:prstGeom prst="rect">
@@ -6698,7 +7565,7 @@
             <a:pPr lvl="0"/>
             <a:r>
               <a:rPr lang="en-US" dirty="0"/>
-              <a:t>Text beside icon 4 maximum 8 words</a:t>
+              <a:t>Text beside icon 4 maximum 8 words in markdown format</a:t>
             </a:r>
           </a:p>
         </p:txBody>
@@ -8139,14 +9006,12 @@
 </file>
 
 <file path=customXml/item1.xml><?xml version="1.0" encoding="utf-8"?>
-<p:properties xmlns:p="http://schemas.microsoft.com/office/2006/metadata/properties" xmlns:xsi="http://www.w3.org/2001/XMLSchema-instance" xmlns:pc="http://schemas.microsoft.com/office/infopath/2007/PartnerControls">
-  <documentManagement>
-    <TaxCatchAll xmlns="2bdccfd7-ed75-47c4-ae3e-45ba8291135b" xsi:nil="true"/>
-    <lcf76f155ced4ddcb4097134ff3c332f xmlns="bdfda862-7558-4f4e-99f8-648970d7935e">
-      <Terms xmlns="http://schemas.microsoft.com/office/infopath/2007/PartnerControls"/>
-    </lcf76f155ced4ddcb4097134ff3c332f>
-  </documentManagement>
-</p:properties>
+<?mso-contentType ?>
+<FormTemplates xmlns="http://schemas.microsoft.com/sharepoint/v3/contenttype/forms">
+  <Display>DocumentLibraryForm</Display>
+  <Edit>DocumentLibraryForm</Edit>
+  <New>DocumentLibraryForm</New>
+</FormTemplates>
 </file>
 
 <file path=customXml/item2.xml><?xml version="1.0" encoding="utf-8"?>
@@ -8357,27 +9222,20 @@
 </file>
 
 <file path=customXml/item3.xml><?xml version="1.0" encoding="utf-8"?>
-<?mso-contentType ?>
-<FormTemplates xmlns="http://schemas.microsoft.com/sharepoint/v3/contenttype/forms">
-  <Display>DocumentLibraryForm</Display>
-  <Edit>DocumentLibraryForm</Edit>
-  <New>DocumentLibraryForm</New>
-</FormTemplates>
+<p:properties xmlns:p="http://schemas.microsoft.com/office/2006/metadata/properties" xmlns:xsi="http://www.w3.org/2001/XMLSchema-instance" xmlns:pc="http://schemas.microsoft.com/office/infopath/2007/PartnerControls">
+  <documentManagement>
+    <TaxCatchAll xmlns="2bdccfd7-ed75-47c4-ae3e-45ba8291135b" xsi:nil="true"/>
+    <lcf76f155ced4ddcb4097134ff3c332f xmlns="bdfda862-7558-4f4e-99f8-648970d7935e">
+      <Terms xmlns="http://schemas.microsoft.com/office/infopath/2007/PartnerControls"/>
+    </lcf76f155ced4ddcb4097134ff3c332f>
+  </documentManagement>
+</p:properties>
 </file>
 
 <file path=customXml/itemProps1.xml><?xml version="1.0" encoding="utf-8"?>
-<ds:datastoreItem xmlns:ds="http://schemas.openxmlformats.org/officeDocument/2006/customXml" ds:itemID="{E18F5EE7-65DF-41C5-963C-25B6B377F939}">
+<ds:datastoreItem xmlns:ds="http://schemas.openxmlformats.org/officeDocument/2006/customXml" ds:itemID="{C2B4E4C2-7A23-4EC8-AE63-F75F63DE72BE}">
   <ds:schemaRefs>
-    <ds:schemaRef ds:uri="http://purl.org/dc/terms/"/>
-    <ds:schemaRef ds:uri="http://www.w3.org/XML/1998/namespace"/>
-    <ds:schemaRef ds:uri="http://schemas.microsoft.com/office/2006/documentManagement/types"/>
-    <ds:schemaRef ds:uri="bdfda862-7558-4f4e-99f8-648970d7935e"/>
-    <ds:schemaRef ds:uri="http://purl.org/dc/elements/1.1/"/>
-    <ds:schemaRef ds:uri="http://schemas.microsoft.com/office/2006/metadata/properties"/>
-    <ds:schemaRef ds:uri="http://schemas.microsoft.com/office/infopath/2007/PartnerControls"/>
-    <ds:schemaRef ds:uri="http://schemas.openxmlformats.org/package/2006/metadata/core-properties"/>
-    <ds:schemaRef ds:uri="2bdccfd7-ed75-47c4-ae3e-45ba8291135b"/>
-    <ds:schemaRef ds:uri="http://purl.org/dc/dcmitype/"/>
+    <ds:schemaRef ds:uri="http://schemas.microsoft.com/sharepoint/v3/contenttype/forms"/>
   </ds:schemaRefs>
 </ds:datastoreItem>
 </file>
@@ -8402,9 +9260,18 @@
 </file>
 
 <file path=customXml/itemProps3.xml><?xml version="1.0" encoding="utf-8"?>
-<ds:datastoreItem xmlns:ds="http://schemas.openxmlformats.org/officeDocument/2006/customXml" ds:itemID="{C2B4E4C2-7A23-4EC8-AE63-F75F63DE72BE}">
+<ds:datastoreItem xmlns:ds="http://schemas.openxmlformats.org/officeDocument/2006/customXml" ds:itemID="{E18F5EE7-65DF-41C5-963C-25B6B377F939}">
   <ds:schemaRefs>
-    <ds:schemaRef ds:uri="http://schemas.microsoft.com/sharepoint/v3/contenttype/forms"/>
+    <ds:schemaRef ds:uri="http://purl.org/dc/terms/"/>
+    <ds:schemaRef ds:uri="http://schemas.microsoft.com/office/2006/metadata/properties"/>
+    <ds:schemaRef ds:uri="http://schemas.openxmlformats.org/package/2006/metadata/core-properties"/>
+    <ds:schemaRef ds:uri="http://schemas.microsoft.com/office/2006/documentManagement/types"/>
+    <ds:schemaRef ds:uri="bdfda862-7558-4f4e-99f8-648970d7935e"/>
+    <ds:schemaRef ds:uri="http://purl.org/dc/dcmitype/"/>
+    <ds:schemaRef ds:uri="http://www.w3.org/XML/1998/namespace"/>
+    <ds:schemaRef ds:uri="http://schemas.microsoft.com/office/infopath/2007/PartnerControls"/>
+    <ds:schemaRef ds:uri="2bdccfd7-ed75-47c4-ae3e-45ba8291135b"/>
+    <ds:schemaRef ds:uri="http://purl.org/dc/elements/1.1/"/>
   </ds:schemaRefs>
 </ds:datastoreItem>
 </file>
--- a/ekona_slides_template_new.pptx
+++ b/ekona_slides_template_new.pptx
@@ -116,14 +116,6 @@
     </p:ext>
   </p:extLst>
 </p:presentation>
-</file>
-
-<file path=ppt/revisionInfo.xml><?xml version="1.0" encoding="utf-8"?>
-<p1510:revInfo xmlns:a="http://schemas.openxmlformats.org/drawingml/2006/main" xmlns:r="http://schemas.openxmlformats.org/officeDocument/2006/relationships" xmlns:p1510="http://schemas.microsoft.com/office/powerpoint/2015/10/main">
-  <p1510:revLst>
-    <p1510:client id="{651B6F30-EC96-2340-AD4B-07A6B9855D0C}" v="209" dt="2025-07-21T08:11:00.613"/>
-  </p1510:revLst>
-</p1510:revInfo>
 </file>
 
 <file path=ppt/changesInfos/changesInfo1.xml><?xml version="1.0" encoding="utf-8"?>
@@ -404,15 +396,6 @@
             <pc:sldMasterMk cId="2940896467" sldId="2147483648"/>
             <pc:sldLayoutMk cId="3393990456" sldId="2147483672"/>
           </pc:sldLayoutMkLst>
-          <pc:spChg chg="del mod">
-            <ac:chgData name="Sam Khalil" userId="82cd1ec2-6208-465b-9d4d-40ce8f0cbf96" providerId="ADAL" clId="{651B6F30-EC96-2340-AD4B-07A6B9855D0C}" dt="2025-07-21T08:09:05.796" v="2416" actId="478"/>
-            <ac:spMkLst>
-              <pc:docMk/>
-              <pc:sldMasterMk cId="2940896467" sldId="2147483648"/>
-              <pc:sldLayoutMk cId="3393990456" sldId="2147483672"/>
-              <ac:spMk id="2" creationId="{6372FCEB-FEC1-18CC-54A6-09739A289B26}"/>
-            </ac:spMkLst>
-          </pc:spChg>
           <pc:spChg chg="mod">
             <ac:chgData name="Sam Khalil" userId="82cd1ec2-6208-465b-9d4d-40ce8f0cbf96" providerId="ADAL" clId="{651B6F30-EC96-2340-AD4B-07A6B9855D0C}" dt="2025-07-21T08:08:36.529" v="2240" actId="1076"/>
             <ac:spMkLst>
@@ -1005,6 +988,39 @@
       </pc:sldMasterChg>
     </pc:docChg>
   </pc:docChgLst>
+  <pc:docChgLst>
+    <pc:chgData name="Sam Khalil" userId="82cd1ec2-6208-465b-9d4d-40ce8f0cbf96" providerId="ADAL" clId="{EDFF173F-DF9C-D14E-964C-429E56C8376C}"/>
+    <pc:docChg chg="modMainMaster">
+      <pc:chgData name="Sam Khalil" userId="82cd1ec2-6208-465b-9d4d-40ce8f0cbf96" providerId="ADAL" clId="{EDFF173F-DF9C-D14E-964C-429E56C8376C}" dt="2025-08-11T07:57:31.112" v="0" actId="1076"/>
+      <pc:docMkLst>
+        <pc:docMk/>
+      </pc:docMkLst>
+      <pc:sldMasterChg chg="modSldLayout">
+        <pc:chgData name="Sam Khalil" userId="82cd1ec2-6208-465b-9d4d-40ce8f0cbf96" providerId="ADAL" clId="{EDFF173F-DF9C-D14E-964C-429E56C8376C}" dt="2025-08-11T07:57:31.112" v="0" actId="1076"/>
+        <pc:sldMasterMkLst>
+          <pc:docMk/>
+          <pc:sldMasterMk cId="2940896467" sldId="2147483648"/>
+        </pc:sldMasterMkLst>
+        <pc:sldLayoutChg chg="modSp mod">
+          <pc:chgData name="Sam Khalil" userId="82cd1ec2-6208-465b-9d4d-40ce8f0cbf96" providerId="ADAL" clId="{EDFF173F-DF9C-D14E-964C-429E56C8376C}" dt="2025-08-11T07:57:31.112" v="0" actId="1076"/>
+          <pc:sldLayoutMkLst>
+            <pc:docMk/>
+            <pc:sldMasterMk cId="2940896467" sldId="2147483648"/>
+            <pc:sldLayoutMk cId="3074954578" sldId="2147483650"/>
+          </pc:sldLayoutMkLst>
+          <pc:spChg chg="mod">
+            <ac:chgData name="Sam Khalil" userId="82cd1ec2-6208-465b-9d4d-40ce8f0cbf96" providerId="ADAL" clId="{EDFF173F-DF9C-D14E-964C-429E56C8376C}" dt="2025-08-11T07:57:31.112" v="0" actId="1076"/>
+            <ac:spMkLst>
+              <pc:docMk/>
+              <pc:sldMasterMk cId="2940896467" sldId="2147483648"/>
+              <pc:sldLayoutMk cId="3074954578" sldId="2147483650"/>
+              <ac:spMk id="5" creationId="{4286C11B-CD57-AE94-2379-3F6FBE23504C}"/>
+            </ac:spMkLst>
+          </pc:spChg>
+        </pc:sldLayoutChg>
+      </pc:sldMasterChg>
+    </pc:docChg>
+  </pc:docChgLst>
 </pc:chgInfo>
 </file>
 
@@ -1102,7 +1118,7 @@
           <a:p>
             <a:fld id="{D2339670-67E6-CD42-B7B2-F285F1108ED9}" type="datetimeFigureOut">
               <a:rPr lang="en-US" smtClean="0"/>
-              <a:t>7/21/25</a:t>
+              <a:t>8/11/25</a:t>
             </a:fld>
             <a:endParaRPr lang="en-US"/>
           </a:p>
@@ -1278,7 +1294,7 @@
           </a:lstStyle>
           <a:p>
             <a:fld id="{1E521F2A-B11E-40E0-8F26-7CD21B55A12D}" type="datetimeFigureOut">
-              <a:t>7/21/25</a:t>
+              <a:t>8/11/25</a:t>
             </a:fld>
             <a:endParaRPr lang="en-GB"/>
           </a:p>
@@ -5755,7 +5771,7 @@
         </p:nvSpPr>
         <p:spPr>
           <a:xfrm>
-            <a:off x="381000" y="1855425"/>
+            <a:off x="421178" y="1855424"/>
             <a:ext cx="5623560" cy="4193309"/>
           </a:xfrm>
           <a:prstGeom prst="roundRect">
@@ -9006,12 +9022,14 @@
 </file>
 
 <file path=customXml/item1.xml><?xml version="1.0" encoding="utf-8"?>
-<?mso-contentType ?>
-<FormTemplates xmlns="http://schemas.microsoft.com/sharepoint/v3/contenttype/forms">
-  <Display>DocumentLibraryForm</Display>
-  <Edit>DocumentLibraryForm</Edit>
-  <New>DocumentLibraryForm</New>
-</FormTemplates>
+<p:properties xmlns:p="http://schemas.microsoft.com/office/2006/metadata/properties" xmlns:xsi="http://www.w3.org/2001/XMLSchema-instance" xmlns:pc="http://schemas.microsoft.com/office/infopath/2007/PartnerControls">
+  <documentManagement>
+    <TaxCatchAll xmlns="2bdccfd7-ed75-47c4-ae3e-45ba8291135b" xsi:nil="true"/>
+    <lcf76f155ced4ddcb4097134ff3c332f xmlns="bdfda862-7558-4f4e-99f8-648970d7935e">
+      <Terms xmlns="http://schemas.microsoft.com/office/infopath/2007/PartnerControls"/>
+    </lcf76f155ced4ddcb4097134ff3c332f>
+  </documentManagement>
+</p:properties>
 </file>
 
 <file path=customXml/item2.xml><?xml version="1.0" encoding="utf-8"?>
@@ -9222,20 +9240,27 @@
 </file>
 
 <file path=customXml/item3.xml><?xml version="1.0" encoding="utf-8"?>
-<p:properties xmlns:p="http://schemas.microsoft.com/office/2006/metadata/properties" xmlns:xsi="http://www.w3.org/2001/XMLSchema-instance" xmlns:pc="http://schemas.microsoft.com/office/infopath/2007/PartnerControls">
-  <documentManagement>
-    <TaxCatchAll xmlns="2bdccfd7-ed75-47c4-ae3e-45ba8291135b" xsi:nil="true"/>
-    <lcf76f155ced4ddcb4097134ff3c332f xmlns="bdfda862-7558-4f4e-99f8-648970d7935e">
-      <Terms xmlns="http://schemas.microsoft.com/office/infopath/2007/PartnerControls"/>
-    </lcf76f155ced4ddcb4097134ff3c332f>
-  </documentManagement>
-</p:properties>
+<?mso-contentType ?>
+<FormTemplates xmlns="http://schemas.microsoft.com/sharepoint/v3/contenttype/forms">
+  <Display>DocumentLibraryForm</Display>
+  <Edit>DocumentLibraryForm</Edit>
+  <New>DocumentLibraryForm</New>
+</FormTemplates>
 </file>
 
 <file path=customXml/itemProps1.xml><?xml version="1.0" encoding="utf-8"?>
-<ds:datastoreItem xmlns:ds="http://schemas.openxmlformats.org/officeDocument/2006/customXml" ds:itemID="{C2B4E4C2-7A23-4EC8-AE63-F75F63DE72BE}">
+<ds:datastoreItem xmlns:ds="http://schemas.openxmlformats.org/officeDocument/2006/customXml" ds:itemID="{E18F5EE7-65DF-41C5-963C-25B6B377F939}">
   <ds:schemaRefs>
-    <ds:schemaRef ds:uri="http://schemas.microsoft.com/sharepoint/v3/contenttype/forms"/>
+    <ds:schemaRef ds:uri="http://schemas.microsoft.com/office/2006/metadata/properties"/>
+    <ds:schemaRef ds:uri="http://purl.org/dc/dcmitype/"/>
+    <ds:schemaRef ds:uri="http://purl.org/dc/terms/"/>
+    <ds:schemaRef ds:uri="bdfda862-7558-4f4e-99f8-648970d7935e"/>
+    <ds:schemaRef ds:uri="http://purl.org/dc/elements/1.1/"/>
+    <ds:schemaRef ds:uri="http://www.w3.org/XML/1998/namespace"/>
+    <ds:schemaRef ds:uri="http://schemas.microsoft.com/office/2006/documentManagement/types"/>
+    <ds:schemaRef ds:uri="http://schemas.microsoft.com/office/infopath/2007/PartnerControls"/>
+    <ds:schemaRef ds:uri="http://schemas.openxmlformats.org/package/2006/metadata/core-properties"/>
+    <ds:schemaRef ds:uri="2bdccfd7-ed75-47c4-ae3e-45ba8291135b"/>
   </ds:schemaRefs>
 </ds:datastoreItem>
 </file>
@@ -9260,18 +9285,9 @@
 </file>
 
 <file path=customXml/itemProps3.xml><?xml version="1.0" encoding="utf-8"?>
-<ds:datastoreItem xmlns:ds="http://schemas.openxmlformats.org/officeDocument/2006/customXml" ds:itemID="{E18F5EE7-65DF-41C5-963C-25B6B377F939}">
+<ds:datastoreItem xmlns:ds="http://schemas.openxmlformats.org/officeDocument/2006/customXml" ds:itemID="{C2B4E4C2-7A23-4EC8-AE63-F75F63DE72BE}">
   <ds:schemaRefs>
-    <ds:schemaRef ds:uri="http://purl.org/dc/terms/"/>
-    <ds:schemaRef ds:uri="http://schemas.microsoft.com/office/2006/metadata/properties"/>
-    <ds:schemaRef ds:uri="http://schemas.openxmlformats.org/package/2006/metadata/core-properties"/>
-    <ds:schemaRef ds:uri="http://schemas.microsoft.com/office/2006/documentManagement/types"/>
-    <ds:schemaRef ds:uri="bdfda862-7558-4f4e-99f8-648970d7935e"/>
-    <ds:schemaRef ds:uri="http://purl.org/dc/dcmitype/"/>
-    <ds:schemaRef ds:uri="http://www.w3.org/XML/1998/namespace"/>
-    <ds:schemaRef ds:uri="http://schemas.microsoft.com/office/infopath/2007/PartnerControls"/>
-    <ds:schemaRef ds:uri="2bdccfd7-ed75-47c4-ae3e-45ba8291135b"/>
-    <ds:schemaRef ds:uri="http://purl.org/dc/elements/1.1/"/>
+    <ds:schemaRef ds:uri="http://schemas.microsoft.com/sharepoint/v3/contenttype/forms"/>
   </ds:schemaRefs>
 </ds:datastoreItem>
 </file>